--- a/pptx/Lecture8.pptx
+++ b/pptx/Lecture8.pptx
@@ -5,45 +5,52 @@
     <p:sldMasterId id="2147483648" r:id="rId1"/>
   </p:sldMasterIdLst>
   <p:notesMasterIdLst>
-    <p:notesMasterId r:id="rId38"/>
+    <p:notesMasterId r:id="rId45"/>
   </p:notesMasterIdLst>
   <p:sldIdLst>
     <p:sldId id="256" r:id="rId2"/>
     <p:sldId id="316" r:id="rId3"/>
     <p:sldId id="295" r:id="rId4"/>
     <p:sldId id="334" r:id="rId5"/>
-    <p:sldId id="322" r:id="rId6"/>
-    <p:sldId id="338" r:id="rId7"/>
-    <p:sldId id="296" r:id="rId8"/>
-    <p:sldId id="317" r:id="rId9"/>
-    <p:sldId id="325" r:id="rId10"/>
-    <p:sldId id="335" r:id="rId11"/>
-    <p:sldId id="344" r:id="rId12"/>
-    <p:sldId id="351" r:id="rId13"/>
-    <p:sldId id="352" r:id="rId14"/>
-    <p:sldId id="354" r:id="rId15"/>
-    <p:sldId id="353" r:id="rId16"/>
-    <p:sldId id="327" r:id="rId17"/>
-    <p:sldId id="340" r:id="rId18"/>
-    <p:sldId id="341" r:id="rId19"/>
-    <p:sldId id="355" r:id="rId20"/>
-    <p:sldId id="342" r:id="rId21"/>
-    <p:sldId id="343" r:id="rId22"/>
-    <p:sldId id="329" r:id="rId23"/>
-    <p:sldId id="345" r:id="rId24"/>
-    <p:sldId id="326" r:id="rId25"/>
-    <p:sldId id="346" r:id="rId26"/>
-    <p:sldId id="347" r:id="rId27"/>
-    <p:sldId id="348" r:id="rId28"/>
-    <p:sldId id="349" r:id="rId29"/>
-    <p:sldId id="321" r:id="rId30"/>
-    <p:sldId id="318" r:id="rId31"/>
-    <p:sldId id="350" r:id="rId32"/>
-    <p:sldId id="320" r:id="rId33"/>
-    <p:sldId id="331" r:id="rId34"/>
-    <p:sldId id="332" r:id="rId35"/>
-    <p:sldId id="333" r:id="rId36"/>
-    <p:sldId id="330" r:id="rId37"/>
+    <p:sldId id="358" r:id="rId6"/>
+    <p:sldId id="296" r:id="rId7"/>
+    <p:sldId id="317" r:id="rId8"/>
+    <p:sldId id="325" r:id="rId9"/>
+    <p:sldId id="335" r:id="rId10"/>
+    <p:sldId id="344" r:id="rId11"/>
+    <p:sldId id="359" r:id="rId12"/>
+    <p:sldId id="360" r:id="rId13"/>
+    <p:sldId id="361" r:id="rId14"/>
+    <p:sldId id="351" r:id="rId15"/>
+    <p:sldId id="362" r:id="rId16"/>
+    <p:sldId id="352" r:id="rId17"/>
+    <p:sldId id="354" r:id="rId18"/>
+    <p:sldId id="322" r:id="rId19"/>
+    <p:sldId id="338" r:id="rId20"/>
+    <p:sldId id="356" r:id="rId21"/>
+    <p:sldId id="357" r:id="rId22"/>
+    <p:sldId id="353" r:id="rId23"/>
+    <p:sldId id="327" r:id="rId24"/>
+    <p:sldId id="340" r:id="rId25"/>
+    <p:sldId id="341" r:id="rId26"/>
+    <p:sldId id="355" r:id="rId27"/>
+    <p:sldId id="342" r:id="rId28"/>
+    <p:sldId id="343" r:id="rId29"/>
+    <p:sldId id="329" r:id="rId30"/>
+    <p:sldId id="345" r:id="rId31"/>
+    <p:sldId id="326" r:id="rId32"/>
+    <p:sldId id="346" r:id="rId33"/>
+    <p:sldId id="347" r:id="rId34"/>
+    <p:sldId id="348" r:id="rId35"/>
+    <p:sldId id="349" r:id="rId36"/>
+    <p:sldId id="321" r:id="rId37"/>
+    <p:sldId id="318" r:id="rId38"/>
+    <p:sldId id="350" r:id="rId39"/>
+    <p:sldId id="320" r:id="rId40"/>
+    <p:sldId id="331" r:id="rId41"/>
+    <p:sldId id="332" r:id="rId42"/>
+    <p:sldId id="333" r:id="rId43"/>
+    <p:sldId id="330" r:id="rId44"/>
   </p:sldIdLst>
   <p:sldSz cx="12192000" cy="6858000"/>
   <p:notesSz cx="6858000" cy="9144000"/>
@@ -411,7 +418,7 @@
 <file path=ppt/charts/chart1.xml><?xml version="1.0" encoding="utf-8"?>
 <c:chartSpace xmlns:c="http://schemas.openxmlformats.org/drawingml/2006/chart" xmlns:a="http://schemas.openxmlformats.org/drawingml/2006/main" xmlns:r="http://schemas.openxmlformats.org/officeDocument/2006/relationships" xmlns:c16r2="http://schemas.microsoft.com/office/drawing/2015/06/chart">
   <c:date1904 val="0"/>
-  <c:lang val="en-US"/>
+  <c:lang val="en-GB"/>
   <c:roundedCorners val="0"/>
   <mc:AlternateContent xmlns:mc="http://schemas.openxmlformats.org/markup-compatibility/2006">
     <mc:Choice xmlns:c14="http://schemas.microsoft.com/office/drawing/2007/8/2/chart" Requires="c14">
@@ -1609,7 +1616,7 @@
           <a:p>
             <a:fld id="{4995A223-E7C9-A243-9A70-FE01E1A1DD65}" type="datetimeFigureOut">
               <a:rPr lang="en-US" smtClean="0"/>
-              <a:t>9/23/2026</a:t>
+              <a:t>9/24/26</a:t>
             </a:fld>
             <a:endParaRPr lang="en-US"/>
           </a:p>
@@ -1986,7 +1993,7 @@
         <p:cNvPr id="1" name="">
           <a:extLst>
             <a:ext uri="{FF2B5EF4-FFF2-40B4-BE49-F238E27FC236}">
-              <a16:creationId xmlns:a16="http://schemas.microsoft.com/office/drawing/2014/main" id="{FB524790-24FF-023E-10BC-7375D19FA8BF}"/>
+              <a16:creationId xmlns:a16="http://schemas.microsoft.com/office/drawing/2014/main" id="{D7EDAC94-16AC-E9D8-E19B-F562CB634797}"/>
             </a:ext>
           </a:extLst>
         </p:cNvPr>
@@ -2006,7 +2013,7 @@
           <p:cNvPr id="2" name="Slide Image Placeholder 1">
             <a:extLst>
               <a:ext uri="{FF2B5EF4-FFF2-40B4-BE49-F238E27FC236}">
-                <a16:creationId xmlns:a16="http://schemas.microsoft.com/office/drawing/2014/main" id="{024064AF-DFEC-E902-AD4C-A856CB90E144}"/>
+                <a16:creationId xmlns:a16="http://schemas.microsoft.com/office/drawing/2014/main" id="{78BDDEC2-C08F-37A0-4164-BA64478F1B23}"/>
               </a:ext>
             </a:extLst>
           </p:cNvPr>
@@ -2024,7 +2031,7 @@
           <p:cNvPr id="3" name="Notes Placeholder 2">
             <a:extLst>
               <a:ext uri="{FF2B5EF4-FFF2-40B4-BE49-F238E27FC236}">
-                <a16:creationId xmlns:a16="http://schemas.microsoft.com/office/drawing/2014/main" id="{F79A7F02-70FC-3667-D378-646EAA368453}"/>
+                <a16:creationId xmlns:a16="http://schemas.microsoft.com/office/drawing/2014/main" id="{13DB20AB-D938-75C2-033C-7CFEFB5ABF49}"/>
               </a:ext>
             </a:extLst>
           </p:cNvPr>
@@ -2112,7 +2119,7 @@
           <p:cNvPr id="4" name="Slide Number Placeholder 3">
             <a:extLst>
               <a:ext uri="{FF2B5EF4-FFF2-40B4-BE49-F238E27FC236}">
-                <a16:creationId xmlns:a16="http://schemas.microsoft.com/office/drawing/2014/main" id="{15CC0EEB-0FDE-7FA1-3197-A389384E5B8C}"/>
+                <a16:creationId xmlns:a16="http://schemas.microsoft.com/office/drawing/2014/main" id="{2E81C213-85DC-F3F2-B236-B13ACFAA6A2A}"/>
               </a:ext>
             </a:extLst>
           </p:cNvPr>
@@ -2139,7 +2146,7 @@
     </p:spTree>
     <p:extLst>
       <p:ext uri="{BB962C8B-B14F-4D97-AF65-F5344CB8AC3E}">
-        <p14:creationId xmlns:p14="http://schemas.microsoft.com/office/powerpoint/2010/main" val="1794544098"/>
+        <p14:creationId xmlns:p14="http://schemas.microsoft.com/office/powerpoint/2010/main" val="261808978"/>
       </p:ext>
     </p:extLst>
   </p:cSld>
@@ -2157,7 +2164,7 @@
         <p:cNvPr id="1" name="">
           <a:extLst>
             <a:ext uri="{FF2B5EF4-FFF2-40B4-BE49-F238E27FC236}">
-              <a16:creationId xmlns:a16="http://schemas.microsoft.com/office/drawing/2014/main" id="{D7EDAC94-16AC-E9D8-E19B-F562CB634797}"/>
+              <a16:creationId xmlns:a16="http://schemas.microsoft.com/office/drawing/2014/main" id="{83114F47-6EC6-EB32-DA87-185197C2BFC0}"/>
             </a:ext>
           </a:extLst>
         </p:cNvPr>
@@ -2177,7 +2184,7 @@
           <p:cNvPr id="2" name="Slide Image Placeholder 1">
             <a:extLst>
               <a:ext uri="{FF2B5EF4-FFF2-40B4-BE49-F238E27FC236}">
-                <a16:creationId xmlns:a16="http://schemas.microsoft.com/office/drawing/2014/main" id="{78BDDEC2-C08F-37A0-4164-BA64478F1B23}"/>
+                <a16:creationId xmlns:a16="http://schemas.microsoft.com/office/drawing/2014/main" id="{062D0A74-6B37-0846-2BD8-5C81650C0B7E}"/>
               </a:ext>
             </a:extLst>
           </p:cNvPr>
@@ -2195,7 +2202,7 @@
           <p:cNvPr id="3" name="Notes Placeholder 2">
             <a:extLst>
               <a:ext uri="{FF2B5EF4-FFF2-40B4-BE49-F238E27FC236}">
-                <a16:creationId xmlns:a16="http://schemas.microsoft.com/office/drawing/2014/main" id="{13DB20AB-D938-75C2-033C-7CFEFB5ABF49}"/>
+                <a16:creationId xmlns:a16="http://schemas.microsoft.com/office/drawing/2014/main" id="{B89C8BCB-8023-6F39-BABD-5242C1FA446C}"/>
               </a:ext>
             </a:extLst>
           </p:cNvPr>
@@ -2283,7 +2290,7 @@
           <p:cNvPr id="4" name="Slide Number Placeholder 3">
             <a:extLst>
               <a:ext uri="{FF2B5EF4-FFF2-40B4-BE49-F238E27FC236}">
-                <a16:creationId xmlns:a16="http://schemas.microsoft.com/office/drawing/2014/main" id="{2E81C213-85DC-F3F2-B236-B13ACFAA6A2A}"/>
+                <a16:creationId xmlns:a16="http://schemas.microsoft.com/office/drawing/2014/main" id="{8DFF5EB2-AFA2-91EC-9DCF-89AE51768006}"/>
               </a:ext>
             </a:extLst>
           </p:cNvPr>
@@ -2310,7 +2317,7 @@
     </p:spTree>
     <p:extLst>
       <p:ext uri="{BB962C8B-B14F-4D97-AF65-F5344CB8AC3E}">
-        <p14:creationId xmlns:p14="http://schemas.microsoft.com/office/powerpoint/2010/main" val="261808978"/>
+        <p14:creationId xmlns:p14="http://schemas.microsoft.com/office/powerpoint/2010/main" val="3578609265"/>
       </p:ext>
     </p:extLst>
   </p:cSld>
@@ -2328,7 +2335,7 @@
         <p:cNvPr id="1" name="">
           <a:extLst>
             <a:ext uri="{FF2B5EF4-FFF2-40B4-BE49-F238E27FC236}">
-              <a16:creationId xmlns:a16="http://schemas.microsoft.com/office/drawing/2014/main" id="{30AD562F-2C47-EBAF-4107-F21F391ADBB4}"/>
+              <a16:creationId xmlns:a16="http://schemas.microsoft.com/office/drawing/2014/main" id="{27D2DB58-44E9-A336-712F-3DD37881C5D0}"/>
             </a:ext>
           </a:extLst>
         </p:cNvPr>
@@ -2348,7 +2355,7 @@
           <p:cNvPr id="2" name="Slide Image Placeholder 1">
             <a:extLst>
               <a:ext uri="{FF2B5EF4-FFF2-40B4-BE49-F238E27FC236}">
-                <a16:creationId xmlns:a16="http://schemas.microsoft.com/office/drawing/2014/main" id="{C016D336-C282-F6FD-CDAE-143042C684AB}"/>
+                <a16:creationId xmlns:a16="http://schemas.microsoft.com/office/drawing/2014/main" id="{7B130C80-0EB3-0C7E-A162-7612A9E714CD}"/>
               </a:ext>
             </a:extLst>
           </p:cNvPr>
@@ -2366,7 +2373,7 @@
           <p:cNvPr id="3" name="Notes Placeholder 2">
             <a:extLst>
               <a:ext uri="{FF2B5EF4-FFF2-40B4-BE49-F238E27FC236}">
-                <a16:creationId xmlns:a16="http://schemas.microsoft.com/office/drawing/2014/main" id="{FF82D0F4-31C6-DADC-3AEF-FD51743AC33C}"/>
+                <a16:creationId xmlns:a16="http://schemas.microsoft.com/office/drawing/2014/main" id="{E6E87C2F-649E-03FD-98CD-7EC9E1EB81CC}"/>
               </a:ext>
             </a:extLst>
           </p:cNvPr>
@@ -2397,7 +2404,7 @@
           <p:cNvPr id="4" name="Slide Number Placeholder 3">
             <a:extLst>
               <a:ext uri="{FF2B5EF4-FFF2-40B4-BE49-F238E27FC236}">
-                <a16:creationId xmlns:a16="http://schemas.microsoft.com/office/drawing/2014/main" id="{54D6204F-8D95-2CC9-548F-25EB58745D05}"/>
+                <a16:creationId xmlns:a16="http://schemas.microsoft.com/office/drawing/2014/main" id="{5F576433-BF6F-962A-5108-B9323B283B85}"/>
               </a:ext>
             </a:extLst>
           </p:cNvPr>
@@ -2415,7 +2422,7 @@
           <a:p>
             <a:fld id="{1560C251-82B7-4253-A774-38D73C276BCE}" type="slidenum">
               <a:rPr lang="en-US" smtClean="0"/>
-              <a:t>14</a:t>
+              <a:t>12</a:t>
             </a:fld>
             <a:endParaRPr lang="en-US"/>
           </a:p>
@@ -2424,7 +2431,7 @@
     </p:spTree>
     <p:extLst>
       <p:ext uri="{BB962C8B-B14F-4D97-AF65-F5344CB8AC3E}">
-        <p14:creationId xmlns:p14="http://schemas.microsoft.com/office/powerpoint/2010/main" val="1450869670"/>
+        <p14:creationId xmlns:p14="http://schemas.microsoft.com/office/powerpoint/2010/main" val="3633255537"/>
       </p:ext>
     </p:extLst>
   </p:cSld>
@@ -2478,57 +2485,82 @@
           <a:bodyPr/>
           <a:lstStyle/>
           <a:p>
-            <a:r>
-              <a:rPr lang="en-US" sz="1200" b="0" i="0" u="none" strike="noStrike" kern="1200" baseline="0" dirty="0">
-                <a:solidFill>
-                  <a:schemeClr val="tx1"/>
-                </a:solidFill>
-                <a:latin typeface="+mn-lt"/>
-                <a:ea typeface="+mn-ea"/>
-                <a:cs typeface="+mn-cs"/>
-              </a:rPr>
-              <a:t>mistaken expectation that aggregate data will reflect the same relationships found within subgroups such as categories, classes, or individuals that comprise the aggregate.</a:t>
-            </a:r>
-          </a:p>
-          <a:p>
-            <a:endParaRPr lang="en-US" sz="1200" b="0" i="0" u="none" strike="noStrike" kern="1200" baseline="0" dirty="0">
-              <a:solidFill>
-                <a:schemeClr val="tx1"/>
-              </a:solidFill>
-              <a:latin typeface="+mn-lt"/>
-              <a:ea typeface="+mn-ea"/>
-              <a:cs typeface="+mn-cs"/>
-            </a:endParaRPr>
-          </a:p>
-          <a:p>
-            <a:r>
-              <a:rPr lang="en-US" sz="1200" b="0" i="0" u="none" strike="noStrike" kern="1200" baseline="0" dirty="0">
-                <a:solidFill>
-                  <a:schemeClr val="tx1"/>
-                </a:solidFill>
-                <a:latin typeface="+mn-lt"/>
-                <a:ea typeface="+mn-ea"/>
-                <a:cs typeface="+mn-cs"/>
-              </a:rPr>
-              <a:t>In this example, summarizing (aggregating) the two types of shots leading to the devaluing of the 3 point shot</a:t>
-            </a:r>
-          </a:p>
-          <a:p>
-            <a:r>
-              <a:rPr lang="en-US" sz="1200" b="0" i="0" u="none" strike="noStrike" kern="1200" baseline="0" dirty="0">
-                <a:solidFill>
-                  <a:schemeClr val="tx1"/>
-                </a:solidFill>
-                <a:latin typeface="+mn-lt"/>
-                <a:ea typeface="+mn-ea"/>
-                <a:cs typeface="+mn-cs"/>
-              </a:rPr>
-              <a:t>- </a:t>
-            </a:r>
-            <a:r>
-              <a:rPr lang="en-US" dirty="0"/>
-              <a:t>Since Larry Bird took far more two-point shots, his overall percentage is dominated by two-point efficiency. Reggie Miller took many more three-point shots, so his overall percentage is more influenced by three-point efficiency. Because three-pointers are harder shots, that weighting pulls Miller’s overall percentage down</a:t>
-            </a:r>
+            <a:pPr marL="228600" lvl="0" indent="-228600">
+              <a:buFont typeface="Arial" panose="020B0604020202020204" pitchFamily="34" charset="0"/>
+              <a:buChar char="•"/>
+            </a:pPr>
+            <a:r>
+              <a:rPr lang="en-US" dirty="0"/>
+              <a:t>Right-Skewed (Positive Skew):</a:t>
+            </a:r>
+          </a:p>
+          <a:p>
+            <a:pPr marL="685800" lvl="1" indent="-228600">
+              <a:buFont typeface="Arial" panose="020B0604020202020204" pitchFamily="34" charset="0"/>
+              <a:buChar char="•"/>
+            </a:pPr>
+            <a:r>
+              <a:rPr lang="en-US" dirty="0"/>
+              <a:t>Most players have low counts, but a few superstars skew the tail high.</a:t>
+            </a:r>
+          </a:p>
+          <a:p>
+            <a:pPr marL="685800" lvl="1" indent="-228600">
+              <a:buFont typeface="Arial" panose="020B0604020202020204" pitchFamily="34" charset="0"/>
+              <a:buChar char="•"/>
+            </a:pPr>
+            <a:r>
+              <a:rPr lang="en-US" i="1" dirty="0"/>
+              <a:t>Examples:</a:t>
+            </a:r>
+            <a:r>
+              <a:rPr lang="en-US" dirty="0"/>
+              <a:t> Goals scored per match, career home runs, yellow cards.</a:t>
+            </a:r>
+          </a:p>
+          <a:p>
+            <a:pPr marL="228600" lvl="0" indent="-228600">
+              <a:buFont typeface="Arial" panose="020B0604020202020204" pitchFamily="34" charset="0"/>
+              <a:buChar char="•"/>
+            </a:pPr>
+            <a:r>
+              <a:rPr lang="en-US" dirty="0"/>
+              <a:t>Left-Skewed (Negative Skew):</a:t>
+            </a:r>
+          </a:p>
+          <a:p>
+            <a:pPr marL="685800" lvl="1" indent="-228600">
+              <a:buFont typeface="Arial" panose="020B0604020202020204" pitchFamily="34" charset="0"/>
+              <a:buChar char="•"/>
+            </a:pPr>
+            <a:r>
+              <a:rPr lang="en-US" dirty="0"/>
+              <a:t>Values clustered near the maximum ceiling, with a few poor performances trailing off.</a:t>
+            </a:r>
+          </a:p>
+          <a:p>
+            <a:pPr marL="685800" lvl="1" indent="-228600">
+              <a:buFont typeface="Arial" panose="020B0604020202020204" pitchFamily="34" charset="0"/>
+              <a:buChar char="•"/>
+            </a:pPr>
+            <a:r>
+              <a:rPr lang="en-US" i="1" dirty="0"/>
+              <a:t>Examples:</a:t>
+            </a:r>
+            <a:r>
+              <a:rPr lang="en-US" dirty="0"/>
+              <a:t> Passing completion percentages for elite quarterbacks, free-throw percentages.</a:t>
+            </a:r>
+          </a:p>
+          <a:p>
+            <a:pPr marL="228600" lvl="0" indent="-228600">
+              <a:buFont typeface="Arial" panose="020B0604020202020204" pitchFamily="34" charset="0"/>
+              <a:buChar char="•"/>
+            </a:pPr>
+            <a:endParaRPr lang="en-US" dirty="0"/>
+          </a:p>
+          <a:p>
+            <a:endParaRPr lang="en-US" dirty="0"/>
           </a:p>
         </p:txBody>
       </p:sp>
@@ -2547,7 +2579,7 @@
           <a:bodyPr/>
           <a:lstStyle/>
           <a:p>
-            <a:fld id="{1560C251-82B7-4253-A774-38D73C276BCE}" type="slidenum">
+            <a:fld id="{117D17FD-8842-8E4F-8C3E-EC8B634B2D5A}" type="slidenum">
               <a:rPr lang="en-US" smtClean="0"/>
               <a:t>16</a:t>
             </a:fld>
@@ -2558,7 +2590,7 @@
     </p:spTree>
     <p:extLst>
       <p:ext uri="{BB962C8B-B14F-4D97-AF65-F5344CB8AC3E}">
-        <p14:creationId xmlns:p14="http://schemas.microsoft.com/office/powerpoint/2010/main" val="3448769395"/>
+        <p14:creationId xmlns:p14="http://schemas.microsoft.com/office/powerpoint/2010/main" val="1542096524"/>
       </p:ext>
     </p:extLst>
   </p:cSld>
@@ -2576,7 +2608,7 @@
         <p:cNvPr id="1" name="">
           <a:extLst>
             <a:ext uri="{FF2B5EF4-FFF2-40B4-BE49-F238E27FC236}">
-              <a16:creationId xmlns:a16="http://schemas.microsoft.com/office/drawing/2014/main" id="{F1A0DC8A-6810-40BA-9A21-65ADD52FC477}"/>
+              <a16:creationId xmlns:a16="http://schemas.microsoft.com/office/drawing/2014/main" id="{30AD562F-2C47-EBAF-4107-F21F391ADBB4}"/>
             </a:ext>
           </a:extLst>
         </p:cNvPr>
@@ -2596,7 +2628,7 @@
           <p:cNvPr id="2" name="Slide Image Placeholder 1">
             <a:extLst>
               <a:ext uri="{FF2B5EF4-FFF2-40B4-BE49-F238E27FC236}">
-                <a16:creationId xmlns:a16="http://schemas.microsoft.com/office/drawing/2014/main" id="{CCC33718-7968-2173-D3B1-F4CB83B6C655}"/>
+                <a16:creationId xmlns:a16="http://schemas.microsoft.com/office/drawing/2014/main" id="{C016D336-C282-F6FD-CDAE-143042C684AB}"/>
               </a:ext>
             </a:extLst>
           </p:cNvPr>
@@ -2614,7 +2646,7 @@
           <p:cNvPr id="3" name="Notes Placeholder 2">
             <a:extLst>
               <a:ext uri="{FF2B5EF4-FFF2-40B4-BE49-F238E27FC236}">
-                <a16:creationId xmlns:a16="http://schemas.microsoft.com/office/drawing/2014/main" id="{B2B4976B-C5A5-EC2D-B80F-EEE496B493E0}"/>
+                <a16:creationId xmlns:a16="http://schemas.microsoft.com/office/drawing/2014/main" id="{FF82D0F4-31C6-DADC-3AEF-FD51743AC33C}"/>
               </a:ext>
             </a:extLst>
           </p:cNvPr>
@@ -2631,56 +2663,12 @@
           <a:lstStyle/>
           <a:p>
             <a:r>
-              <a:rPr lang="en-US" sz="1200" b="0" i="0" u="none" strike="noStrike" kern="1200" baseline="0" dirty="0">
-                <a:solidFill>
-                  <a:schemeClr val="tx1"/>
-                </a:solidFill>
-                <a:latin typeface="+mn-lt"/>
-                <a:ea typeface="+mn-ea"/>
-                <a:cs typeface="+mn-cs"/>
-              </a:rPr>
-              <a:t>mistaken expectation that aggregate data will reflect the same relationships found within subgroups such as categories, classes, or individuals that comprise the aggregate.</a:t>
-            </a:r>
-          </a:p>
-          <a:p>
-            <a:endParaRPr lang="en-US" sz="1200" b="0" i="0" u="none" strike="noStrike" kern="1200" baseline="0" dirty="0">
-              <a:solidFill>
-                <a:schemeClr val="tx1"/>
-              </a:solidFill>
-              <a:latin typeface="+mn-lt"/>
-              <a:ea typeface="+mn-ea"/>
-              <a:cs typeface="+mn-cs"/>
-            </a:endParaRPr>
-          </a:p>
-          <a:p>
-            <a:r>
-              <a:rPr lang="en-US" sz="1200" b="0" i="0" u="none" strike="noStrike" kern="1200" baseline="0" dirty="0">
-                <a:solidFill>
-                  <a:schemeClr val="tx1"/>
-                </a:solidFill>
-                <a:latin typeface="+mn-lt"/>
-                <a:ea typeface="+mn-ea"/>
-                <a:cs typeface="+mn-cs"/>
-              </a:rPr>
-              <a:t>In this example, summarizing (aggregating) the two types of shots leading to the devaluing of the 3 point shot</a:t>
-            </a:r>
-          </a:p>
-          <a:p>
-            <a:r>
-              <a:rPr lang="en-US" sz="1200" b="0" i="0" u="none" strike="noStrike" kern="1200" baseline="0" dirty="0">
-                <a:solidFill>
-                  <a:schemeClr val="tx1"/>
-                </a:solidFill>
-                <a:latin typeface="+mn-lt"/>
-                <a:ea typeface="+mn-ea"/>
-                <a:cs typeface="+mn-cs"/>
-              </a:rPr>
-              <a:t>- </a:t>
-            </a:r>
-            <a:r>
-              <a:rPr lang="en-US" dirty="0"/>
-              <a:t>Since Larry Bird took far more two-point shots, his overall percentage is dominated by two-point efficiency. Reggie Miller took many more three-point shots, so his overall percentage is more influenced by three-point efficiency. Because three-pointers are harder shots, that weighting pulls Miller’s overall percentage down</a:t>
-            </a:r>
+              <a:rPr lang="en-US" b="1" dirty="0"/>
+              <a:t>Section 2: Variability</a:t>
+            </a:r>
+          </a:p>
+          <a:p>
+            <a:endParaRPr lang="en-US" dirty="0"/>
           </a:p>
         </p:txBody>
       </p:sp>
@@ -2689,7 +2677,7 @@
           <p:cNvPr id="4" name="Slide Number Placeholder 3">
             <a:extLst>
               <a:ext uri="{FF2B5EF4-FFF2-40B4-BE49-F238E27FC236}">
-                <a16:creationId xmlns:a16="http://schemas.microsoft.com/office/drawing/2014/main" id="{2E1C6A0F-54ED-C467-17A0-22FDEDA8B53F}"/>
+                <a16:creationId xmlns:a16="http://schemas.microsoft.com/office/drawing/2014/main" id="{54D6204F-8D95-2CC9-548F-25EB58745D05}"/>
               </a:ext>
             </a:extLst>
           </p:cNvPr>
@@ -2716,7 +2704,7 @@
     </p:spTree>
     <p:extLst>
       <p:ext uri="{BB962C8B-B14F-4D97-AF65-F5344CB8AC3E}">
-        <p14:creationId xmlns:p14="http://schemas.microsoft.com/office/powerpoint/2010/main" val="573949970"/>
+        <p14:creationId xmlns:p14="http://schemas.microsoft.com/office/powerpoint/2010/main" val="1450869670"/>
       </p:ext>
     </p:extLst>
   </p:cSld>
@@ -2727,164 +2715,6 @@
 </file>
 
 <file path=ppt/notesSlides/notesSlide15.xml><?xml version="1.0" encoding="utf-8"?>
-<p:notes xmlns:a="http://schemas.openxmlformats.org/drawingml/2006/main" xmlns:r="http://schemas.openxmlformats.org/officeDocument/2006/relationships" xmlns:p="http://schemas.openxmlformats.org/presentationml/2006/main">
-  <p:cSld>
-    <p:spTree>
-      <p:nvGrpSpPr>
-        <p:cNvPr id="1" name="">
-          <a:extLst>
-            <a:ext uri="{FF2B5EF4-FFF2-40B4-BE49-F238E27FC236}">
-              <a16:creationId xmlns:a16="http://schemas.microsoft.com/office/drawing/2014/main" id="{4FAC46F1-7D2F-254A-9AF0-E2ACFB834C48}"/>
-            </a:ext>
-          </a:extLst>
-        </p:cNvPr>
-        <p:cNvGrpSpPr/>
-        <p:nvPr/>
-      </p:nvGrpSpPr>
-      <p:grpSpPr>
-        <a:xfrm>
-          <a:off x="0" y="0"/>
-          <a:ext cx="0" cy="0"/>
-          <a:chOff x="0" y="0"/>
-          <a:chExt cx="0" cy="0"/>
-        </a:xfrm>
-      </p:grpSpPr>
-      <p:sp>
-        <p:nvSpPr>
-          <p:cNvPr id="2" name="Slide Image Placeholder 1">
-            <a:extLst>
-              <a:ext uri="{FF2B5EF4-FFF2-40B4-BE49-F238E27FC236}">
-                <a16:creationId xmlns:a16="http://schemas.microsoft.com/office/drawing/2014/main" id="{ADA28AA2-1467-D1E5-A856-B1A1475B973F}"/>
-              </a:ext>
-            </a:extLst>
-          </p:cNvPr>
-          <p:cNvSpPr>
-            <a:spLocks noGrp="1" noRot="1" noChangeAspect="1"/>
-          </p:cNvSpPr>
-          <p:nvPr>
-            <p:ph type="sldImg"/>
-          </p:nvPr>
-        </p:nvSpPr>
-        <p:spPr/>
-      </p:sp>
-      <p:sp>
-        <p:nvSpPr>
-          <p:cNvPr id="3" name="Notes Placeholder 2">
-            <a:extLst>
-              <a:ext uri="{FF2B5EF4-FFF2-40B4-BE49-F238E27FC236}">
-                <a16:creationId xmlns:a16="http://schemas.microsoft.com/office/drawing/2014/main" id="{545639F7-C82A-55B0-AF94-22962613F9B3}"/>
-              </a:ext>
-            </a:extLst>
-          </p:cNvPr>
-          <p:cNvSpPr>
-            <a:spLocks noGrp="1"/>
-          </p:cNvSpPr>
-          <p:nvPr>
-            <p:ph type="body" idx="1"/>
-          </p:nvPr>
-        </p:nvSpPr>
-        <p:spPr/>
-        <p:txBody>
-          <a:bodyPr/>
-          <a:lstStyle/>
-          <a:p>
-            <a:r>
-              <a:rPr lang="en-US" sz="1200" b="0" i="0" u="none" strike="noStrike" kern="1200" baseline="0" dirty="0">
-                <a:solidFill>
-                  <a:schemeClr val="tx1"/>
-                </a:solidFill>
-                <a:latin typeface="+mn-lt"/>
-                <a:ea typeface="+mn-ea"/>
-                <a:cs typeface="+mn-cs"/>
-              </a:rPr>
-              <a:t>mistaken expectation that aggregate data will reflect the same relationships found within subgroups such as categories, classes, or individuals that comprise the aggregate.</a:t>
-            </a:r>
-          </a:p>
-          <a:p>
-            <a:endParaRPr lang="en-US" sz="1200" b="0" i="0" u="none" strike="noStrike" kern="1200" baseline="0" dirty="0">
-              <a:solidFill>
-                <a:schemeClr val="tx1"/>
-              </a:solidFill>
-              <a:latin typeface="+mn-lt"/>
-              <a:ea typeface="+mn-ea"/>
-              <a:cs typeface="+mn-cs"/>
-            </a:endParaRPr>
-          </a:p>
-          <a:p>
-            <a:r>
-              <a:rPr lang="en-US" sz="1200" b="0" i="0" u="none" strike="noStrike" kern="1200" baseline="0" dirty="0">
-                <a:solidFill>
-                  <a:schemeClr val="tx1"/>
-                </a:solidFill>
-                <a:latin typeface="+mn-lt"/>
-                <a:ea typeface="+mn-ea"/>
-                <a:cs typeface="+mn-cs"/>
-              </a:rPr>
-              <a:t>In this example, summarizing (aggregating) the two types of shots leading to the devaluing of the 3 point shot</a:t>
-            </a:r>
-          </a:p>
-          <a:p>
-            <a:r>
-              <a:rPr lang="en-US" sz="1200" b="0" i="0" u="none" strike="noStrike" kern="1200" baseline="0" dirty="0">
-                <a:solidFill>
-                  <a:schemeClr val="tx1"/>
-                </a:solidFill>
-                <a:latin typeface="+mn-lt"/>
-                <a:ea typeface="+mn-ea"/>
-                <a:cs typeface="+mn-cs"/>
-              </a:rPr>
-              <a:t>- </a:t>
-            </a:r>
-            <a:r>
-              <a:rPr lang="en-US" dirty="0"/>
-              <a:t>Since Larry Bird took far more two-point shots, his overall percentage is dominated by two-point efficiency. Reggie Miller took many more three-point shots, so his overall percentage is more influenced by three-point efficiency. Because three-pointers are harder shots, that weighting pulls Miller’s overall percentage down</a:t>
-            </a:r>
-          </a:p>
-        </p:txBody>
-      </p:sp>
-      <p:sp>
-        <p:nvSpPr>
-          <p:cNvPr id="4" name="Slide Number Placeholder 3">
-            <a:extLst>
-              <a:ext uri="{FF2B5EF4-FFF2-40B4-BE49-F238E27FC236}">
-                <a16:creationId xmlns:a16="http://schemas.microsoft.com/office/drawing/2014/main" id="{F6B5DF38-086D-60C0-6A7A-929C4C3A4A69}"/>
-              </a:ext>
-            </a:extLst>
-          </p:cNvPr>
-          <p:cNvSpPr>
-            <a:spLocks noGrp="1"/>
-          </p:cNvSpPr>
-          <p:nvPr>
-            <p:ph type="sldNum" sz="quarter" idx="5"/>
-          </p:nvPr>
-        </p:nvSpPr>
-        <p:spPr/>
-        <p:txBody>
-          <a:bodyPr/>
-          <a:lstStyle/>
-          <a:p>
-            <a:fld id="{1560C251-82B7-4253-A774-38D73C276BCE}" type="slidenum">
-              <a:rPr lang="en-US" smtClean="0"/>
-              <a:t>18</a:t>
-            </a:fld>
-            <a:endParaRPr lang="en-US"/>
-          </a:p>
-        </p:txBody>
-      </p:sp>
-    </p:spTree>
-    <p:extLst>
-      <p:ext uri="{BB962C8B-B14F-4D97-AF65-F5344CB8AC3E}">
-        <p14:creationId xmlns:p14="http://schemas.microsoft.com/office/powerpoint/2010/main" val="4010814745"/>
-      </p:ext>
-    </p:extLst>
-  </p:cSld>
-  <p:clrMapOvr>
-    <a:masterClrMapping/>
-  </p:clrMapOvr>
-</p:notes>
-</file>
-
-<file path=ppt/notesSlides/notesSlide16.xml><?xml version="1.0" encoding="utf-8"?>
 <p:notes xmlns:a="http://schemas.openxmlformats.org/drawingml/2006/main" xmlns:r="http://schemas.openxmlformats.org/officeDocument/2006/relationships" xmlns:p="http://schemas.openxmlformats.org/presentationml/2006/main">
   <p:cSld>
     <p:spTree>
@@ -2930,7 +2760,54 @@
           <a:p>
             <a:r>
               <a:rPr lang="en-US" dirty="0"/>
-              <a:t>This is the real Anscombe’s quartet, in case you ever come across it outside of this class</a:t>
+              <a:t>Mean: arithmetic mean </a:t>
+            </a:r>
+          </a:p>
+          <a:p>
+            <a:pPr lvl="1"/>
+            <a:r>
+              <a:rPr lang="en-US" dirty="0"/>
+              <a:t>Determined by the sum of the values in the distribution divided by the number of values.</a:t>
+            </a:r>
+          </a:p>
+          <a:p>
+            <a:pPr lvl="1"/>
+            <a:r>
+              <a:rPr lang="en-US" dirty="0"/>
+              <a:t>Misleading if outliers or asymmetries are present</a:t>
+            </a:r>
+          </a:p>
+          <a:p>
+            <a:r>
+              <a:rPr lang="en-US" dirty="0"/>
+              <a:t>Median: the middle value</a:t>
+            </a:r>
+          </a:p>
+          <a:p>
+            <a:pPr lvl="1"/>
+            <a:r>
+              <a:rPr lang="en-US" dirty="0"/>
+              <a:t>the data point below which half of the values lie</a:t>
+            </a:r>
+          </a:p>
+          <a:p>
+            <a:pPr lvl="1"/>
+            <a:r>
+              <a:rPr lang="en-US" dirty="0"/>
+              <a:t>Ignores magnitude, focused on order</a:t>
+            </a:r>
+          </a:p>
+          <a:p>
+            <a:r>
+              <a:rPr lang="en-US" dirty="0"/>
+              <a:t>Mode: most frequent value</a:t>
+            </a:r>
+          </a:p>
+          <a:p>
+            <a:pPr lvl="1"/>
+            <a:r>
+              <a:rPr lang="en-US" dirty="0"/>
+              <a:t>Rarely used for interval or ratio data</a:t>
             </a:r>
           </a:p>
         </p:txBody>
@@ -2952,7 +2829,7 @@
           <a:p>
             <a:fld id="{1560C251-82B7-4253-A774-38D73C276BCE}" type="slidenum">
               <a:rPr lang="en-US" smtClean="0"/>
-              <a:t>22</a:t>
+              <a:t>18</a:t>
             </a:fld>
             <a:endParaRPr lang="en-US"/>
           </a:p>
@@ -2961,7 +2838,165 @@
     </p:spTree>
     <p:extLst>
       <p:ext uri="{BB962C8B-B14F-4D97-AF65-F5344CB8AC3E}">
-        <p14:creationId xmlns:p14="http://schemas.microsoft.com/office/powerpoint/2010/main" val="450748608"/>
+        <p14:creationId xmlns:p14="http://schemas.microsoft.com/office/powerpoint/2010/main" val="2064084438"/>
+      </p:ext>
+    </p:extLst>
+  </p:cSld>
+  <p:clrMapOvr>
+    <a:masterClrMapping/>
+  </p:clrMapOvr>
+</p:notes>
+</file>
+
+<file path=ppt/notesSlides/notesSlide16.xml><?xml version="1.0" encoding="utf-8"?>
+<p:notes xmlns:a="http://schemas.openxmlformats.org/drawingml/2006/main" xmlns:r="http://schemas.openxmlformats.org/officeDocument/2006/relationships" xmlns:p="http://schemas.openxmlformats.org/presentationml/2006/main">
+  <p:cSld>
+    <p:spTree>
+      <p:nvGrpSpPr>
+        <p:cNvPr id="1" name="">
+          <a:extLst>
+            <a:ext uri="{FF2B5EF4-FFF2-40B4-BE49-F238E27FC236}">
+              <a16:creationId xmlns:a16="http://schemas.microsoft.com/office/drawing/2014/main" id="{A8B877B8-616D-D4F2-FA7D-C2867BEFD407}"/>
+            </a:ext>
+          </a:extLst>
+        </p:cNvPr>
+        <p:cNvGrpSpPr/>
+        <p:nvPr/>
+      </p:nvGrpSpPr>
+      <p:grpSpPr>
+        <a:xfrm>
+          <a:off x="0" y="0"/>
+          <a:ext cx="0" cy="0"/>
+          <a:chOff x="0" y="0"/>
+          <a:chExt cx="0" cy="0"/>
+        </a:xfrm>
+      </p:grpSpPr>
+      <p:sp>
+        <p:nvSpPr>
+          <p:cNvPr id="2" name="Slide Image Placeholder 1">
+            <a:extLst>
+              <a:ext uri="{FF2B5EF4-FFF2-40B4-BE49-F238E27FC236}">
+                <a16:creationId xmlns:a16="http://schemas.microsoft.com/office/drawing/2014/main" id="{80E4064F-4EF6-4E35-97C5-48E5DE38DEBA}"/>
+              </a:ext>
+            </a:extLst>
+          </p:cNvPr>
+          <p:cNvSpPr>
+            <a:spLocks noGrp="1" noRot="1" noChangeAspect="1"/>
+          </p:cNvSpPr>
+          <p:nvPr>
+            <p:ph type="sldImg"/>
+          </p:nvPr>
+        </p:nvSpPr>
+        <p:spPr/>
+      </p:sp>
+      <p:sp>
+        <p:nvSpPr>
+          <p:cNvPr id="3" name="Notes Placeholder 2">
+            <a:extLst>
+              <a:ext uri="{FF2B5EF4-FFF2-40B4-BE49-F238E27FC236}">
+                <a16:creationId xmlns:a16="http://schemas.microsoft.com/office/drawing/2014/main" id="{653637FD-10A9-AAE1-40AB-BF5C3B0522E9}"/>
+              </a:ext>
+            </a:extLst>
+          </p:cNvPr>
+          <p:cNvSpPr>
+            <a:spLocks noGrp="1"/>
+          </p:cNvSpPr>
+          <p:nvPr>
+            <p:ph type="body" idx="1"/>
+          </p:nvPr>
+        </p:nvSpPr>
+        <p:spPr/>
+        <p:txBody>
+          <a:bodyPr/>
+          <a:lstStyle/>
+          <a:p>
+            <a:r>
+              <a:rPr lang="en-US" dirty="0"/>
+              <a:t>Mean: arithmetic mean </a:t>
+            </a:r>
+          </a:p>
+          <a:p>
+            <a:pPr lvl="1"/>
+            <a:r>
+              <a:rPr lang="en-US" dirty="0"/>
+              <a:t>Determined by the sum of the values in the distribution divided by the number of values.</a:t>
+            </a:r>
+          </a:p>
+          <a:p>
+            <a:pPr lvl="1"/>
+            <a:r>
+              <a:rPr lang="en-US" dirty="0"/>
+              <a:t>Misleading if outliers or asymmetries are present</a:t>
+            </a:r>
+          </a:p>
+          <a:p>
+            <a:r>
+              <a:rPr lang="en-US" dirty="0"/>
+              <a:t>Median: the middle value</a:t>
+            </a:r>
+          </a:p>
+          <a:p>
+            <a:pPr lvl="1"/>
+            <a:r>
+              <a:rPr lang="en-US" dirty="0"/>
+              <a:t>the data point below which half of the values lie</a:t>
+            </a:r>
+          </a:p>
+          <a:p>
+            <a:pPr lvl="1"/>
+            <a:r>
+              <a:rPr lang="en-US" dirty="0"/>
+              <a:t>Ignores magnitude, focused on order</a:t>
+            </a:r>
+          </a:p>
+          <a:p>
+            <a:r>
+              <a:rPr lang="en-US" dirty="0"/>
+              <a:t>Mode: most frequent value</a:t>
+            </a:r>
+          </a:p>
+          <a:p>
+            <a:pPr lvl="1"/>
+            <a:r>
+              <a:rPr lang="en-US" dirty="0"/>
+              <a:t>Rarely used for interval or ratio data</a:t>
+            </a:r>
+          </a:p>
+        </p:txBody>
+      </p:sp>
+      <p:sp>
+        <p:nvSpPr>
+          <p:cNvPr id="4" name="Slide Number Placeholder 3">
+            <a:extLst>
+              <a:ext uri="{FF2B5EF4-FFF2-40B4-BE49-F238E27FC236}">
+                <a16:creationId xmlns:a16="http://schemas.microsoft.com/office/drawing/2014/main" id="{CBF1D531-E726-2ED3-9674-6906ADD6F3DD}"/>
+              </a:ext>
+            </a:extLst>
+          </p:cNvPr>
+          <p:cNvSpPr>
+            <a:spLocks noGrp="1"/>
+          </p:cNvSpPr>
+          <p:nvPr>
+            <p:ph type="sldNum" sz="quarter" idx="5"/>
+          </p:nvPr>
+        </p:nvSpPr>
+        <p:spPr/>
+        <p:txBody>
+          <a:bodyPr/>
+          <a:lstStyle/>
+          <a:p>
+            <a:fld id="{1560C251-82B7-4253-A774-38D73C276BCE}" type="slidenum">
+              <a:rPr lang="en-US" smtClean="0"/>
+              <a:t>19</a:t>
+            </a:fld>
+            <a:endParaRPr lang="en-US"/>
+          </a:p>
+        </p:txBody>
+      </p:sp>
+    </p:spTree>
+    <p:extLst>
+      <p:ext uri="{BB962C8B-B14F-4D97-AF65-F5344CB8AC3E}">
+        <p14:creationId xmlns:p14="http://schemas.microsoft.com/office/powerpoint/2010/main" val="1267449958"/>
       </p:ext>
     </p:extLst>
   </p:cSld>
@@ -2979,7 +3014,7 @@
         <p:cNvPr id="1" name="">
           <a:extLst>
             <a:ext uri="{FF2B5EF4-FFF2-40B4-BE49-F238E27FC236}">
-              <a16:creationId xmlns:a16="http://schemas.microsoft.com/office/drawing/2014/main" id="{17D6C3BF-1410-282C-E358-4DAEDAD30E2D}"/>
+              <a16:creationId xmlns:a16="http://schemas.microsoft.com/office/drawing/2014/main" id="{5514F201-A674-8CF9-7A31-FE86BB85BB1D}"/>
             </a:ext>
           </a:extLst>
         </p:cNvPr>
@@ -2999,7 +3034,7 @@
           <p:cNvPr id="2" name="Slide Image Placeholder 1">
             <a:extLst>
               <a:ext uri="{FF2B5EF4-FFF2-40B4-BE49-F238E27FC236}">
-                <a16:creationId xmlns:a16="http://schemas.microsoft.com/office/drawing/2014/main" id="{BAF13BA8-57D9-8395-C333-5A57AD9C0DF5}"/>
+                <a16:creationId xmlns:a16="http://schemas.microsoft.com/office/drawing/2014/main" id="{6EE9FBED-8263-23EA-0C38-30D85D3A5406}"/>
               </a:ext>
             </a:extLst>
           </p:cNvPr>
@@ -3017,7 +3052,7 @@
           <p:cNvPr id="3" name="Notes Placeholder 2">
             <a:extLst>
               <a:ext uri="{FF2B5EF4-FFF2-40B4-BE49-F238E27FC236}">
-                <a16:creationId xmlns:a16="http://schemas.microsoft.com/office/drawing/2014/main" id="{807B752B-7357-A385-8B29-763FD6749BDC}"/>
+                <a16:creationId xmlns:a16="http://schemas.microsoft.com/office/drawing/2014/main" id="{A8CD0657-094A-8BA4-5DB9-3165930136F4}"/>
               </a:ext>
             </a:extLst>
           </p:cNvPr>
@@ -3034,8 +3069,55 @@
           <a:lstStyle/>
           <a:p>
             <a:r>
-              <a:rPr lang="en-US" b="1" dirty="0"/>
-              <a:t>Section 3: What summaries reveal vs. what they hide</a:t>
+              <a:rPr lang="en-US" dirty="0"/>
+              <a:t>Mean: arithmetic mean </a:t>
+            </a:r>
+          </a:p>
+          <a:p>
+            <a:pPr lvl="1"/>
+            <a:r>
+              <a:rPr lang="en-US" dirty="0"/>
+              <a:t>Determined by the sum of the values in the distribution divided by the number of values.</a:t>
+            </a:r>
+          </a:p>
+          <a:p>
+            <a:pPr lvl="1"/>
+            <a:r>
+              <a:rPr lang="en-US" dirty="0"/>
+              <a:t>Misleading if outliers or asymmetries are present</a:t>
+            </a:r>
+          </a:p>
+          <a:p>
+            <a:r>
+              <a:rPr lang="en-US" dirty="0"/>
+              <a:t>Median: the middle value</a:t>
+            </a:r>
+          </a:p>
+          <a:p>
+            <a:pPr lvl="1"/>
+            <a:r>
+              <a:rPr lang="en-US" dirty="0"/>
+              <a:t>the data point below which half of the values lie</a:t>
+            </a:r>
+          </a:p>
+          <a:p>
+            <a:pPr lvl="1"/>
+            <a:r>
+              <a:rPr lang="en-US" dirty="0"/>
+              <a:t>Ignores magnitude, focused on order</a:t>
+            </a:r>
+          </a:p>
+          <a:p>
+            <a:r>
+              <a:rPr lang="en-US" dirty="0"/>
+              <a:t>Mode: most frequent value</a:t>
+            </a:r>
+          </a:p>
+          <a:p>
+            <a:pPr lvl="1"/>
+            <a:r>
+              <a:rPr lang="en-US" dirty="0"/>
+              <a:t>Rarely used for interval or ratio data</a:t>
             </a:r>
           </a:p>
         </p:txBody>
@@ -3045,7 +3127,7 @@
           <p:cNvPr id="4" name="Slide Number Placeholder 3">
             <a:extLst>
               <a:ext uri="{FF2B5EF4-FFF2-40B4-BE49-F238E27FC236}">
-                <a16:creationId xmlns:a16="http://schemas.microsoft.com/office/drawing/2014/main" id="{644BD303-86C6-3EB0-E571-19959F856032}"/>
+                <a16:creationId xmlns:a16="http://schemas.microsoft.com/office/drawing/2014/main" id="{33CF5E50-CD8F-FB46-E925-9750B62EF7FE}"/>
               </a:ext>
             </a:extLst>
           </p:cNvPr>
@@ -3063,7 +3145,7 @@
           <a:p>
             <a:fld id="{1560C251-82B7-4253-A774-38D73C276BCE}" type="slidenum">
               <a:rPr lang="en-US" smtClean="0"/>
-              <a:t>23</a:t>
+              <a:t>20</a:t>
             </a:fld>
             <a:endParaRPr lang="en-US"/>
           </a:p>
@@ -3072,7 +3154,7 @@
     </p:spTree>
     <p:extLst>
       <p:ext uri="{BB962C8B-B14F-4D97-AF65-F5344CB8AC3E}">
-        <p14:creationId xmlns:p14="http://schemas.microsoft.com/office/powerpoint/2010/main" val="414880112"/>
+        <p14:creationId xmlns:p14="http://schemas.microsoft.com/office/powerpoint/2010/main" val="726334711"/>
       </p:ext>
     </p:extLst>
   </p:cSld>
@@ -3083,6 +3165,120 @@
 </file>
 
 <file path=ppt/notesSlides/notesSlide18.xml><?xml version="1.0" encoding="utf-8"?>
+<p:notes xmlns:a="http://schemas.openxmlformats.org/drawingml/2006/main" xmlns:r="http://schemas.openxmlformats.org/officeDocument/2006/relationships" xmlns:p="http://schemas.openxmlformats.org/presentationml/2006/main">
+  <p:cSld>
+    <p:spTree>
+      <p:nvGrpSpPr>
+        <p:cNvPr id="1" name="">
+          <a:extLst>
+            <a:ext uri="{FF2B5EF4-FFF2-40B4-BE49-F238E27FC236}">
+              <a16:creationId xmlns:a16="http://schemas.microsoft.com/office/drawing/2014/main" id="{38C45235-E355-F4FF-23D0-19260B21AAC1}"/>
+            </a:ext>
+          </a:extLst>
+        </p:cNvPr>
+        <p:cNvGrpSpPr/>
+        <p:nvPr/>
+      </p:nvGrpSpPr>
+      <p:grpSpPr>
+        <a:xfrm>
+          <a:off x="0" y="0"/>
+          <a:ext cx="0" cy="0"/>
+          <a:chOff x="0" y="0"/>
+          <a:chExt cx="0" cy="0"/>
+        </a:xfrm>
+      </p:grpSpPr>
+      <p:sp>
+        <p:nvSpPr>
+          <p:cNvPr id="2" name="Slide Image Placeholder 1">
+            <a:extLst>
+              <a:ext uri="{FF2B5EF4-FFF2-40B4-BE49-F238E27FC236}">
+                <a16:creationId xmlns:a16="http://schemas.microsoft.com/office/drawing/2014/main" id="{F48CDA99-76BD-5D58-55BB-D1D5CB1D6CB5}"/>
+              </a:ext>
+            </a:extLst>
+          </p:cNvPr>
+          <p:cNvSpPr>
+            <a:spLocks noGrp="1" noRot="1" noChangeAspect="1"/>
+          </p:cNvSpPr>
+          <p:nvPr>
+            <p:ph type="sldImg"/>
+          </p:nvPr>
+        </p:nvSpPr>
+        <p:spPr/>
+      </p:sp>
+      <p:sp>
+        <p:nvSpPr>
+          <p:cNvPr id="3" name="Notes Placeholder 2">
+            <a:extLst>
+              <a:ext uri="{FF2B5EF4-FFF2-40B4-BE49-F238E27FC236}">
+                <a16:creationId xmlns:a16="http://schemas.microsoft.com/office/drawing/2014/main" id="{7B438E69-5AB6-A5A7-734A-B8EFADE41ACA}"/>
+              </a:ext>
+            </a:extLst>
+          </p:cNvPr>
+          <p:cNvSpPr>
+            <a:spLocks noGrp="1"/>
+          </p:cNvSpPr>
+          <p:nvPr>
+            <p:ph type="body" idx="1"/>
+          </p:nvPr>
+        </p:nvSpPr>
+        <p:spPr/>
+        <p:txBody>
+          <a:bodyPr/>
+          <a:lstStyle/>
+          <a:p>
+            <a:r>
+              <a:rPr lang="en-US" b="1" dirty="0"/>
+              <a:t>Section 2: Variability</a:t>
+            </a:r>
+          </a:p>
+          <a:p>
+            <a:endParaRPr lang="en-US" dirty="0"/>
+          </a:p>
+        </p:txBody>
+      </p:sp>
+      <p:sp>
+        <p:nvSpPr>
+          <p:cNvPr id="4" name="Slide Number Placeholder 3">
+            <a:extLst>
+              <a:ext uri="{FF2B5EF4-FFF2-40B4-BE49-F238E27FC236}">
+                <a16:creationId xmlns:a16="http://schemas.microsoft.com/office/drawing/2014/main" id="{CEEEB194-CEFE-90EB-8749-2F87645192D6}"/>
+              </a:ext>
+            </a:extLst>
+          </p:cNvPr>
+          <p:cNvSpPr>
+            <a:spLocks noGrp="1"/>
+          </p:cNvSpPr>
+          <p:nvPr>
+            <p:ph type="sldNum" sz="quarter" idx="5"/>
+          </p:nvPr>
+        </p:nvSpPr>
+        <p:spPr/>
+        <p:txBody>
+          <a:bodyPr/>
+          <a:lstStyle/>
+          <a:p>
+            <a:fld id="{1560C251-82B7-4253-A774-38D73C276BCE}" type="slidenum">
+              <a:rPr lang="en-US" smtClean="0"/>
+              <a:t>21</a:t>
+            </a:fld>
+            <a:endParaRPr lang="en-US"/>
+          </a:p>
+        </p:txBody>
+      </p:sp>
+    </p:spTree>
+    <p:extLst>
+      <p:ext uri="{BB962C8B-B14F-4D97-AF65-F5344CB8AC3E}">
+        <p14:creationId xmlns:p14="http://schemas.microsoft.com/office/powerpoint/2010/main" val="3639405884"/>
+      </p:ext>
+    </p:extLst>
+  </p:cSld>
+  <p:clrMapOvr>
+    <a:masterClrMapping/>
+  </p:clrMapOvr>
+</p:notes>
+</file>
+
+<file path=ppt/notesSlides/notesSlide19.xml><?xml version="1.0" encoding="utf-8"?>
 <p:notes xmlns:a="http://schemas.openxmlformats.org/drawingml/2006/main" xmlns:r="http://schemas.openxmlformats.org/officeDocument/2006/relationships" xmlns:p="http://schemas.openxmlformats.org/presentationml/2006/main">
   <p:cSld>
     <p:spTree>
@@ -3127,145 +3323,55 @@
           <a:lstStyle/>
           <a:p>
             <a:r>
-              <a:rPr lang="en-US" dirty="0"/>
-              <a:t>– Which summary statistics are </a:t>
-            </a:r>
-            <a:r>
-              <a:rPr lang="en-US" b="1" dirty="0"/>
-              <a:t>invalid</a:t>
-            </a:r>
-            <a:r>
-              <a:rPr lang="en-US" dirty="0"/>
-              <a:t> for Position, and why?</a:t>
-            </a:r>
-          </a:p>
-          <a:p>
-            <a:r>
-              <a:rPr lang="en-US" dirty="0"/>
-              <a:t>– What is the </a:t>
-            </a:r>
-            <a:r>
-              <a:rPr lang="en-US" b="1" dirty="0"/>
-              <a:t>mode</a:t>
-            </a:r>
-            <a:r>
-              <a:rPr lang="en-US" dirty="0"/>
-              <a:t> of Position?</a:t>
-            </a:r>
-            <a:br>
-              <a:rPr lang="en-US" dirty="0"/>
-            </a:br>
-            <a:endParaRPr lang="en-US" dirty="0"/>
-          </a:p>
-          <a:p>
-            <a:r>
-              <a:rPr lang="en-US" dirty="0"/>
-              <a:t>– For </a:t>
-            </a:r>
-            <a:r>
-              <a:rPr lang="en-US" dirty="0" err="1"/>
-              <a:t>JumpHeight_cm</a:t>
-            </a:r>
-            <a:r>
-              <a:rPr lang="en-US" dirty="0"/>
-              <a:t>, which is more representative of a “typical” athlete: </a:t>
-            </a:r>
-            <a:r>
-              <a:rPr lang="en-US" b="1" dirty="0"/>
-              <a:t>mean or median</a:t>
-            </a:r>
-            <a:r>
-              <a:rPr lang="en-US" dirty="0"/>
-              <a:t>?</a:t>
-            </a:r>
-          </a:p>
-          <a:p>
-            <a:endParaRPr lang="en-US" dirty="0"/>
-          </a:p>
-          <a:p>
-            <a:r>
-              <a:rPr lang="en-US" dirty="0"/>
-              <a:t>– Which variability measure is </a:t>
-            </a:r>
-            <a:r>
-              <a:rPr lang="en-US" b="1" dirty="0"/>
-              <a:t>most affected</a:t>
-            </a:r>
-            <a:r>
-              <a:rPr lang="en-US" dirty="0"/>
-              <a:t> by Athlete A10?</a:t>
-            </a:r>
-            <a:br>
-              <a:rPr lang="en-US" dirty="0"/>
-            </a:br>
-            <a:r>
-              <a:rPr lang="en-US" dirty="0"/>
-              <a:t>– Which variability measure is </a:t>
-            </a:r>
-            <a:r>
-              <a:rPr lang="en-US" b="1" dirty="0"/>
-              <a:t>least affected</a:t>
-            </a:r>
-            <a:r>
-              <a:rPr lang="en-US" dirty="0"/>
-              <a:t> by Athlete A10?</a:t>
-            </a:r>
-          </a:p>
-          <a:p>
-            <a:endParaRPr lang="en-US" dirty="0"/>
-          </a:p>
-          <a:p>
-            <a:r>
-              <a:rPr lang="en-US" dirty="0"/>
-              <a:t>– If you were </a:t>
-            </a:r>
-            <a:r>
-              <a:rPr lang="en-US" b="1" dirty="0"/>
-              <a:t>validating the data</a:t>
-            </a:r>
-            <a:r>
-              <a:rPr lang="en-US" dirty="0"/>
-              <a:t>, which variability measure would you look at first?</a:t>
-            </a:r>
-            <a:br>
-              <a:rPr lang="en-US" dirty="0"/>
-            </a:br>
-            <a:r>
-              <a:rPr lang="en-US" dirty="0"/>
-              <a:t>– If you were </a:t>
-            </a:r>
-            <a:r>
-              <a:rPr lang="en-US" b="1" dirty="0"/>
-              <a:t>describing performance consistency</a:t>
-            </a:r>
-            <a:r>
-              <a:rPr lang="en-US" dirty="0"/>
-              <a:t>, which would you report?</a:t>
-            </a:r>
-          </a:p>
-          <a:p>
-            <a:endParaRPr lang="en-US" dirty="0"/>
-          </a:p>
-          <a:p>
-            <a:r>
-              <a:rPr lang="en-US" dirty="0"/>
-              <a:t>– If you could report </a:t>
-            </a:r>
-            <a:r>
-              <a:rPr lang="en-US" b="1" dirty="0"/>
-              <a:t>one number for “typical performance”</a:t>
-            </a:r>
-            <a:r>
-              <a:rPr lang="en-US" dirty="0"/>
-              <a:t> and </a:t>
-            </a:r>
-            <a:r>
-              <a:rPr lang="en-US" b="1" dirty="0"/>
-              <a:t>one number for “spread”</a:t>
-            </a:r>
-            <a:r>
-              <a:rPr lang="en-US" dirty="0"/>
-              <a:t> to a coach, what would you choose and why?</a:t>
+              <a:rPr lang="en-US" sz="1200" b="0" i="0" u="none" strike="noStrike" kern="1200" baseline="0" dirty="0">
+                <a:solidFill>
+                  <a:schemeClr val="tx1"/>
+                </a:solidFill>
+                <a:latin typeface="+mn-lt"/>
+                <a:ea typeface="+mn-ea"/>
+                <a:cs typeface="+mn-cs"/>
+              </a:rPr>
+              <a:t>mistaken expectation that aggregate data will reflect the same relationships found within subgroups such as categories, classes, or individuals that comprise the aggregate.</a:t>
+            </a:r>
+          </a:p>
+          <a:p>
+            <a:endParaRPr lang="en-US" sz="1200" b="0" i="0" u="none" strike="noStrike" kern="1200" baseline="0" dirty="0">
+              <a:solidFill>
+                <a:schemeClr val="tx1"/>
+              </a:solidFill>
+              <a:latin typeface="+mn-lt"/>
+              <a:ea typeface="+mn-ea"/>
+              <a:cs typeface="+mn-cs"/>
+            </a:endParaRPr>
+          </a:p>
+          <a:p>
+            <a:r>
+              <a:rPr lang="en-US" sz="1200" b="0" i="0" u="none" strike="noStrike" kern="1200" baseline="0" dirty="0">
+                <a:solidFill>
+                  <a:schemeClr val="tx1"/>
+                </a:solidFill>
+                <a:latin typeface="+mn-lt"/>
+                <a:ea typeface="+mn-ea"/>
+                <a:cs typeface="+mn-cs"/>
+              </a:rPr>
+              <a:t>In this example, summarizing (aggregating) the two types of shots leading to the devaluing of the 3 point shot</a:t>
+            </a:r>
+          </a:p>
+          <a:p>
+            <a:r>
+              <a:rPr lang="en-US" sz="1200" b="0" i="0" u="none" strike="noStrike" kern="1200" baseline="0" dirty="0">
+                <a:solidFill>
+                  <a:schemeClr val="tx1"/>
+                </a:solidFill>
+                <a:latin typeface="+mn-lt"/>
+                <a:ea typeface="+mn-ea"/>
+                <a:cs typeface="+mn-cs"/>
+              </a:rPr>
+              <a:t>- </a:t>
+            </a:r>
+            <a:r>
+              <a:rPr lang="en-US" dirty="0"/>
+              <a:t>Since Larry Bird took far more two-point shots, his overall percentage is dominated by two-point efficiency. Reggie Miller took many more three-point shots, so his overall percentage is more influenced by three-point efficiency. Because three-pointers are harder shots, that weighting pulls Miller’s overall percentage down</a:t>
             </a:r>
           </a:p>
         </p:txBody>
@@ -3287,7 +3393,7 @@
           <a:p>
             <a:fld id="{1560C251-82B7-4253-A774-38D73C276BCE}" type="slidenum">
               <a:rPr lang="en-US" smtClean="0"/>
-              <a:t>24</a:t>
+              <a:t>23</a:t>
             </a:fld>
             <a:endParaRPr lang="en-US"/>
           </a:p>
@@ -3296,115 +3402,7 @@
     </p:spTree>
     <p:extLst>
       <p:ext uri="{BB962C8B-B14F-4D97-AF65-F5344CB8AC3E}">
-        <p14:creationId xmlns:p14="http://schemas.microsoft.com/office/powerpoint/2010/main" val="1365217422"/>
-      </p:ext>
-    </p:extLst>
-  </p:cSld>
-  <p:clrMapOvr>
-    <a:masterClrMapping/>
-  </p:clrMapOvr>
-</p:notes>
-</file>
-
-<file path=ppt/notesSlides/notesSlide19.xml><?xml version="1.0" encoding="utf-8"?>
-<p:notes xmlns:a="http://schemas.openxmlformats.org/drawingml/2006/main" xmlns:r="http://schemas.openxmlformats.org/officeDocument/2006/relationships" xmlns:p="http://schemas.openxmlformats.org/presentationml/2006/main">
-  <p:cSld>
-    <p:spTree>
-      <p:nvGrpSpPr>
-        <p:cNvPr id="1" name="">
-          <a:extLst>
-            <a:ext uri="{FF2B5EF4-FFF2-40B4-BE49-F238E27FC236}">
-              <a16:creationId xmlns:a16="http://schemas.microsoft.com/office/drawing/2014/main" id="{220C8DD0-AA2E-9D28-DCCB-2096BE0C0924}"/>
-            </a:ext>
-          </a:extLst>
-        </p:cNvPr>
-        <p:cNvGrpSpPr/>
-        <p:nvPr/>
-      </p:nvGrpSpPr>
-      <p:grpSpPr>
-        <a:xfrm>
-          <a:off x="0" y="0"/>
-          <a:ext cx="0" cy="0"/>
-          <a:chOff x="0" y="0"/>
-          <a:chExt cx="0" cy="0"/>
-        </a:xfrm>
-      </p:grpSpPr>
-      <p:sp>
-        <p:nvSpPr>
-          <p:cNvPr id="2" name="Slide Image Placeholder 1">
-            <a:extLst>
-              <a:ext uri="{FF2B5EF4-FFF2-40B4-BE49-F238E27FC236}">
-                <a16:creationId xmlns:a16="http://schemas.microsoft.com/office/drawing/2014/main" id="{9C67813B-799C-F80C-6D92-ABC410468F6F}"/>
-              </a:ext>
-            </a:extLst>
-          </p:cNvPr>
-          <p:cNvSpPr>
-            <a:spLocks noGrp="1" noRot="1" noChangeAspect="1"/>
-          </p:cNvSpPr>
-          <p:nvPr>
-            <p:ph type="sldImg"/>
-          </p:nvPr>
-        </p:nvSpPr>
-        <p:spPr/>
-      </p:sp>
-      <p:sp>
-        <p:nvSpPr>
-          <p:cNvPr id="3" name="Notes Placeholder 2">
-            <a:extLst>
-              <a:ext uri="{FF2B5EF4-FFF2-40B4-BE49-F238E27FC236}">
-                <a16:creationId xmlns:a16="http://schemas.microsoft.com/office/drawing/2014/main" id="{30016463-9B4D-A6FF-430C-656E93595EA2}"/>
-              </a:ext>
-            </a:extLst>
-          </p:cNvPr>
-          <p:cNvSpPr>
-            <a:spLocks noGrp="1"/>
-          </p:cNvSpPr>
-          <p:nvPr>
-            <p:ph type="body" idx="1"/>
-          </p:nvPr>
-        </p:nvSpPr>
-        <p:spPr/>
-        <p:txBody>
-          <a:bodyPr/>
-          <a:lstStyle/>
-          <a:p>
-            <a:endParaRPr lang="en-US" dirty="0"/>
-          </a:p>
-        </p:txBody>
-      </p:sp>
-      <p:sp>
-        <p:nvSpPr>
-          <p:cNvPr id="4" name="Slide Number Placeholder 3">
-            <a:extLst>
-              <a:ext uri="{FF2B5EF4-FFF2-40B4-BE49-F238E27FC236}">
-                <a16:creationId xmlns:a16="http://schemas.microsoft.com/office/drawing/2014/main" id="{AAB80C08-ECE5-BD10-2AC6-00F8353F1BCE}"/>
-              </a:ext>
-            </a:extLst>
-          </p:cNvPr>
-          <p:cNvSpPr>
-            <a:spLocks noGrp="1"/>
-          </p:cNvSpPr>
-          <p:nvPr>
-            <p:ph type="sldNum" sz="quarter" idx="5"/>
-          </p:nvPr>
-        </p:nvSpPr>
-        <p:spPr/>
-        <p:txBody>
-          <a:bodyPr/>
-          <a:lstStyle/>
-          <a:p>
-            <a:fld id="{1560C251-82B7-4253-A774-38D73C276BCE}" type="slidenum">
-              <a:rPr lang="en-US" smtClean="0"/>
-              <a:t>25</a:t>
-            </a:fld>
-            <a:endParaRPr lang="en-US"/>
-          </a:p>
-        </p:txBody>
-      </p:sp>
-    </p:spTree>
-    <p:extLst>
-      <p:ext uri="{BB962C8B-B14F-4D97-AF65-F5344CB8AC3E}">
-        <p14:creationId xmlns:p14="http://schemas.microsoft.com/office/powerpoint/2010/main" val="1190973736"/>
+        <p14:creationId xmlns:p14="http://schemas.microsoft.com/office/powerpoint/2010/main" val="3448769395"/>
       </p:ext>
     </p:extLst>
   </p:cSld>
@@ -3515,7 +3513,7 @@
         <p:cNvPr id="1" name="">
           <a:extLst>
             <a:ext uri="{FF2B5EF4-FFF2-40B4-BE49-F238E27FC236}">
-              <a16:creationId xmlns:a16="http://schemas.microsoft.com/office/drawing/2014/main" id="{C7581CEB-7CE8-F32B-2D66-BD17CDD621DB}"/>
+              <a16:creationId xmlns:a16="http://schemas.microsoft.com/office/drawing/2014/main" id="{F1A0DC8A-6810-40BA-9A21-65ADD52FC477}"/>
             </a:ext>
           </a:extLst>
         </p:cNvPr>
@@ -3535,7 +3533,7 @@
           <p:cNvPr id="2" name="Slide Image Placeholder 1">
             <a:extLst>
               <a:ext uri="{FF2B5EF4-FFF2-40B4-BE49-F238E27FC236}">
-                <a16:creationId xmlns:a16="http://schemas.microsoft.com/office/drawing/2014/main" id="{68DDE70F-A1F0-5BF6-7FAF-5D458AA8D0C1}"/>
+                <a16:creationId xmlns:a16="http://schemas.microsoft.com/office/drawing/2014/main" id="{CCC33718-7968-2173-D3B1-F4CB83B6C655}"/>
               </a:ext>
             </a:extLst>
           </p:cNvPr>
@@ -3553,7 +3551,7 @@
           <p:cNvPr id="3" name="Notes Placeholder 2">
             <a:extLst>
               <a:ext uri="{FF2B5EF4-FFF2-40B4-BE49-F238E27FC236}">
-                <a16:creationId xmlns:a16="http://schemas.microsoft.com/office/drawing/2014/main" id="{915E31E0-4548-DCEF-ABF5-8AE812276313}"/>
+                <a16:creationId xmlns:a16="http://schemas.microsoft.com/office/drawing/2014/main" id="{B2B4976B-C5A5-EC2D-B80F-EEE496B493E0}"/>
               </a:ext>
             </a:extLst>
           </p:cNvPr>
@@ -3570,8 +3568,55 @@
           <a:lstStyle/>
           <a:p>
             <a:r>
-              <a:rPr lang="en-US" b="1" dirty="0"/>
-              <a:t>Section 3: What summaries reveal vs. what they hide</a:t>
+              <a:rPr lang="en-US" sz="1200" b="0" i="0" u="none" strike="noStrike" kern="1200" baseline="0" dirty="0">
+                <a:solidFill>
+                  <a:schemeClr val="tx1"/>
+                </a:solidFill>
+                <a:latin typeface="+mn-lt"/>
+                <a:ea typeface="+mn-ea"/>
+                <a:cs typeface="+mn-cs"/>
+              </a:rPr>
+              <a:t>mistaken expectation that aggregate data will reflect the same relationships found within subgroups such as categories, classes, or individuals that comprise the aggregate.</a:t>
+            </a:r>
+          </a:p>
+          <a:p>
+            <a:endParaRPr lang="en-US" sz="1200" b="0" i="0" u="none" strike="noStrike" kern="1200" baseline="0" dirty="0">
+              <a:solidFill>
+                <a:schemeClr val="tx1"/>
+              </a:solidFill>
+              <a:latin typeface="+mn-lt"/>
+              <a:ea typeface="+mn-ea"/>
+              <a:cs typeface="+mn-cs"/>
+            </a:endParaRPr>
+          </a:p>
+          <a:p>
+            <a:r>
+              <a:rPr lang="en-US" sz="1200" b="0" i="0" u="none" strike="noStrike" kern="1200" baseline="0" dirty="0">
+                <a:solidFill>
+                  <a:schemeClr val="tx1"/>
+                </a:solidFill>
+                <a:latin typeface="+mn-lt"/>
+                <a:ea typeface="+mn-ea"/>
+                <a:cs typeface="+mn-cs"/>
+              </a:rPr>
+              <a:t>In this example, summarizing (aggregating) the two types of shots leading to the devaluing of the 3 point shot</a:t>
+            </a:r>
+          </a:p>
+          <a:p>
+            <a:r>
+              <a:rPr lang="en-US" sz="1200" b="0" i="0" u="none" strike="noStrike" kern="1200" baseline="0" dirty="0">
+                <a:solidFill>
+                  <a:schemeClr val="tx1"/>
+                </a:solidFill>
+                <a:latin typeface="+mn-lt"/>
+                <a:ea typeface="+mn-ea"/>
+                <a:cs typeface="+mn-cs"/>
+              </a:rPr>
+              <a:t>- </a:t>
+            </a:r>
+            <a:r>
+              <a:rPr lang="en-US" dirty="0"/>
+              <a:t>Since Larry Bird took far more two-point shots, his overall percentage is dominated by two-point efficiency. Reggie Miller took many more three-point shots, so his overall percentage is more influenced by three-point efficiency. Because three-pointers are harder shots, that weighting pulls Miller’s overall percentage down</a:t>
             </a:r>
           </a:p>
         </p:txBody>
@@ -3581,7 +3626,7 @@
           <p:cNvPr id="4" name="Slide Number Placeholder 3">
             <a:extLst>
               <a:ext uri="{FF2B5EF4-FFF2-40B4-BE49-F238E27FC236}">
-                <a16:creationId xmlns:a16="http://schemas.microsoft.com/office/drawing/2014/main" id="{2AC10EAA-7D48-C6F6-1A3A-47069806FFB1}"/>
+                <a16:creationId xmlns:a16="http://schemas.microsoft.com/office/drawing/2014/main" id="{2E1C6A0F-54ED-C467-17A0-22FDEDA8B53F}"/>
               </a:ext>
             </a:extLst>
           </p:cNvPr>
@@ -3599,7 +3644,7 @@
           <a:p>
             <a:fld id="{1560C251-82B7-4253-A774-38D73C276BCE}" type="slidenum">
               <a:rPr lang="en-US" smtClean="0"/>
-              <a:t>29</a:t>
+              <a:t>24</a:t>
             </a:fld>
             <a:endParaRPr lang="en-US"/>
           </a:p>
@@ -3608,7 +3653,7 @@
     </p:spTree>
     <p:extLst>
       <p:ext uri="{BB962C8B-B14F-4D97-AF65-F5344CB8AC3E}">
-        <p14:creationId xmlns:p14="http://schemas.microsoft.com/office/powerpoint/2010/main" val="4131779728"/>
+        <p14:creationId xmlns:p14="http://schemas.microsoft.com/office/powerpoint/2010/main" val="573949970"/>
       </p:ext>
     </p:extLst>
   </p:cSld>
@@ -3623,7 +3668,13 @@
   <p:cSld>
     <p:spTree>
       <p:nvGrpSpPr>
-        <p:cNvPr id="1" name=""/>
+        <p:cNvPr id="1" name="">
+          <a:extLst>
+            <a:ext uri="{FF2B5EF4-FFF2-40B4-BE49-F238E27FC236}">
+              <a16:creationId xmlns:a16="http://schemas.microsoft.com/office/drawing/2014/main" id="{4FAC46F1-7D2F-254A-9AF0-E2ACFB834C48}"/>
+            </a:ext>
+          </a:extLst>
+        </p:cNvPr>
         <p:cNvGrpSpPr/>
         <p:nvPr/>
       </p:nvGrpSpPr>
@@ -3637,7 +3688,13 @@
       </p:grpSpPr>
       <p:sp>
         <p:nvSpPr>
-          <p:cNvPr id="2" name="Slide Image Placeholder 1"/>
+          <p:cNvPr id="2" name="Slide Image Placeholder 1">
+            <a:extLst>
+              <a:ext uri="{FF2B5EF4-FFF2-40B4-BE49-F238E27FC236}">
+                <a16:creationId xmlns:a16="http://schemas.microsoft.com/office/drawing/2014/main" id="{ADA28AA2-1467-D1E5-A856-B1A1475B973F}"/>
+              </a:ext>
+            </a:extLst>
+          </p:cNvPr>
           <p:cNvSpPr>
             <a:spLocks noGrp="1" noRot="1" noChangeAspect="1"/>
           </p:cNvSpPr>
@@ -3649,7 +3706,13 @@
       </p:sp>
       <p:sp>
         <p:nvSpPr>
-          <p:cNvPr id="3" name="Notes Placeholder 2"/>
+          <p:cNvPr id="3" name="Notes Placeholder 2">
+            <a:extLst>
+              <a:ext uri="{FF2B5EF4-FFF2-40B4-BE49-F238E27FC236}">
+                <a16:creationId xmlns:a16="http://schemas.microsoft.com/office/drawing/2014/main" id="{545639F7-C82A-55B0-AF94-22962613F9B3}"/>
+              </a:ext>
+            </a:extLst>
+          </p:cNvPr>
           <p:cNvSpPr>
             <a:spLocks noGrp="1"/>
           </p:cNvSpPr>
@@ -3663,42 +3726,68 @@
           <a:lstStyle/>
           <a:p>
             <a:r>
-              <a:rPr lang="en-US" b="1" dirty="0"/>
-              <a:t>Correct but incomplete: </a:t>
-            </a:r>
-            <a:r>
-              <a:rPr lang="en-US" dirty="0"/>
-              <a:t>Summary statistics can be mathematically correct while still misleading.</a:t>
-            </a:r>
-          </a:p>
-          <a:p>
-            <a:r>
-              <a:rPr lang="en-US" b="1" dirty="0"/>
-              <a:t>Aggregation changes the story: </a:t>
-            </a:r>
-            <a:r>
-              <a:rPr lang="en-US" dirty="0"/>
-              <a:t>Summarizing across time, people, or groups can obscure important patterns.</a:t>
-            </a:r>
-          </a:p>
-          <a:p>
-            <a:r>
-              <a:rPr lang="en-US" b="1" dirty="0"/>
-              <a:t>Masking subgroups and structure: </a:t>
-            </a:r>
-            <a:r>
-              <a:rPr lang="en-US" dirty="0"/>
-              <a:t>A single summary can hide clusters, trends, or outliers.</a:t>
-            </a:r>
-          </a:p>
-          <a:p>
-            <a:endParaRPr lang="en-US" dirty="0"/>
-          </a:p>
-        </p:txBody>
-      </p:sp>
-      <p:sp>
-        <p:nvSpPr>
-          <p:cNvPr id="4" name="Slide Number Placeholder 3"/>
+              <a:rPr lang="en-US" sz="1200" b="0" i="0" u="none" strike="noStrike" kern="1200" baseline="0" dirty="0">
+                <a:solidFill>
+                  <a:schemeClr val="tx1"/>
+                </a:solidFill>
+                <a:latin typeface="+mn-lt"/>
+                <a:ea typeface="+mn-ea"/>
+                <a:cs typeface="+mn-cs"/>
+              </a:rPr>
+              <a:t>mistaken expectation that aggregate data will reflect the same relationships found within subgroups such as categories, classes, or individuals that comprise the aggregate.</a:t>
+            </a:r>
+          </a:p>
+          <a:p>
+            <a:endParaRPr lang="en-US" sz="1200" b="0" i="0" u="none" strike="noStrike" kern="1200" baseline="0" dirty="0">
+              <a:solidFill>
+                <a:schemeClr val="tx1"/>
+              </a:solidFill>
+              <a:latin typeface="+mn-lt"/>
+              <a:ea typeface="+mn-ea"/>
+              <a:cs typeface="+mn-cs"/>
+            </a:endParaRPr>
+          </a:p>
+          <a:p>
+            <a:r>
+              <a:rPr lang="en-US" sz="1200" b="0" i="0" u="none" strike="noStrike" kern="1200" baseline="0" dirty="0">
+                <a:solidFill>
+                  <a:schemeClr val="tx1"/>
+                </a:solidFill>
+                <a:latin typeface="+mn-lt"/>
+                <a:ea typeface="+mn-ea"/>
+                <a:cs typeface="+mn-cs"/>
+              </a:rPr>
+              <a:t>In this example, summarizing (aggregating) the two types of shots leading to the devaluing of the 3 point shot</a:t>
+            </a:r>
+          </a:p>
+          <a:p>
+            <a:r>
+              <a:rPr lang="en-US" sz="1200" b="0" i="0" u="none" strike="noStrike" kern="1200" baseline="0" dirty="0">
+                <a:solidFill>
+                  <a:schemeClr val="tx1"/>
+                </a:solidFill>
+                <a:latin typeface="+mn-lt"/>
+                <a:ea typeface="+mn-ea"/>
+                <a:cs typeface="+mn-cs"/>
+              </a:rPr>
+              <a:t>- </a:t>
+            </a:r>
+            <a:r>
+              <a:rPr lang="en-US" dirty="0"/>
+              <a:t>Since Larry Bird took far more two-point shots, his overall percentage is dominated by two-point efficiency. Reggie Miller took many more three-point shots, so his overall percentage is more influenced by three-point efficiency. Because three-pointers are harder shots, that weighting pulls Miller’s overall percentage down</a:t>
+            </a:r>
+          </a:p>
+        </p:txBody>
+      </p:sp>
+      <p:sp>
+        <p:nvSpPr>
+          <p:cNvPr id="4" name="Slide Number Placeholder 3">
+            <a:extLst>
+              <a:ext uri="{FF2B5EF4-FFF2-40B4-BE49-F238E27FC236}">
+                <a16:creationId xmlns:a16="http://schemas.microsoft.com/office/drawing/2014/main" id="{F6B5DF38-086D-60C0-6A7A-929C4C3A4A69}"/>
+              </a:ext>
+            </a:extLst>
+          </p:cNvPr>
           <p:cNvSpPr>
             <a:spLocks noGrp="1"/>
           </p:cNvSpPr>
@@ -3713,7 +3802,7 @@
           <a:p>
             <a:fld id="{1560C251-82B7-4253-A774-38D73C276BCE}" type="slidenum">
               <a:rPr lang="en-US" smtClean="0"/>
-              <a:t>30</a:t>
+              <a:t>25</a:t>
             </a:fld>
             <a:endParaRPr lang="en-US"/>
           </a:p>
@@ -3722,7 +3811,7 @@
     </p:spTree>
     <p:extLst>
       <p:ext uri="{BB962C8B-B14F-4D97-AF65-F5344CB8AC3E}">
-        <p14:creationId xmlns:p14="http://schemas.microsoft.com/office/powerpoint/2010/main" val="4233449667"/>
+        <p14:creationId xmlns:p14="http://schemas.microsoft.com/office/powerpoint/2010/main" val="4010814745"/>
       </p:ext>
     </p:extLst>
   </p:cSld>
@@ -3777,28 +3866,286 @@
           <a:lstStyle/>
           <a:p>
             <a:r>
+              <a:rPr lang="en-US" dirty="0"/>
+              <a:t>This is the real Anscombe’s quartet, in case you ever come across it outside of this class</a:t>
+            </a:r>
+          </a:p>
+        </p:txBody>
+      </p:sp>
+      <p:sp>
+        <p:nvSpPr>
+          <p:cNvPr id="4" name="Slide Number Placeholder 3"/>
+          <p:cNvSpPr>
+            <a:spLocks noGrp="1"/>
+          </p:cNvSpPr>
+          <p:nvPr>
+            <p:ph type="sldNum" sz="quarter" idx="5"/>
+          </p:nvPr>
+        </p:nvSpPr>
+        <p:spPr/>
+        <p:txBody>
+          <a:bodyPr/>
+          <a:lstStyle/>
+          <a:p>
+            <a:fld id="{1560C251-82B7-4253-A774-38D73C276BCE}" type="slidenum">
+              <a:rPr lang="en-US" smtClean="0"/>
+              <a:t>29</a:t>
+            </a:fld>
+            <a:endParaRPr lang="en-US"/>
+          </a:p>
+        </p:txBody>
+      </p:sp>
+    </p:spTree>
+    <p:extLst>
+      <p:ext uri="{BB962C8B-B14F-4D97-AF65-F5344CB8AC3E}">
+        <p14:creationId xmlns:p14="http://schemas.microsoft.com/office/powerpoint/2010/main" val="450748608"/>
+      </p:ext>
+    </p:extLst>
+  </p:cSld>
+  <p:clrMapOvr>
+    <a:masterClrMapping/>
+  </p:clrMapOvr>
+</p:notes>
+</file>
+
+<file path=ppt/notesSlides/notesSlide23.xml><?xml version="1.0" encoding="utf-8"?>
+<p:notes xmlns:a="http://schemas.openxmlformats.org/drawingml/2006/main" xmlns:r="http://schemas.openxmlformats.org/officeDocument/2006/relationships" xmlns:p="http://schemas.openxmlformats.org/presentationml/2006/main">
+  <p:cSld>
+    <p:spTree>
+      <p:nvGrpSpPr>
+        <p:cNvPr id="1" name="">
+          <a:extLst>
+            <a:ext uri="{FF2B5EF4-FFF2-40B4-BE49-F238E27FC236}">
+              <a16:creationId xmlns:a16="http://schemas.microsoft.com/office/drawing/2014/main" id="{17D6C3BF-1410-282C-E358-4DAEDAD30E2D}"/>
+            </a:ext>
+          </a:extLst>
+        </p:cNvPr>
+        <p:cNvGrpSpPr/>
+        <p:nvPr/>
+      </p:nvGrpSpPr>
+      <p:grpSpPr>
+        <a:xfrm>
+          <a:off x="0" y="0"/>
+          <a:ext cx="0" cy="0"/>
+          <a:chOff x="0" y="0"/>
+          <a:chExt cx="0" cy="0"/>
+        </a:xfrm>
+      </p:grpSpPr>
+      <p:sp>
+        <p:nvSpPr>
+          <p:cNvPr id="2" name="Slide Image Placeholder 1">
+            <a:extLst>
+              <a:ext uri="{FF2B5EF4-FFF2-40B4-BE49-F238E27FC236}">
+                <a16:creationId xmlns:a16="http://schemas.microsoft.com/office/drawing/2014/main" id="{BAF13BA8-57D9-8395-C333-5A57AD9C0DF5}"/>
+              </a:ext>
+            </a:extLst>
+          </p:cNvPr>
+          <p:cNvSpPr>
+            <a:spLocks noGrp="1" noRot="1" noChangeAspect="1"/>
+          </p:cNvSpPr>
+          <p:nvPr>
+            <p:ph type="sldImg"/>
+          </p:nvPr>
+        </p:nvSpPr>
+        <p:spPr/>
+      </p:sp>
+      <p:sp>
+        <p:nvSpPr>
+          <p:cNvPr id="3" name="Notes Placeholder 2">
+            <a:extLst>
+              <a:ext uri="{FF2B5EF4-FFF2-40B4-BE49-F238E27FC236}">
+                <a16:creationId xmlns:a16="http://schemas.microsoft.com/office/drawing/2014/main" id="{807B752B-7357-A385-8B29-763FD6749BDC}"/>
+              </a:ext>
+            </a:extLst>
+          </p:cNvPr>
+          <p:cNvSpPr>
+            <a:spLocks noGrp="1"/>
+          </p:cNvSpPr>
+          <p:nvPr>
+            <p:ph type="body" idx="1"/>
+          </p:nvPr>
+        </p:nvSpPr>
+        <p:spPr/>
+        <p:txBody>
+          <a:bodyPr/>
+          <a:lstStyle/>
+          <a:p>
+            <a:r>
               <a:rPr lang="en-US" b="1" dirty="0"/>
-              <a:t>Same statistics, different data</a:t>
+              <a:t>Section 3: What summaries reveal vs. what they hide</a:t>
+            </a:r>
+          </a:p>
+        </p:txBody>
+      </p:sp>
+      <p:sp>
+        <p:nvSpPr>
+          <p:cNvPr id="4" name="Slide Number Placeholder 3">
+            <a:extLst>
+              <a:ext uri="{FF2B5EF4-FFF2-40B4-BE49-F238E27FC236}">
+                <a16:creationId xmlns:a16="http://schemas.microsoft.com/office/drawing/2014/main" id="{644BD303-86C6-3EB0-E571-19959F856032}"/>
+              </a:ext>
+            </a:extLst>
+          </p:cNvPr>
+          <p:cNvSpPr>
+            <a:spLocks noGrp="1"/>
+          </p:cNvSpPr>
+          <p:nvPr>
+            <p:ph type="sldNum" sz="quarter" idx="5"/>
+          </p:nvPr>
+        </p:nvSpPr>
+        <p:spPr/>
+        <p:txBody>
+          <a:bodyPr/>
+          <a:lstStyle/>
+          <a:p>
+            <a:fld id="{1560C251-82B7-4253-A774-38D73C276BCE}" type="slidenum">
+              <a:rPr lang="en-US" smtClean="0"/>
+              <a:t>30</a:t>
+            </a:fld>
+            <a:endParaRPr lang="en-US"/>
+          </a:p>
+        </p:txBody>
+      </p:sp>
+    </p:spTree>
+    <p:extLst>
+      <p:ext uri="{BB962C8B-B14F-4D97-AF65-F5344CB8AC3E}">
+        <p14:creationId xmlns:p14="http://schemas.microsoft.com/office/powerpoint/2010/main" val="414880112"/>
+      </p:ext>
+    </p:extLst>
+  </p:cSld>
+  <p:clrMapOvr>
+    <a:masterClrMapping/>
+  </p:clrMapOvr>
+</p:notes>
+</file>
+
+<file path=ppt/notesSlides/notesSlide24.xml><?xml version="1.0" encoding="utf-8"?>
+<p:notes xmlns:a="http://schemas.openxmlformats.org/drawingml/2006/main" xmlns:r="http://schemas.openxmlformats.org/officeDocument/2006/relationships" xmlns:p="http://schemas.openxmlformats.org/presentationml/2006/main">
+  <p:cSld>
+    <p:spTree>
+      <p:nvGrpSpPr>
+        <p:cNvPr id="1" name=""/>
+        <p:cNvGrpSpPr/>
+        <p:nvPr/>
+      </p:nvGrpSpPr>
+      <p:grpSpPr>
+        <a:xfrm>
+          <a:off x="0" y="0"/>
+          <a:ext cx="0" cy="0"/>
+          <a:chOff x="0" y="0"/>
+          <a:chExt cx="0" cy="0"/>
+        </a:xfrm>
+      </p:grpSpPr>
+      <p:sp>
+        <p:nvSpPr>
+          <p:cNvPr id="2" name="Slide Image Placeholder 1"/>
+          <p:cNvSpPr>
+            <a:spLocks noGrp="1" noRot="1" noChangeAspect="1"/>
+          </p:cNvSpPr>
+          <p:nvPr>
+            <p:ph type="sldImg"/>
+          </p:nvPr>
+        </p:nvSpPr>
+        <p:spPr/>
+      </p:sp>
+      <p:sp>
+        <p:nvSpPr>
+          <p:cNvPr id="3" name="Notes Placeholder 2"/>
+          <p:cNvSpPr>
+            <a:spLocks noGrp="1"/>
+          </p:cNvSpPr>
+          <p:nvPr>
+            <p:ph type="body" idx="1"/>
+          </p:nvPr>
+        </p:nvSpPr>
+        <p:spPr/>
+        <p:txBody>
+          <a:bodyPr/>
+          <a:lstStyle/>
+          <a:p>
+            <a:r>
+              <a:rPr lang="en-US" dirty="0"/>
+              <a:t>– Which summary statistics are </a:t>
+            </a:r>
+            <a:r>
+              <a:rPr lang="en-US" b="1" dirty="0"/>
+              <a:t>invalid</a:t>
+            </a:r>
+            <a:r>
+              <a:rPr lang="en-US" dirty="0"/>
+              <a:t> for Position, and why?</a:t>
+            </a:r>
+          </a:p>
+          <a:p>
+            <a:r>
+              <a:rPr lang="en-US" dirty="0"/>
+              <a:t>– What is the </a:t>
+            </a:r>
+            <a:r>
+              <a:rPr lang="en-US" b="1" dirty="0"/>
+              <a:t>mode</a:t>
+            </a:r>
+            <a:r>
+              <a:rPr lang="en-US" dirty="0"/>
+              <a:t> of Position?</a:t>
             </a:r>
             <a:br>
               <a:rPr lang="en-US" dirty="0"/>
             </a:br>
-            <a:r>
-              <a:rPr lang="en-US" dirty="0"/>
-              <a:t>Multiple datasets can share identical summary statistics but have very different structures.</a:t>
-            </a:r>
-          </a:p>
-          <a:p>
+            <a:endParaRPr lang="en-US" dirty="0"/>
+          </a:p>
+          <a:p>
+            <a:r>
+              <a:rPr lang="en-US" dirty="0"/>
+              <a:t>– For </a:t>
+            </a:r>
+            <a:r>
+              <a:rPr lang="en-US" dirty="0" err="1"/>
+              <a:t>JumpHeight_cm</a:t>
+            </a:r>
+            <a:r>
+              <a:rPr lang="en-US" dirty="0"/>
+              <a:t>, which is more representative of a “typical” athlete: </a:t>
+            </a:r>
             <a:r>
               <a:rPr lang="en-US" b="1" dirty="0"/>
-              <a:t>Why visualization is necessary</a:t>
+              <a:t>mean or median</a:t>
+            </a:r>
+            <a:r>
+              <a:rPr lang="en-US" dirty="0"/>
+              <a:t>?</a:t>
+            </a:r>
+          </a:p>
+          <a:p>
+            <a:endParaRPr lang="en-US" dirty="0"/>
+          </a:p>
+          <a:p>
+            <a:r>
+              <a:rPr lang="en-US" dirty="0"/>
+              <a:t>– Which variability measure is </a:t>
+            </a:r>
+            <a:r>
+              <a:rPr lang="en-US" b="1" dirty="0"/>
+              <a:t>most affected</a:t>
+            </a:r>
+            <a:r>
+              <a:rPr lang="en-US" dirty="0"/>
+              <a:t> by Athlete A10?</a:t>
             </a:r>
             <a:br>
               <a:rPr lang="en-US" dirty="0"/>
             </a:br>
             <a:r>
               <a:rPr lang="en-US" dirty="0"/>
-              <a:t>Plots reveal patterns that summary statistics alone cannot detect.</a:t>
+              <a:t>– Which variability measure is </a:t>
+            </a:r>
+            <a:r>
+              <a:rPr lang="en-US" b="1" dirty="0"/>
+              <a:t>least affected</a:t>
+            </a:r>
+            <a:r>
+              <a:rPr lang="en-US" dirty="0"/>
+              <a:t> by Athlete A10?</a:t>
             </a:r>
           </a:p>
           <a:p>
@@ -3807,15 +4154,55 @@
           <a:p>
             <a:r>
               <a:rPr lang="en-US" dirty="0"/>
-              <a:t>Mention </a:t>
+              <a:t>– If you were </a:t>
             </a:r>
             <a:r>
               <a:rPr lang="en-US" b="1" dirty="0"/>
-              <a:t>why pie charts </a:t>
-            </a:r>
-            <a:r>
-              <a:rPr lang="en-US" dirty="0"/>
-              <a:t>are not ideal – stacked bar is better</a:t>
+              <a:t>validating the data</a:t>
+            </a:r>
+            <a:r>
+              <a:rPr lang="en-US" dirty="0"/>
+              <a:t>, which variability measure would you look at first?</a:t>
+            </a:r>
+            <a:br>
+              <a:rPr lang="en-US" dirty="0"/>
+            </a:br>
+            <a:r>
+              <a:rPr lang="en-US" dirty="0"/>
+              <a:t>– If you were </a:t>
+            </a:r>
+            <a:r>
+              <a:rPr lang="en-US" b="1" dirty="0"/>
+              <a:t>describing performance consistency</a:t>
+            </a:r>
+            <a:r>
+              <a:rPr lang="en-US" dirty="0"/>
+              <a:t>, which would you report?</a:t>
+            </a:r>
+          </a:p>
+          <a:p>
+            <a:endParaRPr lang="en-US" dirty="0"/>
+          </a:p>
+          <a:p>
+            <a:r>
+              <a:rPr lang="en-US" dirty="0"/>
+              <a:t>– If you could report </a:t>
+            </a:r>
+            <a:r>
+              <a:rPr lang="en-US" b="1" dirty="0"/>
+              <a:t>one number for “typical performance”</a:t>
+            </a:r>
+            <a:r>
+              <a:rPr lang="en-US" dirty="0"/>
+              <a:t> and </a:t>
+            </a:r>
+            <a:r>
+              <a:rPr lang="en-US" b="1" dirty="0"/>
+              <a:t>one number for “spread”</a:t>
+            </a:r>
+            <a:r>
+              <a:rPr lang="en-US" dirty="0"/>
+              <a:t> to a coach, what would you choose and why?</a:t>
             </a:r>
           </a:p>
         </p:txBody>
@@ -3823,6 +4210,114 @@
       <p:sp>
         <p:nvSpPr>
           <p:cNvPr id="4" name="Slide Number Placeholder 3"/>
+          <p:cNvSpPr>
+            <a:spLocks noGrp="1"/>
+          </p:cNvSpPr>
+          <p:nvPr>
+            <p:ph type="sldNum" sz="quarter" idx="5"/>
+          </p:nvPr>
+        </p:nvSpPr>
+        <p:spPr/>
+        <p:txBody>
+          <a:bodyPr/>
+          <a:lstStyle/>
+          <a:p>
+            <a:fld id="{1560C251-82B7-4253-A774-38D73C276BCE}" type="slidenum">
+              <a:rPr lang="en-US" smtClean="0"/>
+              <a:t>31</a:t>
+            </a:fld>
+            <a:endParaRPr lang="en-US"/>
+          </a:p>
+        </p:txBody>
+      </p:sp>
+    </p:spTree>
+    <p:extLst>
+      <p:ext uri="{BB962C8B-B14F-4D97-AF65-F5344CB8AC3E}">
+        <p14:creationId xmlns:p14="http://schemas.microsoft.com/office/powerpoint/2010/main" val="1365217422"/>
+      </p:ext>
+    </p:extLst>
+  </p:cSld>
+  <p:clrMapOvr>
+    <a:masterClrMapping/>
+  </p:clrMapOvr>
+</p:notes>
+</file>
+
+<file path=ppt/notesSlides/notesSlide25.xml><?xml version="1.0" encoding="utf-8"?>
+<p:notes xmlns:a="http://schemas.openxmlformats.org/drawingml/2006/main" xmlns:r="http://schemas.openxmlformats.org/officeDocument/2006/relationships" xmlns:p="http://schemas.openxmlformats.org/presentationml/2006/main">
+  <p:cSld>
+    <p:spTree>
+      <p:nvGrpSpPr>
+        <p:cNvPr id="1" name="">
+          <a:extLst>
+            <a:ext uri="{FF2B5EF4-FFF2-40B4-BE49-F238E27FC236}">
+              <a16:creationId xmlns:a16="http://schemas.microsoft.com/office/drawing/2014/main" id="{220C8DD0-AA2E-9D28-DCCB-2096BE0C0924}"/>
+            </a:ext>
+          </a:extLst>
+        </p:cNvPr>
+        <p:cNvGrpSpPr/>
+        <p:nvPr/>
+      </p:nvGrpSpPr>
+      <p:grpSpPr>
+        <a:xfrm>
+          <a:off x="0" y="0"/>
+          <a:ext cx="0" cy="0"/>
+          <a:chOff x="0" y="0"/>
+          <a:chExt cx="0" cy="0"/>
+        </a:xfrm>
+      </p:grpSpPr>
+      <p:sp>
+        <p:nvSpPr>
+          <p:cNvPr id="2" name="Slide Image Placeholder 1">
+            <a:extLst>
+              <a:ext uri="{FF2B5EF4-FFF2-40B4-BE49-F238E27FC236}">
+                <a16:creationId xmlns:a16="http://schemas.microsoft.com/office/drawing/2014/main" id="{9C67813B-799C-F80C-6D92-ABC410468F6F}"/>
+              </a:ext>
+            </a:extLst>
+          </p:cNvPr>
+          <p:cNvSpPr>
+            <a:spLocks noGrp="1" noRot="1" noChangeAspect="1"/>
+          </p:cNvSpPr>
+          <p:nvPr>
+            <p:ph type="sldImg"/>
+          </p:nvPr>
+        </p:nvSpPr>
+        <p:spPr/>
+      </p:sp>
+      <p:sp>
+        <p:nvSpPr>
+          <p:cNvPr id="3" name="Notes Placeholder 2">
+            <a:extLst>
+              <a:ext uri="{FF2B5EF4-FFF2-40B4-BE49-F238E27FC236}">
+                <a16:creationId xmlns:a16="http://schemas.microsoft.com/office/drawing/2014/main" id="{30016463-9B4D-A6FF-430C-656E93595EA2}"/>
+              </a:ext>
+            </a:extLst>
+          </p:cNvPr>
+          <p:cNvSpPr>
+            <a:spLocks noGrp="1"/>
+          </p:cNvSpPr>
+          <p:nvPr>
+            <p:ph type="body" idx="1"/>
+          </p:nvPr>
+        </p:nvSpPr>
+        <p:spPr/>
+        <p:txBody>
+          <a:bodyPr/>
+          <a:lstStyle/>
+          <a:p>
+            <a:endParaRPr lang="en-US" dirty="0"/>
+          </a:p>
+        </p:txBody>
+      </p:sp>
+      <p:sp>
+        <p:nvSpPr>
+          <p:cNvPr id="4" name="Slide Number Placeholder 3">
+            <a:extLst>
+              <a:ext uri="{FF2B5EF4-FFF2-40B4-BE49-F238E27FC236}">
+                <a16:creationId xmlns:a16="http://schemas.microsoft.com/office/drawing/2014/main" id="{AAB80C08-ECE5-BD10-2AC6-00F8353F1BCE}"/>
+              </a:ext>
+            </a:extLst>
+          </p:cNvPr>
           <p:cNvSpPr>
             <a:spLocks noGrp="1"/>
           </p:cNvSpPr>
@@ -3838,6 +4333,355 @@
             <a:fld id="{1560C251-82B7-4253-A774-38D73C276BCE}" type="slidenum">
               <a:rPr lang="en-US" smtClean="0"/>
               <a:t>32</a:t>
+            </a:fld>
+            <a:endParaRPr lang="en-US"/>
+          </a:p>
+        </p:txBody>
+      </p:sp>
+    </p:spTree>
+    <p:extLst>
+      <p:ext uri="{BB962C8B-B14F-4D97-AF65-F5344CB8AC3E}">
+        <p14:creationId xmlns:p14="http://schemas.microsoft.com/office/powerpoint/2010/main" val="1190973736"/>
+      </p:ext>
+    </p:extLst>
+  </p:cSld>
+  <p:clrMapOvr>
+    <a:masterClrMapping/>
+  </p:clrMapOvr>
+</p:notes>
+</file>
+
+<file path=ppt/notesSlides/notesSlide26.xml><?xml version="1.0" encoding="utf-8"?>
+<p:notes xmlns:a="http://schemas.openxmlformats.org/drawingml/2006/main" xmlns:r="http://schemas.openxmlformats.org/officeDocument/2006/relationships" xmlns:p="http://schemas.openxmlformats.org/presentationml/2006/main">
+  <p:cSld>
+    <p:spTree>
+      <p:nvGrpSpPr>
+        <p:cNvPr id="1" name="">
+          <a:extLst>
+            <a:ext uri="{FF2B5EF4-FFF2-40B4-BE49-F238E27FC236}">
+              <a16:creationId xmlns:a16="http://schemas.microsoft.com/office/drawing/2014/main" id="{C7581CEB-7CE8-F32B-2D66-BD17CDD621DB}"/>
+            </a:ext>
+          </a:extLst>
+        </p:cNvPr>
+        <p:cNvGrpSpPr/>
+        <p:nvPr/>
+      </p:nvGrpSpPr>
+      <p:grpSpPr>
+        <a:xfrm>
+          <a:off x="0" y="0"/>
+          <a:ext cx="0" cy="0"/>
+          <a:chOff x="0" y="0"/>
+          <a:chExt cx="0" cy="0"/>
+        </a:xfrm>
+      </p:grpSpPr>
+      <p:sp>
+        <p:nvSpPr>
+          <p:cNvPr id="2" name="Slide Image Placeholder 1">
+            <a:extLst>
+              <a:ext uri="{FF2B5EF4-FFF2-40B4-BE49-F238E27FC236}">
+                <a16:creationId xmlns:a16="http://schemas.microsoft.com/office/drawing/2014/main" id="{68DDE70F-A1F0-5BF6-7FAF-5D458AA8D0C1}"/>
+              </a:ext>
+            </a:extLst>
+          </p:cNvPr>
+          <p:cNvSpPr>
+            <a:spLocks noGrp="1" noRot="1" noChangeAspect="1"/>
+          </p:cNvSpPr>
+          <p:nvPr>
+            <p:ph type="sldImg"/>
+          </p:nvPr>
+        </p:nvSpPr>
+        <p:spPr/>
+      </p:sp>
+      <p:sp>
+        <p:nvSpPr>
+          <p:cNvPr id="3" name="Notes Placeholder 2">
+            <a:extLst>
+              <a:ext uri="{FF2B5EF4-FFF2-40B4-BE49-F238E27FC236}">
+                <a16:creationId xmlns:a16="http://schemas.microsoft.com/office/drawing/2014/main" id="{915E31E0-4548-DCEF-ABF5-8AE812276313}"/>
+              </a:ext>
+            </a:extLst>
+          </p:cNvPr>
+          <p:cNvSpPr>
+            <a:spLocks noGrp="1"/>
+          </p:cNvSpPr>
+          <p:nvPr>
+            <p:ph type="body" idx="1"/>
+          </p:nvPr>
+        </p:nvSpPr>
+        <p:spPr/>
+        <p:txBody>
+          <a:bodyPr/>
+          <a:lstStyle/>
+          <a:p>
+            <a:r>
+              <a:rPr lang="en-US" b="1" dirty="0"/>
+              <a:t>Section 3: What summaries reveal vs. what they hide</a:t>
+            </a:r>
+          </a:p>
+        </p:txBody>
+      </p:sp>
+      <p:sp>
+        <p:nvSpPr>
+          <p:cNvPr id="4" name="Slide Number Placeholder 3">
+            <a:extLst>
+              <a:ext uri="{FF2B5EF4-FFF2-40B4-BE49-F238E27FC236}">
+                <a16:creationId xmlns:a16="http://schemas.microsoft.com/office/drawing/2014/main" id="{2AC10EAA-7D48-C6F6-1A3A-47069806FFB1}"/>
+              </a:ext>
+            </a:extLst>
+          </p:cNvPr>
+          <p:cNvSpPr>
+            <a:spLocks noGrp="1"/>
+          </p:cNvSpPr>
+          <p:nvPr>
+            <p:ph type="sldNum" sz="quarter" idx="5"/>
+          </p:nvPr>
+        </p:nvSpPr>
+        <p:spPr/>
+        <p:txBody>
+          <a:bodyPr/>
+          <a:lstStyle/>
+          <a:p>
+            <a:fld id="{1560C251-82B7-4253-A774-38D73C276BCE}" type="slidenum">
+              <a:rPr lang="en-US" smtClean="0"/>
+              <a:t>36</a:t>
+            </a:fld>
+            <a:endParaRPr lang="en-US"/>
+          </a:p>
+        </p:txBody>
+      </p:sp>
+    </p:spTree>
+    <p:extLst>
+      <p:ext uri="{BB962C8B-B14F-4D97-AF65-F5344CB8AC3E}">
+        <p14:creationId xmlns:p14="http://schemas.microsoft.com/office/powerpoint/2010/main" val="4131779728"/>
+      </p:ext>
+    </p:extLst>
+  </p:cSld>
+  <p:clrMapOvr>
+    <a:masterClrMapping/>
+  </p:clrMapOvr>
+</p:notes>
+</file>
+
+<file path=ppt/notesSlides/notesSlide27.xml><?xml version="1.0" encoding="utf-8"?>
+<p:notes xmlns:a="http://schemas.openxmlformats.org/drawingml/2006/main" xmlns:r="http://schemas.openxmlformats.org/officeDocument/2006/relationships" xmlns:p="http://schemas.openxmlformats.org/presentationml/2006/main">
+  <p:cSld>
+    <p:spTree>
+      <p:nvGrpSpPr>
+        <p:cNvPr id="1" name=""/>
+        <p:cNvGrpSpPr/>
+        <p:nvPr/>
+      </p:nvGrpSpPr>
+      <p:grpSpPr>
+        <a:xfrm>
+          <a:off x="0" y="0"/>
+          <a:ext cx="0" cy="0"/>
+          <a:chOff x="0" y="0"/>
+          <a:chExt cx="0" cy="0"/>
+        </a:xfrm>
+      </p:grpSpPr>
+      <p:sp>
+        <p:nvSpPr>
+          <p:cNvPr id="2" name="Slide Image Placeholder 1"/>
+          <p:cNvSpPr>
+            <a:spLocks noGrp="1" noRot="1" noChangeAspect="1"/>
+          </p:cNvSpPr>
+          <p:nvPr>
+            <p:ph type="sldImg"/>
+          </p:nvPr>
+        </p:nvSpPr>
+        <p:spPr/>
+      </p:sp>
+      <p:sp>
+        <p:nvSpPr>
+          <p:cNvPr id="3" name="Notes Placeholder 2"/>
+          <p:cNvSpPr>
+            <a:spLocks noGrp="1"/>
+          </p:cNvSpPr>
+          <p:nvPr>
+            <p:ph type="body" idx="1"/>
+          </p:nvPr>
+        </p:nvSpPr>
+        <p:spPr/>
+        <p:txBody>
+          <a:bodyPr/>
+          <a:lstStyle/>
+          <a:p>
+            <a:r>
+              <a:rPr lang="en-US" b="1" dirty="0"/>
+              <a:t>Correct but incomplete: </a:t>
+            </a:r>
+            <a:r>
+              <a:rPr lang="en-US" dirty="0"/>
+              <a:t>Summary statistics can be mathematically correct while still misleading.</a:t>
+            </a:r>
+          </a:p>
+          <a:p>
+            <a:r>
+              <a:rPr lang="en-US" b="1" dirty="0"/>
+              <a:t>Aggregation changes the story: </a:t>
+            </a:r>
+            <a:r>
+              <a:rPr lang="en-US" dirty="0"/>
+              <a:t>Summarizing across time, people, or groups can obscure important patterns.</a:t>
+            </a:r>
+          </a:p>
+          <a:p>
+            <a:r>
+              <a:rPr lang="en-US" b="1" dirty="0"/>
+              <a:t>Masking subgroups and structure: </a:t>
+            </a:r>
+            <a:r>
+              <a:rPr lang="en-US" dirty="0"/>
+              <a:t>A single summary can hide clusters, trends, or outliers.</a:t>
+            </a:r>
+          </a:p>
+          <a:p>
+            <a:endParaRPr lang="en-US" dirty="0"/>
+          </a:p>
+        </p:txBody>
+      </p:sp>
+      <p:sp>
+        <p:nvSpPr>
+          <p:cNvPr id="4" name="Slide Number Placeholder 3"/>
+          <p:cNvSpPr>
+            <a:spLocks noGrp="1"/>
+          </p:cNvSpPr>
+          <p:nvPr>
+            <p:ph type="sldNum" sz="quarter" idx="5"/>
+          </p:nvPr>
+        </p:nvSpPr>
+        <p:spPr/>
+        <p:txBody>
+          <a:bodyPr/>
+          <a:lstStyle/>
+          <a:p>
+            <a:fld id="{1560C251-82B7-4253-A774-38D73C276BCE}" type="slidenum">
+              <a:rPr lang="en-US" smtClean="0"/>
+              <a:t>37</a:t>
+            </a:fld>
+            <a:endParaRPr lang="en-US"/>
+          </a:p>
+        </p:txBody>
+      </p:sp>
+    </p:spTree>
+    <p:extLst>
+      <p:ext uri="{BB962C8B-B14F-4D97-AF65-F5344CB8AC3E}">
+        <p14:creationId xmlns:p14="http://schemas.microsoft.com/office/powerpoint/2010/main" val="4233449667"/>
+      </p:ext>
+    </p:extLst>
+  </p:cSld>
+  <p:clrMapOvr>
+    <a:masterClrMapping/>
+  </p:clrMapOvr>
+</p:notes>
+</file>
+
+<file path=ppt/notesSlides/notesSlide28.xml><?xml version="1.0" encoding="utf-8"?>
+<p:notes xmlns:a="http://schemas.openxmlformats.org/drawingml/2006/main" xmlns:r="http://schemas.openxmlformats.org/officeDocument/2006/relationships" xmlns:p="http://schemas.openxmlformats.org/presentationml/2006/main">
+  <p:cSld>
+    <p:spTree>
+      <p:nvGrpSpPr>
+        <p:cNvPr id="1" name=""/>
+        <p:cNvGrpSpPr/>
+        <p:nvPr/>
+      </p:nvGrpSpPr>
+      <p:grpSpPr>
+        <a:xfrm>
+          <a:off x="0" y="0"/>
+          <a:ext cx="0" cy="0"/>
+          <a:chOff x="0" y="0"/>
+          <a:chExt cx="0" cy="0"/>
+        </a:xfrm>
+      </p:grpSpPr>
+      <p:sp>
+        <p:nvSpPr>
+          <p:cNvPr id="2" name="Slide Image Placeholder 1"/>
+          <p:cNvSpPr>
+            <a:spLocks noGrp="1" noRot="1" noChangeAspect="1"/>
+          </p:cNvSpPr>
+          <p:nvPr>
+            <p:ph type="sldImg"/>
+          </p:nvPr>
+        </p:nvSpPr>
+        <p:spPr/>
+      </p:sp>
+      <p:sp>
+        <p:nvSpPr>
+          <p:cNvPr id="3" name="Notes Placeholder 2"/>
+          <p:cNvSpPr>
+            <a:spLocks noGrp="1"/>
+          </p:cNvSpPr>
+          <p:nvPr>
+            <p:ph type="body" idx="1"/>
+          </p:nvPr>
+        </p:nvSpPr>
+        <p:spPr/>
+        <p:txBody>
+          <a:bodyPr/>
+          <a:lstStyle/>
+          <a:p>
+            <a:r>
+              <a:rPr lang="en-US" b="1" dirty="0"/>
+              <a:t>Same statistics, different data</a:t>
+            </a:r>
+            <a:br>
+              <a:rPr lang="en-US" dirty="0"/>
+            </a:br>
+            <a:r>
+              <a:rPr lang="en-US" dirty="0"/>
+              <a:t>Multiple datasets can share identical summary statistics but have very different structures.</a:t>
+            </a:r>
+          </a:p>
+          <a:p>
+            <a:r>
+              <a:rPr lang="en-US" b="1" dirty="0"/>
+              <a:t>Why visualization is necessary</a:t>
+            </a:r>
+            <a:br>
+              <a:rPr lang="en-US" dirty="0"/>
+            </a:br>
+            <a:r>
+              <a:rPr lang="en-US" dirty="0"/>
+              <a:t>Plots reveal patterns that summary statistics alone cannot detect.</a:t>
+            </a:r>
+          </a:p>
+          <a:p>
+            <a:endParaRPr lang="en-US" dirty="0"/>
+          </a:p>
+          <a:p>
+            <a:r>
+              <a:rPr lang="en-US" dirty="0"/>
+              <a:t>Mention </a:t>
+            </a:r>
+            <a:r>
+              <a:rPr lang="en-US" b="1" dirty="0"/>
+              <a:t>why pie charts </a:t>
+            </a:r>
+            <a:r>
+              <a:rPr lang="en-US" dirty="0"/>
+              <a:t>are not ideal – stacked bar is better</a:t>
+            </a:r>
+          </a:p>
+        </p:txBody>
+      </p:sp>
+      <p:sp>
+        <p:nvSpPr>
+          <p:cNvPr id="4" name="Slide Number Placeholder 3"/>
+          <p:cNvSpPr>
+            <a:spLocks noGrp="1"/>
+          </p:cNvSpPr>
+          <p:nvPr>
+            <p:ph type="sldNum" sz="quarter" idx="5"/>
+          </p:nvPr>
+        </p:nvSpPr>
+        <p:spPr/>
+        <p:txBody>
+          <a:bodyPr/>
+          <a:lstStyle/>
+          <a:p>
+            <a:fld id="{1560C251-82B7-4253-A774-38D73C276BCE}" type="slidenum">
+              <a:rPr lang="en-US" smtClean="0"/>
+              <a:t>39</a:t>
             </a:fld>
             <a:endParaRPr lang="en-US"/>
           </a:p>
@@ -4118,7 +4962,13 @@
   <p:cSld>
     <p:spTree>
       <p:nvGrpSpPr>
-        <p:cNvPr id="1" name=""/>
+        <p:cNvPr id="1" name="">
+          <a:extLst>
+            <a:ext uri="{FF2B5EF4-FFF2-40B4-BE49-F238E27FC236}">
+              <a16:creationId xmlns:a16="http://schemas.microsoft.com/office/drawing/2014/main" id="{153AD8B0-4784-2C08-9D81-704C41ACDE6B}"/>
+            </a:ext>
+          </a:extLst>
+        </p:cNvPr>
         <p:cNvGrpSpPr/>
         <p:nvPr/>
       </p:nvGrpSpPr>
@@ -4132,7 +4982,13 @@
       </p:grpSpPr>
       <p:sp>
         <p:nvSpPr>
-          <p:cNvPr id="2" name="Slide Image Placeholder 1"/>
+          <p:cNvPr id="2" name="Slide Image Placeholder 1">
+            <a:extLst>
+              <a:ext uri="{FF2B5EF4-FFF2-40B4-BE49-F238E27FC236}">
+                <a16:creationId xmlns:a16="http://schemas.microsoft.com/office/drawing/2014/main" id="{AFC33DA0-5A87-B5F5-F90B-6917DA6C28E0}"/>
+              </a:ext>
+            </a:extLst>
+          </p:cNvPr>
           <p:cNvSpPr>
             <a:spLocks noGrp="1" noRot="1" noChangeAspect="1"/>
           </p:cNvSpPr>
@@ -4144,7 +5000,13 @@
       </p:sp>
       <p:sp>
         <p:nvSpPr>
-          <p:cNvPr id="3" name="Notes Placeholder 2"/>
+          <p:cNvPr id="3" name="Notes Placeholder 2">
+            <a:extLst>
+              <a:ext uri="{FF2B5EF4-FFF2-40B4-BE49-F238E27FC236}">
+                <a16:creationId xmlns:a16="http://schemas.microsoft.com/office/drawing/2014/main" id="{93B6F244-E693-F9F3-49D7-1BDFF85A6B0B}"/>
+              </a:ext>
+            </a:extLst>
+          </p:cNvPr>
           <p:cNvSpPr>
             <a:spLocks noGrp="1"/>
           </p:cNvSpPr>
@@ -4158,62 +5020,57 @@
           <a:lstStyle/>
           <a:p>
             <a:r>
-              <a:rPr lang="en-US" dirty="0"/>
-              <a:t>Mean: arithmetic mean </a:t>
-            </a:r>
-          </a:p>
-          <a:p>
-            <a:pPr lvl="1"/>
-            <a:r>
-              <a:rPr lang="en-US" dirty="0"/>
-              <a:t>Determined by the sum of the values in the distribution divided by the number of values.</a:t>
-            </a:r>
-          </a:p>
-          <a:p>
-            <a:pPr lvl="1"/>
-            <a:r>
-              <a:rPr lang="en-US" dirty="0"/>
-              <a:t>Misleading if outliers or asymmetries are present</a:t>
-            </a:r>
-          </a:p>
-          <a:p>
-            <a:r>
-              <a:rPr lang="en-US" dirty="0"/>
-              <a:t>Median: the middle value</a:t>
-            </a:r>
-          </a:p>
-          <a:p>
-            <a:pPr lvl="1"/>
-            <a:r>
-              <a:rPr lang="en-US" dirty="0"/>
-              <a:t>the data point below which half of the values lie</a:t>
-            </a:r>
-          </a:p>
-          <a:p>
-            <a:pPr lvl="1"/>
-            <a:r>
-              <a:rPr lang="en-US" dirty="0"/>
-              <a:t>Ignores magnitude, focused on order</a:t>
-            </a:r>
-          </a:p>
-          <a:p>
-            <a:r>
-              <a:rPr lang="en-US" dirty="0"/>
-              <a:t>Mode: most frequent value</a:t>
-            </a:r>
-          </a:p>
-          <a:p>
-            <a:pPr lvl="1"/>
-            <a:r>
-              <a:rPr lang="en-US" dirty="0"/>
-              <a:t>Rarely used for interval or ratio data</a:t>
-            </a:r>
-          </a:p>
-        </p:txBody>
-      </p:sp>
-      <p:sp>
-        <p:nvSpPr>
-          <p:cNvPr id="4" name="Slide Number Placeholder 3"/>
+              <a:rPr lang="en-US" b="1" dirty="0"/>
+              <a:t>Sensitivity to outliers</a:t>
+            </a:r>
+            <a:br>
+              <a:rPr lang="en-US" dirty="0"/>
+            </a:br>
+            <a:r>
+              <a:rPr lang="en-US" dirty="0"/>
+              <a:t>Some measures shift dramatically with extreme values, others are more resistant.</a:t>
+            </a:r>
+          </a:p>
+          <a:p>
+            <a:r>
+              <a:rPr lang="en-US" b="1" dirty="0"/>
+              <a:t>When the average is misleading</a:t>
+            </a:r>
+            <a:br>
+              <a:rPr lang="en-US" dirty="0"/>
+            </a:br>
+            <a:r>
+              <a:rPr lang="en-US" dirty="0"/>
+              <a:t>A single “typical” value can fail to represent most observations.</a:t>
+            </a:r>
+          </a:p>
+          <a:p>
+            <a:r>
+              <a:rPr lang="en-US" b="1" dirty="0"/>
+              <a:t>What central tendency hides</a:t>
+            </a:r>
+            <a:br>
+              <a:rPr lang="en-US" dirty="0"/>
+            </a:br>
+            <a:r>
+              <a:rPr lang="en-US" dirty="0"/>
+              <a:t>Central tendency tells us nothing about spread, shape, or subgroups.</a:t>
+            </a:r>
+          </a:p>
+          <a:p>
+            <a:endParaRPr lang="en-US" dirty="0"/>
+          </a:p>
+        </p:txBody>
+      </p:sp>
+      <p:sp>
+        <p:nvSpPr>
+          <p:cNvPr id="4" name="Slide Number Placeholder 3">
+            <a:extLst>
+              <a:ext uri="{FF2B5EF4-FFF2-40B4-BE49-F238E27FC236}">
+                <a16:creationId xmlns:a16="http://schemas.microsoft.com/office/drawing/2014/main" id="{B518ED68-0CC4-8684-6AC5-9E515A8038C9}"/>
+              </a:ext>
+            </a:extLst>
+          </p:cNvPr>
           <p:cNvSpPr>
             <a:spLocks noGrp="1"/>
           </p:cNvSpPr>
@@ -4237,7 +5094,7 @@
     </p:spTree>
     <p:extLst>
       <p:ext uri="{BB962C8B-B14F-4D97-AF65-F5344CB8AC3E}">
-        <p14:creationId xmlns:p14="http://schemas.microsoft.com/office/powerpoint/2010/main" val="2064084438"/>
+        <p14:creationId xmlns:p14="http://schemas.microsoft.com/office/powerpoint/2010/main" val="801353089"/>
       </p:ext>
     </p:extLst>
   </p:cSld>
@@ -4252,13 +5109,7 @@
   <p:cSld>
     <p:spTree>
       <p:nvGrpSpPr>
-        <p:cNvPr id="1" name="">
-          <a:extLst>
-            <a:ext uri="{FF2B5EF4-FFF2-40B4-BE49-F238E27FC236}">
-              <a16:creationId xmlns:a16="http://schemas.microsoft.com/office/drawing/2014/main" id="{A8B877B8-616D-D4F2-FA7D-C2867BEFD407}"/>
-            </a:ext>
-          </a:extLst>
-        </p:cNvPr>
+        <p:cNvPr id="1" name=""/>
         <p:cNvGrpSpPr/>
         <p:nvPr/>
       </p:nvGrpSpPr>
@@ -4272,13 +5123,7 @@
       </p:grpSpPr>
       <p:sp>
         <p:nvSpPr>
-          <p:cNvPr id="2" name="Slide Image Placeholder 1">
-            <a:extLst>
-              <a:ext uri="{FF2B5EF4-FFF2-40B4-BE49-F238E27FC236}">
-                <a16:creationId xmlns:a16="http://schemas.microsoft.com/office/drawing/2014/main" id="{80E4064F-4EF6-4E35-97C5-48E5DE38DEBA}"/>
-              </a:ext>
-            </a:extLst>
-          </p:cNvPr>
+          <p:cNvPr id="2" name="Slide Image Placeholder 1"/>
           <p:cNvSpPr>
             <a:spLocks noGrp="1" noRot="1" noChangeAspect="1"/>
           </p:cNvSpPr>
@@ -4290,13 +5135,7 @@
       </p:sp>
       <p:sp>
         <p:nvSpPr>
-          <p:cNvPr id="3" name="Notes Placeholder 2">
-            <a:extLst>
-              <a:ext uri="{FF2B5EF4-FFF2-40B4-BE49-F238E27FC236}">
-                <a16:creationId xmlns:a16="http://schemas.microsoft.com/office/drawing/2014/main" id="{653637FD-10A9-AAE1-40AB-BF5C3B0522E9}"/>
-              </a:ext>
-            </a:extLst>
-          </p:cNvPr>
+          <p:cNvPr id="3" name="Notes Placeholder 2"/>
           <p:cNvSpPr>
             <a:spLocks noGrp="1"/>
           </p:cNvSpPr>
@@ -4310,68 +5149,18 @@
           <a:lstStyle/>
           <a:p>
             <a:r>
-              <a:rPr lang="en-US" dirty="0"/>
-              <a:t>Mean: arithmetic mean </a:t>
-            </a:r>
-          </a:p>
-          <a:p>
-            <a:pPr lvl="1"/>
-            <a:r>
-              <a:rPr lang="en-US" dirty="0"/>
-              <a:t>Determined by the sum of the values in the distribution divided by the number of values.</a:t>
-            </a:r>
-          </a:p>
-          <a:p>
-            <a:pPr lvl="1"/>
-            <a:r>
-              <a:rPr lang="en-US" dirty="0"/>
-              <a:t>Misleading if outliers or asymmetries are present</a:t>
-            </a:r>
-          </a:p>
-          <a:p>
-            <a:r>
-              <a:rPr lang="en-US" dirty="0"/>
-              <a:t>Median: the middle value</a:t>
-            </a:r>
-          </a:p>
-          <a:p>
-            <a:pPr lvl="1"/>
-            <a:r>
-              <a:rPr lang="en-US" dirty="0"/>
-              <a:t>the data point below which half of the values lie</a:t>
-            </a:r>
-          </a:p>
-          <a:p>
-            <a:pPr lvl="1"/>
-            <a:r>
-              <a:rPr lang="en-US" dirty="0"/>
-              <a:t>Ignores magnitude, focused on order</a:t>
-            </a:r>
-          </a:p>
-          <a:p>
-            <a:r>
-              <a:rPr lang="en-US" dirty="0"/>
-              <a:t>Mode: most frequent value</a:t>
-            </a:r>
-          </a:p>
-          <a:p>
-            <a:pPr lvl="1"/>
-            <a:r>
-              <a:rPr lang="en-US" dirty="0"/>
-              <a:t>Rarely used for interval or ratio data</a:t>
-            </a:r>
-          </a:p>
-        </p:txBody>
-      </p:sp>
-      <p:sp>
-        <p:nvSpPr>
-          <p:cNvPr id="4" name="Slide Number Placeholder 3">
-            <a:extLst>
-              <a:ext uri="{FF2B5EF4-FFF2-40B4-BE49-F238E27FC236}">
-                <a16:creationId xmlns:a16="http://schemas.microsoft.com/office/drawing/2014/main" id="{CBF1D531-E726-2ED3-9674-6906ADD6F3DD}"/>
-              </a:ext>
-            </a:extLst>
-          </p:cNvPr>
+              <a:rPr lang="en-US" b="1" dirty="0"/>
+              <a:t>Section 2: Variability</a:t>
+            </a:r>
+          </a:p>
+          <a:p>
+            <a:endParaRPr lang="en-US" dirty="0"/>
+          </a:p>
+        </p:txBody>
+      </p:sp>
+      <p:sp>
+        <p:nvSpPr>
+          <p:cNvPr id="4" name="Slide Number Placeholder 3"/>
           <p:cNvSpPr>
             <a:spLocks noGrp="1"/>
           </p:cNvSpPr>
@@ -4395,7 +5184,7 @@
     </p:spTree>
     <p:extLst>
       <p:ext uri="{BB962C8B-B14F-4D97-AF65-F5344CB8AC3E}">
-        <p14:creationId xmlns:p14="http://schemas.microsoft.com/office/powerpoint/2010/main" val="1267449958"/>
+        <p14:creationId xmlns:p14="http://schemas.microsoft.com/office/powerpoint/2010/main" val="622188051"/>
       </p:ext>
     </p:extLst>
   </p:cSld>
@@ -4451,7 +5240,59 @@
           <a:p>
             <a:r>
               <a:rPr lang="en-US" b="1" dirty="0"/>
-              <a:t>Section 2: Variability</a:t>
+              <a:t>Why variability matters</a:t>
+            </a:r>
+            <a:br>
+              <a:rPr lang="en-US" dirty="0"/>
+            </a:br>
+            <a:r>
+              <a:rPr lang="en-US" dirty="0"/>
+              <a:t>Variability describes how much observations differ, not just where they center.</a:t>
+            </a:r>
+          </a:p>
+          <a:p>
+            <a:r>
+              <a:rPr lang="en-US" b="1" dirty="0"/>
+              <a:t>Variability as information, not noise</a:t>
+            </a:r>
+            <a:br>
+              <a:rPr lang="en-US" dirty="0"/>
+            </a:br>
+            <a:r>
+              <a:rPr lang="en-US" dirty="0"/>
+              <a:t>High variability can signal inconsistency, risk, or meaningful differences.</a:t>
+            </a:r>
+          </a:p>
+          <a:p>
+            <a:r>
+              <a:rPr lang="en-US" b="1" dirty="0"/>
+              <a:t>Same mean, different variability</a:t>
+            </a:r>
+            <a:br>
+              <a:rPr lang="en-US" dirty="0"/>
+            </a:br>
+            <a:r>
+              <a:rPr lang="en-US" dirty="0"/>
+              <a:t>Datasets with identical averages can imply very different interpretations.</a:t>
+            </a:r>
+          </a:p>
+          <a:p>
+            <a:endParaRPr lang="en-US" b="1" dirty="0"/>
+          </a:p>
+          <a:p>
+            <a:endParaRPr lang="en-US" dirty="0"/>
+          </a:p>
+          <a:p>
+            <a:r>
+              <a:rPr lang="en-US" b="1" dirty="0"/>
+              <a:t>What variability still does not show</a:t>
+            </a:r>
+            <a:br>
+              <a:rPr lang="en-US" dirty="0"/>
+            </a:br>
+            <a:r>
+              <a:rPr lang="en-US" dirty="0"/>
+              <a:t>Variability alone does not reveal structure, trends, or relationships.</a:t>
             </a:r>
           </a:p>
           <a:p>
@@ -4485,7 +5326,7 @@
     </p:spTree>
     <p:extLst>
       <p:ext uri="{BB962C8B-B14F-4D97-AF65-F5344CB8AC3E}">
-        <p14:creationId xmlns:p14="http://schemas.microsoft.com/office/powerpoint/2010/main" val="622188051"/>
+        <p14:creationId xmlns:p14="http://schemas.microsoft.com/office/powerpoint/2010/main" val="1598167257"/>
       </p:ext>
     </p:extLst>
   </p:cSld>
@@ -4541,59 +5382,64 @@
           <a:p>
             <a:r>
               <a:rPr lang="en-US" b="1" dirty="0"/>
-              <a:t>Why variability matters</a:t>
+              <a:t>Range, IQR, and standard deviation</a:t>
             </a:r>
             <a:br>
               <a:rPr lang="en-US" dirty="0"/>
             </a:br>
             <a:r>
               <a:rPr lang="en-US" dirty="0"/>
-              <a:t>Variability describes how much observations differ, not just where they center.</a:t>
+              <a:t>Different variability measures capture different aspects of spread.</a:t>
             </a:r>
           </a:p>
           <a:p>
             <a:r>
               <a:rPr lang="en-US" b="1" dirty="0"/>
-              <a:t>Variability as information, not noise</a:t>
-            </a:r>
-            <a:br>
-              <a:rPr lang="en-US" dirty="0"/>
-            </a:br>
-            <a:r>
-              <a:rPr lang="en-US" dirty="0"/>
-              <a:t>High variability can signal inconsistency, risk, or meaningful differences.</a:t>
+              <a:t>Range</a:t>
+            </a:r>
+            <a:r>
+              <a:rPr lang="en-US" dirty="0"/>
+              <a:t> is the simplest lens. It shows the extremes, which is useful for sanity checks and identifying possible outliers, but it tells you nothing about how the rest of the data behave.</a:t>
             </a:r>
           </a:p>
           <a:p>
             <a:r>
               <a:rPr lang="en-US" b="1" dirty="0"/>
-              <a:t>Same mean, different variability</a:t>
-            </a:r>
-            <a:br>
-              <a:rPr lang="en-US" dirty="0"/>
-            </a:br>
-            <a:r>
-              <a:rPr lang="en-US" dirty="0"/>
-              <a:t>Datasets with identical averages can imply very different interpretations.</a:t>
-            </a:r>
-          </a:p>
-          <a:p>
-            <a:endParaRPr lang="en-US" b="1" dirty="0"/>
+              <a:t>IQR</a:t>
+            </a:r>
+            <a:r>
+              <a:rPr lang="en-US" dirty="0"/>
+              <a:t> focuses on the middle of the distribution. It’s more robust to outliers and gives a sense of where most athletes sit, but it intentionally ignores the tails.</a:t>
+            </a:r>
           </a:p>
           <a:p>
             <a:endParaRPr lang="en-US" dirty="0"/>
           </a:p>
           <a:p>
             <a:r>
+              <a:rPr lang="en-US" dirty="0"/>
+              <a:t>These two are useful for data validation. Next 2 are used for interpretation</a:t>
+            </a:r>
+          </a:p>
+          <a:p>
+            <a:endParaRPr lang="en-US" dirty="0"/>
+          </a:p>
+          <a:p>
+            <a:r>
               <a:rPr lang="en-US" b="1" dirty="0"/>
-              <a:t>What variability still does not show</a:t>
-            </a:r>
-            <a:br>
-              <a:rPr lang="en-US" dirty="0"/>
-            </a:br>
-            <a:r>
-              <a:rPr lang="en-US" dirty="0"/>
-              <a:t>Variability alone does not reveal structure, trends, or relationships.</a:t>
+              <a:t>Variance</a:t>
+            </a:r>
+            <a:r>
+              <a:rPr lang="en-US" dirty="0"/>
+              <a:t> and </a:t>
+            </a:r>
+            <a:r>
+              <a:rPr lang="en-US" b="1" dirty="0"/>
+              <a:t>SD</a:t>
+            </a:r>
+            <a:r>
+              <a:rPr lang="en-US" dirty="0"/>
+              <a:t> describe how values typically deviate from the mean. This is usually the most informative for applied work because it connects naturally to ideas like consistency, typical error, and thresholds. SD is easier to interpret than variance, which is why we usually report SD.</a:t>
             </a:r>
           </a:p>
           <a:p>
@@ -4627,7 +5473,7 @@
     </p:spTree>
     <p:extLst>
       <p:ext uri="{BB962C8B-B14F-4D97-AF65-F5344CB8AC3E}">
-        <p14:creationId xmlns:p14="http://schemas.microsoft.com/office/powerpoint/2010/main" val="1598167257"/>
+        <p14:creationId xmlns:p14="http://schemas.microsoft.com/office/powerpoint/2010/main" val="1443262531"/>
       </p:ext>
     </p:extLst>
   </p:cSld>
@@ -4642,7 +5488,13 @@
   <p:cSld>
     <p:spTree>
       <p:nvGrpSpPr>
-        <p:cNvPr id="1" name=""/>
+        <p:cNvPr id="1" name="">
+          <a:extLst>
+            <a:ext uri="{FF2B5EF4-FFF2-40B4-BE49-F238E27FC236}">
+              <a16:creationId xmlns:a16="http://schemas.microsoft.com/office/drawing/2014/main" id="{FB524790-24FF-023E-10BC-7375D19FA8BF}"/>
+            </a:ext>
+          </a:extLst>
+        </p:cNvPr>
         <p:cNvGrpSpPr/>
         <p:nvPr/>
       </p:nvGrpSpPr>
@@ -4656,7 +5508,13 @@
       </p:grpSpPr>
       <p:sp>
         <p:nvSpPr>
-          <p:cNvPr id="2" name="Slide Image Placeholder 1"/>
+          <p:cNvPr id="2" name="Slide Image Placeholder 1">
+            <a:extLst>
+              <a:ext uri="{FF2B5EF4-FFF2-40B4-BE49-F238E27FC236}">
+                <a16:creationId xmlns:a16="http://schemas.microsoft.com/office/drawing/2014/main" id="{024064AF-DFEC-E902-AD4C-A856CB90E144}"/>
+              </a:ext>
+            </a:extLst>
+          </p:cNvPr>
           <p:cNvSpPr>
             <a:spLocks noGrp="1" noRot="1" noChangeAspect="1"/>
           </p:cNvSpPr>
@@ -4668,7 +5526,13 @@
       </p:sp>
       <p:sp>
         <p:nvSpPr>
-          <p:cNvPr id="3" name="Notes Placeholder 2"/>
+          <p:cNvPr id="3" name="Notes Placeholder 2">
+            <a:extLst>
+              <a:ext uri="{FF2B5EF4-FFF2-40B4-BE49-F238E27FC236}">
+                <a16:creationId xmlns:a16="http://schemas.microsoft.com/office/drawing/2014/main" id="{F79A7F02-70FC-3667-D378-646EAA368453}"/>
+              </a:ext>
+            </a:extLst>
+          </p:cNvPr>
           <p:cNvSpPr>
             <a:spLocks noGrp="1"/>
           </p:cNvSpPr>
@@ -4750,7 +5614,13 @@
       </p:sp>
       <p:sp>
         <p:nvSpPr>
-          <p:cNvPr id="4" name="Slide Number Placeholder 3"/>
+          <p:cNvPr id="4" name="Slide Number Placeholder 3">
+            <a:extLst>
+              <a:ext uri="{FF2B5EF4-FFF2-40B4-BE49-F238E27FC236}">
+                <a16:creationId xmlns:a16="http://schemas.microsoft.com/office/drawing/2014/main" id="{15CC0EEB-0FDE-7FA1-3197-A389384E5B8C}"/>
+              </a:ext>
+            </a:extLst>
+          </p:cNvPr>
           <p:cNvSpPr>
             <a:spLocks noGrp="1"/>
           </p:cNvSpPr>
@@ -4774,7 +5644,7 @@
     </p:spTree>
     <p:extLst>
       <p:ext uri="{BB962C8B-B14F-4D97-AF65-F5344CB8AC3E}">
-        <p14:creationId xmlns:p14="http://schemas.microsoft.com/office/powerpoint/2010/main" val="1443262531"/>
+        <p14:creationId xmlns:p14="http://schemas.microsoft.com/office/powerpoint/2010/main" val="1794544098"/>
       </p:ext>
     </p:extLst>
   </p:cSld>
@@ -4941,7 +5811,7 @@
           <a:p>
             <a:fld id="{1BF61C71-767E-B84C-BFB3-7B18856D27F4}" type="datetimeFigureOut">
               <a:rPr lang="en-US" smtClean="0"/>
-              <a:t>9/23/2026</a:t>
+              <a:t>9/24/26</a:t>
             </a:fld>
             <a:endParaRPr lang="en-US"/>
           </a:p>
@@ -5149,7 +6019,7 @@
           <a:p>
             <a:fld id="{1BF61C71-767E-B84C-BFB3-7B18856D27F4}" type="datetimeFigureOut">
               <a:rPr lang="en-US" smtClean="0"/>
-              <a:t>9/23/2026</a:t>
+              <a:t>9/24/26</a:t>
             </a:fld>
             <a:endParaRPr lang="en-US"/>
           </a:p>
@@ -5367,7 +6237,7 @@
           <a:p>
             <a:fld id="{1BF61C71-767E-B84C-BFB3-7B18856D27F4}" type="datetimeFigureOut">
               <a:rPr lang="en-US" smtClean="0"/>
-              <a:t>9/23/2026</a:t>
+              <a:t>9/24/26</a:t>
             </a:fld>
             <a:endParaRPr lang="en-US"/>
           </a:p>
@@ -5677,7 +6547,7 @@
           <a:p>
             <a:fld id="{1BF61C71-767E-B84C-BFB3-7B18856D27F4}" type="datetimeFigureOut">
               <a:rPr lang="en-US" smtClean="0"/>
-              <a:t>9/23/2026</a:t>
+              <a:t>9/24/26</a:t>
             </a:fld>
             <a:endParaRPr lang="en-US"/>
           </a:p>
@@ -5961,7 +6831,7 @@
           <a:p>
             <a:fld id="{1BF61C71-767E-B84C-BFB3-7B18856D27F4}" type="datetimeFigureOut">
               <a:rPr lang="en-US" smtClean="0"/>
-              <a:t>9/23/2026</a:t>
+              <a:t>9/24/26</a:t>
             </a:fld>
             <a:endParaRPr lang="en-US"/>
           </a:p>
@@ -6237,7 +7107,7 @@
           <a:p>
             <a:fld id="{1BF61C71-767E-B84C-BFB3-7B18856D27F4}" type="datetimeFigureOut">
               <a:rPr lang="en-US" smtClean="0"/>
-              <a:t>9/23/2026</a:t>
+              <a:t>9/24/26</a:t>
             </a:fld>
             <a:endParaRPr lang="en-US"/>
           </a:p>
@@ -6660,7 +7530,7 @@
           <a:p>
             <a:fld id="{1BF61C71-767E-B84C-BFB3-7B18856D27F4}" type="datetimeFigureOut">
               <a:rPr lang="en-US" smtClean="0"/>
-              <a:t>9/23/2026</a:t>
+              <a:t>9/24/26</a:t>
             </a:fld>
             <a:endParaRPr lang="en-US"/>
           </a:p>
@@ -6810,7 +7680,7 @@
           <a:p>
             <a:fld id="{1BF61C71-767E-B84C-BFB3-7B18856D27F4}" type="datetimeFigureOut">
               <a:rPr lang="en-US" smtClean="0"/>
-              <a:t>9/23/2026</a:t>
+              <a:t>9/24/26</a:t>
             </a:fld>
             <a:endParaRPr lang="en-US"/>
           </a:p>
@@ -6931,7 +7801,7 @@
           <a:p>
             <a:fld id="{1BF61C71-767E-B84C-BFB3-7B18856D27F4}" type="datetimeFigureOut">
               <a:rPr lang="en-US" smtClean="0"/>
-              <a:t>9/23/2026</a:t>
+              <a:t>9/24/26</a:t>
             </a:fld>
             <a:endParaRPr lang="en-US"/>
           </a:p>
@@ -7252,7 +8122,7 @@
           <a:p>
             <a:fld id="{1BF61C71-767E-B84C-BFB3-7B18856D27F4}" type="datetimeFigureOut">
               <a:rPr lang="en-US" smtClean="0"/>
-              <a:t>9/23/2026</a:t>
+              <a:t>9/24/26</a:t>
             </a:fld>
             <a:endParaRPr lang="en-US"/>
           </a:p>
@@ -7549,7 +8419,7 @@
           <a:p>
             <a:fld id="{1BF61C71-767E-B84C-BFB3-7B18856D27F4}" type="datetimeFigureOut">
               <a:rPr lang="en-US" smtClean="0"/>
-              <a:t>9/23/2026</a:t>
+              <a:t>9/24/26</a:t>
             </a:fld>
             <a:endParaRPr lang="en-US"/>
           </a:p>
@@ -7803,7 +8673,7 @@
           <a:p>
             <a:fld id="{1BF61C71-767E-B84C-BFB3-7B18856D27F4}" type="datetimeFigureOut">
               <a:rPr lang="en-US" smtClean="0"/>
-              <a:t>9/23/2026</a:t>
+              <a:t>9/24/26</a:t>
             </a:fld>
             <a:endParaRPr lang="en-US"/>
           </a:p>
@@ -8318,7 +9188,7 @@
         <p:cNvPr id="1" name="">
           <a:extLst>
             <a:ext uri="{FF2B5EF4-FFF2-40B4-BE49-F238E27FC236}">
-              <a16:creationId xmlns:a16="http://schemas.microsoft.com/office/drawing/2014/main" id="{8AAAEA5E-7577-2AE3-0E8B-A2EACB10EEDF}"/>
+              <a16:creationId xmlns:a16="http://schemas.microsoft.com/office/drawing/2014/main" id="{953095F8-A5E1-1DE8-FD64-3EEB50F8AE03}"/>
             </a:ext>
           </a:extLst>
         </p:cNvPr>
@@ -8338,7 +9208,7 @@
           <p:cNvPr id="2" name="Title 1">
             <a:extLst>
               <a:ext uri="{FF2B5EF4-FFF2-40B4-BE49-F238E27FC236}">
-                <a16:creationId xmlns:a16="http://schemas.microsoft.com/office/drawing/2014/main" id="{3CBFB0CF-2A71-D3A2-2FF0-1B2A0CE00118}"/>
+                <a16:creationId xmlns:a16="http://schemas.microsoft.com/office/drawing/2014/main" id="{BD81AD4A-0E19-28D1-0B5B-9B437A95405C}"/>
               </a:ext>
             </a:extLst>
           </p:cNvPr>
@@ -8356,8 +9226,121 @@
           <a:p>
             <a:r>
               <a:rPr lang="en-US" dirty="0"/>
-              <a:t>Range and IQR</a:t>
-            </a:r>
+              <a:t>Standard Deviation</a:t>
+            </a:r>
+          </a:p>
+        </p:txBody>
+      </p:sp>
+      <p:sp>
+        <p:nvSpPr>
+          <p:cNvPr id="3" name="Content Placeholder 2">
+            <a:extLst>
+              <a:ext uri="{FF2B5EF4-FFF2-40B4-BE49-F238E27FC236}">
+                <a16:creationId xmlns:a16="http://schemas.microsoft.com/office/drawing/2014/main" id="{263FF8F0-D580-9E75-FD88-42E4D8EF06CD}"/>
+              </a:ext>
+            </a:extLst>
+          </p:cNvPr>
+          <p:cNvSpPr>
+            <a:spLocks noGrp="1"/>
+          </p:cNvSpPr>
+          <p:nvPr>
+            <p:ph idx="1"/>
+          </p:nvPr>
+        </p:nvSpPr>
+        <p:spPr/>
+        <p:txBody>
+          <a:bodyPr>
+            <a:normAutofit/>
+          </a:bodyPr>
+          <a:lstStyle/>
+          <a:p>
+            <a:r>
+              <a:rPr lang="en-US" dirty="0">
+                <a:solidFill>
+                  <a:schemeClr val="bg2">
+                    <a:lumMod val="75000"/>
+                  </a:schemeClr>
+                </a:solidFill>
+              </a:rPr>
+              <a:t>Range: distance between the smallest and largest values.</a:t>
+            </a:r>
+          </a:p>
+          <a:p>
+            <a:pPr lvl="1"/>
+            <a:r>
+              <a:rPr lang="en-US" dirty="0">
+                <a:solidFill>
+                  <a:schemeClr val="bg2">
+                    <a:lumMod val="75000"/>
+                  </a:schemeClr>
+                </a:solidFill>
+              </a:rPr>
+              <a:t>Sensitive to outliers</a:t>
+            </a:r>
+          </a:p>
+          <a:p>
+            <a:pPr lvl="1"/>
+            <a:endParaRPr lang="en-US" dirty="0">
+              <a:solidFill>
+                <a:schemeClr val="bg2">
+                  <a:lumMod val="75000"/>
+                </a:schemeClr>
+              </a:solidFill>
+            </a:endParaRPr>
+          </a:p>
+          <a:p>
+            <a:r>
+              <a:rPr lang="en-US" dirty="0">
+                <a:solidFill>
+                  <a:schemeClr val="bg2">
+                    <a:lumMod val="75000"/>
+                  </a:schemeClr>
+                </a:solidFill>
+              </a:rPr>
+              <a:t>IQR: spread of the middle 50% of the data.</a:t>
+            </a:r>
+          </a:p>
+          <a:p>
+            <a:pPr lvl="1"/>
+            <a:r>
+              <a:rPr lang="en-US" dirty="0">
+                <a:solidFill>
+                  <a:schemeClr val="bg2">
+                    <a:lumMod val="75000"/>
+                  </a:schemeClr>
+                </a:solidFill>
+              </a:rPr>
+              <a:t>Removes outliers</a:t>
+            </a:r>
+          </a:p>
+          <a:p>
+            <a:pPr marL="457200" lvl="1" indent="0">
+              <a:buNone/>
+            </a:pPr>
+            <a:endParaRPr lang="en-US" dirty="0"/>
+          </a:p>
+          <a:p>
+            <a:r>
+              <a:rPr lang="en-US" dirty="0"/>
+              <a:t>Standard Deviation: Typical deviation from the mean</a:t>
+            </a:r>
+          </a:p>
+          <a:p>
+            <a:pPr lvl="1"/>
+            <a:r>
+              <a:rPr lang="en-US" dirty="0"/>
+              <a:t>square root of variance</a:t>
+            </a:r>
+          </a:p>
+          <a:p>
+            <a:pPr lvl="1"/>
+            <a:r>
+              <a:rPr lang="en-US" dirty="0"/>
+              <a:t>Same units as the data</a:t>
+            </a:r>
+          </a:p>
+          <a:p>
+            <a:endParaRPr lang="en-US" dirty="0"/>
           </a:p>
         </p:txBody>
       </p:sp>
@@ -8366,7 +9349,7 @@
           <p:cNvPr id="4" name="Slide Number Placeholder 3">
             <a:extLst>
               <a:ext uri="{FF2B5EF4-FFF2-40B4-BE49-F238E27FC236}">
-                <a16:creationId xmlns:a16="http://schemas.microsoft.com/office/drawing/2014/main" id="{FDD9E4FB-2395-2EC7-0828-BDF71DCE4A66}"/>
+                <a16:creationId xmlns:a16="http://schemas.microsoft.com/office/drawing/2014/main" id="{9B7FE7D7-7926-F0EC-AE70-FB839BCBA4C3}"/>
               </a:ext>
             </a:extLst>
           </p:cNvPr>
@@ -8387,203 +9370,14 @@
               <a:pPr/>
               <a:t>10</a:t>
             </a:fld>
-            <a:endParaRPr lang="en-US"/>
-          </a:p>
-        </p:txBody>
-      </p:sp>
-      <p:pic>
-        <p:nvPicPr>
-          <p:cNvPr id="9" name="Picture 8">
-            <a:extLst>
-              <a:ext uri="{FF2B5EF4-FFF2-40B4-BE49-F238E27FC236}">
-                <a16:creationId xmlns:a16="http://schemas.microsoft.com/office/drawing/2014/main" id="{870C3C5B-B049-1768-3B29-0B864DB2D1B2}"/>
-              </a:ext>
-            </a:extLst>
-          </p:cNvPr>
-          <p:cNvPicPr>
-            <a:picLocks noChangeAspect="1"/>
-          </p:cNvPicPr>
-          <p:nvPr/>
-        </p:nvPicPr>
-        <p:blipFill>
-          <a:blip r:embed="rId3"/>
-          <a:stretch>
-            <a:fillRect/>
-          </a:stretch>
-        </p:blipFill>
-        <p:spPr>
-          <a:xfrm>
-            <a:off x="3810000" y="2446866"/>
-            <a:ext cx="4876800" cy="2767013"/>
-          </a:xfrm>
-          <a:prstGeom prst="rect">
-            <a:avLst/>
-          </a:prstGeom>
-        </p:spPr>
-      </p:pic>
-      <p:cxnSp>
-        <p:nvCxnSpPr>
-          <p:cNvPr id="11" name="Straight Arrow Connector 10">
-            <a:extLst>
-              <a:ext uri="{FF2B5EF4-FFF2-40B4-BE49-F238E27FC236}">
-                <a16:creationId xmlns:a16="http://schemas.microsoft.com/office/drawing/2014/main" id="{4251B779-5782-62AB-EF5A-1689D42E8607}"/>
-              </a:ext>
-            </a:extLst>
-          </p:cNvPr>
-          <p:cNvCxnSpPr/>
-          <p:nvPr/>
-        </p:nvCxnSpPr>
-        <p:spPr>
-          <a:xfrm>
-            <a:off x="5283200" y="4741333"/>
-            <a:ext cx="1930400" cy="0"/>
-          </a:xfrm>
-          <a:prstGeom prst="straightConnector1">
-            <a:avLst/>
-          </a:prstGeom>
-          <a:ln w="28575">
-            <a:headEnd type="triangle"/>
-            <a:tailEnd type="triangle"/>
-          </a:ln>
-        </p:spPr>
-        <p:style>
-          <a:lnRef idx="1">
-            <a:schemeClr val="accent1"/>
-          </a:lnRef>
-          <a:fillRef idx="0">
-            <a:schemeClr val="accent1"/>
-          </a:fillRef>
-          <a:effectRef idx="0">
-            <a:schemeClr val="accent1"/>
-          </a:effectRef>
-          <a:fontRef idx="minor">
-            <a:schemeClr val="tx1"/>
-          </a:fontRef>
-        </p:style>
-      </p:cxnSp>
-      <p:cxnSp>
-        <p:nvCxnSpPr>
-          <p:cNvPr id="12" name="Straight Arrow Connector 11">
-            <a:extLst>
-              <a:ext uri="{FF2B5EF4-FFF2-40B4-BE49-F238E27FC236}">
-                <a16:creationId xmlns:a16="http://schemas.microsoft.com/office/drawing/2014/main" id="{99A5919D-D89C-D771-B49D-57D20C3EA9D6}"/>
-              </a:ext>
-            </a:extLst>
-          </p:cNvPr>
-          <p:cNvCxnSpPr>
-            <a:cxnSpLocks/>
-          </p:cNvCxnSpPr>
-          <p:nvPr/>
-        </p:nvCxnSpPr>
-        <p:spPr>
-          <a:xfrm>
-            <a:off x="4267201" y="2946399"/>
-            <a:ext cx="3962399" cy="0"/>
-          </a:xfrm>
-          <a:prstGeom prst="straightConnector1">
-            <a:avLst/>
-          </a:prstGeom>
-          <a:ln w="28575">
-            <a:headEnd type="triangle"/>
-            <a:tailEnd type="triangle"/>
-          </a:ln>
-        </p:spPr>
-        <p:style>
-          <a:lnRef idx="1">
-            <a:schemeClr val="accent1"/>
-          </a:lnRef>
-          <a:fillRef idx="0">
-            <a:schemeClr val="accent1"/>
-          </a:fillRef>
-          <a:effectRef idx="0">
-            <a:schemeClr val="accent1"/>
-          </a:effectRef>
-          <a:fontRef idx="minor">
-            <a:schemeClr val="tx1"/>
-          </a:fontRef>
-        </p:style>
-      </p:cxnSp>
-      <p:sp>
-        <p:nvSpPr>
-          <p:cNvPr id="14" name="TextBox 13">
-            <a:extLst>
-              <a:ext uri="{FF2B5EF4-FFF2-40B4-BE49-F238E27FC236}">
-                <a16:creationId xmlns:a16="http://schemas.microsoft.com/office/drawing/2014/main" id="{DC05E2EB-CC66-E792-FE91-C7F6FF66FEB0}"/>
-              </a:ext>
-            </a:extLst>
-          </p:cNvPr>
-          <p:cNvSpPr txBox="1"/>
-          <p:nvPr/>
-        </p:nvSpPr>
-        <p:spPr>
-          <a:xfrm>
-            <a:off x="5890898" y="2473854"/>
-            <a:ext cx="715004" cy="369332"/>
-          </a:xfrm>
-          <a:prstGeom prst="rect">
-            <a:avLst/>
-          </a:prstGeom>
-          <a:noFill/>
-        </p:spPr>
-        <p:txBody>
-          <a:bodyPr wrap="none" rtlCol="0">
-            <a:spAutoFit/>
-          </a:bodyPr>
-          <a:lstStyle/>
-          <a:p>
-            <a:r>
-              <a:rPr lang="en-US" dirty="0"/>
-              <a:t>range</a:t>
-            </a:r>
-          </a:p>
-        </p:txBody>
-      </p:sp>
-      <p:sp>
-        <p:nvSpPr>
-          <p:cNvPr id="15" name="TextBox 14">
-            <a:extLst>
-              <a:ext uri="{FF2B5EF4-FFF2-40B4-BE49-F238E27FC236}">
-                <a16:creationId xmlns:a16="http://schemas.microsoft.com/office/drawing/2014/main" id="{427B8F54-2B58-134B-0684-97B1817A1CD3}"/>
-              </a:ext>
-            </a:extLst>
-          </p:cNvPr>
-          <p:cNvSpPr txBox="1"/>
-          <p:nvPr/>
-        </p:nvSpPr>
-        <p:spPr>
-          <a:xfrm>
-            <a:off x="5570041" y="4741333"/>
-            <a:ext cx="1356718" cy="646331"/>
-          </a:xfrm>
-          <a:prstGeom prst="rect">
-            <a:avLst/>
-          </a:prstGeom>
-          <a:noFill/>
-        </p:spPr>
-        <p:txBody>
-          <a:bodyPr wrap="none" rtlCol="0">
-            <a:spAutoFit/>
-          </a:bodyPr>
-          <a:lstStyle/>
-          <a:p>
-            <a:r>
-              <a:rPr lang="en-US" dirty="0"/>
-              <a:t>Interquartile</a:t>
-            </a:r>
-          </a:p>
-          <a:p>
-            <a:pPr algn="ctr"/>
-            <a:r>
-              <a:rPr lang="en-US" dirty="0"/>
-              <a:t>range</a:t>
-            </a:r>
+            <a:endParaRPr lang="en-US" dirty="0"/>
           </a:p>
         </p:txBody>
       </p:sp>
     </p:spTree>
     <p:extLst>
       <p:ext uri="{BB962C8B-B14F-4D97-AF65-F5344CB8AC3E}">
-        <p14:creationId xmlns:p14="http://schemas.microsoft.com/office/powerpoint/2010/main" val="3410868396"/>
+        <p14:creationId xmlns:p14="http://schemas.microsoft.com/office/powerpoint/2010/main" val="2749560103"/>
       </p:ext>
     </p:extLst>
   </p:cSld>
@@ -8601,7 +9395,7 @@
         <p:cNvPr id="1" name="">
           <a:extLst>
             <a:ext uri="{FF2B5EF4-FFF2-40B4-BE49-F238E27FC236}">
-              <a16:creationId xmlns:a16="http://schemas.microsoft.com/office/drawing/2014/main" id="{953095F8-A5E1-1DE8-FD64-3EEB50F8AE03}"/>
+              <a16:creationId xmlns:a16="http://schemas.microsoft.com/office/drawing/2014/main" id="{6BF54927-97FF-95D3-C621-F0E4139BE244}"/>
             </a:ext>
           </a:extLst>
         </p:cNvPr>
@@ -8621,7 +9415,7 @@
           <p:cNvPr id="2" name="Title 1">
             <a:extLst>
               <a:ext uri="{FF2B5EF4-FFF2-40B4-BE49-F238E27FC236}">
-                <a16:creationId xmlns:a16="http://schemas.microsoft.com/office/drawing/2014/main" id="{BD81AD4A-0E19-28D1-0B5B-9B437A95405C}"/>
+                <a16:creationId xmlns:a16="http://schemas.microsoft.com/office/drawing/2014/main" id="{4F5584F3-3710-27AD-E0A2-0B8302CC0025}"/>
               </a:ext>
             </a:extLst>
           </p:cNvPr>
@@ -8646,123 +9440,10 @@
       </p:sp>
       <p:sp>
         <p:nvSpPr>
-          <p:cNvPr id="3" name="Content Placeholder 2">
-            <a:extLst>
-              <a:ext uri="{FF2B5EF4-FFF2-40B4-BE49-F238E27FC236}">
-                <a16:creationId xmlns:a16="http://schemas.microsoft.com/office/drawing/2014/main" id="{263FF8F0-D580-9E75-FD88-42E4D8EF06CD}"/>
-              </a:ext>
-            </a:extLst>
-          </p:cNvPr>
-          <p:cNvSpPr>
-            <a:spLocks noGrp="1"/>
-          </p:cNvSpPr>
-          <p:nvPr>
-            <p:ph idx="1"/>
-          </p:nvPr>
-        </p:nvSpPr>
-        <p:spPr/>
-        <p:txBody>
-          <a:bodyPr>
-            <a:normAutofit/>
-          </a:bodyPr>
-          <a:lstStyle/>
-          <a:p>
-            <a:r>
-              <a:rPr lang="en-US" dirty="0">
-                <a:solidFill>
-                  <a:schemeClr val="bg2">
-                    <a:lumMod val="75000"/>
-                  </a:schemeClr>
-                </a:solidFill>
-              </a:rPr>
-              <a:t>Range: distance between the smallest and largest values.</a:t>
-            </a:r>
-          </a:p>
-          <a:p>
-            <a:pPr lvl="1"/>
-            <a:r>
-              <a:rPr lang="en-US" dirty="0">
-                <a:solidFill>
-                  <a:schemeClr val="bg2">
-                    <a:lumMod val="75000"/>
-                  </a:schemeClr>
-                </a:solidFill>
-              </a:rPr>
-              <a:t>Sensitive to outliers</a:t>
-            </a:r>
-          </a:p>
-          <a:p>
-            <a:pPr lvl="1"/>
-            <a:endParaRPr lang="en-US" dirty="0">
-              <a:solidFill>
-                <a:schemeClr val="bg2">
-                  <a:lumMod val="75000"/>
-                </a:schemeClr>
-              </a:solidFill>
-            </a:endParaRPr>
-          </a:p>
-          <a:p>
-            <a:r>
-              <a:rPr lang="en-US" dirty="0">
-                <a:solidFill>
-                  <a:schemeClr val="bg2">
-                    <a:lumMod val="75000"/>
-                  </a:schemeClr>
-                </a:solidFill>
-              </a:rPr>
-              <a:t>IQR: spread of the middle 50% of the data.</a:t>
-            </a:r>
-          </a:p>
-          <a:p>
-            <a:pPr lvl="1"/>
-            <a:r>
-              <a:rPr lang="en-US" dirty="0">
-                <a:solidFill>
-                  <a:schemeClr val="bg2">
-                    <a:lumMod val="75000"/>
-                  </a:schemeClr>
-                </a:solidFill>
-              </a:rPr>
-              <a:t>Removes outliers</a:t>
-            </a:r>
-          </a:p>
-          <a:p>
-            <a:pPr marL="457200" lvl="1" indent="0">
-              <a:buNone/>
-            </a:pPr>
-            <a:endParaRPr lang="en-US" dirty="0"/>
-          </a:p>
-          <a:p>
-            <a:r>
-              <a:rPr lang="en-US" dirty="0"/>
-              <a:t>Standard Deviation: Typical deviation from the mean</a:t>
-            </a:r>
-          </a:p>
-          <a:p>
-            <a:pPr lvl="1"/>
-            <a:r>
-              <a:rPr lang="en-US" dirty="0"/>
-              <a:t>square root of variance</a:t>
-            </a:r>
-          </a:p>
-          <a:p>
-            <a:pPr lvl="1"/>
-            <a:r>
-              <a:rPr lang="en-US" dirty="0"/>
-              <a:t>Same units as the data</a:t>
-            </a:r>
-          </a:p>
-          <a:p>
-            <a:endParaRPr lang="en-US" dirty="0"/>
-          </a:p>
-        </p:txBody>
-      </p:sp>
-      <p:sp>
-        <p:nvSpPr>
           <p:cNvPr id="4" name="Slide Number Placeholder 3">
             <a:extLst>
               <a:ext uri="{FF2B5EF4-FFF2-40B4-BE49-F238E27FC236}">
-                <a16:creationId xmlns:a16="http://schemas.microsoft.com/office/drawing/2014/main" id="{9B7FE7D7-7926-F0EC-AE70-FB839BCBA4C3}"/>
+                <a16:creationId xmlns:a16="http://schemas.microsoft.com/office/drawing/2014/main" id="{3AD25D38-C79D-439B-8A38-47D18B38C6C7}"/>
               </a:ext>
             </a:extLst>
           </p:cNvPr>
@@ -8787,10 +9468,121 @@
           </a:p>
         </p:txBody>
       </p:sp>
+      <p:pic>
+        <p:nvPicPr>
+          <p:cNvPr id="5" name="Content Placeholder 4">
+            <a:extLst>
+              <a:ext uri="{FF2B5EF4-FFF2-40B4-BE49-F238E27FC236}">
+                <a16:creationId xmlns:a16="http://schemas.microsoft.com/office/drawing/2014/main" id="{DC2D5ECF-FC98-FDE8-E520-AA491C782B23}"/>
+              </a:ext>
+            </a:extLst>
+          </p:cNvPr>
+          <p:cNvPicPr>
+            <a:picLocks noGrp="1" noChangeAspect="1"/>
+          </p:cNvPicPr>
+          <p:nvPr>
+            <p:ph idx="1"/>
+          </p:nvPr>
+        </p:nvPicPr>
+        <p:blipFill>
+          <a:blip r:embed="rId3"/>
+          <a:stretch>
+            <a:fillRect/>
+          </a:stretch>
+        </p:blipFill>
+        <p:spPr>
+          <a:xfrm>
+            <a:off x="2547138" y="1441450"/>
+            <a:ext cx="7097724" cy="4735513"/>
+          </a:xfrm>
+          <a:prstGeom prst="rect">
+            <a:avLst/>
+          </a:prstGeom>
+        </p:spPr>
+      </p:pic>
+      <p:sp>
+        <p:nvSpPr>
+          <p:cNvPr id="6" name="TextBox 5">
+            <a:extLst>
+              <a:ext uri="{FF2B5EF4-FFF2-40B4-BE49-F238E27FC236}">
+                <a16:creationId xmlns:a16="http://schemas.microsoft.com/office/drawing/2014/main" id="{2C8EE3BC-1057-F8D4-9D09-84834D662EEB}"/>
+              </a:ext>
+            </a:extLst>
+          </p:cNvPr>
+          <p:cNvSpPr txBox="1"/>
+          <p:nvPr/>
+        </p:nvSpPr>
+        <p:spPr>
+          <a:xfrm>
+            <a:off x="5719134" y="6189663"/>
+            <a:ext cx="753732" cy="369332"/>
+          </a:xfrm>
+          <a:prstGeom prst="rect">
+            <a:avLst/>
+          </a:prstGeom>
+          <a:noFill/>
+        </p:spPr>
+        <p:txBody>
+          <a:bodyPr wrap="none" rtlCol="0">
+            <a:spAutoFit/>
+          </a:bodyPr>
+          <a:lstStyle/>
+          <a:p>
+            <a:r>
+              <a:rPr lang="en-US" dirty="0">
+                <a:solidFill>
+                  <a:srgbClr val="FF0000"/>
+                </a:solidFill>
+              </a:rPr>
+              <a:t>mean</a:t>
+            </a:r>
+          </a:p>
+        </p:txBody>
+      </p:sp>
+      <p:sp>
+        <p:nvSpPr>
+          <p:cNvPr id="7" name="TextBox 6">
+            <a:extLst>
+              <a:ext uri="{FF2B5EF4-FFF2-40B4-BE49-F238E27FC236}">
+                <a16:creationId xmlns:a16="http://schemas.microsoft.com/office/drawing/2014/main" id="{EE79A5ED-E47F-CCEE-205C-439E62F9D115}"/>
+              </a:ext>
+            </a:extLst>
+          </p:cNvPr>
+          <p:cNvSpPr txBox="1"/>
+          <p:nvPr/>
+        </p:nvSpPr>
+        <p:spPr>
+          <a:xfrm>
+            <a:off x="5508691" y="1105850"/>
+            <a:ext cx="1174617" cy="369332"/>
+          </a:xfrm>
+          <a:prstGeom prst="rect">
+            <a:avLst/>
+          </a:prstGeom>
+          <a:noFill/>
+        </p:spPr>
+        <p:txBody>
+          <a:bodyPr wrap="none" rtlCol="0">
+            <a:spAutoFit/>
+          </a:bodyPr>
+          <a:lstStyle/>
+          <a:p>
+            <a:pPr algn="ctr"/>
+            <a:r>
+              <a:rPr lang="en-US" dirty="0">
+                <a:solidFill>
+                  <a:srgbClr val="FF0000"/>
+                </a:solidFill>
+              </a:rPr>
+              <a:t>Deviation </a:t>
+            </a:r>
+          </a:p>
+        </p:txBody>
+      </p:sp>
     </p:spTree>
     <p:extLst>
       <p:ext uri="{BB962C8B-B14F-4D97-AF65-F5344CB8AC3E}">
-        <p14:creationId xmlns:p14="http://schemas.microsoft.com/office/powerpoint/2010/main" val="2749560103"/>
+        <p14:creationId xmlns:p14="http://schemas.microsoft.com/office/powerpoint/2010/main" val="1659471624"/>
       </p:ext>
     </p:extLst>
   </p:cSld>
@@ -8801,6 +9593,250 @@
 </file>
 
 <file path=ppt/slides/slide12.xml><?xml version="1.0" encoding="utf-8"?>
+<p:sld xmlns:a="http://schemas.openxmlformats.org/drawingml/2006/main" xmlns:r="http://schemas.openxmlformats.org/officeDocument/2006/relationships" xmlns:p="http://schemas.openxmlformats.org/presentationml/2006/main">
+  <p:cSld>
+    <p:spTree>
+      <p:nvGrpSpPr>
+        <p:cNvPr id="1" name="">
+          <a:extLst>
+            <a:ext uri="{FF2B5EF4-FFF2-40B4-BE49-F238E27FC236}">
+              <a16:creationId xmlns:a16="http://schemas.microsoft.com/office/drawing/2014/main" id="{ECCDC9A6-C360-F240-0097-BBA3F79E1A55}"/>
+            </a:ext>
+          </a:extLst>
+        </p:cNvPr>
+        <p:cNvGrpSpPr/>
+        <p:nvPr/>
+      </p:nvGrpSpPr>
+      <p:grpSpPr>
+        <a:xfrm>
+          <a:off x="0" y="0"/>
+          <a:ext cx="0" cy="0"/>
+          <a:chOff x="0" y="0"/>
+          <a:chExt cx="0" cy="0"/>
+        </a:xfrm>
+      </p:grpSpPr>
+      <p:sp>
+        <p:nvSpPr>
+          <p:cNvPr id="4" name="Slide Number Placeholder 3">
+            <a:extLst>
+              <a:ext uri="{FF2B5EF4-FFF2-40B4-BE49-F238E27FC236}">
+                <a16:creationId xmlns:a16="http://schemas.microsoft.com/office/drawing/2014/main" id="{9F392EF3-DD2F-400F-BBD3-44ED1D5DEDA6}"/>
+              </a:ext>
+            </a:extLst>
+          </p:cNvPr>
+          <p:cNvSpPr>
+            <a:spLocks noGrp="1"/>
+          </p:cNvSpPr>
+          <p:nvPr>
+            <p:ph type="sldNum" sz="quarter" idx="11"/>
+          </p:nvPr>
+        </p:nvSpPr>
+        <p:spPr/>
+        <p:txBody>
+          <a:bodyPr/>
+          <a:lstStyle/>
+          <a:p>
+            <a:fld id="{45C00377-489B-40EC-B059-26BDDD2E89B9}" type="slidenum">
+              <a:rPr lang="en-US" smtClean="0"/>
+              <a:pPr/>
+              <a:t>12</a:t>
+            </a:fld>
+            <a:endParaRPr lang="en-US"/>
+          </a:p>
+        </p:txBody>
+      </p:sp>
+      <p:sp>
+        <p:nvSpPr>
+          <p:cNvPr id="2" name="Title 1">
+            <a:extLst>
+              <a:ext uri="{FF2B5EF4-FFF2-40B4-BE49-F238E27FC236}">
+                <a16:creationId xmlns:a16="http://schemas.microsoft.com/office/drawing/2014/main" id="{17910A00-46DF-0043-C9B1-82467EFD3DB4}"/>
+              </a:ext>
+            </a:extLst>
+          </p:cNvPr>
+          <p:cNvSpPr>
+            <a:spLocks noGrp="1"/>
+          </p:cNvSpPr>
+          <p:nvPr>
+            <p:ph type="title"/>
+          </p:nvPr>
+        </p:nvSpPr>
+        <p:spPr/>
+        <p:txBody>
+          <a:bodyPr>
+            <a:normAutofit fontScale="90000"/>
+          </a:bodyPr>
+          <a:lstStyle/>
+          <a:p>
+            <a:r>
+              <a:rPr lang="en-US" dirty="0"/>
+              <a:t>Distribution in data</a:t>
+            </a:r>
+          </a:p>
+        </p:txBody>
+      </p:sp>
+    </p:spTree>
+    <p:extLst>
+      <p:ext uri="{BB962C8B-B14F-4D97-AF65-F5344CB8AC3E}">
+        <p14:creationId xmlns:p14="http://schemas.microsoft.com/office/powerpoint/2010/main" val="236711030"/>
+      </p:ext>
+    </p:extLst>
+  </p:cSld>
+  <p:clrMapOvr>
+    <a:masterClrMapping/>
+  </p:clrMapOvr>
+</p:sld>
+</file>
+
+<file path=ppt/slides/slide13.xml><?xml version="1.0" encoding="utf-8"?>
+<p:sld xmlns:a="http://schemas.openxmlformats.org/drawingml/2006/main" xmlns:r="http://schemas.openxmlformats.org/officeDocument/2006/relationships" xmlns:p="http://schemas.openxmlformats.org/presentationml/2006/main">
+  <p:cSld>
+    <p:spTree>
+      <p:nvGrpSpPr>
+        <p:cNvPr id="1" name="">
+          <a:extLst>
+            <a:ext uri="{FF2B5EF4-FFF2-40B4-BE49-F238E27FC236}">
+              <a16:creationId xmlns:a16="http://schemas.microsoft.com/office/drawing/2014/main" id="{9A597CCB-9A6A-A551-5084-FC1FFF3DAF20}"/>
+            </a:ext>
+          </a:extLst>
+        </p:cNvPr>
+        <p:cNvGrpSpPr/>
+        <p:nvPr/>
+      </p:nvGrpSpPr>
+      <p:grpSpPr>
+        <a:xfrm>
+          <a:off x="0" y="0"/>
+          <a:ext cx="0" cy="0"/>
+          <a:chOff x="0" y="0"/>
+          <a:chExt cx="0" cy="0"/>
+        </a:xfrm>
+      </p:grpSpPr>
+      <p:sp>
+        <p:nvSpPr>
+          <p:cNvPr id="2" name="Title 1">
+            <a:extLst>
+              <a:ext uri="{FF2B5EF4-FFF2-40B4-BE49-F238E27FC236}">
+                <a16:creationId xmlns:a16="http://schemas.microsoft.com/office/drawing/2014/main" id="{0A403DBF-1B2C-03CD-CF30-769EEDF512F5}"/>
+              </a:ext>
+            </a:extLst>
+          </p:cNvPr>
+          <p:cNvSpPr>
+            <a:spLocks noGrp="1"/>
+          </p:cNvSpPr>
+          <p:nvPr>
+            <p:ph type="title"/>
+          </p:nvPr>
+        </p:nvSpPr>
+        <p:spPr/>
+        <p:txBody>
+          <a:bodyPr/>
+          <a:lstStyle/>
+          <a:p>
+            <a:r>
+              <a:rPr lang="en-US" dirty="0"/>
+              <a:t>Understanding Distributions</a:t>
+            </a:r>
+          </a:p>
+        </p:txBody>
+      </p:sp>
+      <p:sp>
+        <p:nvSpPr>
+          <p:cNvPr id="3" name="Content Placeholder 2">
+            <a:extLst>
+              <a:ext uri="{FF2B5EF4-FFF2-40B4-BE49-F238E27FC236}">
+                <a16:creationId xmlns:a16="http://schemas.microsoft.com/office/drawing/2014/main" id="{4A2BB526-8B3E-238A-9D1C-BAE6F198FFA5}"/>
+              </a:ext>
+            </a:extLst>
+          </p:cNvPr>
+          <p:cNvSpPr>
+            <a:spLocks noGrp="1"/>
+          </p:cNvSpPr>
+          <p:nvPr>
+            <p:ph idx="1"/>
+          </p:nvPr>
+        </p:nvSpPr>
+        <p:spPr>
+          <a:xfrm>
+            <a:off x="838199" y="1441938"/>
+            <a:ext cx="10515599" cy="4735025"/>
+          </a:xfrm>
+        </p:spPr>
+        <p:txBody>
+          <a:bodyPr>
+            <a:normAutofit/>
+          </a:bodyPr>
+          <a:lstStyle/>
+          <a:p>
+            <a:pPr lvl="0"/>
+            <a:r>
+              <a:rPr lang="en-US" dirty="0"/>
+              <a:t>The Normal Distribution (Bell Curve):</a:t>
+            </a:r>
+          </a:p>
+          <a:p>
+            <a:pPr lvl="1"/>
+            <a:r>
+              <a:rPr lang="en-US" dirty="0"/>
+              <a:t>Many biological and physical traits roughly approximate a normal distribution </a:t>
+            </a:r>
+          </a:p>
+          <a:p>
+            <a:pPr lvl="1"/>
+            <a:endParaRPr lang="en-US" dirty="0"/>
+          </a:p>
+          <a:p>
+            <a:pPr lvl="1"/>
+            <a:endParaRPr lang="en-US" dirty="0"/>
+          </a:p>
+          <a:p>
+            <a:endParaRPr lang="en-US" dirty="0"/>
+          </a:p>
+        </p:txBody>
+      </p:sp>
+      <p:pic>
+        <p:nvPicPr>
+          <p:cNvPr id="4" name="Picture 3" descr="Human Height | Our World in Data">
+            <a:extLst>
+              <a:ext uri="{FF2B5EF4-FFF2-40B4-BE49-F238E27FC236}">
+                <a16:creationId xmlns:a16="http://schemas.microsoft.com/office/drawing/2014/main" id="{91777DA0-2CCE-59ED-8919-07A1339C5AA7}"/>
+              </a:ext>
+            </a:extLst>
+          </p:cNvPr>
+          <p:cNvPicPr>
+            <a:picLocks noChangeAspect="1"/>
+          </p:cNvPicPr>
+          <p:nvPr/>
+        </p:nvPicPr>
+        <p:blipFill>
+          <a:blip r:embed="rId2"/>
+          <a:stretch>
+            <a:fillRect/>
+          </a:stretch>
+        </p:blipFill>
+        <p:spPr>
+          <a:xfrm>
+            <a:off x="3812685" y="2800471"/>
+            <a:ext cx="4919345" cy="3692403"/>
+          </a:xfrm>
+          <a:prstGeom prst="rect">
+            <a:avLst/>
+          </a:prstGeom>
+        </p:spPr>
+      </p:pic>
+    </p:spTree>
+    <p:extLst>
+      <p:ext uri="{BB962C8B-B14F-4D97-AF65-F5344CB8AC3E}">
+        <p14:creationId xmlns:p14="http://schemas.microsoft.com/office/powerpoint/2010/main" val="1375167878"/>
+      </p:ext>
+    </p:extLst>
+  </p:cSld>
+  <p:clrMapOvr>
+    <a:masterClrMapping/>
+  </p:clrMapOvr>
+</p:sld>
+</file>
+
+<file path=ppt/slides/slide14.xml><?xml version="1.0" encoding="utf-8"?>
 <p:sld xmlns:a="http://schemas.openxmlformats.org/drawingml/2006/main" xmlns:r="http://schemas.openxmlformats.org/officeDocument/2006/relationships" xmlns:p="http://schemas.openxmlformats.org/presentationml/2006/main">
   <p:cSld>
     <p:spTree>
@@ -8863,8 +9899,8 @@
         </p:nvSpPr>
         <p:spPr>
           <a:xfrm>
-            <a:off x="838200" y="1441938"/>
-            <a:ext cx="6549736" cy="4735025"/>
+            <a:off x="838199" y="1441938"/>
+            <a:ext cx="10515599" cy="4735025"/>
           </a:xfrm>
         </p:spPr>
         <p:txBody>
@@ -8887,13 +9923,6 @@
             </a:r>
           </a:p>
           <a:p>
-            <a:pPr lvl="2"/>
-            <a:r>
-              <a:rPr lang="en-US" dirty="0"/>
-              <a:t>heights, weights, etc.</a:t>
-            </a:r>
-          </a:p>
-          <a:p>
             <a:pPr lvl="1"/>
             <a:r>
               <a:rPr lang="en-US" dirty="0"/>
@@ -8903,24 +9932,6 @@
           <a:p>
             <a:pPr lvl="1"/>
             <a:endParaRPr lang="en-US" dirty="0"/>
-          </a:p>
-          <a:p>
-            <a:pPr lvl="1"/>
-            <a:endParaRPr lang="en-US" dirty="0"/>
-          </a:p>
-          <a:p>
-            <a:pPr lvl="0"/>
-            <a:r>
-              <a:rPr lang="en-US" dirty="0"/>
-              <a:t>The Reality of Sports:</a:t>
-            </a:r>
-          </a:p>
-          <a:p>
-            <a:pPr lvl="1"/>
-            <a:r>
-              <a:rPr lang="en-US" dirty="0"/>
-              <a:t>Most performance metrics are not perfectly normal! </a:t>
-            </a:r>
           </a:p>
           <a:p>
             <a:endParaRPr lang="en-US" dirty="0"/>
@@ -8949,8 +9960,8 @@
         </p:blipFill>
         <p:spPr>
           <a:xfrm>
-            <a:off x="7644912" y="2042908"/>
-            <a:ext cx="4155030" cy="2772184"/>
+            <a:off x="3867917" y="3367987"/>
+            <a:ext cx="4456166" cy="2973098"/>
           </a:xfrm>
           <a:prstGeom prst="rect">
             <a:avLst/>
@@ -8970,7 +9981,196 @@
 </p:sld>
 </file>
 
-<file path=ppt/slides/slide13.xml><?xml version="1.0" encoding="utf-8"?>
+<file path=ppt/slides/slide15.xml><?xml version="1.0" encoding="utf-8"?>
+<p:sld xmlns:a="http://schemas.openxmlformats.org/drawingml/2006/main" xmlns:r="http://schemas.openxmlformats.org/officeDocument/2006/relationships" xmlns:p="http://schemas.openxmlformats.org/presentationml/2006/main">
+  <p:cSld>
+    <p:spTree>
+      <p:nvGrpSpPr>
+        <p:cNvPr id="1" name="">
+          <a:extLst>
+            <a:ext uri="{FF2B5EF4-FFF2-40B4-BE49-F238E27FC236}">
+              <a16:creationId xmlns:a16="http://schemas.microsoft.com/office/drawing/2014/main" id="{64D26051-5506-EA7F-E67F-8B839387A67A}"/>
+            </a:ext>
+          </a:extLst>
+        </p:cNvPr>
+        <p:cNvGrpSpPr/>
+        <p:nvPr/>
+      </p:nvGrpSpPr>
+      <p:grpSpPr>
+        <a:xfrm>
+          <a:off x="0" y="0"/>
+          <a:ext cx="0" cy="0"/>
+          <a:chOff x="0" y="0"/>
+          <a:chExt cx="0" cy="0"/>
+        </a:xfrm>
+      </p:grpSpPr>
+      <p:sp>
+        <p:nvSpPr>
+          <p:cNvPr id="2" name="Title 1">
+            <a:extLst>
+              <a:ext uri="{FF2B5EF4-FFF2-40B4-BE49-F238E27FC236}">
+                <a16:creationId xmlns:a16="http://schemas.microsoft.com/office/drawing/2014/main" id="{450A422D-2E5E-3A5F-E0E6-964227428BD2}"/>
+              </a:ext>
+            </a:extLst>
+          </p:cNvPr>
+          <p:cNvSpPr>
+            <a:spLocks noGrp="1"/>
+          </p:cNvSpPr>
+          <p:nvPr>
+            <p:ph type="title"/>
+          </p:nvPr>
+        </p:nvSpPr>
+        <p:spPr/>
+        <p:txBody>
+          <a:bodyPr/>
+          <a:lstStyle/>
+          <a:p>
+            <a:r>
+              <a:rPr lang="en-US" dirty="0"/>
+              <a:t>Distribution in Sports</a:t>
+            </a:r>
+          </a:p>
+        </p:txBody>
+      </p:sp>
+      <p:sp>
+        <p:nvSpPr>
+          <p:cNvPr id="3" name="Content Placeholder 2">
+            <a:extLst>
+              <a:ext uri="{FF2B5EF4-FFF2-40B4-BE49-F238E27FC236}">
+                <a16:creationId xmlns:a16="http://schemas.microsoft.com/office/drawing/2014/main" id="{13BD846C-99C1-C619-97FD-5A2666C8C056}"/>
+              </a:ext>
+            </a:extLst>
+          </p:cNvPr>
+          <p:cNvSpPr>
+            <a:spLocks noGrp="1"/>
+          </p:cNvSpPr>
+          <p:nvPr>
+            <p:ph idx="1"/>
+          </p:nvPr>
+        </p:nvSpPr>
+        <p:spPr>
+          <a:xfrm>
+            <a:off x="838199" y="1441938"/>
+            <a:ext cx="10515599" cy="4735025"/>
+          </a:xfrm>
+        </p:spPr>
+        <p:txBody>
+          <a:bodyPr>
+            <a:normAutofit/>
+          </a:bodyPr>
+          <a:lstStyle/>
+          <a:p>
+            <a:pPr lvl="0"/>
+            <a:r>
+              <a:rPr lang="en-US" dirty="0"/>
+              <a:t>Data in sports often not-normal</a:t>
+            </a:r>
+          </a:p>
+          <a:p>
+            <a:pPr lvl="1"/>
+            <a:endParaRPr lang="en-US" dirty="0"/>
+          </a:p>
+          <a:p>
+            <a:endParaRPr lang="en-US" dirty="0"/>
+          </a:p>
+        </p:txBody>
+      </p:sp>
+      <p:pic>
+        <p:nvPicPr>
+          <p:cNvPr id="5" name="Picture 4">
+            <a:extLst>
+              <a:ext uri="{FF2B5EF4-FFF2-40B4-BE49-F238E27FC236}">
+                <a16:creationId xmlns:a16="http://schemas.microsoft.com/office/drawing/2014/main" id="{FE158035-1533-0014-B6A6-C7B3C9C8EAC2}"/>
+              </a:ext>
+            </a:extLst>
+          </p:cNvPr>
+          <p:cNvPicPr>
+            <a:picLocks noChangeAspect="1"/>
+          </p:cNvPicPr>
+          <p:nvPr/>
+        </p:nvPicPr>
+        <p:blipFill>
+          <a:blip r:embed="rId2"/>
+          <a:stretch>
+            <a:fillRect/>
+          </a:stretch>
+        </p:blipFill>
+        <p:spPr>
+          <a:xfrm>
+            <a:off x="3571008" y="2807678"/>
+            <a:ext cx="5049983" cy="3369285"/>
+          </a:xfrm>
+          <a:prstGeom prst="rect">
+            <a:avLst/>
+          </a:prstGeom>
+        </p:spPr>
+      </p:pic>
+      <p:sp>
+        <p:nvSpPr>
+          <p:cNvPr id="4" name="Rectangle 3">
+            <a:extLst>
+              <a:ext uri="{FF2B5EF4-FFF2-40B4-BE49-F238E27FC236}">
+                <a16:creationId xmlns:a16="http://schemas.microsoft.com/office/drawing/2014/main" id="{94B83893-CB97-CAD3-9101-1915466DBDFA}"/>
+              </a:ext>
+            </a:extLst>
+          </p:cNvPr>
+          <p:cNvSpPr/>
+          <p:nvPr/>
+        </p:nvSpPr>
+        <p:spPr>
+          <a:xfrm>
+            <a:off x="6972301" y="5014913"/>
+            <a:ext cx="1648690" cy="1162050"/>
+          </a:xfrm>
+          <a:prstGeom prst="rect">
+            <a:avLst/>
+          </a:prstGeom>
+          <a:noFill/>
+          <a:ln w="38100">
+            <a:solidFill>
+              <a:srgbClr val="FF0000"/>
+            </a:solidFill>
+          </a:ln>
+        </p:spPr>
+        <p:style>
+          <a:lnRef idx="2">
+            <a:schemeClr val="accent1">
+              <a:shade val="15000"/>
+            </a:schemeClr>
+          </a:lnRef>
+          <a:fillRef idx="1">
+            <a:schemeClr val="accent1"/>
+          </a:fillRef>
+          <a:effectRef idx="0">
+            <a:schemeClr val="accent1"/>
+          </a:effectRef>
+          <a:fontRef idx="minor">
+            <a:schemeClr val="lt1"/>
+          </a:fontRef>
+        </p:style>
+        <p:txBody>
+          <a:bodyPr rtlCol="0" anchor="ctr"/>
+          <a:lstStyle/>
+          <a:p>
+            <a:pPr algn="ctr"/>
+            <a:endParaRPr lang="en-US"/>
+          </a:p>
+        </p:txBody>
+      </p:sp>
+    </p:spTree>
+    <p:extLst>
+      <p:ext uri="{BB962C8B-B14F-4D97-AF65-F5344CB8AC3E}">
+        <p14:creationId xmlns:p14="http://schemas.microsoft.com/office/powerpoint/2010/main" val="1713279387"/>
+      </p:ext>
+    </p:extLst>
+  </p:cSld>
+  <p:clrMapOvr>
+    <a:masterClrMapping/>
+  </p:clrMapOvr>
+</p:sld>
+</file>
+
+<file path=ppt/slides/slide16.xml><?xml version="1.0" encoding="utf-8"?>
 <p:sld xmlns:a="http://schemas.openxmlformats.org/drawingml/2006/main" xmlns:r="http://schemas.openxmlformats.org/officeDocument/2006/relationships" xmlns:p="http://schemas.openxmlformats.org/presentationml/2006/main">
   <p:cSld>
     <p:spTree>
@@ -9051,14 +10251,7 @@
           </a:p>
           <a:p>
             <a:pPr lvl="1"/>
-            <a:r>
-              <a:rPr lang="en-US" i="1" dirty="0"/>
-              <a:t>Examples:</a:t>
-            </a:r>
-            <a:r>
-              <a:rPr lang="en-US" dirty="0"/>
-              <a:t> Goals scored per match, career home runs, yellow cards.</a:t>
-            </a:r>
+            <a:endParaRPr lang="en-US" i="1" dirty="0"/>
           </a:p>
           <a:p>
             <a:pPr lvl="0"/>
@@ -9076,14 +10269,7 @@
           </a:p>
           <a:p>
             <a:pPr lvl="1"/>
-            <a:r>
-              <a:rPr lang="en-US" i="1" dirty="0"/>
-              <a:t>Examples:</a:t>
-            </a:r>
-            <a:r>
-              <a:rPr lang="en-US" dirty="0"/>
-              <a:t> Passing completion percentages for elite quarterbacks, free-throw percentages.</a:t>
-            </a:r>
+            <a:endParaRPr lang="en-US" i="1" dirty="0"/>
           </a:p>
           <a:p>
             <a:endParaRPr lang="en-US" dirty="0"/>
@@ -9105,7 +10291,7 @@
           <p:nvPr/>
         </p:nvPicPr>
         <p:blipFill rotWithShape="1">
-          <a:blip r:embed="rId2">
+          <a:blip r:embed="rId3">
             <a:extLst>
               <a:ext uri="{28A0092B-C50C-407E-A947-70E740481C1C}">
                 <a14:useLocalDpi xmlns:a14="http://schemas.microsoft.com/office/drawing/2010/main" val="0"/>
@@ -9119,8 +10305,8 @@
         </p:blipFill>
         <p:spPr bwMode="auto">
           <a:xfrm>
-            <a:off x="3906596" y="4742056"/>
-            <a:ext cx="4378807" cy="2012035"/>
+            <a:off x="3606559" y="4225914"/>
+            <a:ext cx="5180254" cy="2380295"/>
           </a:xfrm>
           <a:prstGeom prst="rect">
             <a:avLst/>
@@ -9150,7 +10336,7 @@
 </p:sld>
 </file>
 
-<file path=ppt/slides/slide14.xml><?xml version="1.0" encoding="utf-8"?>
+<file path=ppt/slides/slide17.xml><?xml version="1.0" encoding="utf-8"?>
 <p:sld xmlns:a="http://schemas.openxmlformats.org/drawingml/2006/main" xmlns:r="http://schemas.openxmlformats.org/officeDocument/2006/relationships" xmlns:p="http://schemas.openxmlformats.org/presentationml/2006/main">
   <p:cSld>
     <p:spTree>
@@ -9197,7 +10383,7 @@
             <a:fld id="{45C00377-489B-40EC-B059-26BDDD2E89B9}" type="slidenum">
               <a:rPr lang="en-US" smtClean="0"/>
               <a:pPr/>
-              <a:t>14</a:t>
+              <a:t>17</a:t>
             </a:fld>
             <a:endParaRPr lang="en-US"/>
           </a:p>
@@ -9228,7 +10414,7 @@
           <a:p>
             <a:r>
               <a:rPr lang="en-US" dirty="0"/>
-              <a:t>Grouped summary</a:t>
+              <a:t>Measuring center in non-normal data</a:t>
             </a:r>
           </a:p>
         </p:txBody>
@@ -9246,7 +10432,7 @@
 </p:sld>
 </file>
 
-<file path=ppt/slides/slide15.xml><?xml version="1.0" encoding="utf-8"?>
+<file path=ppt/slides/slide18.xml><?xml version="1.0" encoding="utf-8"?>
 <p:sld xmlns:a="http://schemas.openxmlformats.org/drawingml/2006/main" xmlns:r="http://schemas.openxmlformats.org/officeDocument/2006/relationships" xmlns:p="http://schemas.openxmlformats.org/presentationml/2006/main">
   <p:cSld>
     <p:spTree>
@@ -9268,7 +10454,7 @@
           <p:cNvPr id="2" name="Title 1">
             <a:extLst>
               <a:ext uri="{FF2B5EF4-FFF2-40B4-BE49-F238E27FC236}">
-                <a16:creationId xmlns:a16="http://schemas.microsoft.com/office/drawing/2014/main" id="{A13B7130-5B81-B62D-BA4D-505C3745BDE8}"/>
+                <a16:creationId xmlns:a16="http://schemas.microsoft.com/office/drawing/2014/main" id="{0F5C5114-2493-6C4D-FCE6-E9E71FC2B4DB}"/>
               </a:ext>
             </a:extLst>
           </p:cNvPr>
@@ -9286,78 +10472,94 @@
           <a:p>
             <a:r>
               <a:rPr lang="en-US" dirty="0"/>
-              <a:t>Grouped summary statistics</a:t>
-            </a:r>
-          </a:p>
-        </p:txBody>
-      </p:sp>
-      <p:sp>
-        <p:nvSpPr>
-          <p:cNvPr id="3" name="Content Placeholder 2">
-            <a:extLst>
-              <a:ext uri="{FF2B5EF4-FFF2-40B4-BE49-F238E27FC236}">
-                <a16:creationId xmlns:a16="http://schemas.microsoft.com/office/drawing/2014/main" id="{35B77547-6F10-4E09-A289-6D75BEBD3D06}"/>
-              </a:ext>
-            </a:extLst>
-          </p:cNvPr>
-          <p:cNvSpPr>
-            <a:spLocks noGrp="1"/>
-          </p:cNvSpPr>
+              <a:t>The center in symmetric data</a:t>
+            </a:r>
+          </a:p>
+        </p:txBody>
+      </p:sp>
+      <p:sp>
+        <p:nvSpPr>
+          <p:cNvPr id="4" name="Slide Number Placeholder 3">
+            <a:extLst>
+              <a:ext uri="{FF2B5EF4-FFF2-40B4-BE49-F238E27FC236}">
+                <a16:creationId xmlns:a16="http://schemas.microsoft.com/office/drawing/2014/main" id="{7CC6B867-7845-FDD1-CECB-446A320EF33D}"/>
+              </a:ext>
+            </a:extLst>
+          </p:cNvPr>
+          <p:cNvSpPr>
+            <a:spLocks noGrp="1"/>
+          </p:cNvSpPr>
+          <p:nvPr>
+            <p:ph type="sldNum" sz="quarter" idx="12"/>
+          </p:nvPr>
+        </p:nvSpPr>
+        <p:spPr/>
+        <p:txBody>
+          <a:bodyPr/>
+          <a:lstStyle/>
+          <a:p>
+            <a:fld id="{45C00377-489B-40EC-B059-26BDDD2E89B9}" type="slidenum">
+              <a:rPr lang="en-US" smtClean="0"/>
+              <a:pPr/>
+              <a:t>18</a:t>
+            </a:fld>
+            <a:endParaRPr lang="en-US"/>
+          </a:p>
+        </p:txBody>
+      </p:sp>
+      <p:pic>
+        <p:nvPicPr>
+          <p:cNvPr id="4098" name="Picture 2" descr="How to Interpret Histograms - LabXchange">
+            <a:extLst>
+              <a:ext uri="{FF2B5EF4-FFF2-40B4-BE49-F238E27FC236}">
+                <a16:creationId xmlns:a16="http://schemas.microsoft.com/office/drawing/2014/main" id="{F8CD6BBC-8B3D-70EE-865D-4DF5A9A3790A}"/>
+              </a:ext>
+            </a:extLst>
+          </p:cNvPr>
+          <p:cNvPicPr>
+            <a:picLocks noGrp="1" noChangeAspect="1" noChangeArrowheads="1"/>
+          </p:cNvPicPr>
           <p:nvPr>
             <p:ph idx="1"/>
           </p:nvPr>
-        </p:nvSpPr>
-        <p:spPr/>
-        <p:txBody>
-          <a:bodyPr/>
-          <a:lstStyle/>
-          <a:p>
-            <a:pPr marL="0" indent="0">
-              <a:buNone/>
-            </a:pPr>
-            <a:r>
-              <a:rPr lang="en-US" dirty="0"/>
-              <a:t>Why Segment Your Data?</a:t>
-            </a:r>
-          </a:p>
-          <a:p>
-            <a:r>
-              <a:rPr lang="en-US" dirty="0"/>
-              <a:t>Looking at team / league average often masks the truth because different positions have entirely different physical and tactical requirements.</a:t>
-            </a:r>
-          </a:p>
-          <a:p>
-            <a:endParaRPr lang="en-US" dirty="0"/>
-          </a:p>
-          <a:p>
-            <a:r>
-              <a:rPr lang="en-US" dirty="0"/>
-              <a:t>Example:</a:t>
-            </a:r>
-          </a:p>
-          <a:p>
-            <a:pPr lvl="1"/>
-            <a:r>
-              <a:rPr lang="en-US" dirty="0"/>
-              <a:t>Lumping center-backs and wingers together in soccer makes total high-speed distance look "average." </a:t>
-            </a:r>
-          </a:p>
-          <a:p>
-            <a:pPr lvl="1"/>
-            <a:r>
-              <a:rPr lang="en-US" dirty="0"/>
-              <a:t>Segmenting by position reveals that wingers log massive high-speed workloads, while central defenders rely more on mechanical impacts and aerial duels.</a:t>
-            </a:r>
-          </a:p>
-          <a:p>
-            <a:endParaRPr lang="en-US" dirty="0"/>
-          </a:p>
-        </p:txBody>
-      </p:sp>
+        </p:nvPicPr>
+        <p:blipFill rotWithShape="1">
+          <a:blip r:embed="rId3">
+            <a:extLst>
+              <a:ext uri="{28A0092B-C50C-407E-A947-70E740481C1C}">
+                <a14:useLocalDpi xmlns:a14="http://schemas.microsoft.com/office/drawing/2010/main" val="0"/>
+              </a:ext>
+            </a:extLst>
+          </a:blip>
+          <a:srcRect r="66103"/>
+          <a:stretch>
+            <a:fillRect/>
+          </a:stretch>
+        </p:blipFill>
+        <p:spPr bwMode="auto">
+          <a:xfrm>
+            <a:off x="3901017" y="1951228"/>
+            <a:ext cx="4389966" cy="3789232"/>
+          </a:xfrm>
+          <a:prstGeom prst="rect">
+            <a:avLst/>
+          </a:prstGeom>
+          <a:noFill/>
+          <a:extLst>
+            <a:ext uri="{909E8E84-426E-40DD-AFC4-6F175D3DCCD1}">
+              <a14:hiddenFill xmlns:a14="http://schemas.microsoft.com/office/drawing/2010/main">
+                <a:solidFill>
+                  <a:srgbClr val="FFFFFF"/>
+                </a:solidFill>
+              </a14:hiddenFill>
+            </a:ext>
+          </a:extLst>
+        </p:spPr>
+      </p:pic>
     </p:spTree>
     <p:extLst>
       <p:ext uri="{BB962C8B-B14F-4D97-AF65-F5344CB8AC3E}">
-        <p14:creationId xmlns:p14="http://schemas.microsoft.com/office/powerpoint/2010/main" val="2238529226"/>
+        <p14:creationId xmlns:p14="http://schemas.microsoft.com/office/powerpoint/2010/main" val="741419840"/>
       </p:ext>
     </p:extLst>
   </p:cSld>
@@ -9367,7 +10569,226 @@
 </p:sld>
 </file>
 
-<file path=ppt/slides/slide16.xml><?xml version="1.0" encoding="utf-8"?>
+<file path=ppt/slides/slide19.xml><?xml version="1.0" encoding="utf-8"?>
+<p:sld xmlns:a="http://schemas.openxmlformats.org/drawingml/2006/main" xmlns:r="http://schemas.openxmlformats.org/officeDocument/2006/relationships" xmlns:p="http://schemas.openxmlformats.org/presentationml/2006/main">
+  <p:cSld>
+    <p:spTree>
+      <p:nvGrpSpPr>
+        <p:cNvPr id="1" name="">
+          <a:extLst>
+            <a:ext uri="{FF2B5EF4-FFF2-40B4-BE49-F238E27FC236}">
+              <a16:creationId xmlns:a16="http://schemas.microsoft.com/office/drawing/2014/main" id="{C906F5E7-39BF-696D-8378-92F55112B751}"/>
+            </a:ext>
+          </a:extLst>
+        </p:cNvPr>
+        <p:cNvGrpSpPr/>
+        <p:nvPr/>
+      </p:nvGrpSpPr>
+      <p:grpSpPr>
+        <a:xfrm>
+          <a:off x="0" y="0"/>
+          <a:ext cx="0" cy="0"/>
+          <a:chOff x="0" y="0"/>
+          <a:chExt cx="0" cy="0"/>
+        </a:xfrm>
+      </p:grpSpPr>
+      <p:sp>
+        <p:nvSpPr>
+          <p:cNvPr id="2" name="Title 1">
+            <a:extLst>
+              <a:ext uri="{FF2B5EF4-FFF2-40B4-BE49-F238E27FC236}">
+                <a16:creationId xmlns:a16="http://schemas.microsoft.com/office/drawing/2014/main" id="{742DD15C-B31F-B99D-1E00-35CDDA3EB94B}"/>
+              </a:ext>
+            </a:extLst>
+          </p:cNvPr>
+          <p:cNvSpPr>
+            <a:spLocks noGrp="1"/>
+          </p:cNvSpPr>
+          <p:nvPr>
+            <p:ph type="title"/>
+          </p:nvPr>
+        </p:nvSpPr>
+        <p:spPr/>
+        <p:txBody>
+          <a:bodyPr/>
+          <a:lstStyle/>
+          <a:p>
+            <a:r>
+              <a:rPr lang="en-US" dirty="0"/>
+              <a:t>The center in asymmetric data</a:t>
+            </a:r>
+          </a:p>
+        </p:txBody>
+      </p:sp>
+      <p:sp>
+        <p:nvSpPr>
+          <p:cNvPr id="4" name="Slide Number Placeholder 3">
+            <a:extLst>
+              <a:ext uri="{FF2B5EF4-FFF2-40B4-BE49-F238E27FC236}">
+                <a16:creationId xmlns:a16="http://schemas.microsoft.com/office/drawing/2014/main" id="{5B709428-25C8-E6FD-4688-FD80036813C2}"/>
+              </a:ext>
+            </a:extLst>
+          </p:cNvPr>
+          <p:cNvSpPr>
+            <a:spLocks noGrp="1"/>
+          </p:cNvSpPr>
+          <p:nvPr>
+            <p:ph type="sldNum" sz="quarter" idx="12"/>
+          </p:nvPr>
+        </p:nvSpPr>
+        <p:spPr/>
+        <p:txBody>
+          <a:bodyPr/>
+          <a:lstStyle/>
+          <a:p>
+            <a:fld id="{45C00377-489B-40EC-B059-26BDDD2E89B9}" type="slidenum">
+              <a:rPr lang="en-US" smtClean="0"/>
+              <a:pPr/>
+              <a:t>19</a:t>
+            </a:fld>
+            <a:endParaRPr lang="en-US"/>
+          </a:p>
+        </p:txBody>
+      </p:sp>
+      <p:pic>
+        <p:nvPicPr>
+          <p:cNvPr id="4098" name="Picture 2" descr="How to Interpret Histograms - LabXchange">
+            <a:extLst>
+              <a:ext uri="{FF2B5EF4-FFF2-40B4-BE49-F238E27FC236}">
+                <a16:creationId xmlns:a16="http://schemas.microsoft.com/office/drawing/2014/main" id="{5E07A6AD-6BA3-9343-6F05-9D3ADF059A08}"/>
+              </a:ext>
+            </a:extLst>
+          </p:cNvPr>
+          <p:cNvPicPr>
+            <a:picLocks noGrp="1" noChangeAspect="1" noChangeArrowheads="1"/>
+          </p:cNvPicPr>
+          <p:nvPr>
+            <p:ph idx="1"/>
+          </p:nvPr>
+        </p:nvPicPr>
+        <p:blipFill rotWithShape="1">
+          <a:blip r:embed="rId3">
+            <a:extLst>
+              <a:ext uri="{28A0092B-C50C-407E-A947-70E740481C1C}">
+                <a14:useLocalDpi xmlns:a14="http://schemas.microsoft.com/office/drawing/2010/main" val="0"/>
+              </a:ext>
+            </a:extLst>
+          </a:blip>
+          <a:srcRect l="33814" t="-447" r="2510" b="447"/>
+          <a:stretch>
+            <a:fillRect/>
+          </a:stretch>
+        </p:blipFill>
+        <p:spPr bwMode="auto">
+          <a:xfrm>
+            <a:off x="1972733" y="2018961"/>
+            <a:ext cx="8246534" cy="3789232"/>
+          </a:xfrm>
+          <a:prstGeom prst="rect">
+            <a:avLst/>
+          </a:prstGeom>
+          <a:noFill/>
+          <a:extLst>
+            <a:ext uri="{909E8E84-426E-40DD-AFC4-6F175D3DCCD1}">
+              <a14:hiddenFill xmlns:a14="http://schemas.microsoft.com/office/drawing/2010/main">
+                <a:solidFill>
+                  <a:srgbClr val="FFFFFF"/>
+                </a:solidFill>
+              </a14:hiddenFill>
+            </a:ext>
+          </a:extLst>
+        </p:spPr>
+      </p:pic>
+      <p:cxnSp>
+        <p:nvCxnSpPr>
+          <p:cNvPr id="5" name="Straight Arrow Connector 4">
+            <a:extLst>
+              <a:ext uri="{FF2B5EF4-FFF2-40B4-BE49-F238E27FC236}">
+                <a16:creationId xmlns:a16="http://schemas.microsoft.com/office/drawing/2014/main" id="{65374D5F-FD24-5385-E2BA-049B45FEE8A7}"/>
+              </a:ext>
+            </a:extLst>
+          </p:cNvPr>
+          <p:cNvCxnSpPr>
+            <a:cxnSpLocks/>
+          </p:cNvCxnSpPr>
+          <p:nvPr/>
+        </p:nvCxnSpPr>
+        <p:spPr>
+          <a:xfrm flipH="1" flipV="1">
+            <a:off x="5723467" y="5554193"/>
+            <a:ext cx="575733" cy="592607"/>
+          </a:xfrm>
+          <a:prstGeom prst="straightConnector1">
+            <a:avLst/>
+          </a:prstGeom>
+          <a:ln>
+            <a:tailEnd type="triangle"/>
+          </a:ln>
+        </p:spPr>
+        <p:style>
+          <a:lnRef idx="1">
+            <a:schemeClr val="accent1"/>
+          </a:lnRef>
+          <a:fillRef idx="0">
+            <a:schemeClr val="accent1"/>
+          </a:fillRef>
+          <a:effectRef idx="0">
+            <a:schemeClr val="accent1"/>
+          </a:effectRef>
+          <a:fontRef idx="minor">
+            <a:schemeClr val="tx1"/>
+          </a:fontRef>
+        </p:style>
+      </p:cxnSp>
+      <p:sp>
+        <p:nvSpPr>
+          <p:cNvPr id="10" name="TextBox 9">
+            <a:extLst>
+              <a:ext uri="{FF2B5EF4-FFF2-40B4-BE49-F238E27FC236}">
+                <a16:creationId xmlns:a16="http://schemas.microsoft.com/office/drawing/2014/main" id="{38983018-9898-0624-B472-193C5ED2E7B0}"/>
+              </a:ext>
+            </a:extLst>
+          </p:cNvPr>
+          <p:cNvSpPr txBox="1"/>
+          <p:nvPr/>
+        </p:nvSpPr>
+        <p:spPr>
+          <a:xfrm>
+            <a:off x="6356148" y="5987018"/>
+            <a:ext cx="1903085" cy="369332"/>
+          </a:xfrm>
+          <a:prstGeom prst="rect">
+            <a:avLst/>
+          </a:prstGeom>
+          <a:noFill/>
+        </p:spPr>
+        <p:txBody>
+          <a:bodyPr wrap="none" rtlCol="0">
+            <a:spAutoFit/>
+          </a:bodyPr>
+          <a:lstStyle/>
+          <a:p>
+            <a:r>
+              <a:rPr lang="en-US" dirty="0"/>
+              <a:t>Common in sports</a:t>
+            </a:r>
+          </a:p>
+        </p:txBody>
+      </p:sp>
+    </p:spTree>
+    <p:extLst>
+      <p:ext uri="{BB962C8B-B14F-4D97-AF65-F5344CB8AC3E}">
+        <p14:creationId xmlns:p14="http://schemas.microsoft.com/office/powerpoint/2010/main" val="1046255775"/>
+      </p:ext>
+    </p:extLst>
+  </p:cSld>
+  <p:clrMapOvr>
+    <a:masterClrMapping/>
+  </p:clrMapOvr>
+</p:sld>
+</file>
+
+<file path=ppt/slides/slide2.xml><?xml version="1.0" encoding="utf-8"?>
 <p:sld xmlns:a="http://schemas.openxmlformats.org/drawingml/2006/main" xmlns:r="http://schemas.openxmlformats.org/officeDocument/2006/relationships" xmlns:p="http://schemas.openxmlformats.org/presentationml/2006/main">
   <p:cSld>
     <p:spTree>
@@ -9386,6 +10807,520 @@
       </p:grpSpPr>
       <p:sp>
         <p:nvSpPr>
+          <p:cNvPr id="2" name="Slide Number Placeholder 1">
+            <a:extLst>
+              <a:ext uri="{FF2B5EF4-FFF2-40B4-BE49-F238E27FC236}">
+                <a16:creationId xmlns:a16="http://schemas.microsoft.com/office/drawing/2014/main" id="{4F00E21B-1982-E0CA-1F9E-8355997AAE51}"/>
+              </a:ext>
+            </a:extLst>
+          </p:cNvPr>
+          <p:cNvSpPr>
+            <a:spLocks noGrp="1"/>
+          </p:cNvSpPr>
+          <p:nvPr>
+            <p:ph type="sldNum" sz="quarter" idx="11"/>
+          </p:nvPr>
+        </p:nvSpPr>
+        <p:spPr/>
+        <p:txBody>
+          <a:bodyPr/>
+          <a:lstStyle/>
+          <a:p>
+            <a:fld id="{45C00377-489B-40EC-B059-26BDDD2E89B9}" type="slidenum">
+              <a:rPr lang="en-US" smtClean="0"/>
+              <a:pPr/>
+              <a:t>2</a:t>
+            </a:fld>
+            <a:endParaRPr lang="en-US"/>
+          </a:p>
+        </p:txBody>
+      </p:sp>
+      <p:sp>
+        <p:nvSpPr>
+          <p:cNvPr id="3" name="Title 1">
+            <a:extLst>
+              <a:ext uri="{FF2B5EF4-FFF2-40B4-BE49-F238E27FC236}">
+                <a16:creationId xmlns:a16="http://schemas.microsoft.com/office/drawing/2014/main" id="{B2604BDD-1EB2-C9AE-AD81-128821271322}"/>
+              </a:ext>
+            </a:extLst>
+          </p:cNvPr>
+          <p:cNvSpPr txBox="1">
+            <a:spLocks/>
+          </p:cNvSpPr>
+          <p:nvPr/>
+        </p:nvSpPr>
+        <p:spPr>
+          <a:xfrm>
+            <a:off x="838200" y="3110401"/>
+            <a:ext cx="10515600" cy="637198"/>
+          </a:xfrm>
+          <a:prstGeom prst="rect">
+            <a:avLst/>
+          </a:prstGeom>
+        </p:spPr>
+        <p:txBody>
+          <a:bodyPr/>
+          <a:lstStyle>
+            <a:lvl1pPr algn="l" defTabSz="914400" rtl="0" eaLnBrk="1" latinLnBrk="0" hangingPunct="1">
+              <a:lnSpc>
+                <a:spcPct val="90000"/>
+              </a:lnSpc>
+              <a:spcBef>
+                <a:spcPct val="0"/>
+              </a:spcBef>
+              <a:buNone/>
+              <a:defRPr sz="3600" b="1" kern="1200" cap="all" baseline="0">
+                <a:solidFill>
+                  <a:schemeClr val="tx1"/>
+                </a:solidFill>
+                <a:latin typeface="+mn-lt"/>
+                <a:ea typeface="+mj-ea"/>
+                <a:cs typeface="+mj-cs"/>
+              </a:defRPr>
+            </a:lvl1pPr>
+          </a:lstStyle>
+          <a:p>
+            <a:pPr algn="ctr"/>
+            <a:r>
+              <a:rPr lang="en-US" b="0" dirty="0"/>
+              <a:t>What is “typical”?</a:t>
+            </a:r>
+          </a:p>
+        </p:txBody>
+      </p:sp>
+    </p:spTree>
+    <p:extLst>
+      <p:ext uri="{BB962C8B-B14F-4D97-AF65-F5344CB8AC3E}">
+        <p14:creationId xmlns:p14="http://schemas.microsoft.com/office/powerpoint/2010/main" val="944151257"/>
+      </p:ext>
+    </p:extLst>
+  </p:cSld>
+  <p:clrMapOvr>
+    <a:masterClrMapping/>
+  </p:clrMapOvr>
+</p:sld>
+</file>
+
+<file path=ppt/slides/slide20.xml><?xml version="1.0" encoding="utf-8"?>
+<p:sld xmlns:a="http://schemas.openxmlformats.org/drawingml/2006/main" xmlns:r="http://schemas.openxmlformats.org/officeDocument/2006/relationships" xmlns:p="http://schemas.openxmlformats.org/presentationml/2006/main">
+  <p:cSld>
+    <p:spTree>
+      <p:nvGrpSpPr>
+        <p:cNvPr id="1" name="">
+          <a:extLst>
+            <a:ext uri="{FF2B5EF4-FFF2-40B4-BE49-F238E27FC236}">
+              <a16:creationId xmlns:a16="http://schemas.microsoft.com/office/drawing/2014/main" id="{51427734-1538-7DC8-18B4-31FC9E1C96E0}"/>
+            </a:ext>
+          </a:extLst>
+        </p:cNvPr>
+        <p:cNvGrpSpPr/>
+        <p:nvPr/>
+      </p:nvGrpSpPr>
+      <p:grpSpPr>
+        <a:xfrm>
+          <a:off x="0" y="0"/>
+          <a:ext cx="0" cy="0"/>
+          <a:chOff x="0" y="0"/>
+          <a:chExt cx="0" cy="0"/>
+        </a:xfrm>
+      </p:grpSpPr>
+      <p:sp>
+        <p:nvSpPr>
+          <p:cNvPr id="2" name="Title 1">
+            <a:extLst>
+              <a:ext uri="{FF2B5EF4-FFF2-40B4-BE49-F238E27FC236}">
+                <a16:creationId xmlns:a16="http://schemas.microsoft.com/office/drawing/2014/main" id="{1A30EDA4-2884-5C3A-1453-89ED62C3BDD0}"/>
+              </a:ext>
+            </a:extLst>
+          </p:cNvPr>
+          <p:cNvSpPr>
+            <a:spLocks noGrp="1"/>
+          </p:cNvSpPr>
+          <p:nvPr>
+            <p:ph type="title"/>
+          </p:nvPr>
+        </p:nvSpPr>
+        <p:spPr/>
+        <p:txBody>
+          <a:bodyPr>
+            <a:normAutofit fontScale="90000"/>
+          </a:bodyPr>
+          <a:lstStyle/>
+          <a:p>
+            <a:r>
+              <a:rPr lang="en-US" dirty="0"/>
+              <a:t>Does distribution change appropriate method?</a:t>
+            </a:r>
+          </a:p>
+        </p:txBody>
+      </p:sp>
+      <p:sp>
+        <p:nvSpPr>
+          <p:cNvPr id="4" name="Slide Number Placeholder 3">
+            <a:extLst>
+              <a:ext uri="{FF2B5EF4-FFF2-40B4-BE49-F238E27FC236}">
+                <a16:creationId xmlns:a16="http://schemas.microsoft.com/office/drawing/2014/main" id="{8C96CE0E-0732-E9D4-E499-2B84DEA82B46}"/>
+              </a:ext>
+            </a:extLst>
+          </p:cNvPr>
+          <p:cNvSpPr>
+            <a:spLocks noGrp="1"/>
+          </p:cNvSpPr>
+          <p:nvPr>
+            <p:ph type="sldNum" sz="quarter" idx="12"/>
+          </p:nvPr>
+        </p:nvSpPr>
+        <p:spPr/>
+        <p:txBody>
+          <a:bodyPr/>
+          <a:lstStyle/>
+          <a:p>
+            <a:fld id="{45C00377-489B-40EC-B059-26BDDD2E89B9}" type="slidenum">
+              <a:rPr lang="en-US" smtClean="0"/>
+              <a:pPr/>
+              <a:t>20</a:t>
+            </a:fld>
+            <a:endParaRPr lang="en-US"/>
+          </a:p>
+        </p:txBody>
+      </p:sp>
+      <p:pic>
+        <p:nvPicPr>
+          <p:cNvPr id="4098" name="Picture 2" descr="How to Interpret Histograms - LabXchange">
+            <a:extLst>
+              <a:ext uri="{FF2B5EF4-FFF2-40B4-BE49-F238E27FC236}">
+                <a16:creationId xmlns:a16="http://schemas.microsoft.com/office/drawing/2014/main" id="{93CF171A-A016-7C27-0CC5-108FDA526E14}"/>
+              </a:ext>
+            </a:extLst>
+          </p:cNvPr>
+          <p:cNvPicPr>
+            <a:picLocks noGrp="1" noChangeAspect="1" noChangeArrowheads="1"/>
+          </p:cNvPicPr>
+          <p:nvPr>
+            <p:ph idx="1"/>
+          </p:nvPr>
+        </p:nvPicPr>
+        <p:blipFill rotWithShape="1">
+          <a:blip r:embed="rId3">
+            <a:extLst>
+              <a:ext uri="{28A0092B-C50C-407E-A947-70E740481C1C}">
+                <a14:useLocalDpi xmlns:a14="http://schemas.microsoft.com/office/drawing/2010/main" val="0"/>
+              </a:ext>
+            </a:extLst>
+          </a:blip>
+          <a:srcRect l="1165" t="-447" r="2511" b="447"/>
+          <a:stretch>
+            <a:fillRect/>
+          </a:stretch>
+        </p:blipFill>
+        <p:spPr bwMode="auto">
+          <a:xfrm>
+            <a:off x="838200" y="2107349"/>
+            <a:ext cx="10041538" cy="3050135"/>
+          </a:xfrm>
+          <a:prstGeom prst="rect">
+            <a:avLst/>
+          </a:prstGeom>
+          <a:noFill/>
+          <a:extLst>
+            <a:ext uri="{909E8E84-426E-40DD-AFC4-6F175D3DCCD1}">
+              <a14:hiddenFill xmlns:a14="http://schemas.microsoft.com/office/drawing/2010/main">
+                <a:solidFill>
+                  <a:srgbClr val="FFFFFF"/>
+                </a:solidFill>
+              </a14:hiddenFill>
+            </a:ext>
+          </a:extLst>
+        </p:spPr>
+      </p:pic>
+      <p:sp>
+        <p:nvSpPr>
+          <p:cNvPr id="10" name="TextBox 9">
+            <a:extLst>
+              <a:ext uri="{FF2B5EF4-FFF2-40B4-BE49-F238E27FC236}">
+                <a16:creationId xmlns:a16="http://schemas.microsoft.com/office/drawing/2014/main" id="{016F27C4-5B87-D900-73E0-C9E1F2F39871}"/>
+              </a:ext>
+            </a:extLst>
+          </p:cNvPr>
+          <p:cNvSpPr txBox="1"/>
+          <p:nvPr/>
+        </p:nvSpPr>
+        <p:spPr>
+          <a:xfrm>
+            <a:off x="2237411" y="5572251"/>
+            <a:ext cx="7717177" cy="369332"/>
+          </a:xfrm>
+          <a:prstGeom prst="rect">
+            <a:avLst/>
+          </a:prstGeom>
+          <a:noFill/>
+        </p:spPr>
+        <p:txBody>
+          <a:bodyPr wrap="none" rtlCol="0">
+            <a:spAutoFit/>
+          </a:bodyPr>
+          <a:lstStyle/>
+          <a:p>
+            <a:r>
+              <a:rPr lang="en-US" dirty="0">
+                <a:solidFill>
+                  <a:srgbClr val="FF0000"/>
+                </a:solidFill>
+              </a:rPr>
+              <a:t>Would you / should you change the averaging method based on distribution?</a:t>
+            </a:r>
+          </a:p>
+        </p:txBody>
+      </p:sp>
+    </p:spTree>
+    <p:extLst>
+      <p:ext uri="{BB962C8B-B14F-4D97-AF65-F5344CB8AC3E}">
+        <p14:creationId xmlns:p14="http://schemas.microsoft.com/office/powerpoint/2010/main" val="1918175078"/>
+      </p:ext>
+    </p:extLst>
+  </p:cSld>
+  <p:clrMapOvr>
+    <a:masterClrMapping/>
+  </p:clrMapOvr>
+</p:sld>
+</file>
+
+<file path=ppt/slides/slide21.xml><?xml version="1.0" encoding="utf-8"?>
+<p:sld xmlns:a="http://schemas.openxmlformats.org/drawingml/2006/main" xmlns:r="http://schemas.openxmlformats.org/officeDocument/2006/relationships" xmlns:p="http://schemas.openxmlformats.org/presentationml/2006/main">
+  <p:cSld>
+    <p:spTree>
+      <p:nvGrpSpPr>
+        <p:cNvPr id="1" name="">
+          <a:extLst>
+            <a:ext uri="{FF2B5EF4-FFF2-40B4-BE49-F238E27FC236}">
+              <a16:creationId xmlns:a16="http://schemas.microsoft.com/office/drawing/2014/main" id="{A26CDC0B-0B2A-1E14-5007-45A1A2468332}"/>
+            </a:ext>
+          </a:extLst>
+        </p:cNvPr>
+        <p:cNvGrpSpPr/>
+        <p:nvPr/>
+      </p:nvGrpSpPr>
+      <p:grpSpPr>
+        <a:xfrm>
+          <a:off x="0" y="0"/>
+          <a:ext cx="0" cy="0"/>
+          <a:chOff x="0" y="0"/>
+          <a:chExt cx="0" cy="0"/>
+        </a:xfrm>
+      </p:grpSpPr>
+      <p:sp>
+        <p:nvSpPr>
+          <p:cNvPr id="4" name="Slide Number Placeholder 3">
+            <a:extLst>
+              <a:ext uri="{FF2B5EF4-FFF2-40B4-BE49-F238E27FC236}">
+                <a16:creationId xmlns:a16="http://schemas.microsoft.com/office/drawing/2014/main" id="{C5DA7F33-C641-8689-7008-5C776B05177D}"/>
+              </a:ext>
+            </a:extLst>
+          </p:cNvPr>
+          <p:cNvSpPr>
+            <a:spLocks noGrp="1"/>
+          </p:cNvSpPr>
+          <p:nvPr>
+            <p:ph type="sldNum" sz="quarter" idx="11"/>
+          </p:nvPr>
+        </p:nvSpPr>
+        <p:spPr/>
+        <p:txBody>
+          <a:bodyPr/>
+          <a:lstStyle/>
+          <a:p>
+            <a:fld id="{45C00377-489B-40EC-B059-26BDDD2E89B9}" type="slidenum">
+              <a:rPr lang="en-US" smtClean="0"/>
+              <a:pPr/>
+              <a:t>21</a:t>
+            </a:fld>
+            <a:endParaRPr lang="en-US"/>
+          </a:p>
+        </p:txBody>
+      </p:sp>
+      <p:sp>
+        <p:nvSpPr>
+          <p:cNvPr id="2" name="Title 1">
+            <a:extLst>
+              <a:ext uri="{FF2B5EF4-FFF2-40B4-BE49-F238E27FC236}">
+                <a16:creationId xmlns:a16="http://schemas.microsoft.com/office/drawing/2014/main" id="{24E378FE-1C47-00EE-09AE-0807820064CE}"/>
+              </a:ext>
+            </a:extLst>
+          </p:cNvPr>
+          <p:cNvSpPr>
+            <a:spLocks noGrp="1"/>
+          </p:cNvSpPr>
+          <p:nvPr>
+            <p:ph type="title"/>
+          </p:nvPr>
+        </p:nvSpPr>
+        <p:spPr/>
+        <p:txBody>
+          <a:bodyPr>
+            <a:normAutofit fontScale="90000"/>
+          </a:bodyPr>
+          <a:lstStyle/>
+          <a:p>
+            <a:r>
+              <a:rPr lang="en-US" dirty="0"/>
+              <a:t>Grouped summary</a:t>
+            </a:r>
+          </a:p>
+        </p:txBody>
+      </p:sp>
+    </p:spTree>
+    <p:extLst>
+      <p:ext uri="{BB962C8B-B14F-4D97-AF65-F5344CB8AC3E}">
+        <p14:creationId xmlns:p14="http://schemas.microsoft.com/office/powerpoint/2010/main" val="4232389522"/>
+      </p:ext>
+    </p:extLst>
+  </p:cSld>
+  <p:clrMapOvr>
+    <a:masterClrMapping/>
+  </p:clrMapOvr>
+</p:sld>
+</file>
+
+<file path=ppt/slides/slide22.xml><?xml version="1.0" encoding="utf-8"?>
+<p:sld xmlns:a="http://schemas.openxmlformats.org/drawingml/2006/main" xmlns:r="http://schemas.openxmlformats.org/officeDocument/2006/relationships" xmlns:p="http://schemas.openxmlformats.org/presentationml/2006/main">
+  <p:cSld>
+    <p:spTree>
+      <p:nvGrpSpPr>
+        <p:cNvPr id="1" name=""/>
+        <p:cNvGrpSpPr/>
+        <p:nvPr/>
+      </p:nvGrpSpPr>
+      <p:grpSpPr>
+        <a:xfrm>
+          <a:off x="0" y="0"/>
+          <a:ext cx="0" cy="0"/>
+          <a:chOff x="0" y="0"/>
+          <a:chExt cx="0" cy="0"/>
+        </a:xfrm>
+      </p:grpSpPr>
+      <p:sp>
+        <p:nvSpPr>
+          <p:cNvPr id="2" name="Title 1">
+            <a:extLst>
+              <a:ext uri="{FF2B5EF4-FFF2-40B4-BE49-F238E27FC236}">
+                <a16:creationId xmlns:a16="http://schemas.microsoft.com/office/drawing/2014/main" id="{A13B7130-5B81-B62D-BA4D-505C3745BDE8}"/>
+              </a:ext>
+            </a:extLst>
+          </p:cNvPr>
+          <p:cNvSpPr>
+            <a:spLocks noGrp="1"/>
+          </p:cNvSpPr>
+          <p:nvPr>
+            <p:ph type="title"/>
+          </p:nvPr>
+        </p:nvSpPr>
+        <p:spPr/>
+        <p:txBody>
+          <a:bodyPr/>
+          <a:lstStyle/>
+          <a:p>
+            <a:r>
+              <a:rPr lang="en-US" dirty="0"/>
+              <a:t>Grouped summary statistics</a:t>
+            </a:r>
+          </a:p>
+        </p:txBody>
+      </p:sp>
+      <p:sp>
+        <p:nvSpPr>
+          <p:cNvPr id="3" name="Content Placeholder 2">
+            <a:extLst>
+              <a:ext uri="{FF2B5EF4-FFF2-40B4-BE49-F238E27FC236}">
+                <a16:creationId xmlns:a16="http://schemas.microsoft.com/office/drawing/2014/main" id="{35B77547-6F10-4E09-A289-6D75BEBD3D06}"/>
+              </a:ext>
+            </a:extLst>
+          </p:cNvPr>
+          <p:cNvSpPr>
+            <a:spLocks noGrp="1"/>
+          </p:cNvSpPr>
+          <p:nvPr>
+            <p:ph idx="1"/>
+          </p:nvPr>
+        </p:nvSpPr>
+        <p:spPr/>
+        <p:txBody>
+          <a:bodyPr/>
+          <a:lstStyle/>
+          <a:p>
+            <a:pPr marL="0" indent="0">
+              <a:buNone/>
+            </a:pPr>
+            <a:r>
+              <a:rPr lang="en-US" dirty="0"/>
+              <a:t>Why Segment Your Data?</a:t>
+            </a:r>
+          </a:p>
+          <a:p>
+            <a:r>
+              <a:rPr lang="en-US" dirty="0"/>
+              <a:t>Looking at team / league average often masks the truth because different positions have entirely different physical and tactical requirements.</a:t>
+            </a:r>
+          </a:p>
+          <a:p>
+            <a:endParaRPr lang="en-US" dirty="0"/>
+          </a:p>
+          <a:p>
+            <a:r>
+              <a:rPr lang="en-US" dirty="0"/>
+              <a:t>Example:</a:t>
+            </a:r>
+          </a:p>
+          <a:p>
+            <a:pPr lvl="1"/>
+            <a:r>
+              <a:rPr lang="en-US" dirty="0"/>
+              <a:t>Lumping center-backs and wingers together in soccer makes total high-speed distance look "average." </a:t>
+            </a:r>
+          </a:p>
+          <a:p>
+            <a:pPr lvl="1"/>
+            <a:r>
+              <a:rPr lang="en-US" dirty="0"/>
+              <a:t>Segmenting by position reveals that wingers log massive high-speed workloads, while central defenders rely more on mechanical impacts and aerial duels.</a:t>
+            </a:r>
+          </a:p>
+          <a:p>
+            <a:endParaRPr lang="en-US" dirty="0"/>
+          </a:p>
+        </p:txBody>
+      </p:sp>
+    </p:spTree>
+    <p:extLst>
+      <p:ext uri="{BB962C8B-B14F-4D97-AF65-F5344CB8AC3E}">
+        <p14:creationId xmlns:p14="http://schemas.microsoft.com/office/powerpoint/2010/main" val="2238529226"/>
+      </p:ext>
+    </p:extLst>
+  </p:cSld>
+  <p:clrMapOvr>
+    <a:masterClrMapping/>
+  </p:clrMapOvr>
+</p:sld>
+</file>
+
+<file path=ppt/slides/slide23.xml><?xml version="1.0" encoding="utf-8"?>
+<p:sld xmlns:a="http://schemas.openxmlformats.org/drawingml/2006/main" xmlns:r="http://schemas.openxmlformats.org/officeDocument/2006/relationships" xmlns:p="http://schemas.openxmlformats.org/presentationml/2006/main">
+  <p:cSld>
+    <p:spTree>
+      <p:nvGrpSpPr>
+        <p:cNvPr id="1" name=""/>
+        <p:cNvGrpSpPr/>
+        <p:nvPr/>
+      </p:nvGrpSpPr>
+      <p:grpSpPr>
+        <a:xfrm>
+          <a:off x="0" y="0"/>
+          <a:ext cx="0" cy="0"/>
+          <a:chOff x="0" y="0"/>
+          <a:chExt cx="0" cy="0"/>
+        </a:xfrm>
+      </p:grpSpPr>
+      <p:sp>
+        <p:nvSpPr>
           <p:cNvPr id="2" name="Title 1">
             <a:extLst>
               <a:ext uri="{FF2B5EF4-FFF2-40B4-BE49-F238E27FC236}">
@@ -9469,7 +11404,7 @@
             <a:fld id="{45C00377-489B-40EC-B059-26BDDD2E89B9}" type="slidenum">
               <a:rPr lang="en-US" smtClean="0"/>
               <a:pPr/>
-              <a:t>16</a:t>
+              <a:t>23</a:t>
             </a:fld>
             <a:endParaRPr lang="en-US"/>
           </a:p>
@@ -10182,7 +12117,7 @@
 </p:sld>
 </file>
 
-<file path=ppt/slides/slide17.xml><?xml version="1.0" encoding="utf-8"?>
+<file path=ppt/slides/slide24.xml><?xml version="1.0" encoding="utf-8"?>
 <p:sld xmlns:a="http://schemas.openxmlformats.org/drawingml/2006/main" xmlns:r="http://schemas.openxmlformats.org/officeDocument/2006/relationships" xmlns:p="http://schemas.openxmlformats.org/presentationml/2006/main">
   <p:cSld>
     <p:spTree>
@@ -10302,7 +12237,7 @@
             <a:fld id="{45C00377-489B-40EC-B059-26BDDD2E89B9}" type="slidenum">
               <a:rPr lang="en-US" smtClean="0"/>
               <a:pPr/>
-              <a:t>17</a:t>
+              <a:t>24</a:t>
             </a:fld>
             <a:endParaRPr lang="en-US"/>
           </a:p>
@@ -10944,7 +12879,7 @@
 </p:sld>
 </file>
 
-<file path=ppt/slides/slide18.xml><?xml version="1.0" encoding="utf-8"?>
+<file path=ppt/slides/slide25.xml><?xml version="1.0" encoding="utf-8"?>
 <p:sld xmlns:a="http://schemas.openxmlformats.org/drawingml/2006/main" xmlns:r="http://schemas.openxmlformats.org/officeDocument/2006/relationships" xmlns:p="http://schemas.openxmlformats.org/presentationml/2006/main">
   <p:cSld>
     <p:spTree>
@@ -11052,7 +12987,7 @@
             <a:fld id="{45C00377-489B-40EC-B059-26BDDD2E89B9}" type="slidenum">
               <a:rPr lang="en-US" smtClean="0"/>
               <a:pPr/>
-              <a:t>18</a:t>
+              <a:t>25</a:t>
             </a:fld>
             <a:endParaRPr lang="en-US" dirty="0"/>
           </a:p>
@@ -11101,7 +13036,7 @@
 </p:sld>
 </file>
 
-<file path=ppt/slides/slide19.xml><?xml version="1.0" encoding="utf-8"?>
+<file path=ppt/slides/slide26.xml><?xml version="1.0" encoding="utf-8"?>
 <p:sld xmlns:a="http://schemas.openxmlformats.org/drawingml/2006/main" xmlns:r="http://schemas.openxmlformats.org/officeDocument/2006/relationships" xmlns:p="http://schemas.openxmlformats.org/presentationml/2006/main">
   <p:cSld>
     <p:spTree>
@@ -11190,7 +13125,7 @@
             <a:pPr lvl="1"/>
             <a:r>
               <a:rPr lang="en-US" dirty="0"/>
-              <a:t>Histograms, density plots, and boxplots are essential tools for spotting positional differences and skewness.</a:t>
+              <a:t>Histograms, density plots, and boxplots are useful for spotting positional differences and skewness.</a:t>
             </a:r>
           </a:p>
           <a:p>
@@ -11219,120 +13154,7 @@
 </p:sld>
 </file>
 
-<file path=ppt/slides/slide2.xml><?xml version="1.0" encoding="utf-8"?>
-<p:sld xmlns:a="http://schemas.openxmlformats.org/drawingml/2006/main" xmlns:r="http://schemas.openxmlformats.org/officeDocument/2006/relationships" xmlns:p="http://schemas.openxmlformats.org/presentationml/2006/main">
-  <p:cSld>
-    <p:spTree>
-      <p:nvGrpSpPr>
-        <p:cNvPr id="1" name=""/>
-        <p:cNvGrpSpPr/>
-        <p:nvPr/>
-      </p:nvGrpSpPr>
-      <p:grpSpPr>
-        <a:xfrm>
-          <a:off x="0" y="0"/>
-          <a:ext cx="0" cy="0"/>
-          <a:chOff x="0" y="0"/>
-          <a:chExt cx="0" cy="0"/>
-        </a:xfrm>
-      </p:grpSpPr>
-      <p:sp>
-        <p:nvSpPr>
-          <p:cNvPr id="2" name="Slide Number Placeholder 1">
-            <a:extLst>
-              <a:ext uri="{FF2B5EF4-FFF2-40B4-BE49-F238E27FC236}">
-                <a16:creationId xmlns:a16="http://schemas.microsoft.com/office/drawing/2014/main" id="{4F00E21B-1982-E0CA-1F9E-8355997AAE51}"/>
-              </a:ext>
-            </a:extLst>
-          </p:cNvPr>
-          <p:cNvSpPr>
-            <a:spLocks noGrp="1"/>
-          </p:cNvSpPr>
-          <p:nvPr>
-            <p:ph type="sldNum" sz="quarter" idx="11"/>
-          </p:nvPr>
-        </p:nvSpPr>
-        <p:spPr/>
-        <p:txBody>
-          <a:bodyPr/>
-          <a:lstStyle/>
-          <a:p>
-            <a:fld id="{45C00377-489B-40EC-B059-26BDDD2E89B9}" type="slidenum">
-              <a:rPr lang="en-US" smtClean="0"/>
-              <a:pPr/>
-              <a:t>2</a:t>
-            </a:fld>
-            <a:endParaRPr lang="en-US"/>
-          </a:p>
-        </p:txBody>
-      </p:sp>
-      <p:sp>
-        <p:nvSpPr>
-          <p:cNvPr id="3" name="Title 1">
-            <a:extLst>
-              <a:ext uri="{FF2B5EF4-FFF2-40B4-BE49-F238E27FC236}">
-                <a16:creationId xmlns:a16="http://schemas.microsoft.com/office/drawing/2014/main" id="{B2604BDD-1EB2-C9AE-AD81-128821271322}"/>
-              </a:ext>
-            </a:extLst>
-          </p:cNvPr>
-          <p:cNvSpPr txBox="1">
-            <a:spLocks/>
-          </p:cNvSpPr>
-          <p:nvPr/>
-        </p:nvSpPr>
-        <p:spPr>
-          <a:xfrm>
-            <a:off x="838200" y="3110401"/>
-            <a:ext cx="10515600" cy="637198"/>
-          </a:xfrm>
-          <a:prstGeom prst="rect">
-            <a:avLst/>
-          </a:prstGeom>
-        </p:spPr>
-        <p:txBody>
-          <a:bodyPr/>
-          <a:lstStyle>
-            <a:lvl1pPr algn="l" defTabSz="914400" rtl="0" eaLnBrk="1" latinLnBrk="0" hangingPunct="1">
-              <a:lnSpc>
-                <a:spcPct val="90000"/>
-              </a:lnSpc>
-              <a:spcBef>
-                <a:spcPct val="0"/>
-              </a:spcBef>
-              <a:buNone/>
-              <a:defRPr sz="3600" b="1" kern="1200" cap="all" baseline="0">
-                <a:solidFill>
-                  <a:schemeClr val="tx1"/>
-                </a:solidFill>
-                <a:latin typeface="+mn-lt"/>
-                <a:ea typeface="+mj-ea"/>
-                <a:cs typeface="+mj-cs"/>
-              </a:defRPr>
-            </a:lvl1pPr>
-          </a:lstStyle>
-          <a:p>
-            <a:pPr algn="ctr"/>
-            <a:r>
-              <a:rPr lang="en-US" b="0" dirty="0"/>
-              <a:t>Measures of Central tendency</a:t>
-            </a:r>
-          </a:p>
-        </p:txBody>
-      </p:sp>
-    </p:spTree>
-    <p:extLst>
-      <p:ext uri="{BB962C8B-B14F-4D97-AF65-F5344CB8AC3E}">
-        <p14:creationId xmlns:p14="http://schemas.microsoft.com/office/powerpoint/2010/main" val="944151257"/>
-      </p:ext>
-    </p:extLst>
-  </p:cSld>
-  <p:clrMapOvr>
-    <a:masterClrMapping/>
-  </p:clrMapOvr>
-</p:sld>
-</file>
-
-<file path=ppt/slides/slide20.xml><?xml version="1.0" encoding="utf-8"?>
+<file path=ppt/slides/slide27.xml><?xml version="1.0" encoding="utf-8"?>
 <p:sld xmlns:a="http://schemas.openxmlformats.org/drawingml/2006/main" xmlns:r="http://schemas.openxmlformats.org/officeDocument/2006/relationships" xmlns:p="http://schemas.openxmlformats.org/presentationml/2006/main">
   <p:cSld>
     <p:spTree>
@@ -11439,7 +13261,7 @@
             <a:fld id="{45C00377-489B-40EC-B059-26BDDD2E89B9}" type="slidenum">
               <a:rPr lang="en-US" smtClean="0"/>
               <a:pPr/>
-              <a:t>20</a:t>
+              <a:t>27</a:t>
             </a:fld>
             <a:endParaRPr lang="en-US"/>
           </a:p>
@@ -11667,7 +13489,7 @@
 </p:sld>
 </file>
 
-<file path=ppt/slides/slide21.xml><?xml version="1.0" encoding="utf-8"?>
+<file path=ppt/slides/slide28.xml><?xml version="1.0" encoding="utf-8"?>
 <p:sld xmlns:a="http://schemas.openxmlformats.org/drawingml/2006/main" xmlns:r="http://schemas.openxmlformats.org/officeDocument/2006/relationships" xmlns:p="http://schemas.openxmlformats.org/presentationml/2006/main">
   <p:cSld>
     <p:spTree>
@@ -11742,7 +13564,7 @@
             <a:fld id="{45C00377-489B-40EC-B059-26BDDD2E89B9}" type="slidenum">
               <a:rPr lang="en-US" smtClean="0"/>
               <a:pPr/>
-              <a:t>21</a:t>
+              <a:t>28</a:t>
             </a:fld>
             <a:endParaRPr lang="en-US"/>
           </a:p>
@@ -11992,7 +13814,7 @@
         </p:blipFill>
         <p:spPr>
           <a:xfrm>
-            <a:off x="3033792" y="3621121"/>
+            <a:off x="4971080" y="4049880"/>
             <a:ext cx="6124415" cy="2385993"/>
           </a:xfrm>
           <a:prstGeom prst="rect">
@@ -12000,6 +13822,89 @@
           </a:prstGeom>
         </p:spPr>
       </p:pic>
+      <p:pic>
+        <p:nvPicPr>
+          <p:cNvPr id="3" name="Content Placeholder 5">
+            <a:extLst>
+              <a:ext uri="{FF2B5EF4-FFF2-40B4-BE49-F238E27FC236}">
+                <a16:creationId xmlns:a16="http://schemas.microsoft.com/office/drawing/2014/main" id="{17A6B2D6-72CF-F5F3-FC31-CB8FE323ABF6}"/>
+              </a:ext>
+            </a:extLst>
+          </p:cNvPr>
+          <p:cNvPicPr>
+            <a:picLocks noGrp="1" noChangeAspect="1"/>
+          </p:cNvPicPr>
+          <p:nvPr>
+            <p:ph idx="1"/>
+          </p:nvPr>
+        </p:nvPicPr>
+        <p:blipFill>
+          <a:blip r:embed="rId3"/>
+          <a:srcRect l="26027" r="25744" b="12068"/>
+          <a:stretch>
+            <a:fillRect/>
+          </a:stretch>
+        </p:blipFill>
+        <p:spPr>
+          <a:xfrm>
+            <a:off x="838199" y="3236879"/>
+            <a:ext cx="3533614" cy="1424909"/>
+          </a:xfrm>
+          <a:prstGeom prst="rect">
+            <a:avLst/>
+          </a:prstGeom>
+        </p:spPr>
+      </p:pic>
+      <p:sp>
+        <p:nvSpPr>
+          <p:cNvPr id="5" name="Bent Arrow 4">
+            <a:extLst>
+              <a:ext uri="{FF2B5EF4-FFF2-40B4-BE49-F238E27FC236}">
+                <a16:creationId xmlns:a16="http://schemas.microsoft.com/office/drawing/2014/main" id="{8A688CBA-3386-F193-21DF-10D0F142508A}"/>
+              </a:ext>
+            </a:extLst>
+          </p:cNvPr>
+          <p:cNvSpPr/>
+          <p:nvPr/>
+        </p:nvSpPr>
+        <p:spPr>
+          <a:xfrm flipV="1">
+            <a:off x="3450723" y="4788976"/>
+            <a:ext cx="1262052" cy="1053885"/>
+          </a:xfrm>
+          <a:prstGeom prst="bentArrow">
+            <a:avLst/>
+          </a:prstGeom>
+        </p:spPr>
+        <p:style>
+          <a:lnRef idx="2">
+            <a:schemeClr val="accent1">
+              <a:shade val="15000"/>
+            </a:schemeClr>
+          </a:lnRef>
+          <a:fillRef idx="1">
+            <a:schemeClr val="accent1"/>
+          </a:fillRef>
+          <a:effectRef idx="0">
+            <a:schemeClr val="accent1"/>
+          </a:effectRef>
+          <a:fontRef idx="minor">
+            <a:schemeClr val="lt1"/>
+          </a:fontRef>
+        </p:style>
+        <p:txBody>
+          <a:bodyPr rtlCol="0" anchor="ctr"/>
+          <a:lstStyle/>
+          <a:p>
+            <a:pPr algn="ctr"/>
+            <a:endParaRPr lang="en-US">
+              <a:solidFill>
+                <a:schemeClr val="tx1"/>
+              </a:solidFill>
+            </a:endParaRPr>
+          </a:p>
+        </p:txBody>
+      </p:sp>
     </p:spTree>
     <p:extLst>
       <p:ext uri="{BB962C8B-B14F-4D97-AF65-F5344CB8AC3E}">
@@ -12013,7 +13918,7 @@
 </p:sld>
 </file>
 
-<file path=ppt/slides/slide22.xml><?xml version="1.0" encoding="utf-8"?>
+<file path=ppt/slides/slide29.xml><?xml version="1.0" encoding="utf-8"?>
 <p:sld xmlns:a="http://schemas.openxmlformats.org/drawingml/2006/main" xmlns:r="http://schemas.openxmlformats.org/officeDocument/2006/relationships" xmlns:p="http://schemas.openxmlformats.org/presentationml/2006/main">
   <p:cSld>
     <p:spTree>
@@ -12088,7 +13993,7 @@
             <a:fld id="{45C00377-489B-40EC-B059-26BDDD2E89B9}" type="slidenum">
               <a:rPr lang="en-US" smtClean="0"/>
               <a:pPr/>
-              <a:t>22</a:t>
+              <a:t>29</a:t>
             </a:fld>
             <a:endParaRPr lang="en-US"/>
           </a:p>
@@ -12137,7 +14042,180 @@
 </p:sld>
 </file>
 
-<file path=ppt/slides/slide23.xml><?xml version="1.0" encoding="utf-8"?>
+<file path=ppt/slides/slide3.xml><?xml version="1.0" encoding="utf-8"?>
+<p:sld xmlns:a="http://schemas.openxmlformats.org/drawingml/2006/main" xmlns:r="http://schemas.openxmlformats.org/officeDocument/2006/relationships" xmlns:p="http://schemas.openxmlformats.org/presentationml/2006/main">
+  <p:cSld>
+    <p:spTree>
+      <p:nvGrpSpPr>
+        <p:cNvPr id="1" name=""/>
+        <p:cNvGrpSpPr/>
+        <p:nvPr/>
+      </p:nvGrpSpPr>
+      <p:grpSpPr>
+        <a:xfrm>
+          <a:off x="0" y="0"/>
+          <a:ext cx="0" cy="0"/>
+          <a:chOff x="0" y="0"/>
+          <a:chExt cx="0" cy="0"/>
+        </a:xfrm>
+      </p:grpSpPr>
+      <p:sp>
+        <p:nvSpPr>
+          <p:cNvPr id="3" name="Content Placeholder 2">
+            <a:extLst>
+              <a:ext uri="{FF2B5EF4-FFF2-40B4-BE49-F238E27FC236}">
+                <a16:creationId xmlns:a16="http://schemas.microsoft.com/office/drawing/2014/main" id="{1E7EFF20-7721-22CF-0B9C-0225448146B6}"/>
+              </a:ext>
+            </a:extLst>
+          </p:cNvPr>
+          <p:cNvSpPr>
+            <a:spLocks noGrp="1"/>
+          </p:cNvSpPr>
+          <p:nvPr>
+            <p:ph idx="1"/>
+          </p:nvPr>
+        </p:nvSpPr>
+        <p:spPr/>
+        <p:txBody>
+          <a:bodyPr>
+            <a:normAutofit/>
+          </a:bodyPr>
+          <a:lstStyle/>
+          <a:p>
+            <a:r>
+              <a:rPr lang="en-US" dirty="0"/>
+              <a:t>A method of describing a data set with a single figure</a:t>
+            </a:r>
+          </a:p>
+          <a:p>
+            <a:pPr lvl="1"/>
+            <a:endParaRPr lang="en-US" dirty="0"/>
+          </a:p>
+          <a:p>
+            <a:r>
+              <a:rPr lang="en-US" dirty="0"/>
+              <a:t>Main methods:</a:t>
+            </a:r>
+          </a:p>
+          <a:p>
+            <a:pPr lvl="1"/>
+            <a:r>
+              <a:rPr lang="en-US" dirty="0"/>
+              <a:t>Mean</a:t>
+            </a:r>
+          </a:p>
+          <a:p>
+            <a:pPr lvl="1"/>
+            <a:r>
+              <a:rPr lang="en-US" dirty="0"/>
+              <a:t>Median</a:t>
+            </a:r>
+          </a:p>
+          <a:p>
+            <a:pPr lvl="1"/>
+            <a:r>
+              <a:rPr lang="en-US" dirty="0"/>
+              <a:t>Mode </a:t>
+            </a:r>
+          </a:p>
+          <a:p>
+            <a:pPr lvl="1"/>
+            <a:endParaRPr lang="en-US" dirty="0"/>
+          </a:p>
+          <a:p>
+            <a:r>
+              <a:rPr lang="en-US" dirty="0"/>
+              <a:t>Most appropriate method depends on the data and question</a:t>
+            </a:r>
+          </a:p>
+          <a:p>
+            <a:pPr lvl="1"/>
+            <a:r>
+              <a:rPr lang="en-US" dirty="0"/>
+              <a:t>Scale of measurement</a:t>
+            </a:r>
+          </a:p>
+          <a:p>
+            <a:pPr lvl="1"/>
+            <a:r>
+              <a:rPr lang="en-US" dirty="0"/>
+              <a:t>Outliers and data distribution</a:t>
+            </a:r>
+          </a:p>
+        </p:txBody>
+      </p:sp>
+      <p:sp>
+        <p:nvSpPr>
+          <p:cNvPr id="4" name="Slide Number Placeholder 3">
+            <a:extLst>
+              <a:ext uri="{FF2B5EF4-FFF2-40B4-BE49-F238E27FC236}">
+                <a16:creationId xmlns:a16="http://schemas.microsoft.com/office/drawing/2014/main" id="{320425CF-433B-BA64-63C0-A6A6E36B0490}"/>
+              </a:ext>
+            </a:extLst>
+          </p:cNvPr>
+          <p:cNvSpPr>
+            <a:spLocks noGrp="1"/>
+          </p:cNvSpPr>
+          <p:nvPr>
+            <p:ph type="sldNum" sz="quarter" idx="12"/>
+          </p:nvPr>
+        </p:nvSpPr>
+        <p:spPr/>
+        <p:txBody>
+          <a:bodyPr/>
+          <a:lstStyle/>
+          <a:p>
+            <a:fld id="{45C00377-489B-40EC-B059-26BDDD2E89B9}" type="slidenum">
+              <a:rPr lang="en-US" smtClean="0"/>
+              <a:pPr/>
+              <a:t>3</a:t>
+            </a:fld>
+            <a:endParaRPr lang="en-US"/>
+          </a:p>
+        </p:txBody>
+      </p:sp>
+      <p:sp>
+        <p:nvSpPr>
+          <p:cNvPr id="2" name="Title 1">
+            <a:extLst>
+              <a:ext uri="{FF2B5EF4-FFF2-40B4-BE49-F238E27FC236}">
+                <a16:creationId xmlns:a16="http://schemas.microsoft.com/office/drawing/2014/main" id="{537E157F-E6F6-FE34-3C0A-A701E167D090}"/>
+              </a:ext>
+            </a:extLst>
+          </p:cNvPr>
+          <p:cNvSpPr>
+            <a:spLocks noGrp="1"/>
+          </p:cNvSpPr>
+          <p:nvPr>
+            <p:ph type="title"/>
+          </p:nvPr>
+        </p:nvSpPr>
+        <p:spPr/>
+        <p:txBody>
+          <a:bodyPr/>
+          <a:lstStyle/>
+          <a:p>
+            <a:r>
+              <a:rPr lang="en-US" dirty="0"/>
+              <a:t>Measures of central tendency</a:t>
+            </a:r>
+          </a:p>
+        </p:txBody>
+      </p:sp>
+    </p:spTree>
+    <p:extLst>
+      <p:ext uri="{BB962C8B-B14F-4D97-AF65-F5344CB8AC3E}">
+        <p14:creationId xmlns:p14="http://schemas.microsoft.com/office/powerpoint/2010/main" val="2698741083"/>
+      </p:ext>
+    </p:extLst>
+  </p:cSld>
+  <p:clrMapOvr>
+    <a:masterClrMapping/>
+  </p:clrMapOvr>
+</p:sld>
+</file>
+
+<file path=ppt/slides/slide30.xml><?xml version="1.0" encoding="utf-8"?>
 <p:sld xmlns:a="http://schemas.openxmlformats.org/drawingml/2006/main" xmlns:r="http://schemas.openxmlformats.org/officeDocument/2006/relationships" xmlns:p="http://schemas.openxmlformats.org/presentationml/2006/main">
   <p:cSld>
     <p:spTree>
@@ -12184,7 +14262,7 @@
             <a:fld id="{45C00377-489B-40EC-B059-26BDDD2E89B9}" type="slidenum">
               <a:rPr lang="en-US" smtClean="0"/>
               <a:pPr/>
-              <a:t>23</a:t>
+              <a:t>30</a:t>
             </a:fld>
             <a:endParaRPr lang="en-US"/>
           </a:p>
@@ -12233,7 +14311,7 @@
 </p:sld>
 </file>
 
-<file path=ppt/slides/slide24.xml><?xml version="1.0" encoding="utf-8"?>
+<file path=ppt/slides/slide31.xml><?xml version="1.0" encoding="utf-8"?>
 <p:sld xmlns:a="http://schemas.openxmlformats.org/drawingml/2006/main" xmlns:r="http://schemas.openxmlformats.org/officeDocument/2006/relationships" xmlns:p="http://schemas.openxmlformats.org/presentationml/2006/main">
   <p:cSld>
     <p:spTree>
@@ -12304,7 +14382,7 @@
             <a:fld id="{45C00377-489B-40EC-B059-26BDDD2E89B9}" type="slidenum">
               <a:rPr lang="en-US" smtClean="0"/>
               <a:pPr/>
-              <a:t>24</a:t>
+              <a:t>31</a:t>
             </a:fld>
             <a:endParaRPr lang="en-US"/>
           </a:p>
@@ -12354,7 +14432,7 @@
 </p:sld>
 </file>
 
-<file path=ppt/slides/slide25.xml><?xml version="1.0" encoding="utf-8"?>
+<file path=ppt/slides/slide32.xml><?xml version="1.0" encoding="utf-8"?>
 <p:sld xmlns:a="http://schemas.openxmlformats.org/drawingml/2006/main" xmlns:r="http://schemas.openxmlformats.org/officeDocument/2006/relationships" xmlns:p="http://schemas.openxmlformats.org/presentationml/2006/main">
   <p:cSld>
     <p:spTree>
@@ -12431,7 +14509,7 @@
             <a:fld id="{45C00377-489B-40EC-B059-26BDDD2E89B9}" type="slidenum">
               <a:rPr lang="en-US" smtClean="0"/>
               <a:pPr/>
-              <a:t>25</a:t>
+              <a:t>32</a:t>
             </a:fld>
             <a:endParaRPr lang="en-US"/>
           </a:p>
@@ -12521,7 +14599,7 @@
 </p:sld>
 </file>
 
-<file path=ppt/slides/slide26.xml><?xml version="1.0" encoding="utf-8"?>
+<file path=ppt/slides/slide33.xml><?xml version="1.0" encoding="utf-8"?>
 <p:sld xmlns:a="http://schemas.openxmlformats.org/drawingml/2006/main" xmlns:r="http://schemas.openxmlformats.org/officeDocument/2006/relationships" xmlns:p="http://schemas.openxmlformats.org/presentationml/2006/main">
   <p:cSld>
     <p:spTree>
@@ -12653,7 +14731,7 @@
 </p:sld>
 </file>
 
-<file path=ppt/slides/slide27.xml><?xml version="1.0" encoding="utf-8"?>
+<file path=ppt/slides/slide34.xml><?xml version="1.0" encoding="utf-8"?>
 <p:sld xmlns:a="http://schemas.openxmlformats.org/drawingml/2006/main" xmlns:r="http://schemas.openxmlformats.org/officeDocument/2006/relationships" xmlns:p="http://schemas.openxmlformats.org/presentationml/2006/main">
   <p:cSld>
     <p:spTree>
@@ -12795,7 +14873,7 @@
 </p:sld>
 </file>
 
-<file path=ppt/slides/slide28.xml><?xml version="1.0" encoding="utf-8"?>
+<file path=ppt/slides/slide35.xml><?xml version="1.0" encoding="utf-8"?>
 <p:sld xmlns:a="http://schemas.openxmlformats.org/drawingml/2006/main" xmlns:r="http://schemas.openxmlformats.org/officeDocument/2006/relationships" xmlns:p="http://schemas.openxmlformats.org/presentationml/2006/main">
   <p:cSld>
     <p:spTree>
@@ -12916,7 +14994,7 @@
 </p:sld>
 </file>
 
-<file path=ppt/slides/slide29.xml><?xml version="1.0" encoding="utf-8"?>
+<file path=ppt/slides/slide36.xml><?xml version="1.0" encoding="utf-8"?>
 <p:sld xmlns:a="http://schemas.openxmlformats.org/drawingml/2006/main" xmlns:r="http://schemas.openxmlformats.org/officeDocument/2006/relationships" xmlns:p="http://schemas.openxmlformats.org/presentationml/2006/main">
   <p:cSld>
     <p:spTree>
@@ -12963,7 +15041,7 @@
             <a:fld id="{45C00377-489B-40EC-B059-26BDDD2E89B9}" type="slidenum">
               <a:rPr lang="en-US" smtClean="0"/>
               <a:pPr/>
-              <a:t>29</a:t>
+              <a:t>36</a:t>
             </a:fld>
             <a:endParaRPr lang="en-US"/>
           </a:p>
@@ -13012,7 +15090,7 @@
 </p:sld>
 </file>
 
-<file path=ppt/slides/slide3.xml><?xml version="1.0" encoding="utf-8"?>
+<file path=ppt/slides/slide37.xml><?xml version="1.0" encoding="utf-8"?>
 <p:sld xmlns:a="http://schemas.openxmlformats.org/drawingml/2006/main" xmlns:r="http://schemas.openxmlformats.org/officeDocument/2006/relationships" xmlns:p="http://schemas.openxmlformats.org/presentationml/2006/main">
   <p:cSld>
     <p:spTree>
@@ -13031,10 +15109,38 @@
       </p:grpSpPr>
       <p:sp>
         <p:nvSpPr>
+          <p:cNvPr id="2" name="Title 1">
+            <a:extLst>
+              <a:ext uri="{FF2B5EF4-FFF2-40B4-BE49-F238E27FC236}">
+                <a16:creationId xmlns:a16="http://schemas.microsoft.com/office/drawing/2014/main" id="{34DEF9CC-1EF7-C20D-ABF9-9A718993E68A}"/>
+              </a:ext>
+            </a:extLst>
+          </p:cNvPr>
+          <p:cNvSpPr>
+            <a:spLocks noGrp="1"/>
+          </p:cNvSpPr>
+          <p:nvPr>
+            <p:ph type="title"/>
+          </p:nvPr>
+        </p:nvSpPr>
+        <p:spPr/>
+        <p:txBody>
+          <a:bodyPr/>
+          <a:lstStyle/>
+          <a:p>
+            <a:r>
+              <a:rPr lang="en-US"/>
+              <a:t>What they reveal</a:t>
+            </a:r>
+          </a:p>
+        </p:txBody>
+      </p:sp>
+      <p:sp>
+        <p:nvSpPr>
           <p:cNvPr id="3" name="Content Placeholder 2">
             <a:extLst>
               <a:ext uri="{FF2B5EF4-FFF2-40B4-BE49-F238E27FC236}">
-                <a16:creationId xmlns:a16="http://schemas.microsoft.com/office/drawing/2014/main" id="{1E7EFF20-7721-22CF-0B9C-0225448146B6}"/>
+                <a16:creationId xmlns:a16="http://schemas.microsoft.com/office/drawing/2014/main" id="{228A91EC-F982-93D0-0803-D5331F2C3D43}"/>
               </a:ext>
             </a:extLst>
           </p:cNvPr>
@@ -13047,69 +15153,24 @@
         </p:nvSpPr>
         <p:spPr/>
         <p:txBody>
-          <a:bodyPr>
-            <a:normAutofit/>
-          </a:bodyPr>
-          <a:lstStyle/>
-          <a:p>
-            <a:r>
-              <a:rPr lang="en-US" dirty="0"/>
-              <a:t>A method of describing a data set with a single figure</a:t>
-            </a:r>
-          </a:p>
-          <a:p>
-            <a:pPr lvl="1"/>
-            <a:endParaRPr lang="en-US" dirty="0"/>
-          </a:p>
-          <a:p>
-            <a:r>
-              <a:rPr lang="en-US" dirty="0"/>
-              <a:t>Main methods:</a:t>
-            </a:r>
-          </a:p>
-          <a:p>
-            <a:pPr lvl="1"/>
-            <a:r>
-              <a:rPr lang="en-US" dirty="0"/>
-              <a:t>Mean</a:t>
-            </a:r>
-          </a:p>
-          <a:p>
-            <a:pPr lvl="1"/>
-            <a:r>
-              <a:rPr lang="en-US" dirty="0"/>
-              <a:t>Median</a:t>
-            </a:r>
-          </a:p>
-          <a:p>
-            <a:pPr lvl="1"/>
-            <a:r>
-              <a:rPr lang="en-US" dirty="0"/>
-              <a:t>Mode </a:t>
-            </a:r>
-          </a:p>
-          <a:p>
-            <a:pPr lvl="1"/>
-            <a:endParaRPr lang="en-US" dirty="0"/>
-          </a:p>
-          <a:p>
-            <a:r>
-              <a:rPr lang="en-US" dirty="0"/>
-              <a:t>Most appropriate method depends on the data and question</a:t>
-            </a:r>
-          </a:p>
-          <a:p>
-            <a:pPr lvl="1"/>
-            <a:r>
-              <a:rPr lang="en-US" dirty="0"/>
-              <a:t>Scale of measurement</a:t>
-            </a:r>
-          </a:p>
-          <a:p>
-            <a:pPr lvl="1"/>
-            <a:r>
-              <a:rPr lang="en-US" dirty="0"/>
-              <a:t>Outliers and data distribution</a:t>
+          <a:bodyPr/>
+          <a:lstStyle/>
+          <a:p>
+            <a:r>
+              <a:rPr lang="en-US" dirty="0"/>
+              <a:t>Quick snapshot of your data</a:t>
+            </a:r>
+          </a:p>
+          <a:p>
+            <a:r>
+              <a:rPr lang="en-US" dirty="0"/>
+              <a:t>Identify typical values and variation</a:t>
+            </a:r>
+          </a:p>
+          <a:p>
+            <a:r>
+              <a:rPr lang="en-US" dirty="0"/>
+              <a:t>Compare groups or time periods</a:t>
             </a:r>
           </a:p>
         </p:txBody>
@@ -13119,7 +15180,7 @@
           <p:cNvPr id="4" name="Slide Number Placeholder 3">
             <a:extLst>
               <a:ext uri="{FF2B5EF4-FFF2-40B4-BE49-F238E27FC236}">
-                <a16:creationId xmlns:a16="http://schemas.microsoft.com/office/drawing/2014/main" id="{320425CF-433B-BA64-63C0-A6A6E36B0490}"/>
+                <a16:creationId xmlns:a16="http://schemas.microsoft.com/office/drawing/2014/main" id="{C82B0F1F-8354-3EF0-C3F4-777FFECF6337}"/>
               </a:ext>
             </a:extLst>
           </p:cNvPr>
@@ -13138,163 +15199,7 @@
             <a:fld id="{45C00377-489B-40EC-B059-26BDDD2E89B9}" type="slidenum">
               <a:rPr lang="en-US" smtClean="0"/>
               <a:pPr/>
-              <a:t>3</a:t>
-            </a:fld>
-            <a:endParaRPr lang="en-US"/>
-          </a:p>
-        </p:txBody>
-      </p:sp>
-      <p:sp>
-        <p:nvSpPr>
-          <p:cNvPr id="2" name="Title 1">
-            <a:extLst>
-              <a:ext uri="{FF2B5EF4-FFF2-40B4-BE49-F238E27FC236}">
-                <a16:creationId xmlns:a16="http://schemas.microsoft.com/office/drawing/2014/main" id="{537E157F-E6F6-FE34-3C0A-A701E167D090}"/>
-              </a:ext>
-            </a:extLst>
-          </p:cNvPr>
-          <p:cNvSpPr>
-            <a:spLocks noGrp="1"/>
-          </p:cNvSpPr>
-          <p:nvPr>
-            <p:ph type="title"/>
-          </p:nvPr>
-        </p:nvSpPr>
-        <p:spPr/>
-        <p:txBody>
-          <a:bodyPr/>
-          <a:lstStyle/>
-          <a:p>
-            <a:r>
-              <a:rPr lang="en-US" dirty="0"/>
-              <a:t>Measures of central tendency</a:t>
-            </a:r>
-          </a:p>
-        </p:txBody>
-      </p:sp>
-    </p:spTree>
-    <p:extLst>
-      <p:ext uri="{BB962C8B-B14F-4D97-AF65-F5344CB8AC3E}">
-        <p14:creationId xmlns:p14="http://schemas.microsoft.com/office/powerpoint/2010/main" val="2698741083"/>
-      </p:ext>
-    </p:extLst>
-  </p:cSld>
-  <p:clrMapOvr>
-    <a:masterClrMapping/>
-  </p:clrMapOvr>
-</p:sld>
-</file>
-
-<file path=ppt/slides/slide30.xml><?xml version="1.0" encoding="utf-8"?>
-<p:sld xmlns:a="http://schemas.openxmlformats.org/drawingml/2006/main" xmlns:r="http://schemas.openxmlformats.org/officeDocument/2006/relationships" xmlns:p="http://schemas.openxmlformats.org/presentationml/2006/main">
-  <p:cSld>
-    <p:spTree>
-      <p:nvGrpSpPr>
-        <p:cNvPr id="1" name=""/>
-        <p:cNvGrpSpPr/>
-        <p:nvPr/>
-      </p:nvGrpSpPr>
-      <p:grpSpPr>
-        <a:xfrm>
-          <a:off x="0" y="0"/>
-          <a:ext cx="0" cy="0"/>
-          <a:chOff x="0" y="0"/>
-          <a:chExt cx="0" cy="0"/>
-        </a:xfrm>
-      </p:grpSpPr>
-      <p:sp>
-        <p:nvSpPr>
-          <p:cNvPr id="2" name="Title 1">
-            <a:extLst>
-              <a:ext uri="{FF2B5EF4-FFF2-40B4-BE49-F238E27FC236}">
-                <a16:creationId xmlns:a16="http://schemas.microsoft.com/office/drawing/2014/main" id="{34DEF9CC-1EF7-C20D-ABF9-9A718993E68A}"/>
-              </a:ext>
-            </a:extLst>
-          </p:cNvPr>
-          <p:cNvSpPr>
-            <a:spLocks noGrp="1"/>
-          </p:cNvSpPr>
-          <p:nvPr>
-            <p:ph type="title"/>
-          </p:nvPr>
-        </p:nvSpPr>
-        <p:spPr/>
-        <p:txBody>
-          <a:bodyPr/>
-          <a:lstStyle/>
-          <a:p>
-            <a:r>
-              <a:rPr lang="en-US"/>
-              <a:t>What they reveal</a:t>
-            </a:r>
-          </a:p>
-        </p:txBody>
-      </p:sp>
-      <p:sp>
-        <p:nvSpPr>
-          <p:cNvPr id="3" name="Content Placeholder 2">
-            <a:extLst>
-              <a:ext uri="{FF2B5EF4-FFF2-40B4-BE49-F238E27FC236}">
-                <a16:creationId xmlns:a16="http://schemas.microsoft.com/office/drawing/2014/main" id="{228A91EC-F982-93D0-0803-D5331F2C3D43}"/>
-              </a:ext>
-            </a:extLst>
-          </p:cNvPr>
-          <p:cNvSpPr>
-            <a:spLocks noGrp="1"/>
-          </p:cNvSpPr>
-          <p:nvPr>
-            <p:ph idx="1"/>
-          </p:nvPr>
-        </p:nvSpPr>
-        <p:spPr/>
-        <p:txBody>
-          <a:bodyPr/>
-          <a:lstStyle/>
-          <a:p>
-            <a:r>
-              <a:rPr lang="en-US" dirty="0"/>
-              <a:t>Quick snapshot of your data</a:t>
-            </a:r>
-          </a:p>
-          <a:p>
-            <a:r>
-              <a:rPr lang="en-US" dirty="0"/>
-              <a:t>Identify typical values and variation</a:t>
-            </a:r>
-          </a:p>
-          <a:p>
-            <a:r>
-              <a:rPr lang="en-US" dirty="0"/>
-              <a:t>Compare groups or time periods</a:t>
-            </a:r>
-          </a:p>
-        </p:txBody>
-      </p:sp>
-      <p:sp>
-        <p:nvSpPr>
-          <p:cNvPr id="4" name="Slide Number Placeholder 3">
-            <a:extLst>
-              <a:ext uri="{FF2B5EF4-FFF2-40B4-BE49-F238E27FC236}">
-                <a16:creationId xmlns:a16="http://schemas.microsoft.com/office/drawing/2014/main" id="{C82B0F1F-8354-3EF0-C3F4-777FFECF6337}"/>
-              </a:ext>
-            </a:extLst>
-          </p:cNvPr>
-          <p:cNvSpPr>
-            <a:spLocks noGrp="1"/>
-          </p:cNvSpPr>
-          <p:nvPr>
-            <p:ph type="sldNum" sz="quarter" idx="12"/>
-          </p:nvPr>
-        </p:nvSpPr>
-        <p:spPr/>
-        <p:txBody>
-          <a:bodyPr/>
-          <a:lstStyle/>
-          <a:p>
-            <a:fld id="{45C00377-489B-40EC-B059-26BDDD2E89B9}" type="slidenum">
-              <a:rPr lang="en-US" smtClean="0"/>
-              <a:pPr/>
-              <a:t>30</a:t>
+              <a:t>37</a:t>
             </a:fld>
             <a:endParaRPr lang="en-US"/>
           </a:p>
@@ -13343,7 +15248,7 @@
 </p:sld>
 </file>
 
-<file path=ppt/slides/slide31.xml><?xml version="1.0" encoding="utf-8"?>
+<file path=ppt/slides/slide38.xml><?xml version="1.0" encoding="utf-8"?>
 <p:sld xmlns:a="http://schemas.openxmlformats.org/drawingml/2006/main" xmlns:r="http://schemas.openxmlformats.org/officeDocument/2006/relationships" xmlns:p="http://schemas.openxmlformats.org/presentationml/2006/main">
   <p:cSld>
     <p:spTree>
@@ -13474,7 +15379,7 @@
 </p:sld>
 </file>
 
-<file path=ppt/slides/slide32.xml><?xml version="1.0" encoding="utf-8"?>
+<file path=ppt/slides/slide39.xml><?xml version="1.0" encoding="utf-8"?>
 <p:sld xmlns:a="http://schemas.openxmlformats.org/drawingml/2006/main" xmlns:r="http://schemas.openxmlformats.org/officeDocument/2006/relationships" xmlns:p="http://schemas.openxmlformats.org/presentationml/2006/main">
   <p:cSld>
     <p:spTree>
@@ -13605,7 +15510,7 @@
             <a:fld id="{45C00377-489B-40EC-B059-26BDDD2E89B9}" type="slidenum">
               <a:rPr lang="en-US" smtClean="0"/>
               <a:pPr/>
-              <a:t>32</a:t>
+              <a:t>39</a:t>
             </a:fld>
             <a:endParaRPr lang="en-US"/>
           </a:p>
@@ -13624,7 +15529,184 @@
 </p:sld>
 </file>
 
-<file path=ppt/slides/slide33.xml><?xml version="1.0" encoding="utf-8"?>
+<file path=ppt/slides/slide4.xml><?xml version="1.0" encoding="utf-8"?>
+<p:sld xmlns:a="http://schemas.openxmlformats.org/drawingml/2006/main" xmlns:r="http://schemas.openxmlformats.org/officeDocument/2006/relationships" xmlns:p="http://schemas.openxmlformats.org/presentationml/2006/main">
+  <p:cSld>
+    <p:spTree>
+      <p:nvGrpSpPr>
+        <p:cNvPr id="1" name="">
+          <a:extLst>
+            <a:ext uri="{FF2B5EF4-FFF2-40B4-BE49-F238E27FC236}">
+              <a16:creationId xmlns:a16="http://schemas.microsoft.com/office/drawing/2014/main" id="{7BCD22BB-FD16-96CE-85B0-13D619F19E23}"/>
+            </a:ext>
+          </a:extLst>
+        </p:cNvPr>
+        <p:cNvGrpSpPr/>
+        <p:nvPr/>
+      </p:nvGrpSpPr>
+      <p:grpSpPr>
+        <a:xfrm>
+          <a:off x="0" y="0"/>
+          <a:ext cx="0" cy="0"/>
+          <a:chOff x="0" y="0"/>
+          <a:chExt cx="0" cy="0"/>
+        </a:xfrm>
+      </p:grpSpPr>
+      <p:sp>
+        <p:nvSpPr>
+          <p:cNvPr id="2" name="Title 1">
+            <a:extLst>
+              <a:ext uri="{FF2B5EF4-FFF2-40B4-BE49-F238E27FC236}">
+                <a16:creationId xmlns:a16="http://schemas.microsoft.com/office/drawing/2014/main" id="{C54EF5EC-1A9E-DDC3-DBFA-C7F7A42B3F83}"/>
+              </a:ext>
+            </a:extLst>
+          </p:cNvPr>
+          <p:cNvSpPr>
+            <a:spLocks noGrp="1"/>
+          </p:cNvSpPr>
+          <p:nvPr>
+            <p:ph type="title"/>
+          </p:nvPr>
+        </p:nvSpPr>
+        <p:spPr/>
+        <p:txBody>
+          <a:bodyPr/>
+          <a:lstStyle/>
+          <a:p>
+            <a:r>
+              <a:rPr lang="en-US" dirty="0"/>
+              <a:t>Mean, Median and Mode</a:t>
+            </a:r>
+          </a:p>
+        </p:txBody>
+      </p:sp>
+      <p:sp>
+        <p:nvSpPr>
+          <p:cNvPr id="3" name="Content Placeholder 2">
+            <a:extLst>
+              <a:ext uri="{FF2B5EF4-FFF2-40B4-BE49-F238E27FC236}">
+                <a16:creationId xmlns:a16="http://schemas.microsoft.com/office/drawing/2014/main" id="{D9F83990-63DF-C1E7-CB5D-672EC20E5059}"/>
+              </a:ext>
+            </a:extLst>
+          </p:cNvPr>
+          <p:cNvSpPr>
+            <a:spLocks noGrp="1"/>
+          </p:cNvSpPr>
+          <p:nvPr>
+            <p:ph idx="1"/>
+          </p:nvPr>
+        </p:nvSpPr>
+        <p:spPr/>
+        <p:txBody>
+          <a:bodyPr/>
+          <a:lstStyle/>
+          <a:p>
+            <a:r>
+              <a:rPr lang="en-US" dirty="0"/>
+              <a:t>Mean: arithmetic mean </a:t>
+            </a:r>
+          </a:p>
+          <a:p>
+            <a:pPr lvl="1"/>
+            <a:r>
+              <a:rPr lang="en-US" dirty="0"/>
+              <a:t>Determined by the sum of the values in the distribution divided by the number of values.</a:t>
+            </a:r>
+          </a:p>
+          <a:p>
+            <a:pPr lvl="1"/>
+            <a:r>
+              <a:rPr lang="en-US" dirty="0"/>
+              <a:t>Misleading if outliers or asymmetries are present</a:t>
+            </a:r>
+          </a:p>
+          <a:p>
+            <a:pPr lvl="1"/>
+            <a:endParaRPr lang="en-US" dirty="0"/>
+          </a:p>
+          <a:p>
+            <a:r>
+              <a:rPr lang="en-US" dirty="0"/>
+              <a:t>Median: the middle value</a:t>
+            </a:r>
+          </a:p>
+          <a:p>
+            <a:pPr lvl="1"/>
+            <a:r>
+              <a:rPr lang="en-US" dirty="0"/>
+              <a:t>the data point below which half of the values lie</a:t>
+            </a:r>
+          </a:p>
+          <a:p>
+            <a:pPr lvl="1"/>
+            <a:r>
+              <a:rPr lang="en-US" dirty="0"/>
+              <a:t>Ignores magnitude, focused on order</a:t>
+            </a:r>
+          </a:p>
+          <a:p>
+            <a:pPr lvl="1"/>
+            <a:endParaRPr lang="en-US" dirty="0"/>
+          </a:p>
+          <a:p>
+            <a:r>
+              <a:rPr lang="en-US" dirty="0"/>
+              <a:t>Mode: most frequent value</a:t>
+            </a:r>
+          </a:p>
+          <a:p>
+            <a:pPr lvl="1"/>
+            <a:r>
+              <a:rPr lang="en-US" dirty="0"/>
+              <a:t>Rarely used for interval or ratio data</a:t>
+            </a:r>
+          </a:p>
+        </p:txBody>
+      </p:sp>
+      <p:sp>
+        <p:nvSpPr>
+          <p:cNvPr id="4" name="Slide Number Placeholder 3">
+            <a:extLst>
+              <a:ext uri="{FF2B5EF4-FFF2-40B4-BE49-F238E27FC236}">
+                <a16:creationId xmlns:a16="http://schemas.microsoft.com/office/drawing/2014/main" id="{4A4D32E9-1577-E359-5868-2FF46783D4B8}"/>
+              </a:ext>
+            </a:extLst>
+          </p:cNvPr>
+          <p:cNvSpPr>
+            <a:spLocks noGrp="1"/>
+          </p:cNvSpPr>
+          <p:nvPr>
+            <p:ph type="sldNum" sz="quarter" idx="12"/>
+          </p:nvPr>
+        </p:nvSpPr>
+        <p:spPr/>
+        <p:txBody>
+          <a:bodyPr/>
+          <a:lstStyle/>
+          <a:p>
+            <a:fld id="{45C00377-489B-40EC-B059-26BDDD2E89B9}" type="slidenum">
+              <a:rPr lang="en-US" smtClean="0"/>
+              <a:pPr/>
+              <a:t>4</a:t>
+            </a:fld>
+            <a:endParaRPr lang="en-US"/>
+          </a:p>
+        </p:txBody>
+      </p:sp>
+    </p:spTree>
+    <p:extLst>
+      <p:ext uri="{BB962C8B-B14F-4D97-AF65-F5344CB8AC3E}">
+        <p14:creationId xmlns:p14="http://schemas.microsoft.com/office/powerpoint/2010/main" val="2352837927"/>
+      </p:ext>
+    </p:extLst>
+  </p:cSld>
+  <p:clrMapOvr>
+    <a:masterClrMapping/>
+  </p:clrMapOvr>
+</p:sld>
+</file>
+
+<file path=ppt/slides/slide40.xml><?xml version="1.0" encoding="utf-8"?>
 <p:sld xmlns:a="http://schemas.openxmlformats.org/drawingml/2006/main" xmlns:r="http://schemas.openxmlformats.org/officeDocument/2006/relationships" xmlns:p="http://schemas.openxmlformats.org/presentationml/2006/main">
   <p:cSld>
     <p:spTree>
@@ -13727,7 +15809,7 @@
             <a:fld id="{45C00377-489B-40EC-B059-26BDDD2E89B9}" type="slidenum">
               <a:rPr lang="en-US" smtClean="0"/>
               <a:pPr/>
-              <a:t>33</a:t>
+              <a:t>40</a:t>
             </a:fld>
             <a:endParaRPr lang="en-US"/>
           </a:p>
@@ -13776,7 +15858,7 @@
 </p:sld>
 </file>
 
-<file path=ppt/slides/slide34.xml><?xml version="1.0" encoding="utf-8"?>
+<file path=ppt/slides/slide41.xml><?xml version="1.0" encoding="utf-8"?>
 <p:sld xmlns:a="http://schemas.openxmlformats.org/drawingml/2006/main" xmlns:r="http://schemas.openxmlformats.org/officeDocument/2006/relationships" xmlns:p="http://schemas.openxmlformats.org/presentationml/2006/main">
   <p:cSld>
     <p:spTree>
@@ -13822,7 +15904,7 @@
           <a:p>
             <a:r>
               <a:rPr lang="en-US" dirty="0"/>
-              <a:t>Visualization of (mean) comparison</a:t>
+              <a:t>Visualization of averages</a:t>
             </a:r>
           </a:p>
         </p:txBody>
@@ -13849,14 +15931,9 @@
           <a:lstStyle/>
           <a:p>
             <a:r>
-              <a:rPr lang="en-US" dirty="0"/>
-              <a:t>Box plot, bar chart are great for comparing means</a:t>
-            </a:r>
-          </a:p>
-          <a:p>
-            <a:pPr marL="457200" lvl="1" indent="0">
-              <a:buNone/>
-            </a:pPr>
+              <a:rPr lang="en-GB" dirty="0"/>
+              <a:t>Box plots compare distributions across groups; bar charts can compare means</a:t>
+            </a:r>
             <a:endParaRPr lang="en-US" dirty="0"/>
           </a:p>
         </p:txBody>
@@ -13885,7 +15962,7 @@
             <a:fld id="{45C00377-489B-40EC-B059-26BDDD2E89B9}" type="slidenum">
               <a:rPr lang="en-US" smtClean="0"/>
               <a:pPr/>
-              <a:t>34</a:t>
+              <a:t>41</a:t>
             </a:fld>
             <a:endParaRPr lang="en-US"/>
           </a:p>
@@ -13934,8 +16011,8 @@
 </p:sld>
 </file>
 
-<file path=ppt/slides/slide35.xml><?xml version="1.0" encoding="utf-8"?>
-<p:sld xmlns:a="http://schemas.openxmlformats.org/drawingml/2006/main" xmlns:r="http://schemas.openxmlformats.org/officeDocument/2006/relationships" xmlns:p="http://schemas.openxmlformats.org/presentationml/2006/main">
+<file path=ppt/slides/slide42.xml><?xml version="1.0" encoding="utf-8"?>
+<p:sld xmlns:a="http://schemas.openxmlformats.org/drawingml/2006/main" xmlns:r="http://schemas.openxmlformats.org/officeDocument/2006/relationships" xmlns:p="http://schemas.openxmlformats.org/presentationml/2006/main" show="0">
   <p:cSld>
     <p:spTree>
       <p:nvGrpSpPr>
@@ -14073,7 +16150,7 @@
             <a:fld id="{45C00377-489B-40EC-B059-26BDDD2E89B9}" type="slidenum">
               <a:rPr lang="en-US" smtClean="0"/>
               <a:pPr/>
-              <a:t>35</a:t>
+              <a:t>42</a:t>
             </a:fld>
             <a:endParaRPr lang="en-US"/>
           </a:p>
@@ -14131,8 +16208,8 @@
 </p:sld>
 </file>
 
-<file path=ppt/slides/slide36.xml><?xml version="1.0" encoding="utf-8"?>
-<p:sld xmlns:a="http://schemas.openxmlformats.org/drawingml/2006/main" xmlns:r="http://schemas.openxmlformats.org/officeDocument/2006/relationships" xmlns:p="http://schemas.openxmlformats.org/presentationml/2006/main">
+<file path=ppt/slides/slide43.xml><?xml version="1.0" encoding="utf-8"?>
+<p:sld xmlns:a="http://schemas.openxmlformats.org/drawingml/2006/main" xmlns:r="http://schemas.openxmlformats.org/officeDocument/2006/relationships" xmlns:p="http://schemas.openxmlformats.org/presentationml/2006/main" show="0">
   <p:cSld>
     <p:spTree>
       <p:nvGrpSpPr>
@@ -14262,7 +16339,7 @@
             <a:fld id="{45C00377-489B-40EC-B059-26BDDD2E89B9}" type="slidenum">
               <a:rPr lang="en-US" smtClean="0"/>
               <a:pPr/>
-              <a:t>36</a:t>
+              <a:t>43</a:t>
             </a:fld>
             <a:endParaRPr lang="en-US"/>
           </a:p>
@@ -14305,7 +16382,7 @@
 </p:sld>
 </file>
 
-<file path=ppt/slides/slide4.xml><?xml version="1.0" encoding="utf-8"?>
+<file path=ppt/slides/slide5.xml><?xml version="1.0" encoding="utf-8"?>
 <p:sld xmlns:a="http://schemas.openxmlformats.org/drawingml/2006/main" xmlns:r="http://schemas.openxmlformats.org/officeDocument/2006/relationships" xmlns:p="http://schemas.openxmlformats.org/presentationml/2006/main">
   <p:cSld>
     <p:spTree>
@@ -14313,7 +16390,7 @@
         <p:cNvPr id="1" name="">
           <a:extLst>
             <a:ext uri="{FF2B5EF4-FFF2-40B4-BE49-F238E27FC236}">
-              <a16:creationId xmlns:a16="http://schemas.microsoft.com/office/drawing/2014/main" id="{7BCD22BB-FD16-96CE-85B0-13D619F19E23}"/>
+              <a16:creationId xmlns:a16="http://schemas.microsoft.com/office/drawing/2014/main" id="{1355B82B-635F-9597-87C0-03E3EE2CB24C}"/>
             </a:ext>
           </a:extLst>
         </p:cNvPr>
@@ -14333,7 +16410,7 @@
           <p:cNvPr id="2" name="Title 1">
             <a:extLst>
               <a:ext uri="{FF2B5EF4-FFF2-40B4-BE49-F238E27FC236}">
-                <a16:creationId xmlns:a16="http://schemas.microsoft.com/office/drawing/2014/main" id="{C54EF5EC-1A9E-DDC3-DBFA-C7F7A42B3F83}"/>
+                <a16:creationId xmlns:a16="http://schemas.microsoft.com/office/drawing/2014/main" id="{1CEEB948-62B5-FAFC-DB68-54030CD71ADD}"/>
               </a:ext>
             </a:extLst>
           </p:cNvPr>
@@ -14361,7 +16438,7 @@
           <p:cNvPr id="3" name="Content Placeholder 2">
             <a:extLst>
               <a:ext uri="{FF2B5EF4-FFF2-40B4-BE49-F238E27FC236}">
-                <a16:creationId xmlns:a16="http://schemas.microsoft.com/office/drawing/2014/main" id="{D9F83990-63DF-C1E7-CB5D-672EC20E5059}"/>
+                <a16:creationId xmlns:a16="http://schemas.microsoft.com/office/drawing/2014/main" id="{F5495BA0-3956-1BF5-1BF0-B407EC90B010}"/>
               </a:ext>
             </a:extLst>
           </p:cNvPr>
@@ -14386,14 +16463,7 @@
             <a:pPr lvl="1"/>
             <a:r>
               <a:rPr lang="en-US" dirty="0"/>
-              <a:t>Determined by the sum of the values in the distribution divided by the number of values.</a:t>
-            </a:r>
-          </a:p>
-          <a:p>
-            <a:pPr lvl="1"/>
-            <a:r>
-              <a:rPr lang="en-US" dirty="0"/>
-              <a:t>Misleading if outliers or asymmetries are present</a:t>
+              <a:t>=AVERAGE(range)</a:t>
             </a:r>
           </a:p>
           <a:p>
@@ -14410,14 +16480,7 @@
             <a:pPr lvl="1"/>
             <a:r>
               <a:rPr lang="en-US" dirty="0"/>
-              <a:t>the data point below which half of the values lie</a:t>
-            </a:r>
-          </a:p>
-          <a:p>
-            <a:pPr lvl="1"/>
-            <a:r>
-              <a:rPr lang="en-US" dirty="0"/>
-              <a:t>Ignores magnitude, focused on order</a:t>
+              <a:t>=MEDIAN(range)</a:t>
             </a:r>
           </a:p>
           <a:p>
@@ -14433,9 +16496,10 @@
           <a:p>
             <a:pPr lvl="1"/>
             <a:r>
-              <a:rPr lang="en-US" dirty="0"/>
-              <a:t>Rarely used for interval or ratio data</a:t>
-            </a:r>
+              <a:rPr lang="en-GB" dirty="0"/>
+              <a:t>=MODE.SNGL(range)</a:t>
+            </a:r>
+            <a:endParaRPr lang="en-US" dirty="0"/>
           </a:p>
         </p:txBody>
       </p:sp>
@@ -14444,7 +16508,7 @@
           <p:cNvPr id="4" name="Slide Number Placeholder 3">
             <a:extLst>
               <a:ext uri="{FF2B5EF4-FFF2-40B4-BE49-F238E27FC236}">
-                <a16:creationId xmlns:a16="http://schemas.microsoft.com/office/drawing/2014/main" id="{4A4D32E9-1577-E359-5868-2FF46783D4B8}"/>
+                <a16:creationId xmlns:a16="http://schemas.microsoft.com/office/drawing/2014/main" id="{CB2714EA-ED95-B042-CB87-CB0054CFFB22}"/>
               </a:ext>
             </a:extLst>
           </p:cNvPr>
@@ -14463,7 +16527,7 @@
             <a:fld id="{45C00377-489B-40EC-B059-26BDDD2E89B9}" type="slidenum">
               <a:rPr lang="en-US" smtClean="0"/>
               <a:pPr/>
-              <a:t>4</a:t>
+              <a:t>5</a:t>
             </a:fld>
             <a:endParaRPr lang="en-US"/>
           </a:p>
@@ -14472,7 +16536,7 @@
     </p:spTree>
     <p:extLst>
       <p:ext uri="{BB962C8B-B14F-4D97-AF65-F5344CB8AC3E}">
-        <p14:creationId xmlns:p14="http://schemas.microsoft.com/office/powerpoint/2010/main" val="2352837927"/>
+        <p14:creationId xmlns:p14="http://schemas.microsoft.com/office/powerpoint/2010/main" val="538422726"/>
       </p:ext>
     </p:extLst>
   </p:cSld>
@@ -14482,7 +16546,7 @@
 </p:sld>
 </file>
 
-<file path=ppt/slides/slide5.xml><?xml version="1.0" encoding="utf-8"?>
+<file path=ppt/slides/slide6.xml><?xml version="1.0" encoding="utf-8"?>
 <p:sld xmlns:a="http://schemas.openxmlformats.org/drawingml/2006/main" xmlns:r="http://schemas.openxmlformats.org/officeDocument/2006/relationships" xmlns:p="http://schemas.openxmlformats.org/presentationml/2006/main">
   <p:cSld>
     <p:spTree>
@@ -14501,189 +16565,18 @@
       </p:grpSpPr>
       <p:sp>
         <p:nvSpPr>
-          <p:cNvPr id="2" name="Title 1">
-            <a:extLst>
-              <a:ext uri="{FF2B5EF4-FFF2-40B4-BE49-F238E27FC236}">
-                <a16:creationId xmlns:a16="http://schemas.microsoft.com/office/drawing/2014/main" id="{0F5C5114-2493-6C4D-FCE6-E9E71FC2B4DB}"/>
-              </a:ext>
-            </a:extLst>
-          </p:cNvPr>
-          <p:cNvSpPr>
-            <a:spLocks noGrp="1"/>
-          </p:cNvSpPr>
-          <p:nvPr>
-            <p:ph type="title"/>
-          </p:nvPr>
-        </p:nvSpPr>
-        <p:spPr/>
-        <p:txBody>
-          <a:bodyPr/>
-          <a:lstStyle/>
-          <a:p>
-            <a:r>
-              <a:rPr lang="en-US" dirty="0"/>
-              <a:t>The center in symmetric data</a:t>
-            </a:r>
-          </a:p>
-        </p:txBody>
-      </p:sp>
-      <p:sp>
-        <p:nvSpPr>
           <p:cNvPr id="4" name="Slide Number Placeholder 3">
             <a:extLst>
               <a:ext uri="{FF2B5EF4-FFF2-40B4-BE49-F238E27FC236}">
-                <a16:creationId xmlns:a16="http://schemas.microsoft.com/office/drawing/2014/main" id="{7CC6B867-7845-FDD1-CECB-446A320EF33D}"/>
-              </a:ext>
-            </a:extLst>
-          </p:cNvPr>
-          <p:cNvSpPr>
-            <a:spLocks noGrp="1"/>
-          </p:cNvSpPr>
-          <p:nvPr>
-            <p:ph type="sldNum" sz="quarter" idx="12"/>
-          </p:nvPr>
-        </p:nvSpPr>
-        <p:spPr/>
-        <p:txBody>
-          <a:bodyPr/>
-          <a:lstStyle/>
-          <a:p>
-            <a:fld id="{45C00377-489B-40EC-B059-26BDDD2E89B9}" type="slidenum">
-              <a:rPr lang="en-US" smtClean="0"/>
-              <a:pPr/>
-              <a:t>5</a:t>
-            </a:fld>
-            <a:endParaRPr lang="en-US"/>
-          </a:p>
-        </p:txBody>
-      </p:sp>
-      <p:pic>
-        <p:nvPicPr>
-          <p:cNvPr id="4098" name="Picture 2" descr="How to Interpret Histograms - LabXchange">
-            <a:extLst>
-              <a:ext uri="{FF2B5EF4-FFF2-40B4-BE49-F238E27FC236}">
-                <a16:creationId xmlns:a16="http://schemas.microsoft.com/office/drawing/2014/main" id="{F8CD6BBC-8B3D-70EE-865D-4DF5A9A3790A}"/>
-              </a:ext>
-            </a:extLst>
-          </p:cNvPr>
-          <p:cNvPicPr>
-            <a:picLocks noGrp="1" noChangeAspect="1" noChangeArrowheads="1"/>
-          </p:cNvPicPr>
-          <p:nvPr>
-            <p:ph idx="1"/>
-          </p:nvPr>
-        </p:nvPicPr>
-        <p:blipFill rotWithShape="1">
-          <a:blip r:embed="rId3">
-            <a:extLst>
-              <a:ext uri="{28A0092B-C50C-407E-A947-70E740481C1C}">
-                <a14:useLocalDpi xmlns:a14="http://schemas.microsoft.com/office/drawing/2010/main" val="0"/>
-              </a:ext>
-            </a:extLst>
-          </a:blip>
-          <a:srcRect r="66103"/>
-          <a:stretch>
-            <a:fillRect/>
-          </a:stretch>
-        </p:blipFill>
-        <p:spPr bwMode="auto">
-          <a:xfrm>
-            <a:off x="3901017" y="1951228"/>
-            <a:ext cx="4389966" cy="3789232"/>
-          </a:xfrm>
-          <a:prstGeom prst="rect">
-            <a:avLst/>
-          </a:prstGeom>
-          <a:noFill/>
-          <a:extLst>
-            <a:ext uri="{909E8E84-426E-40DD-AFC4-6F175D3DCCD1}">
-              <a14:hiddenFill xmlns:a14="http://schemas.microsoft.com/office/drawing/2010/main">
-                <a:solidFill>
-                  <a:srgbClr val="FFFFFF"/>
-                </a:solidFill>
-              </a14:hiddenFill>
-            </a:ext>
-          </a:extLst>
-        </p:spPr>
-      </p:pic>
-    </p:spTree>
-    <p:extLst>
-      <p:ext uri="{BB962C8B-B14F-4D97-AF65-F5344CB8AC3E}">
-        <p14:creationId xmlns:p14="http://schemas.microsoft.com/office/powerpoint/2010/main" val="741419840"/>
-      </p:ext>
-    </p:extLst>
-  </p:cSld>
-  <p:clrMapOvr>
-    <a:masterClrMapping/>
-  </p:clrMapOvr>
-</p:sld>
-</file>
-
-<file path=ppt/slides/slide6.xml><?xml version="1.0" encoding="utf-8"?>
-<p:sld xmlns:a="http://schemas.openxmlformats.org/drawingml/2006/main" xmlns:r="http://schemas.openxmlformats.org/officeDocument/2006/relationships" xmlns:p="http://schemas.openxmlformats.org/presentationml/2006/main">
-  <p:cSld>
-    <p:spTree>
-      <p:nvGrpSpPr>
-        <p:cNvPr id="1" name="">
-          <a:extLst>
-            <a:ext uri="{FF2B5EF4-FFF2-40B4-BE49-F238E27FC236}">
-              <a16:creationId xmlns:a16="http://schemas.microsoft.com/office/drawing/2014/main" id="{C906F5E7-39BF-696D-8378-92F55112B751}"/>
-            </a:ext>
-          </a:extLst>
-        </p:cNvPr>
-        <p:cNvGrpSpPr/>
-        <p:nvPr/>
-      </p:nvGrpSpPr>
-      <p:grpSpPr>
-        <a:xfrm>
-          <a:off x="0" y="0"/>
-          <a:ext cx="0" cy="0"/>
-          <a:chOff x="0" y="0"/>
-          <a:chExt cx="0" cy="0"/>
-        </a:xfrm>
-      </p:grpSpPr>
-      <p:sp>
-        <p:nvSpPr>
-          <p:cNvPr id="2" name="Title 1">
-            <a:extLst>
-              <a:ext uri="{FF2B5EF4-FFF2-40B4-BE49-F238E27FC236}">
-                <a16:creationId xmlns:a16="http://schemas.microsoft.com/office/drawing/2014/main" id="{742DD15C-B31F-B99D-1E00-35CDDA3EB94B}"/>
-              </a:ext>
-            </a:extLst>
-          </p:cNvPr>
-          <p:cNvSpPr>
-            <a:spLocks noGrp="1"/>
-          </p:cNvSpPr>
-          <p:nvPr>
-            <p:ph type="title"/>
-          </p:nvPr>
-        </p:nvSpPr>
-        <p:spPr/>
-        <p:txBody>
-          <a:bodyPr/>
-          <a:lstStyle/>
-          <a:p>
-            <a:r>
-              <a:rPr lang="en-US" dirty="0"/>
-              <a:t>The center in asymmetric data</a:t>
-            </a:r>
-          </a:p>
-        </p:txBody>
-      </p:sp>
-      <p:sp>
-        <p:nvSpPr>
-          <p:cNvPr id="4" name="Slide Number Placeholder 3">
-            <a:extLst>
-              <a:ext uri="{FF2B5EF4-FFF2-40B4-BE49-F238E27FC236}">
-                <a16:creationId xmlns:a16="http://schemas.microsoft.com/office/drawing/2014/main" id="{5B709428-25C8-E6FD-4688-FD80036813C2}"/>
-              </a:ext>
-            </a:extLst>
-          </p:cNvPr>
-          <p:cNvSpPr>
-            <a:spLocks noGrp="1"/>
-          </p:cNvSpPr>
-          <p:nvPr>
-            <p:ph type="sldNum" sz="quarter" idx="12"/>
+                <a16:creationId xmlns:a16="http://schemas.microsoft.com/office/drawing/2014/main" id="{C4ED73F4-D104-466A-88A1-7E877D73A09E}"/>
+              </a:ext>
+            </a:extLst>
+          </p:cNvPr>
+          <p:cNvSpPr>
+            <a:spLocks noGrp="1"/>
+          </p:cNvSpPr>
+          <p:nvPr>
+            <p:ph type="sldNum" sz="quarter" idx="11"/>
           </p:nvPr>
         </p:nvSpPr>
         <p:spPr/>
@@ -14700,127 +16593,32 @@
           </a:p>
         </p:txBody>
       </p:sp>
-      <p:pic>
-        <p:nvPicPr>
-          <p:cNvPr id="4098" name="Picture 2" descr="How to Interpret Histograms - LabXchange">
-            <a:extLst>
-              <a:ext uri="{FF2B5EF4-FFF2-40B4-BE49-F238E27FC236}">
-                <a16:creationId xmlns:a16="http://schemas.microsoft.com/office/drawing/2014/main" id="{5E07A6AD-6BA3-9343-6F05-9D3ADF059A08}"/>
-              </a:ext>
-            </a:extLst>
-          </p:cNvPr>
-          <p:cNvPicPr>
-            <a:picLocks noGrp="1" noChangeAspect="1" noChangeArrowheads="1"/>
-          </p:cNvPicPr>
-          <p:nvPr>
-            <p:ph idx="1"/>
-          </p:nvPr>
-        </p:nvPicPr>
-        <p:blipFill rotWithShape="1">
-          <a:blip r:embed="rId3">
-            <a:extLst>
-              <a:ext uri="{28A0092B-C50C-407E-A947-70E740481C1C}">
-                <a14:useLocalDpi xmlns:a14="http://schemas.microsoft.com/office/drawing/2010/main" val="0"/>
-              </a:ext>
-            </a:extLst>
-          </a:blip>
-          <a:srcRect l="33814" t="-447" r="2510" b="447"/>
-          <a:stretch>
-            <a:fillRect/>
-          </a:stretch>
-        </p:blipFill>
-        <p:spPr bwMode="auto">
-          <a:xfrm>
-            <a:off x="1972733" y="2018961"/>
-            <a:ext cx="8246534" cy="3789232"/>
-          </a:xfrm>
-          <a:prstGeom prst="rect">
-            <a:avLst/>
-          </a:prstGeom>
-          <a:noFill/>
-          <a:extLst>
-            <a:ext uri="{909E8E84-426E-40DD-AFC4-6F175D3DCCD1}">
-              <a14:hiddenFill xmlns:a14="http://schemas.microsoft.com/office/drawing/2010/main">
-                <a:solidFill>
-                  <a:srgbClr val="FFFFFF"/>
-                </a:solidFill>
-              </a14:hiddenFill>
-            </a:ext>
-          </a:extLst>
-        </p:spPr>
-      </p:pic>
-      <p:cxnSp>
-        <p:nvCxnSpPr>
-          <p:cNvPr id="5" name="Straight Arrow Connector 4">
-            <a:extLst>
-              <a:ext uri="{FF2B5EF4-FFF2-40B4-BE49-F238E27FC236}">
-                <a16:creationId xmlns:a16="http://schemas.microsoft.com/office/drawing/2014/main" id="{65374D5F-FD24-5385-E2BA-049B45FEE8A7}"/>
-              </a:ext>
-            </a:extLst>
-          </p:cNvPr>
-          <p:cNvCxnSpPr>
-            <a:cxnSpLocks/>
-          </p:cNvCxnSpPr>
-          <p:nvPr/>
-        </p:nvCxnSpPr>
-        <p:spPr>
-          <a:xfrm flipH="1" flipV="1">
-            <a:off x="5723467" y="5554193"/>
-            <a:ext cx="575733" cy="592607"/>
-          </a:xfrm>
-          <a:prstGeom prst="straightConnector1">
-            <a:avLst/>
-          </a:prstGeom>
-          <a:ln>
-            <a:tailEnd type="triangle"/>
-          </a:ln>
-        </p:spPr>
-        <p:style>
-          <a:lnRef idx="1">
-            <a:schemeClr val="accent1"/>
-          </a:lnRef>
-          <a:fillRef idx="0">
-            <a:schemeClr val="accent1"/>
-          </a:fillRef>
-          <a:effectRef idx="0">
-            <a:schemeClr val="accent1"/>
-          </a:effectRef>
-          <a:fontRef idx="minor">
-            <a:schemeClr val="tx1"/>
-          </a:fontRef>
-        </p:style>
-      </p:cxnSp>
-      <p:sp>
-        <p:nvSpPr>
-          <p:cNvPr id="10" name="TextBox 9">
-            <a:extLst>
-              <a:ext uri="{FF2B5EF4-FFF2-40B4-BE49-F238E27FC236}">
-                <a16:creationId xmlns:a16="http://schemas.microsoft.com/office/drawing/2014/main" id="{38983018-9898-0624-B472-193C5ED2E7B0}"/>
-              </a:ext>
-            </a:extLst>
-          </p:cNvPr>
-          <p:cNvSpPr txBox="1"/>
-          <p:nvPr/>
-        </p:nvSpPr>
-        <p:spPr>
-          <a:xfrm>
-            <a:off x="6356148" y="5987018"/>
-            <a:ext cx="1903085" cy="369332"/>
-          </a:xfrm>
-          <a:prstGeom prst="rect">
-            <a:avLst/>
-          </a:prstGeom>
-          <a:noFill/>
-        </p:spPr>
-        <p:txBody>
-          <a:bodyPr wrap="none" rtlCol="0">
-            <a:spAutoFit/>
+      <p:sp>
+        <p:nvSpPr>
+          <p:cNvPr id="2" name="Title 1">
+            <a:extLst>
+              <a:ext uri="{FF2B5EF4-FFF2-40B4-BE49-F238E27FC236}">
+                <a16:creationId xmlns:a16="http://schemas.microsoft.com/office/drawing/2014/main" id="{1727BF50-FD66-6235-C76B-2B50EB662B38}"/>
+              </a:ext>
+            </a:extLst>
+          </p:cNvPr>
+          <p:cNvSpPr>
+            <a:spLocks noGrp="1"/>
+          </p:cNvSpPr>
+          <p:nvPr>
+            <p:ph type="title"/>
+          </p:nvPr>
+        </p:nvSpPr>
+        <p:spPr/>
+        <p:txBody>
+          <a:bodyPr>
+            <a:normAutofit fontScale="90000"/>
           </a:bodyPr>
           <a:lstStyle/>
           <a:p>
             <a:r>
               <a:rPr lang="en-US" dirty="0"/>
-              <a:t>Common in sports</a:t>
+              <a:t>Variation and distribution </a:t>
             </a:r>
           </a:p>
         </p:txBody>
@@ -14828,7 +16626,7 @@
     </p:spTree>
     <p:extLst>
       <p:ext uri="{BB962C8B-B14F-4D97-AF65-F5344CB8AC3E}">
-        <p14:creationId xmlns:p14="http://schemas.microsoft.com/office/powerpoint/2010/main" val="1046255775"/>
+        <p14:creationId xmlns:p14="http://schemas.microsoft.com/office/powerpoint/2010/main" val="1868022990"/>
       </p:ext>
     </p:extLst>
   </p:cSld>
@@ -14857,18 +16655,122 @@
       </p:grpSpPr>
       <p:sp>
         <p:nvSpPr>
+          <p:cNvPr id="2" name="Title 1">
+            <a:extLst>
+              <a:ext uri="{FF2B5EF4-FFF2-40B4-BE49-F238E27FC236}">
+                <a16:creationId xmlns:a16="http://schemas.microsoft.com/office/drawing/2014/main" id="{0306C600-AB03-A85B-A5F6-526034814841}"/>
+              </a:ext>
+            </a:extLst>
+          </p:cNvPr>
+          <p:cNvSpPr>
+            <a:spLocks noGrp="1"/>
+          </p:cNvSpPr>
+          <p:nvPr>
+            <p:ph type="title"/>
+          </p:nvPr>
+        </p:nvSpPr>
+        <p:spPr/>
+        <p:txBody>
+          <a:bodyPr/>
+          <a:lstStyle/>
+          <a:p>
+            <a:r>
+              <a:rPr lang="en-US" dirty="0"/>
+              <a:t>Measures of variability</a:t>
+            </a:r>
+          </a:p>
+        </p:txBody>
+      </p:sp>
+      <p:sp>
+        <p:nvSpPr>
+          <p:cNvPr id="3" name="Content Placeholder 2">
+            <a:extLst>
+              <a:ext uri="{FF2B5EF4-FFF2-40B4-BE49-F238E27FC236}">
+                <a16:creationId xmlns:a16="http://schemas.microsoft.com/office/drawing/2014/main" id="{2CF9311E-CBE6-3DD5-8A4F-B5CD2086BC0A}"/>
+              </a:ext>
+            </a:extLst>
+          </p:cNvPr>
+          <p:cNvSpPr>
+            <a:spLocks noGrp="1"/>
+          </p:cNvSpPr>
+          <p:nvPr>
+            <p:ph idx="1"/>
+          </p:nvPr>
+        </p:nvSpPr>
+        <p:spPr/>
+        <p:txBody>
+          <a:bodyPr/>
+          <a:lstStyle/>
+          <a:p>
+            <a:r>
+              <a:rPr lang="en-US" dirty="0"/>
+              <a:t>The degree of spread or distribution of the data.	</a:t>
+            </a:r>
+          </a:p>
+          <a:p>
+            <a:pPr lvl="1"/>
+            <a:endParaRPr lang="en-US" dirty="0"/>
+          </a:p>
+          <a:p>
+            <a:r>
+              <a:rPr lang="en-US" dirty="0"/>
+              <a:t>Can be used to show consistency or meaningful differences.</a:t>
+            </a:r>
+          </a:p>
+          <a:p>
+            <a:pPr lvl="1"/>
+            <a:endParaRPr lang="en-US" dirty="0"/>
+          </a:p>
+          <a:p>
+            <a:r>
+              <a:rPr lang="en-US" dirty="0"/>
+              <a:t>Methods:</a:t>
+            </a:r>
+          </a:p>
+          <a:p>
+            <a:pPr lvl="1"/>
+            <a:r>
+              <a:rPr lang="en-US" dirty="0"/>
+              <a:t>Range</a:t>
+            </a:r>
+          </a:p>
+          <a:p>
+            <a:pPr lvl="1"/>
+            <a:r>
+              <a:rPr lang="en-US" dirty="0"/>
+              <a:t>IQR</a:t>
+            </a:r>
+          </a:p>
+          <a:p>
+            <a:pPr lvl="1"/>
+            <a:r>
+              <a:rPr lang="en-US" dirty="0"/>
+              <a:t>Variance</a:t>
+            </a:r>
+          </a:p>
+          <a:p>
+            <a:pPr lvl="1"/>
+            <a:r>
+              <a:rPr lang="en-US" dirty="0"/>
+              <a:t>Standard Deviation</a:t>
+            </a:r>
+          </a:p>
+        </p:txBody>
+      </p:sp>
+      <p:sp>
+        <p:nvSpPr>
           <p:cNvPr id="4" name="Slide Number Placeholder 3">
             <a:extLst>
               <a:ext uri="{FF2B5EF4-FFF2-40B4-BE49-F238E27FC236}">
-                <a16:creationId xmlns:a16="http://schemas.microsoft.com/office/drawing/2014/main" id="{C4ED73F4-D104-466A-88A1-7E877D73A09E}"/>
-              </a:ext>
-            </a:extLst>
-          </p:cNvPr>
-          <p:cNvSpPr>
-            <a:spLocks noGrp="1"/>
-          </p:cNvSpPr>
-          <p:nvPr>
-            <p:ph type="sldNum" sz="quarter" idx="11"/>
+                <a16:creationId xmlns:a16="http://schemas.microsoft.com/office/drawing/2014/main" id="{473CEEB2-1A75-D5E1-B376-ADB7F27AA3C7}"/>
+              </a:ext>
+            </a:extLst>
+          </p:cNvPr>
+          <p:cNvSpPr>
+            <a:spLocks noGrp="1"/>
+          </p:cNvSpPr>
+          <p:nvPr>
+            <p:ph type="sldNum" sz="quarter" idx="12"/>
           </p:nvPr>
         </p:nvSpPr>
         <p:spPr/>
@@ -14885,40 +16787,10 @@
           </a:p>
         </p:txBody>
       </p:sp>
-      <p:sp>
-        <p:nvSpPr>
-          <p:cNvPr id="2" name="Title 1">
-            <a:extLst>
-              <a:ext uri="{FF2B5EF4-FFF2-40B4-BE49-F238E27FC236}">
-                <a16:creationId xmlns:a16="http://schemas.microsoft.com/office/drawing/2014/main" id="{1727BF50-FD66-6235-C76B-2B50EB662B38}"/>
-              </a:ext>
-            </a:extLst>
-          </p:cNvPr>
-          <p:cNvSpPr>
-            <a:spLocks noGrp="1"/>
-          </p:cNvSpPr>
-          <p:nvPr>
-            <p:ph type="title"/>
-          </p:nvPr>
-        </p:nvSpPr>
-        <p:spPr/>
-        <p:txBody>
-          <a:bodyPr>
-            <a:normAutofit fontScale="90000"/>
-          </a:bodyPr>
-          <a:lstStyle/>
-          <a:p>
-            <a:r>
-              <a:rPr lang="en-US" dirty="0"/>
-              <a:t>Measures of variability</a:t>
-            </a:r>
-          </a:p>
-        </p:txBody>
-      </p:sp>
     </p:spTree>
     <p:extLst>
       <p:ext uri="{BB962C8B-B14F-4D97-AF65-F5344CB8AC3E}">
-        <p14:creationId xmlns:p14="http://schemas.microsoft.com/office/powerpoint/2010/main" val="1868022990"/>
+        <p14:creationId xmlns:p14="http://schemas.microsoft.com/office/powerpoint/2010/main" val="3421327094"/>
       </p:ext>
     </p:extLst>
   </p:cSld>
@@ -14950,7 +16822,7 @@
           <p:cNvPr id="2" name="Title 1">
             <a:extLst>
               <a:ext uri="{FF2B5EF4-FFF2-40B4-BE49-F238E27FC236}">
-                <a16:creationId xmlns:a16="http://schemas.microsoft.com/office/drawing/2014/main" id="{0306C600-AB03-A85B-A5F6-526034814841}"/>
+                <a16:creationId xmlns:a16="http://schemas.microsoft.com/office/drawing/2014/main" id="{08CA7D61-3432-671B-3EFC-43F846227E36}"/>
               </a:ext>
             </a:extLst>
           </p:cNvPr>
@@ -14968,7 +16840,7 @@
           <a:p>
             <a:r>
               <a:rPr lang="en-US" dirty="0"/>
-              <a:t>Measures of variability</a:t>
+              <a:t>Range</a:t>
             </a:r>
           </a:p>
         </p:txBody>
@@ -14978,7 +16850,7 @@
           <p:cNvPr id="3" name="Content Placeholder 2">
             <a:extLst>
               <a:ext uri="{FF2B5EF4-FFF2-40B4-BE49-F238E27FC236}">
-                <a16:creationId xmlns:a16="http://schemas.microsoft.com/office/drawing/2014/main" id="{2CF9311E-CBE6-3DD5-8A4F-B5CD2086BC0A}"/>
+                <a16:creationId xmlns:a16="http://schemas.microsoft.com/office/drawing/2014/main" id="{4BFE3BC2-A03B-D6FE-A07F-A2B5C66A40B1}"/>
               </a:ext>
             </a:extLst>
           </p:cNvPr>
@@ -14991,12 +16863,21 @@
         </p:nvSpPr>
         <p:spPr/>
         <p:txBody>
-          <a:bodyPr/>
-          <a:lstStyle/>
-          <a:p>
-            <a:r>
-              <a:rPr lang="en-US" dirty="0"/>
-              <a:t>The degree of spread or distribution of the data.	</a:t>
+          <a:bodyPr>
+            <a:normAutofit/>
+          </a:bodyPr>
+          <a:lstStyle/>
+          <a:p>
+            <a:r>
+              <a:rPr lang="en-US" dirty="0"/>
+              <a:t>Range: distance between the smallest and largest values.</a:t>
+            </a:r>
+          </a:p>
+          <a:p>
+            <a:pPr lvl="1"/>
+            <a:r>
+              <a:rPr lang="en-US" dirty="0"/>
+              <a:t>Sensitive to outliers</a:t>
             </a:r>
           </a:p>
           <a:p>
@@ -15006,7 +16887,14 @@
           <a:p>
             <a:r>
               <a:rPr lang="en-US" dirty="0"/>
-              <a:t>Can be used to show consistency or meaningful differences.</a:t>
+              <a:t>IQR: spread of the middle 50% of the data.</a:t>
+            </a:r>
+          </a:p>
+          <a:p>
+            <a:pPr lvl="1"/>
+            <a:r>
+              <a:rPr lang="en-US" dirty="0"/>
+              <a:t>Less sensitive to outliers</a:t>
             </a:r>
           </a:p>
           <a:p>
@@ -15015,37 +16903,44 @@
           </a:p>
           <a:p>
             <a:r>
-              <a:rPr lang="en-US" dirty="0"/>
-              <a:t>Methods:</a:t>
+              <a:rPr lang="en-US" dirty="0">
+                <a:solidFill>
+                  <a:schemeClr val="bg2">
+                    <a:lumMod val="75000"/>
+                  </a:schemeClr>
+                </a:solidFill>
+              </a:rPr>
+              <a:t>Standard Deviation: square root of variance</a:t>
             </a:r>
           </a:p>
           <a:p>
             <a:pPr lvl="1"/>
             <a:r>
-              <a:rPr lang="en-US" dirty="0"/>
-              <a:t>Range</a:t>
+              <a:rPr lang="en-US" dirty="0">
+                <a:solidFill>
+                  <a:schemeClr val="bg2">
+                    <a:lumMod val="75000"/>
+                  </a:schemeClr>
+                </a:solidFill>
+              </a:rPr>
+              <a:t>Typical deviation from the mean </a:t>
             </a:r>
           </a:p>
           <a:p>
             <a:pPr lvl="1"/>
             <a:r>
-              <a:rPr lang="en-US" dirty="0"/>
-              <a:t>IQR</a:t>
-            </a:r>
-          </a:p>
-          <a:p>
-            <a:pPr lvl="1"/>
-            <a:r>
-              <a:rPr lang="en-US" dirty="0"/>
-              <a:t>Variance</a:t>
-            </a:r>
-          </a:p>
-          <a:p>
-            <a:pPr lvl="1"/>
-            <a:r>
-              <a:rPr lang="en-US" dirty="0"/>
-              <a:t>Standard Deviation</a:t>
-            </a:r>
+              <a:rPr lang="en-US" dirty="0">
+                <a:solidFill>
+                  <a:schemeClr val="bg2">
+                    <a:lumMod val="75000"/>
+                  </a:schemeClr>
+                </a:solidFill>
+              </a:rPr>
+              <a:t>Same units as the data</a:t>
+            </a:r>
+          </a:p>
+          <a:p>
+            <a:endParaRPr lang="en-US" dirty="0"/>
           </a:p>
         </p:txBody>
       </p:sp>
@@ -15054,7 +16949,7 @@
           <p:cNvPr id="4" name="Slide Number Placeholder 3">
             <a:extLst>
               <a:ext uri="{FF2B5EF4-FFF2-40B4-BE49-F238E27FC236}">
-                <a16:creationId xmlns:a16="http://schemas.microsoft.com/office/drawing/2014/main" id="{473CEEB2-1A75-D5E1-B376-ADB7F27AA3C7}"/>
+                <a16:creationId xmlns:a16="http://schemas.microsoft.com/office/drawing/2014/main" id="{F61C70DC-37FB-87E0-5D03-00D92FDD6D3C}"/>
               </a:ext>
             </a:extLst>
           </p:cNvPr>
@@ -15075,14 +16970,14 @@
               <a:pPr/>
               <a:t>8</a:t>
             </a:fld>
-            <a:endParaRPr lang="en-US"/>
+            <a:endParaRPr lang="en-US" dirty="0"/>
           </a:p>
         </p:txBody>
       </p:sp>
     </p:spTree>
     <p:extLst>
       <p:ext uri="{BB962C8B-B14F-4D97-AF65-F5344CB8AC3E}">
-        <p14:creationId xmlns:p14="http://schemas.microsoft.com/office/powerpoint/2010/main" val="3421327094"/>
+        <p14:creationId xmlns:p14="http://schemas.microsoft.com/office/powerpoint/2010/main" val="4206175980"/>
       </p:ext>
     </p:extLst>
   </p:cSld>
@@ -15097,7 +16992,13 @@
   <p:cSld>
     <p:spTree>
       <p:nvGrpSpPr>
-        <p:cNvPr id="1" name=""/>
+        <p:cNvPr id="1" name="">
+          <a:extLst>
+            <a:ext uri="{FF2B5EF4-FFF2-40B4-BE49-F238E27FC236}">
+              <a16:creationId xmlns:a16="http://schemas.microsoft.com/office/drawing/2014/main" id="{8AAAEA5E-7577-2AE3-0E8B-A2EACB10EEDF}"/>
+            </a:ext>
+          </a:extLst>
+        </p:cNvPr>
         <p:cNvGrpSpPr/>
         <p:nvPr/>
       </p:nvGrpSpPr>
@@ -15114,7 +17015,7 @@
           <p:cNvPr id="2" name="Title 1">
             <a:extLst>
               <a:ext uri="{FF2B5EF4-FFF2-40B4-BE49-F238E27FC236}">
-                <a16:creationId xmlns:a16="http://schemas.microsoft.com/office/drawing/2014/main" id="{08CA7D61-3432-671B-3EFC-43F846227E36}"/>
+                <a16:creationId xmlns:a16="http://schemas.microsoft.com/office/drawing/2014/main" id="{3CBFB0CF-2A71-D3A2-2FF0-1B2A0CE00118}"/>
               </a:ext>
             </a:extLst>
           </p:cNvPr>
@@ -15132,107 +17033,8 @@
           <a:p>
             <a:r>
               <a:rPr lang="en-US" dirty="0"/>
-              <a:t>Range</a:t>
-            </a:r>
-          </a:p>
-        </p:txBody>
-      </p:sp>
-      <p:sp>
-        <p:nvSpPr>
-          <p:cNvPr id="3" name="Content Placeholder 2">
-            <a:extLst>
-              <a:ext uri="{FF2B5EF4-FFF2-40B4-BE49-F238E27FC236}">
-                <a16:creationId xmlns:a16="http://schemas.microsoft.com/office/drawing/2014/main" id="{4BFE3BC2-A03B-D6FE-A07F-A2B5C66A40B1}"/>
-              </a:ext>
-            </a:extLst>
-          </p:cNvPr>
-          <p:cNvSpPr>
-            <a:spLocks noGrp="1"/>
-          </p:cNvSpPr>
-          <p:nvPr>
-            <p:ph idx="1"/>
-          </p:nvPr>
-        </p:nvSpPr>
-        <p:spPr/>
-        <p:txBody>
-          <a:bodyPr>
-            <a:normAutofit/>
-          </a:bodyPr>
-          <a:lstStyle/>
-          <a:p>
-            <a:r>
-              <a:rPr lang="en-US" dirty="0"/>
-              <a:t>Range: distance between the smallest and largest values.</a:t>
-            </a:r>
-          </a:p>
-          <a:p>
-            <a:pPr lvl="1"/>
-            <a:r>
-              <a:rPr lang="en-US" dirty="0"/>
-              <a:t>Sensitive to outliers</a:t>
-            </a:r>
-          </a:p>
-          <a:p>
-            <a:pPr lvl="1"/>
-            <a:endParaRPr lang="en-US" dirty="0"/>
-          </a:p>
-          <a:p>
-            <a:r>
-              <a:rPr lang="en-US" dirty="0"/>
-              <a:t>IQR: spread of the middle 50% of the data.</a:t>
-            </a:r>
-          </a:p>
-          <a:p>
-            <a:pPr lvl="1"/>
-            <a:r>
-              <a:rPr lang="en-US" dirty="0"/>
-              <a:t>Removes outliers</a:t>
-            </a:r>
-          </a:p>
-          <a:p>
-            <a:pPr lvl="1"/>
-            <a:endParaRPr lang="en-US" dirty="0"/>
-          </a:p>
-          <a:p>
-            <a:r>
-              <a:rPr lang="en-US" dirty="0">
-                <a:solidFill>
-                  <a:schemeClr val="bg2">
-                    <a:lumMod val="75000"/>
-                  </a:schemeClr>
-                </a:solidFill>
-              </a:rPr>
-              <a:t>Standard Deviation: square root of variance</a:t>
-            </a:r>
-          </a:p>
-          <a:p>
-            <a:pPr lvl="1"/>
-            <a:r>
-              <a:rPr lang="en-US" dirty="0">
-                <a:solidFill>
-                  <a:schemeClr val="bg2">
-                    <a:lumMod val="75000"/>
-                  </a:schemeClr>
-                </a:solidFill>
-              </a:rPr>
-              <a:t>Typical deviation from the mean </a:t>
-            </a:r>
-          </a:p>
-          <a:p>
-            <a:pPr lvl="1"/>
-            <a:r>
-              <a:rPr lang="en-US" dirty="0">
-                <a:solidFill>
-                  <a:schemeClr val="bg2">
-                    <a:lumMod val="75000"/>
-                  </a:schemeClr>
-                </a:solidFill>
-              </a:rPr>
-              <a:t>Same units as the data</a:t>
-            </a:r>
-          </a:p>
-          <a:p>
-            <a:endParaRPr lang="en-US" dirty="0"/>
+              <a:t>Range and IQR</a:t>
+            </a:r>
           </a:p>
         </p:txBody>
       </p:sp>
@@ -15241,7 +17043,7 @@
           <p:cNvPr id="4" name="Slide Number Placeholder 3">
             <a:extLst>
               <a:ext uri="{FF2B5EF4-FFF2-40B4-BE49-F238E27FC236}">
-                <a16:creationId xmlns:a16="http://schemas.microsoft.com/office/drawing/2014/main" id="{F61C70DC-37FB-87E0-5D03-00D92FDD6D3C}"/>
+                <a16:creationId xmlns:a16="http://schemas.microsoft.com/office/drawing/2014/main" id="{FDD9E4FB-2395-2EC7-0828-BDF71DCE4A66}"/>
               </a:ext>
             </a:extLst>
           </p:cNvPr>
@@ -15262,14 +17064,203 @@
               <a:pPr/>
               <a:t>9</a:t>
             </a:fld>
-            <a:endParaRPr lang="en-US" dirty="0"/>
+            <a:endParaRPr lang="en-US"/>
+          </a:p>
+        </p:txBody>
+      </p:sp>
+      <p:pic>
+        <p:nvPicPr>
+          <p:cNvPr id="9" name="Picture 8">
+            <a:extLst>
+              <a:ext uri="{FF2B5EF4-FFF2-40B4-BE49-F238E27FC236}">
+                <a16:creationId xmlns:a16="http://schemas.microsoft.com/office/drawing/2014/main" id="{870C3C5B-B049-1768-3B29-0B864DB2D1B2}"/>
+              </a:ext>
+            </a:extLst>
+          </p:cNvPr>
+          <p:cNvPicPr>
+            <a:picLocks noChangeAspect="1"/>
+          </p:cNvPicPr>
+          <p:nvPr/>
+        </p:nvPicPr>
+        <p:blipFill>
+          <a:blip r:embed="rId3"/>
+          <a:stretch>
+            <a:fillRect/>
+          </a:stretch>
+        </p:blipFill>
+        <p:spPr>
+          <a:xfrm>
+            <a:off x="3810000" y="2446866"/>
+            <a:ext cx="4876800" cy="2767013"/>
+          </a:xfrm>
+          <a:prstGeom prst="rect">
+            <a:avLst/>
+          </a:prstGeom>
+        </p:spPr>
+      </p:pic>
+      <p:cxnSp>
+        <p:nvCxnSpPr>
+          <p:cNvPr id="11" name="Straight Arrow Connector 10">
+            <a:extLst>
+              <a:ext uri="{FF2B5EF4-FFF2-40B4-BE49-F238E27FC236}">
+                <a16:creationId xmlns:a16="http://schemas.microsoft.com/office/drawing/2014/main" id="{4251B779-5782-62AB-EF5A-1689D42E8607}"/>
+              </a:ext>
+            </a:extLst>
+          </p:cNvPr>
+          <p:cNvCxnSpPr/>
+          <p:nvPr/>
+        </p:nvCxnSpPr>
+        <p:spPr>
+          <a:xfrm>
+            <a:off x="5283200" y="4741333"/>
+            <a:ext cx="1930400" cy="0"/>
+          </a:xfrm>
+          <a:prstGeom prst="straightConnector1">
+            <a:avLst/>
+          </a:prstGeom>
+          <a:ln w="28575">
+            <a:headEnd type="triangle"/>
+            <a:tailEnd type="triangle"/>
+          </a:ln>
+        </p:spPr>
+        <p:style>
+          <a:lnRef idx="1">
+            <a:schemeClr val="accent1"/>
+          </a:lnRef>
+          <a:fillRef idx="0">
+            <a:schemeClr val="accent1"/>
+          </a:fillRef>
+          <a:effectRef idx="0">
+            <a:schemeClr val="accent1"/>
+          </a:effectRef>
+          <a:fontRef idx="minor">
+            <a:schemeClr val="tx1"/>
+          </a:fontRef>
+        </p:style>
+      </p:cxnSp>
+      <p:cxnSp>
+        <p:nvCxnSpPr>
+          <p:cNvPr id="12" name="Straight Arrow Connector 11">
+            <a:extLst>
+              <a:ext uri="{FF2B5EF4-FFF2-40B4-BE49-F238E27FC236}">
+                <a16:creationId xmlns:a16="http://schemas.microsoft.com/office/drawing/2014/main" id="{99A5919D-D89C-D771-B49D-57D20C3EA9D6}"/>
+              </a:ext>
+            </a:extLst>
+          </p:cNvPr>
+          <p:cNvCxnSpPr>
+            <a:cxnSpLocks/>
+          </p:cNvCxnSpPr>
+          <p:nvPr/>
+        </p:nvCxnSpPr>
+        <p:spPr>
+          <a:xfrm>
+            <a:off x="4267201" y="2946399"/>
+            <a:ext cx="3962399" cy="0"/>
+          </a:xfrm>
+          <a:prstGeom prst="straightConnector1">
+            <a:avLst/>
+          </a:prstGeom>
+          <a:ln w="28575">
+            <a:headEnd type="triangle"/>
+            <a:tailEnd type="triangle"/>
+          </a:ln>
+        </p:spPr>
+        <p:style>
+          <a:lnRef idx="1">
+            <a:schemeClr val="accent1"/>
+          </a:lnRef>
+          <a:fillRef idx="0">
+            <a:schemeClr val="accent1"/>
+          </a:fillRef>
+          <a:effectRef idx="0">
+            <a:schemeClr val="accent1"/>
+          </a:effectRef>
+          <a:fontRef idx="minor">
+            <a:schemeClr val="tx1"/>
+          </a:fontRef>
+        </p:style>
+      </p:cxnSp>
+      <p:sp>
+        <p:nvSpPr>
+          <p:cNvPr id="14" name="TextBox 13">
+            <a:extLst>
+              <a:ext uri="{FF2B5EF4-FFF2-40B4-BE49-F238E27FC236}">
+                <a16:creationId xmlns:a16="http://schemas.microsoft.com/office/drawing/2014/main" id="{DC05E2EB-CC66-E792-FE91-C7F6FF66FEB0}"/>
+              </a:ext>
+            </a:extLst>
+          </p:cNvPr>
+          <p:cNvSpPr txBox="1"/>
+          <p:nvPr/>
+        </p:nvSpPr>
+        <p:spPr>
+          <a:xfrm>
+            <a:off x="5890898" y="2473854"/>
+            <a:ext cx="715004" cy="369332"/>
+          </a:xfrm>
+          <a:prstGeom prst="rect">
+            <a:avLst/>
+          </a:prstGeom>
+          <a:noFill/>
+        </p:spPr>
+        <p:txBody>
+          <a:bodyPr wrap="none" rtlCol="0">
+            <a:spAutoFit/>
+          </a:bodyPr>
+          <a:lstStyle/>
+          <a:p>
+            <a:r>
+              <a:rPr lang="en-US" dirty="0"/>
+              <a:t>range</a:t>
+            </a:r>
+          </a:p>
+        </p:txBody>
+      </p:sp>
+      <p:sp>
+        <p:nvSpPr>
+          <p:cNvPr id="15" name="TextBox 14">
+            <a:extLst>
+              <a:ext uri="{FF2B5EF4-FFF2-40B4-BE49-F238E27FC236}">
+                <a16:creationId xmlns:a16="http://schemas.microsoft.com/office/drawing/2014/main" id="{427B8F54-2B58-134B-0684-97B1817A1CD3}"/>
+              </a:ext>
+            </a:extLst>
+          </p:cNvPr>
+          <p:cNvSpPr txBox="1"/>
+          <p:nvPr/>
+        </p:nvSpPr>
+        <p:spPr>
+          <a:xfrm>
+            <a:off x="5570041" y="4741333"/>
+            <a:ext cx="1356718" cy="646331"/>
+          </a:xfrm>
+          <a:prstGeom prst="rect">
+            <a:avLst/>
+          </a:prstGeom>
+          <a:noFill/>
+        </p:spPr>
+        <p:txBody>
+          <a:bodyPr wrap="none" rtlCol="0">
+            <a:spAutoFit/>
+          </a:bodyPr>
+          <a:lstStyle/>
+          <a:p>
+            <a:r>
+              <a:rPr lang="en-US" dirty="0"/>
+              <a:t>Interquartile</a:t>
+            </a:r>
+          </a:p>
+          <a:p>
+            <a:pPr algn="ctr"/>
+            <a:r>
+              <a:rPr lang="en-US" dirty="0"/>
+              <a:t>range</a:t>
+            </a:r>
           </a:p>
         </p:txBody>
       </p:sp>
     </p:spTree>
     <p:extLst>
       <p:ext uri="{BB962C8B-B14F-4D97-AF65-F5344CB8AC3E}">
-        <p14:creationId xmlns:p14="http://schemas.microsoft.com/office/powerpoint/2010/main" val="4206175980"/>
+        <p14:creationId xmlns:p14="http://schemas.microsoft.com/office/powerpoint/2010/main" val="3410868396"/>
       </p:ext>
     </p:extLst>
   </p:cSld>

--- a/pptx/Lecture8.pptx
+++ b/pptx/Lecture8.pptx
@@ -5,52 +5,55 @@
     <p:sldMasterId id="2147483648" r:id="rId1"/>
   </p:sldMasterIdLst>
   <p:notesMasterIdLst>
-    <p:notesMasterId r:id="rId45"/>
+    <p:notesMasterId r:id="rId48"/>
   </p:notesMasterIdLst>
   <p:sldIdLst>
     <p:sldId id="256" r:id="rId2"/>
-    <p:sldId id="316" r:id="rId3"/>
-    <p:sldId id="295" r:id="rId4"/>
-    <p:sldId id="334" r:id="rId5"/>
-    <p:sldId id="358" r:id="rId6"/>
-    <p:sldId id="296" r:id="rId7"/>
-    <p:sldId id="317" r:id="rId8"/>
-    <p:sldId id="325" r:id="rId9"/>
-    <p:sldId id="335" r:id="rId10"/>
-    <p:sldId id="344" r:id="rId11"/>
-    <p:sldId id="359" r:id="rId12"/>
-    <p:sldId id="360" r:id="rId13"/>
-    <p:sldId id="361" r:id="rId14"/>
-    <p:sldId id="351" r:id="rId15"/>
-    <p:sldId id="362" r:id="rId16"/>
-    <p:sldId id="352" r:id="rId17"/>
-    <p:sldId id="354" r:id="rId18"/>
-    <p:sldId id="322" r:id="rId19"/>
-    <p:sldId id="338" r:id="rId20"/>
-    <p:sldId id="356" r:id="rId21"/>
-    <p:sldId id="357" r:id="rId22"/>
-    <p:sldId id="353" r:id="rId23"/>
-    <p:sldId id="327" r:id="rId24"/>
-    <p:sldId id="340" r:id="rId25"/>
-    <p:sldId id="341" r:id="rId26"/>
-    <p:sldId id="355" r:id="rId27"/>
-    <p:sldId id="342" r:id="rId28"/>
-    <p:sldId id="343" r:id="rId29"/>
-    <p:sldId id="329" r:id="rId30"/>
-    <p:sldId id="345" r:id="rId31"/>
-    <p:sldId id="326" r:id="rId32"/>
-    <p:sldId id="346" r:id="rId33"/>
-    <p:sldId id="347" r:id="rId34"/>
-    <p:sldId id="348" r:id="rId35"/>
-    <p:sldId id="349" r:id="rId36"/>
-    <p:sldId id="321" r:id="rId37"/>
-    <p:sldId id="318" r:id="rId38"/>
-    <p:sldId id="350" r:id="rId39"/>
-    <p:sldId id="320" r:id="rId40"/>
-    <p:sldId id="331" r:id="rId41"/>
-    <p:sldId id="332" r:id="rId42"/>
-    <p:sldId id="333" r:id="rId43"/>
-    <p:sldId id="330" r:id="rId44"/>
+    <p:sldId id="364" r:id="rId3"/>
+    <p:sldId id="365" r:id="rId4"/>
+    <p:sldId id="316" r:id="rId5"/>
+    <p:sldId id="295" r:id="rId6"/>
+    <p:sldId id="334" r:id="rId7"/>
+    <p:sldId id="358" r:id="rId8"/>
+    <p:sldId id="296" r:id="rId9"/>
+    <p:sldId id="317" r:id="rId10"/>
+    <p:sldId id="325" r:id="rId11"/>
+    <p:sldId id="335" r:id="rId12"/>
+    <p:sldId id="344" r:id="rId13"/>
+    <p:sldId id="359" r:id="rId14"/>
+    <p:sldId id="360" r:id="rId15"/>
+    <p:sldId id="361" r:id="rId16"/>
+    <p:sldId id="351" r:id="rId17"/>
+    <p:sldId id="362" r:id="rId18"/>
+    <p:sldId id="352" r:id="rId19"/>
+    <p:sldId id="354" r:id="rId20"/>
+    <p:sldId id="322" r:id="rId21"/>
+    <p:sldId id="338" r:id="rId22"/>
+    <p:sldId id="356" r:id="rId23"/>
+    <p:sldId id="357" r:id="rId24"/>
+    <p:sldId id="353" r:id="rId25"/>
+    <p:sldId id="327" r:id="rId26"/>
+    <p:sldId id="340" r:id="rId27"/>
+    <p:sldId id="341" r:id="rId28"/>
+    <p:sldId id="355" r:id="rId29"/>
+    <p:sldId id="342" r:id="rId30"/>
+    <p:sldId id="343" r:id="rId31"/>
+    <p:sldId id="329" r:id="rId32"/>
+    <p:sldId id="345" r:id="rId33"/>
+    <p:sldId id="326" r:id="rId34"/>
+    <p:sldId id="346" r:id="rId35"/>
+    <p:sldId id="347" r:id="rId36"/>
+    <p:sldId id="348" r:id="rId37"/>
+    <p:sldId id="349" r:id="rId38"/>
+    <p:sldId id="366" r:id="rId39"/>
+    <p:sldId id="321" r:id="rId40"/>
+    <p:sldId id="318" r:id="rId41"/>
+    <p:sldId id="350" r:id="rId42"/>
+    <p:sldId id="320" r:id="rId43"/>
+    <p:sldId id="331" r:id="rId44"/>
+    <p:sldId id="332" r:id="rId45"/>
+    <p:sldId id="333" r:id="rId46"/>
+    <p:sldId id="330" r:id="rId47"/>
   </p:sldIdLst>
   <p:sldSz cx="12192000" cy="6858000"/>
   <p:notesSz cx="6858000" cy="9144000"/>
@@ -2137,7 +2140,7 @@
           <a:p>
             <a:fld id="{1560C251-82B7-4253-A774-38D73C276BCE}" type="slidenum">
               <a:rPr lang="en-US" smtClean="0"/>
-              <a:t>10</a:t>
+              <a:t>12</a:t>
             </a:fld>
             <a:endParaRPr lang="en-US"/>
           </a:p>
@@ -2308,7 +2311,7 @@
           <a:p>
             <a:fld id="{1560C251-82B7-4253-A774-38D73C276BCE}" type="slidenum">
               <a:rPr lang="en-US" smtClean="0"/>
-              <a:t>11</a:t>
+              <a:t>13</a:t>
             </a:fld>
             <a:endParaRPr lang="en-US"/>
           </a:p>
@@ -2422,7 +2425,7 @@
           <a:p>
             <a:fld id="{1560C251-82B7-4253-A774-38D73C276BCE}" type="slidenum">
               <a:rPr lang="en-US" smtClean="0"/>
-              <a:t>12</a:t>
+              <a:t>14</a:t>
             </a:fld>
             <a:endParaRPr lang="en-US"/>
           </a:p>
@@ -2485,6 +2488,114 @@
           <a:bodyPr/>
           <a:lstStyle/>
           <a:p>
+            <a:pPr marL="685800" marR="0" lvl="1" indent="-228600" algn="l" defTabSz="914400" rtl="0" eaLnBrk="1" fontAlgn="auto" latinLnBrk="0" hangingPunct="1">
+              <a:lnSpc>
+                <a:spcPct val="100000"/>
+              </a:lnSpc>
+              <a:spcBef>
+                <a:spcPts val="0"/>
+              </a:spcBef>
+              <a:spcAft>
+                <a:spcPts val="0"/>
+              </a:spcAft>
+              <a:buClrTx/>
+              <a:buSzTx/>
+              <a:buFont typeface="Arial" panose="020B0604020202020204" pitchFamily="34" charset="0"/>
+              <a:buChar char="•"/>
+              <a:tabLst/>
+              <a:defRPr/>
+            </a:pPr>
+            <a:r>
+              <a:rPr lang="en-GB" dirty="0"/>
+              <a:t>Measurements within one athlete may be more symmetric, especially under similar conditions, but we should check the plot rather than assume a normal distribution.</a:t>
+            </a:r>
+            <a:endParaRPr lang="en-US" dirty="0"/>
+          </a:p>
+          <a:p>
+            <a:endParaRPr lang="en-US" dirty="0"/>
+          </a:p>
+        </p:txBody>
+      </p:sp>
+      <p:sp>
+        <p:nvSpPr>
+          <p:cNvPr id="4" name="Slide Number Placeholder 3"/>
+          <p:cNvSpPr>
+            <a:spLocks noGrp="1"/>
+          </p:cNvSpPr>
+          <p:nvPr>
+            <p:ph type="sldNum" sz="quarter" idx="5"/>
+          </p:nvPr>
+        </p:nvSpPr>
+        <p:spPr/>
+        <p:txBody>
+          <a:bodyPr/>
+          <a:lstStyle/>
+          <a:p>
+            <a:fld id="{117D17FD-8842-8E4F-8C3E-EC8B634B2D5A}" type="slidenum">
+              <a:rPr lang="en-US" smtClean="0"/>
+              <a:t>17</a:t>
+            </a:fld>
+            <a:endParaRPr lang="en-US"/>
+          </a:p>
+        </p:txBody>
+      </p:sp>
+    </p:spTree>
+    <p:extLst>
+      <p:ext uri="{BB962C8B-B14F-4D97-AF65-F5344CB8AC3E}">
+        <p14:creationId xmlns:p14="http://schemas.microsoft.com/office/powerpoint/2010/main" val="4014037205"/>
+      </p:ext>
+    </p:extLst>
+  </p:cSld>
+  <p:clrMapOvr>
+    <a:masterClrMapping/>
+  </p:clrMapOvr>
+</p:notes>
+</file>
+
+<file path=ppt/notesSlides/notesSlide14.xml><?xml version="1.0" encoding="utf-8"?>
+<p:notes xmlns:a="http://schemas.openxmlformats.org/drawingml/2006/main" xmlns:r="http://schemas.openxmlformats.org/officeDocument/2006/relationships" xmlns:p="http://schemas.openxmlformats.org/presentationml/2006/main">
+  <p:cSld>
+    <p:spTree>
+      <p:nvGrpSpPr>
+        <p:cNvPr id="1" name=""/>
+        <p:cNvGrpSpPr/>
+        <p:nvPr/>
+      </p:nvGrpSpPr>
+      <p:grpSpPr>
+        <a:xfrm>
+          <a:off x="0" y="0"/>
+          <a:ext cx="0" cy="0"/>
+          <a:chOff x="0" y="0"/>
+          <a:chExt cx="0" cy="0"/>
+        </a:xfrm>
+      </p:grpSpPr>
+      <p:sp>
+        <p:nvSpPr>
+          <p:cNvPr id="2" name="Slide Image Placeholder 1"/>
+          <p:cNvSpPr>
+            <a:spLocks noGrp="1" noRot="1" noChangeAspect="1"/>
+          </p:cNvSpPr>
+          <p:nvPr>
+            <p:ph type="sldImg"/>
+          </p:nvPr>
+        </p:nvSpPr>
+        <p:spPr/>
+      </p:sp>
+      <p:sp>
+        <p:nvSpPr>
+          <p:cNvPr id="3" name="Notes Placeholder 2"/>
+          <p:cNvSpPr>
+            <a:spLocks noGrp="1"/>
+          </p:cNvSpPr>
+          <p:nvPr>
+            <p:ph type="body" idx="1"/>
+          </p:nvPr>
+        </p:nvSpPr>
+        <p:spPr/>
+        <p:txBody>
+          <a:bodyPr/>
+          <a:lstStyle/>
+          <a:p>
             <a:pPr marL="228600" lvl="0" indent="-228600">
               <a:buFont typeface="Arial" panose="020B0604020202020204" pitchFamily="34" charset="0"/>
               <a:buChar char="•"/>
@@ -2581,7 +2692,7 @@
           <a:p>
             <a:fld id="{117D17FD-8842-8E4F-8C3E-EC8B634B2D5A}" type="slidenum">
               <a:rPr lang="en-US" smtClean="0"/>
-              <a:t>16</a:t>
+              <a:t>18</a:t>
             </a:fld>
             <a:endParaRPr lang="en-US"/>
           </a:p>
@@ -2600,7 +2711,7 @@
 </p:notes>
 </file>
 
-<file path=ppt/notesSlides/notesSlide14.xml><?xml version="1.0" encoding="utf-8"?>
+<file path=ppt/notesSlides/notesSlide15.xml><?xml version="1.0" encoding="utf-8"?>
 <p:notes xmlns:a="http://schemas.openxmlformats.org/drawingml/2006/main" xmlns:r="http://schemas.openxmlformats.org/officeDocument/2006/relationships" xmlns:p="http://schemas.openxmlformats.org/presentationml/2006/main">
   <p:cSld>
     <p:spTree>
@@ -2695,7 +2806,7 @@
           <a:p>
             <a:fld id="{1560C251-82B7-4253-A774-38D73C276BCE}" type="slidenum">
               <a:rPr lang="en-US" smtClean="0"/>
-              <a:t>17</a:t>
+              <a:t>19</a:t>
             </a:fld>
             <a:endParaRPr lang="en-US"/>
           </a:p>
@@ -2714,7 +2825,7 @@
 </p:notes>
 </file>
 
-<file path=ppt/notesSlides/notesSlide15.xml><?xml version="1.0" encoding="utf-8"?>
+<file path=ppt/notesSlides/notesSlide16.xml><?xml version="1.0" encoding="utf-8"?>
 <p:notes xmlns:a="http://schemas.openxmlformats.org/drawingml/2006/main" xmlns:r="http://schemas.openxmlformats.org/officeDocument/2006/relationships" xmlns:p="http://schemas.openxmlformats.org/presentationml/2006/main">
   <p:cSld>
     <p:spTree>
@@ -2829,7 +2940,7 @@
           <a:p>
             <a:fld id="{1560C251-82B7-4253-A774-38D73C276BCE}" type="slidenum">
               <a:rPr lang="en-US" smtClean="0"/>
-              <a:t>18</a:t>
+              <a:t>20</a:t>
             </a:fld>
             <a:endParaRPr lang="en-US"/>
           </a:p>
@@ -2848,7 +2959,7 @@
 </p:notes>
 </file>
 
-<file path=ppt/notesSlides/notesSlide16.xml><?xml version="1.0" encoding="utf-8"?>
+<file path=ppt/notesSlides/notesSlide17.xml><?xml version="1.0" encoding="utf-8"?>
 <p:notes xmlns:a="http://schemas.openxmlformats.org/drawingml/2006/main" xmlns:r="http://schemas.openxmlformats.org/officeDocument/2006/relationships" xmlns:p="http://schemas.openxmlformats.org/presentationml/2006/main">
   <p:cSld>
     <p:spTree>
@@ -2987,7 +3098,7 @@
           <a:p>
             <a:fld id="{1560C251-82B7-4253-A774-38D73C276BCE}" type="slidenum">
               <a:rPr lang="en-US" smtClean="0"/>
-              <a:t>19</a:t>
+              <a:t>21</a:t>
             </a:fld>
             <a:endParaRPr lang="en-US"/>
           </a:p>
@@ -3006,7 +3117,7 @@
 </p:notes>
 </file>
 
-<file path=ppt/notesSlides/notesSlide17.xml><?xml version="1.0" encoding="utf-8"?>
+<file path=ppt/notesSlides/notesSlide18.xml><?xml version="1.0" encoding="utf-8"?>
 <p:notes xmlns:a="http://schemas.openxmlformats.org/drawingml/2006/main" xmlns:r="http://schemas.openxmlformats.org/officeDocument/2006/relationships" xmlns:p="http://schemas.openxmlformats.org/presentationml/2006/main">
   <p:cSld>
     <p:spTree>
@@ -3145,7 +3256,7 @@
           <a:p>
             <a:fld id="{1560C251-82B7-4253-A774-38D73C276BCE}" type="slidenum">
               <a:rPr lang="en-US" smtClean="0"/>
-              <a:t>20</a:t>
+              <a:t>22</a:t>
             </a:fld>
             <a:endParaRPr lang="en-US"/>
           </a:p>
@@ -3164,7 +3275,7 @@
 </p:notes>
 </file>
 
-<file path=ppt/notesSlides/notesSlide18.xml><?xml version="1.0" encoding="utf-8"?>
+<file path=ppt/notesSlides/notesSlide19.xml><?xml version="1.0" encoding="utf-8"?>
 <p:notes xmlns:a="http://schemas.openxmlformats.org/drawingml/2006/main" xmlns:r="http://schemas.openxmlformats.org/officeDocument/2006/relationships" xmlns:p="http://schemas.openxmlformats.org/presentationml/2006/main">
   <p:cSld>
     <p:spTree>
@@ -3259,7 +3370,7 @@
           <a:p>
             <a:fld id="{1560C251-82B7-4253-A774-38D73C276BCE}" type="slidenum">
               <a:rPr lang="en-US" smtClean="0"/>
-              <a:t>21</a:t>
+              <a:t>23</a:t>
             </a:fld>
             <a:endParaRPr lang="en-US"/>
           </a:p>
@@ -3269,140 +3380,6 @@
     <p:extLst>
       <p:ext uri="{BB962C8B-B14F-4D97-AF65-F5344CB8AC3E}">
         <p14:creationId xmlns:p14="http://schemas.microsoft.com/office/powerpoint/2010/main" val="3639405884"/>
-      </p:ext>
-    </p:extLst>
-  </p:cSld>
-  <p:clrMapOvr>
-    <a:masterClrMapping/>
-  </p:clrMapOvr>
-</p:notes>
-</file>
-
-<file path=ppt/notesSlides/notesSlide19.xml><?xml version="1.0" encoding="utf-8"?>
-<p:notes xmlns:a="http://schemas.openxmlformats.org/drawingml/2006/main" xmlns:r="http://schemas.openxmlformats.org/officeDocument/2006/relationships" xmlns:p="http://schemas.openxmlformats.org/presentationml/2006/main">
-  <p:cSld>
-    <p:spTree>
-      <p:nvGrpSpPr>
-        <p:cNvPr id="1" name=""/>
-        <p:cNvGrpSpPr/>
-        <p:nvPr/>
-      </p:nvGrpSpPr>
-      <p:grpSpPr>
-        <a:xfrm>
-          <a:off x="0" y="0"/>
-          <a:ext cx="0" cy="0"/>
-          <a:chOff x="0" y="0"/>
-          <a:chExt cx="0" cy="0"/>
-        </a:xfrm>
-      </p:grpSpPr>
-      <p:sp>
-        <p:nvSpPr>
-          <p:cNvPr id="2" name="Slide Image Placeholder 1"/>
-          <p:cNvSpPr>
-            <a:spLocks noGrp="1" noRot="1" noChangeAspect="1"/>
-          </p:cNvSpPr>
-          <p:nvPr>
-            <p:ph type="sldImg"/>
-          </p:nvPr>
-        </p:nvSpPr>
-        <p:spPr/>
-      </p:sp>
-      <p:sp>
-        <p:nvSpPr>
-          <p:cNvPr id="3" name="Notes Placeholder 2"/>
-          <p:cNvSpPr>
-            <a:spLocks noGrp="1"/>
-          </p:cNvSpPr>
-          <p:nvPr>
-            <p:ph type="body" idx="1"/>
-          </p:nvPr>
-        </p:nvSpPr>
-        <p:spPr/>
-        <p:txBody>
-          <a:bodyPr/>
-          <a:lstStyle/>
-          <a:p>
-            <a:r>
-              <a:rPr lang="en-US" sz="1200" b="0" i="0" u="none" strike="noStrike" kern="1200" baseline="0" dirty="0">
-                <a:solidFill>
-                  <a:schemeClr val="tx1"/>
-                </a:solidFill>
-                <a:latin typeface="+mn-lt"/>
-                <a:ea typeface="+mn-ea"/>
-                <a:cs typeface="+mn-cs"/>
-              </a:rPr>
-              <a:t>mistaken expectation that aggregate data will reflect the same relationships found within subgroups such as categories, classes, or individuals that comprise the aggregate.</a:t>
-            </a:r>
-          </a:p>
-          <a:p>
-            <a:endParaRPr lang="en-US" sz="1200" b="0" i="0" u="none" strike="noStrike" kern="1200" baseline="0" dirty="0">
-              <a:solidFill>
-                <a:schemeClr val="tx1"/>
-              </a:solidFill>
-              <a:latin typeface="+mn-lt"/>
-              <a:ea typeface="+mn-ea"/>
-              <a:cs typeface="+mn-cs"/>
-            </a:endParaRPr>
-          </a:p>
-          <a:p>
-            <a:r>
-              <a:rPr lang="en-US" sz="1200" b="0" i="0" u="none" strike="noStrike" kern="1200" baseline="0" dirty="0">
-                <a:solidFill>
-                  <a:schemeClr val="tx1"/>
-                </a:solidFill>
-                <a:latin typeface="+mn-lt"/>
-                <a:ea typeface="+mn-ea"/>
-                <a:cs typeface="+mn-cs"/>
-              </a:rPr>
-              <a:t>In this example, summarizing (aggregating) the two types of shots leading to the devaluing of the 3 point shot</a:t>
-            </a:r>
-          </a:p>
-          <a:p>
-            <a:r>
-              <a:rPr lang="en-US" sz="1200" b="0" i="0" u="none" strike="noStrike" kern="1200" baseline="0" dirty="0">
-                <a:solidFill>
-                  <a:schemeClr val="tx1"/>
-                </a:solidFill>
-                <a:latin typeface="+mn-lt"/>
-                <a:ea typeface="+mn-ea"/>
-                <a:cs typeface="+mn-cs"/>
-              </a:rPr>
-              <a:t>- </a:t>
-            </a:r>
-            <a:r>
-              <a:rPr lang="en-US" dirty="0"/>
-              <a:t>Since Larry Bird took far more two-point shots, his overall percentage is dominated by two-point efficiency. Reggie Miller took many more three-point shots, so his overall percentage is more influenced by three-point efficiency. Because three-pointers are harder shots, that weighting pulls Miller’s overall percentage down</a:t>
-            </a:r>
-          </a:p>
-        </p:txBody>
-      </p:sp>
-      <p:sp>
-        <p:nvSpPr>
-          <p:cNvPr id="4" name="Slide Number Placeholder 3"/>
-          <p:cNvSpPr>
-            <a:spLocks noGrp="1"/>
-          </p:cNvSpPr>
-          <p:nvPr>
-            <p:ph type="sldNum" sz="quarter" idx="5"/>
-          </p:nvPr>
-        </p:nvSpPr>
-        <p:spPr/>
-        <p:txBody>
-          <a:bodyPr/>
-          <a:lstStyle/>
-          <a:p>
-            <a:fld id="{1560C251-82B7-4253-A774-38D73C276BCE}" type="slidenum">
-              <a:rPr lang="en-US" smtClean="0"/>
-              <a:t>23</a:t>
-            </a:fld>
-            <a:endParaRPr lang="en-US"/>
-          </a:p>
-        </p:txBody>
-      </p:sp>
-    </p:spTree>
-    <p:extLst>
-      <p:ext uri="{BB962C8B-B14F-4D97-AF65-F5344CB8AC3E}">
-        <p14:creationId xmlns:p14="http://schemas.microsoft.com/office/powerpoint/2010/main" val="3448769395"/>
       </p:ext>
     </p:extLst>
   </p:cSld>
@@ -3486,7 +3463,7 @@
           <a:p>
             <a:fld id="{1560C251-82B7-4253-A774-38D73C276BCE}" type="slidenum">
               <a:rPr lang="en-US" smtClean="0"/>
-              <a:t>2</a:t>
+              <a:t>4</a:t>
             </a:fld>
             <a:endParaRPr lang="en-US"/>
           </a:p>
@@ -3506,6 +3483,228 @@
 </file>
 
 <file path=ppt/notesSlides/notesSlide20.xml><?xml version="1.0" encoding="utf-8"?>
+<p:notes xmlns:a="http://schemas.openxmlformats.org/drawingml/2006/main" xmlns:r="http://schemas.openxmlformats.org/officeDocument/2006/relationships" xmlns:p="http://schemas.openxmlformats.org/presentationml/2006/main">
+  <p:cSld>
+    <p:spTree>
+      <p:nvGrpSpPr>
+        <p:cNvPr id="1" name=""/>
+        <p:cNvGrpSpPr/>
+        <p:nvPr/>
+      </p:nvGrpSpPr>
+      <p:grpSpPr>
+        <a:xfrm>
+          <a:off x="0" y="0"/>
+          <a:ext cx="0" cy="0"/>
+          <a:chOff x="0" y="0"/>
+          <a:chExt cx="0" cy="0"/>
+        </a:xfrm>
+      </p:grpSpPr>
+      <p:sp>
+        <p:nvSpPr>
+          <p:cNvPr id="2" name="Slide Image Placeholder 1"/>
+          <p:cNvSpPr>
+            <a:spLocks noGrp="1" noRot="1" noChangeAspect="1"/>
+          </p:cNvSpPr>
+          <p:nvPr>
+            <p:ph type="sldImg"/>
+          </p:nvPr>
+        </p:nvSpPr>
+        <p:spPr/>
+      </p:sp>
+      <p:sp>
+        <p:nvSpPr>
+          <p:cNvPr id="3" name="Notes Placeholder 2"/>
+          <p:cNvSpPr>
+            <a:spLocks noGrp="1"/>
+          </p:cNvSpPr>
+          <p:nvPr>
+            <p:ph type="body" idx="1"/>
+          </p:nvPr>
+        </p:nvSpPr>
+        <p:spPr/>
+        <p:txBody>
+          <a:bodyPr/>
+          <a:lstStyle/>
+          <a:p>
+            <a:r>
+              <a:rPr lang="en-GB" dirty="0"/>
+              <a:t>We’ve talked about comparing players by position. Here’s a case where grouping changes the conclusion entirely.</a:t>
+            </a:r>
+            <a:endParaRPr lang="en-US" dirty="0"/>
+          </a:p>
+        </p:txBody>
+      </p:sp>
+      <p:sp>
+        <p:nvSpPr>
+          <p:cNvPr id="4" name="Slide Number Placeholder 3"/>
+          <p:cNvSpPr>
+            <a:spLocks noGrp="1"/>
+          </p:cNvSpPr>
+          <p:nvPr>
+            <p:ph type="sldNum" sz="quarter" idx="5"/>
+          </p:nvPr>
+        </p:nvSpPr>
+        <p:spPr/>
+        <p:txBody>
+          <a:bodyPr/>
+          <a:lstStyle/>
+          <a:p>
+            <a:fld id="{117D17FD-8842-8E4F-8C3E-EC8B634B2D5A}" type="slidenum">
+              <a:rPr lang="en-US" smtClean="0"/>
+              <a:t>24</a:t>
+            </a:fld>
+            <a:endParaRPr lang="en-US"/>
+          </a:p>
+        </p:txBody>
+      </p:sp>
+    </p:spTree>
+    <p:extLst>
+      <p:ext uri="{BB962C8B-B14F-4D97-AF65-F5344CB8AC3E}">
+        <p14:creationId xmlns:p14="http://schemas.microsoft.com/office/powerpoint/2010/main" val="2733012499"/>
+      </p:ext>
+    </p:extLst>
+  </p:cSld>
+  <p:clrMapOvr>
+    <a:masterClrMapping/>
+  </p:clrMapOvr>
+</p:notes>
+</file>
+
+<file path=ppt/notesSlides/notesSlide21.xml><?xml version="1.0" encoding="utf-8"?>
+<p:notes xmlns:a="http://schemas.openxmlformats.org/drawingml/2006/main" xmlns:r="http://schemas.openxmlformats.org/officeDocument/2006/relationships" xmlns:p="http://schemas.openxmlformats.org/presentationml/2006/main">
+  <p:cSld>
+    <p:spTree>
+      <p:nvGrpSpPr>
+        <p:cNvPr id="1" name=""/>
+        <p:cNvGrpSpPr/>
+        <p:nvPr/>
+      </p:nvGrpSpPr>
+      <p:grpSpPr>
+        <a:xfrm>
+          <a:off x="0" y="0"/>
+          <a:ext cx="0" cy="0"/>
+          <a:chOff x="0" y="0"/>
+          <a:chExt cx="0" cy="0"/>
+        </a:xfrm>
+      </p:grpSpPr>
+      <p:sp>
+        <p:nvSpPr>
+          <p:cNvPr id="2" name="Slide Image Placeholder 1"/>
+          <p:cNvSpPr>
+            <a:spLocks noGrp="1" noRot="1" noChangeAspect="1"/>
+          </p:cNvSpPr>
+          <p:nvPr>
+            <p:ph type="sldImg"/>
+          </p:nvPr>
+        </p:nvSpPr>
+        <p:spPr/>
+      </p:sp>
+      <p:sp>
+        <p:nvSpPr>
+          <p:cNvPr id="3" name="Notes Placeholder 2"/>
+          <p:cNvSpPr>
+            <a:spLocks noGrp="1"/>
+          </p:cNvSpPr>
+          <p:nvPr>
+            <p:ph type="body" idx="1"/>
+          </p:nvPr>
+        </p:nvSpPr>
+        <p:spPr/>
+        <p:txBody>
+          <a:bodyPr/>
+          <a:lstStyle/>
+          <a:p>
+            <a:r>
+              <a:rPr lang="en-US" sz="1200" b="0" i="0" u="none" strike="noStrike" kern="1200" baseline="0" dirty="0">
+                <a:solidFill>
+                  <a:schemeClr val="tx1"/>
+                </a:solidFill>
+                <a:latin typeface="+mn-lt"/>
+                <a:ea typeface="+mn-ea"/>
+                <a:cs typeface="+mn-cs"/>
+              </a:rPr>
+              <a:t>mistaken expectation that aggregate data will reflect the same relationships found within subgroups such as categories, classes, or individuals that comprise the aggregate.</a:t>
+            </a:r>
+          </a:p>
+          <a:p>
+            <a:endParaRPr lang="en-US" sz="1200" b="0" i="0" u="none" strike="noStrike" kern="1200" baseline="0" dirty="0">
+              <a:solidFill>
+                <a:schemeClr val="tx1"/>
+              </a:solidFill>
+              <a:latin typeface="+mn-lt"/>
+              <a:ea typeface="+mn-ea"/>
+              <a:cs typeface="+mn-cs"/>
+            </a:endParaRPr>
+          </a:p>
+          <a:p>
+            <a:r>
+              <a:rPr lang="en-US" sz="1200" b="0" i="0" u="none" strike="noStrike" kern="1200" baseline="0" dirty="0">
+                <a:solidFill>
+                  <a:schemeClr val="tx1"/>
+                </a:solidFill>
+                <a:latin typeface="+mn-lt"/>
+                <a:ea typeface="+mn-ea"/>
+                <a:cs typeface="+mn-cs"/>
+              </a:rPr>
+              <a:t>In this example, summarizing (aggregating) the two types of shots leading to the devaluing of the 3 point shot</a:t>
+            </a:r>
+          </a:p>
+          <a:p>
+            <a:r>
+              <a:rPr lang="en-US" sz="1200" b="0" i="0" u="none" strike="noStrike" kern="1200" baseline="0" dirty="0">
+                <a:solidFill>
+                  <a:schemeClr val="tx1"/>
+                </a:solidFill>
+                <a:latin typeface="+mn-lt"/>
+                <a:ea typeface="+mn-ea"/>
+                <a:cs typeface="+mn-cs"/>
+              </a:rPr>
+              <a:t>- </a:t>
+            </a:r>
+            <a:r>
+              <a:rPr lang="en-US" dirty="0"/>
+              <a:t>Since Larry Bird took far more two-point shots, his overall percentage is dominated by two-point efficiency. Reggie Miller took many more three-point shots, so his overall percentage is more influenced by three-point efficiency. Because three-pointers are harder shots, that weighting pulls Miller’s overall percentage down</a:t>
+            </a:r>
+          </a:p>
+        </p:txBody>
+      </p:sp>
+      <p:sp>
+        <p:nvSpPr>
+          <p:cNvPr id="4" name="Slide Number Placeholder 3"/>
+          <p:cNvSpPr>
+            <a:spLocks noGrp="1"/>
+          </p:cNvSpPr>
+          <p:nvPr>
+            <p:ph type="sldNum" sz="quarter" idx="5"/>
+          </p:nvPr>
+        </p:nvSpPr>
+        <p:spPr/>
+        <p:txBody>
+          <a:bodyPr/>
+          <a:lstStyle/>
+          <a:p>
+            <a:fld id="{1560C251-82B7-4253-A774-38D73C276BCE}" type="slidenum">
+              <a:rPr lang="en-US" smtClean="0"/>
+              <a:t>25</a:t>
+            </a:fld>
+            <a:endParaRPr lang="en-US"/>
+          </a:p>
+        </p:txBody>
+      </p:sp>
+    </p:spTree>
+    <p:extLst>
+      <p:ext uri="{BB962C8B-B14F-4D97-AF65-F5344CB8AC3E}">
+        <p14:creationId xmlns:p14="http://schemas.microsoft.com/office/powerpoint/2010/main" val="3448769395"/>
+      </p:ext>
+    </p:extLst>
+  </p:cSld>
+  <p:clrMapOvr>
+    <a:masterClrMapping/>
+  </p:clrMapOvr>
+</p:notes>
+</file>
+
+<file path=ppt/notesSlides/notesSlide22.xml><?xml version="1.0" encoding="utf-8"?>
 <p:notes xmlns:a="http://schemas.openxmlformats.org/drawingml/2006/main" xmlns:r="http://schemas.openxmlformats.org/officeDocument/2006/relationships" xmlns:p="http://schemas.openxmlformats.org/presentationml/2006/main">
   <p:cSld>
     <p:spTree>
@@ -3644,7 +3843,7 @@
           <a:p>
             <a:fld id="{1560C251-82B7-4253-A774-38D73C276BCE}" type="slidenum">
               <a:rPr lang="en-US" smtClean="0"/>
-              <a:t>24</a:t>
+              <a:t>26</a:t>
             </a:fld>
             <a:endParaRPr lang="en-US"/>
           </a:p>
@@ -3663,7 +3862,7 @@
 </p:notes>
 </file>
 
-<file path=ppt/notesSlides/notesSlide21.xml><?xml version="1.0" encoding="utf-8"?>
+<file path=ppt/notesSlides/notesSlide23.xml><?xml version="1.0" encoding="utf-8"?>
 <p:notes xmlns:a="http://schemas.openxmlformats.org/drawingml/2006/main" xmlns:r="http://schemas.openxmlformats.org/officeDocument/2006/relationships" xmlns:p="http://schemas.openxmlformats.org/presentationml/2006/main">
   <p:cSld>
     <p:spTree>
@@ -3802,7 +4001,7 @@
           <a:p>
             <a:fld id="{1560C251-82B7-4253-A774-38D73C276BCE}" type="slidenum">
               <a:rPr lang="en-US" smtClean="0"/>
-              <a:t>25</a:t>
+              <a:t>27</a:t>
             </a:fld>
             <a:endParaRPr lang="en-US"/>
           </a:p>
@@ -3812,204 +4011,6 @@
     <p:extLst>
       <p:ext uri="{BB962C8B-B14F-4D97-AF65-F5344CB8AC3E}">
         <p14:creationId xmlns:p14="http://schemas.microsoft.com/office/powerpoint/2010/main" val="4010814745"/>
-      </p:ext>
-    </p:extLst>
-  </p:cSld>
-  <p:clrMapOvr>
-    <a:masterClrMapping/>
-  </p:clrMapOvr>
-</p:notes>
-</file>
-
-<file path=ppt/notesSlides/notesSlide22.xml><?xml version="1.0" encoding="utf-8"?>
-<p:notes xmlns:a="http://schemas.openxmlformats.org/drawingml/2006/main" xmlns:r="http://schemas.openxmlformats.org/officeDocument/2006/relationships" xmlns:p="http://schemas.openxmlformats.org/presentationml/2006/main">
-  <p:cSld>
-    <p:spTree>
-      <p:nvGrpSpPr>
-        <p:cNvPr id="1" name=""/>
-        <p:cNvGrpSpPr/>
-        <p:nvPr/>
-      </p:nvGrpSpPr>
-      <p:grpSpPr>
-        <a:xfrm>
-          <a:off x="0" y="0"/>
-          <a:ext cx="0" cy="0"/>
-          <a:chOff x="0" y="0"/>
-          <a:chExt cx="0" cy="0"/>
-        </a:xfrm>
-      </p:grpSpPr>
-      <p:sp>
-        <p:nvSpPr>
-          <p:cNvPr id="2" name="Slide Image Placeholder 1"/>
-          <p:cNvSpPr>
-            <a:spLocks noGrp="1" noRot="1" noChangeAspect="1"/>
-          </p:cNvSpPr>
-          <p:nvPr>
-            <p:ph type="sldImg"/>
-          </p:nvPr>
-        </p:nvSpPr>
-        <p:spPr/>
-      </p:sp>
-      <p:sp>
-        <p:nvSpPr>
-          <p:cNvPr id="3" name="Notes Placeholder 2"/>
-          <p:cNvSpPr>
-            <a:spLocks noGrp="1"/>
-          </p:cNvSpPr>
-          <p:nvPr>
-            <p:ph type="body" idx="1"/>
-          </p:nvPr>
-        </p:nvSpPr>
-        <p:spPr/>
-        <p:txBody>
-          <a:bodyPr/>
-          <a:lstStyle/>
-          <a:p>
-            <a:r>
-              <a:rPr lang="en-US" dirty="0"/>
-              <a:t>This is the real Anscombe’s quartet, in case you ever come across it outside of this class</a:t>
-            </a:r>
-          </a:p>
-        </p:txBody>
-      </p:sp>
-      <p:sp>
-        <p:nvSpPr>
-          <p:cNvPr id="4" name="Slide Number Placeholder 3"/>
-          <p:cNvSpPr>
-            <a:spLocks noGrp="1"/>
-          </p:cNvSpPr>
-          <p:nvPr>
-            <p:ph type="sldNum" sz="quarter" idx="5"/>
-          </p:nvPr>
-        </p:nvSpPr>
-        <p:spPr/>
-        <p:txBody>
-          <a:bodyPr/>
-          <a:lstStyle/>
-          <a:p>
-            <a:fld id="{1560C251-82B7-4253-A774-38D73C276BCE}" type="slidenum">
-              <a:rPr lang="en-US" smtClean="0"/>
-              <a:t>29</a:t>
-            </a:fld>
-            <a:endParaRPr lang="en-US"/>
-          </a:p>
-        </p:txBody>
-      </p:sp>
-    </p:spTree>
-    <p:extLst>
-      <p:ext uri="{BB962C8B-B14F-4D97-AF65-F5344CB8AC3E}">
-        <p14:creationId xmlns:p14="http://schemas.microsoft.com/office/powerpoint/2010/main" val="450748608"/>
-      </p:ext>
-    </p:extLst>
-  </p:cSld>
-  <p:clrMapOvr>
-    <a:masterClrMapping/>
-  </p:clrMapOvr>
-</p:notes>
-</file>
-
-<file path=ppt/notesSlides/notesSlide23.xml><?xml version="1.0" encoding="utf-8"?>
-<p:notes xmlns:a="http://schemas.openxmlformats.org/drawingml/2006/main" xmlns:r="http://schemas.openxmlformats.org/officeDocument/2006/relationships" xmlns:p="http://schemas.openxmlformats.org/presentationml/2006/main">
-  <p:cSld>
-    <p:spTree>
-      <p:nvGrpSpPr>
-        <p:cNvPr id="1" name="">
-          <a:extLst>
-            <a:ext uri="{FF2B5EF4-FFF2-40B4-BE49-F238E27FC236}">
-              <a16:creationId xmlns:a16="http://schemas.microsoft.com/office/drawing/2014/main" id="{17D6C3BF-1410-282C-E358-4DAEDAD30E2D}"/>
-            </a:ext>
-          </a:extLst>
-        </p:cNvPr>
-        <p:cNvGrpSpPr/>
-        <p:nvPr/>
-      </p:nvGrpSpPr>
-      <p:grpSpPr>
-        <a:xfrm>
-          <a:off x="0" y="0"/>
-          <a:ext cx="0" cy="0"/>
-          <a:chOff x="0" y="0"/>
-          <a:chExt cx="0" cy="0"/>
-        </a:xfrm>
-      </p:grpSpPr>
-      <p:sp>
-        <p:nvSpPr>
-          <p:cNvPr id="2" name="Slide Image Placeholder 1">
-            <a:extLst>
-              <a:ext uri="{FF2B5EF4-FFF2-40B4-BE49-F238E27FC236}">
-                <a16:creationId xmlns:a16="http://schemas.microsoft.com/office/drawing/2014/main" id="{BAF13BA8-57D9-8395-C333-5A57AD9C0DF5}"/>
-              </a:ext>
-            </a:extLst>
-          </p:cNvPr>
-          <p:cNvSpPr>
-            <a:spLocks noGrp="1" noRot="1" noChangeAspect="1"/>
-          </p:cNvSpPr>
-          <p:nvPr>
-            <p:ph type="sldImg"/>
-          </p:nvPr>
-        </p:nvSpPr>
-        <p:spPr/>
-      </p:sp>
-      <p:sp>
-        <p:nvSpPr>
-          <p:cNvPr id="3" name="Notes Placeholder 2">
-            <a:extLst>
-              <a:ext uri="{FF2B5EF4-FFF2-40B4-BE49-F238E27FC236}">
-                <a16:creationId xmlns:a16="http://schemas.microsoft.com/office/drawing/2014/main" id="{807B752B-7357-A385-8B29-763FD6749BDC}"/>
-              </a:ext>
-            </a:extLst>
-          </p:cNvPr>
-          <p:cNvSpPr>
-            <a:spLocks noGrp="1"/>
-          </p:cNvSpPr>
-          <p:nvPr>
-            <p:ph type="body" idx="1"/>
-          </p:nvPr>
-        </p:nvSpPr>
-        <p:spPr/>
-        <p:txBody>
-          <a:bodyPr/>
-          <a:lstStyle/>
-          <a:p>
-            <a:r>
-              <a:rPr lang="en-US" b="1" dirty="0"/>
-              <a:t>Section 3: What summaries reveal vs. what they hide</a:t>
-            </a:r>
-          </a:p>
-        </p:txBody>
-      </p:sp>
-      <p:sp>
-        <p:nvSpPr>
-          <p:cNvPr id="4" name="Slide Number Placeholder 3">
-            <a:extLst>
-              <a:ext uri="{FF2B5EF4-FFF2-40B4-BE49-F238E27FC236}">
-                <a16:creationId xmlns:a16="http://schemas.microsoft.com/office/drawing/2014/main" id="{644BD303-86C6-3EB0-E571-19959F856032}"/>
-              </a:ext>
-            </a:extLst>
-          </p:cNvPr>
-          <p:cNvSpPr>
-            <a:spLocks noGrp="1"/>
-          </p:cNvSpPr>
-          <p:nvPr>
-            <p:ph type="sldNum" sz="quarter" idx="5"/>
-          </p:nvPr>
-        </p:nvSpPr>
-        <p:spPr/>
-        <p:txBody>
-          <a:bodyPr/>
-          <a:lstStyle/>
-          <a:p>
-            <a:fld id="{1560C251-82B7-4253-A774-38D73C276BCE}" type="slidenum">
-              <a:rPr lang="en-US" smtClean="0"/>
-              <a:t>30</a:t>
-            </a:fld>
-            <a:endParaRPr lang="en-US"/>
-          </a:p>
-        </p:txBody>
-      </p:sp>
-    </p:spTree>
-    <p:extLst>
-      <p:ext uri="{BB962C8B-B14F-4D97-AF65-F5344CB8AC3E}">
-        <p14:creationId xmlns:p14="http://schemas.microsoft.com/office/powerpoint/2010/main" val="414880112"/>
       </p:ext>
     </p:extLst>
   </p:cSld>
@@ -4065,144 +4066,7 @@
           <a:p>
             <a:r>
               <a:rPr lang="en-US" dirty="0"/>
-              <a:t>– Which summary statistics are </a:t>
-            </a:r>
-            <a:r>
-              <a:rPr lang="en-US" b="1" dirty="0"/>
-              <a:t>invalid</a:t>
-            </a:r>
-            <a:r>
-              <a:rPr lang="en-US" dirty="0"/>
-              <a:t> for Position, and why?</a:t>
-            </a:r>
-          </a:p>
-          <a:p>
-            <a:r>
-              <a:rPr lang="en-US" dirty="0"/>
-              <a:t>– What is the </a:t>
-            </a:r>
-            <a:r>
-              <a:rPr lang="en-US" b="1" dirty="0"/>
-              <a:t>mode</a:t>
-            </a:r>
-            <a:r>
-              <a:rPr lang="en-US" dirty="0"/>
-              <a:t> of Position?</a:t>
-            </a:r>
-            <a:br>
-              <a:rPr lang="en-US" dirty="0"/>
-            </a:br>
-            <a:endParaRPr lang="en-US" dirty="0"/>
-          </a:p>
-          <a:p>
-            <a:r>
-              <a:rPr lang="en-US" dirty="0"/>
-              <a:t>– For </a:t>
-            </a:r>
-            <a:r>
-              <a:rPr lang="en-US" dirty="0" err="1"/>
-              <a:t>JumpHeight_cm</a:t>
-            </a:r>
-            <a:r>
-              <a:rPr lang="en-US" dirty="0"/>
-              <a:t>, which is more representative of a “typical” athlete: </a:t>
-            </a:r>
-            <a:r>
-              <a:rPr lang="en-US" b="1" dirty="0"/>
-              <a:t>mean or median</a:t>
-            </a:r>
-            <a:r>
-              <a:rPr lang="en-US" dirty="0"/>
-              <a:t>?</a:t>
-            </a:r>
-          </a:p>
-          <a:p>
-            <a:endParaRPr lang="en-US" dirty="0"/>
-          </a:p>
-          <a:p>
-            <a:r>
-              <a:rPr lang="en-US" dirty="0"/>
-              <a:t>– Which variability measure is </a:t>
-            </a:r>
-            <a:r>
-              <a:rPr lang="en-US" b="1" dirty="0"/>
-              <a:t>most affected</a:t>
-            </a:r>
-            <a:r>
-              <a:rPr lang="en-US" dirty="0"/>
-              <a:t> by Athlete A10?</a:t>
-            </a:r>
-            <a:br>
-              <a:rPr lang="en-US" dirty="0"/>
-            </a:br>
-            <a:r>
-              <a:rPr lang="en-US" dirty="0"/>
-              <a:t>– Which variability measure is </a:t>
-            </a:r>
-            <a:r>
-              <a:rPr lang="en-US" b="1" dirty="0"/>
-              <a:t>least affected</a:t>
-            </a:r>
-            <a:r>
-              <a:rPr lang="en-US" dirty="0"/>
-              <a:t> by Athlete A10?</a:t>
-            </a:r>
-          </a:p>
-          <a:p>
-            <a:endParaRPr lang="en-US" dirty="0"/>
-          </a:p>
-          <a:p>
-            <a:r>
-              <a:rPr lang="en-US" dirty="0"/>
-              <a:t>– If you were </a:t>
-            </a:r>
-            <a:r>
-              <a:rPr lang="en-US" b="1" dirty="0"/>
-              <a:t>validating the data</a:t>
-            </a:r>
-            <a:r>
-              <a:rPr lang="en-US" dirty="0"/>
-              <a:t>, which variability measure would you look at first?</a:t>
-            </a:r>
-            <a:br>
-              <a:rPr lang="en-US" dirty="0"/>
-            </a:br>
-            <a:r>
-              <a:rPr lang="en-US" dirty="0"/>
-              <a:t>– If you were </a:t>
-            </a:r>
-            <a:r>
-              <a:rPr lang="en-US" b="1" dirty="0"/>
-              <a:t>describing performance consistency</a:t>
-            </a:r>
-            <a:r>
-              <a:rPr lang="en-US" dirty="0"/>
-              <a:t>, which would you report?</a:t>
-            </a:r>
-          </a:p>
-          <a:p>
-            <a:endParaRPr lang="en-US" dirty="0"/>
-          </a:p>
-          <a:p>
-            <a:r>
-              <a:rPr lang="en-US" dirty="0"/>
-              <a:t>– If you could report </a:t>
-            </a:r>
-            <a:r>
-              <a:rPr lang="en-US" b="1" dirty="0"/>
-              <a:t>one number for “typical performance”</a:t>
-            </a:r>
-            <a:r>
-              <a:rPr lang="en-US" dirty="0"/>
-              <a:t> and </a:t>
-            </a:r>
-            <a:r>
-              <a:rPr lang="en-US" b="1" dirty="0"/>
-              <a:t>one number for “spread”</a:t>
-            </a:r>
-            <a:r>
-              <a:rPr lang="en-US" dirty="0"/>
-              <a:t> to a coach, what would you choose and why?</a:t>
+              <a:t>This is the real Anscombe’s quartet, in case you ever come across it outside of this class</a:t>
             </a:r>
           </a:p>
         </p:txBody>
@@ -4225,6 +4089,341 @@
             <a:fld id="{1560C251-82B7-4253-A774-38D73C276BCE}" type="slidenum">
               <a:rPr lang="en-US" smtClean="0"/>
               <a:t>31</a:t>
+            </a:fld>
+            <a:endParaRPr lang="en-US"/>
+          </a:p>
+        </p:txBody>
+      </p:sp>
+    </p:spTree>
+    <p:extLst>
+      <p:ext uri="{BB962C8B-B14F-4D97-AF65-F5344CB8AC3E}">
+        <p14:creationId xmlns:p14="http://schemas.microsoft.com/office/powerpoint/2010/main" val="450748608"/>
+      </p:ext>
+    </p:extLst>
+  </p:cSld>
+  <p:clrMapOvr>
+    <a:masterClrMapping/>
+  </p:clrMapOvr>
+</p:notes>
+</file>
+
+<file path=ppt/notesSlides/notesSlide25.xml><?xml version="1.0" encoding="utf-8"?>
+<p:notes xmlns:a="http://schemas.openxmlformats.org/drawingml/2006/main" xmlns:r="http://schemas.openxmlformats.org/officeDocument/2006/relationships" xmlns:p="http://schemas.openxmlformats.org/presentationml/2006/main">
+  <p:cSld>
+    <p:spTree>
+      <p:nvGrpSpPr>
+        <p:cNvPr id="1" name="">
+          <a:extLst>
+            <a:ext uri="{FF2B5EF4-FFF2-40B4-BE49-F238E27FC236}">
+              <a16:creationId xmlns:a16="http://schemas.microsoft.com/office/drawing/2014/main" id="{17D6C3BF-1410-282C-E358-4DAEDAD30E2D}"/>
+            </a:ext>
+          </a:extLst>
+        </p:cNvPr>
+        <p:cNvGrpSpPr/>
+        <p:nvPr/>
+      </p:nvGrpSpPr>
+      <p:grpSpPr>
+        <a:xfrm>
+          <a:off x="0" y="0"/>
+          <a:ext cx="0" cy="0"/>
+          <a:chOff x="0" y="0"/>
+          <a:chExt cx="0" cy="0"/>
+        </a:xfrm>
+      </p:grpSpPr>
+      <p:sp>
+        <p:nvSpPr>
+          <p:cNvPr id="2" name="Slide Image Placeholder 1">
+            <a:extLst>
+              <a:ext uri="{FF2B5EF4-FFF2-40B4-BE49-F238E27FC236}">
+                <a16:creationId xmlns:a16="http://schemas.microsoft.com/office/drawing/2014/main" id="{BAF13BA8-57D9-8395-C333-5A57AD9C0DF5}"/>
+              </a:ext>
+            </a:extLst>
+          </p:cNvPr>
+          <p:cNvSpPr>
+            <a:spLocks noGrp="1" noRot="1" noChangeAspect="1"/>
+          </p:cNvSpPr>
+          <p:nvPr>
+            <p:ph type="sldImg"/>
+          </p:nvPr>
+        </p:nvSpPr>
+        <p:spPr/>
+      </p:sp>
+      <p:sp>
+        <p:nvSpPr>
+          <p:cNvPr id="3" name="Notes Placeholder 2">
+            <a:extLst>
+              <a:ext uri="{FF2B5EF4-FFF2-40B4-BE49-F238E27FC236}">
+                <a16:creationId xmlns:a16="http://schemas.microsoft.com/office/drawing/2014/main" id="{807B752B-7357-A385-8B29-763FD6749BDC}"/>
+              </a:ext>
+            </a:extLst>
+          </p:cNvPr>
+          <p:cNvSpPr>
+            <a:spLocks noGrp="1"/>
+          </p:cNvSpPr>
+          <p:nvPr>
+            <p:ph type="body" idx="1"/>
+          </p:nvPr>
+        </p:nvSpPr>
+        <p:spPr/>
+        <p:txBody>
+          <a:bodyPr/>
+          <a:lstStyle/>
+          <a:p>
+            <a:r>
+              <a:rPr lang="en-US" b="1" dirty="0"/>
+              <a:t>Section 3: What summaries reveal vs. what they hide</a:t>
+            </a:r>
+          </a:p>
+        </p:txBody>
+      </p:sp>
+      <p:sp>
+        <p:nvSpPr>
+          <p:cNvPr id="4" name="Slide Number Placeholder 3">
+            <a:extLst>
+              <a:ext uri="{FF2B5EF4-FFF2-40B4-BE49-F238E27FC236}">
+                <a16:creationId xmlns:a16="http://schemas.microsoft.com/office/drawing/2014/main" id="{644BD303-86C6-3EB0-E571-19959F856032}"/>
+              </a:ext>
+            </a:extLst>
+          </p:cNvPr>
+          <p:cNvSpPr>
+            <a:spLocks noGrp="1"/>
+          </p:cNvSpPr>
+          <p:nvPr>
+            <p:ph type="sldNum" sz="quarter" idx="5"/>
+          </p:nvPr>
+        </p:nvSpPr>
+        <p:spPr/>
+        <p:txBody>
+          <a:bodyPr/>
+          <a:lstStyle/>
+          <a:p>
+            <a:fld id="{1560C251-82B7-4253-A774-38D73C276BCE}" type="slidenum">
+              <a:rPr lang="en-US" smtClean="0"/>
+              <a:t>32</a:t>
+            </a:fld>
+            <a:endParaRPr lang="en-US"/>
+          </a:p>
+        </p:txBody>
+      </p:sp>
+    </p:spTree>
+    <p:extLst>
+      <p:ext uri="{BB962C8B-B14F-4D97-AF65-F5344CB8AC3E}">
+        <p14:creationId xmlns:p14="http://schemas.microsoft.com/office/powerpoint/2010/main" val="414880112"/>
+      </p:ext>
+    </p:extLst>
+  </p:cSld>
+  <p:clrMapOvr>
+    <a:masterClrMapping/>
+  </p:clrMapOvr>
+</p:notes>
+</file>
+
+<file path=ppt/notesSlides/notesSlide26.xml><?xml version="1.0" encoding="utf-8"?>
+<p:notes xmlns:a="http://schemas.openxmlformats.org/drawingml/2006/main" xmlns:r="http://schemas.openxmlformats.org/officeDocument/2006/relationships" xmlns:p="http://schemas.openxmlformats.org/presentationml/2006/main">
+  <p:cSld>
+    <p:spTree>
+      <p:nvGrpSpPr>
+        <p:cNvPr id="1" name=""/>
+        <p:cNvGrpSpPr/>
+        <p:nvPr/>
+      </p:nvGrpSpPr>
+      <p:grpSpPr>
+        <a:xfrm>
+          <a:off x="0" y="0"/>
+          <a:ext cx="0" cy="0"/>
+          <a:chOff x="0" y="0"/>
+          <a:chExt cx="0" cy="0"/>
+        </a:xfrm>
+      </p:grpSpPr>
+      <p:sp>
+        <p:nvSpPr>
+          <p:cNvPr id="2" name="Slide Image Placeholder 1"/>
+          <p:cNvSpPr>
+            <a:spLocks noGrp="1" noRot="1" noChangeAspect="1"/>
+          </p:cNvSpPr>
+          <p:nvPr>
+            <p:ph type="sldImg"/>
+          </p:nvPr>
+        </p:nvSpPr>
+        <p:spPr/>
+      </p:sp>
+      <p:sp>
+        <p:nvSpPr>
+          <p:cNvPr id="3" name="Notes Placeholder 2"/>
+          <p:cNvSpPr>
+            <a:spLocks noGrp="1"/>
+          </p:cNvSpPr>
+          <p:nvPr>
+            <p:ph type="body" idx="1"/>
+          </p:nvPr>
+        </p:nvSpPr>
+        <p:spPr/>
+        <p:txBody>
+          <a:bodyPr/>
+          <a:lstStyle/>
+          <a:p>
+            <a:r>
+              <a:rPr lang="en-US" dirty="0"/>
+              <a:t>– Which summary statistics are </a:t>
+            </a:r>
+            <a:r>
+              <a:rPr lang="en-US" b="1" dirty="0"/>
+              <a:t>invalid</a:t>
+            </a:r>
+            <a:r>
+              <a:rPr lang="en-US" dirty="0"/>
+              <a:t> for Position, and why?</a:t>
+            </a:r>
+          </a:p>
+          <a:p>
+            <a:r>
+              <a:rPr lang="en-US" dirty="0"/>
+              <a:t>– What is the </a:t>
+            </a:r>
+            <a:r>
+              <a:rPr lang="en-US" b="1" dirty="0"/>
+              <a:t>mode</a:t>
+            </a:r>
+            <a:r>
+              <a:rPr lang="en-US" dirty="0"/>
+              <a:t> of Position?</a:t>
+            </a:r>
+            <a:br>
+              <a:rPr lang="en-US" dirty="0"/>
+            </a:br>
+            <a:endParaRPr lang="en-US" dirty="0"/>
+          </a:p>
+          <a:p>
+            <a:r>
+              <a:rPr lang="en-US" dirty="0"/>
+              <a:t>– For </a:t>
+            </a:r>
+            <a:r>
+              <a:rPr lang="en-US" dirty="0" err="1"/>
+              <a:t>JumpHeight_cm</a:t>
+            </a:r>
+            <a:r>
+              <a:rPr lang="en-US" dirty="0"/>
+              <a:t>, which is more representative of a “typical” athlete: </a:t>
+            </a:r>
+            <a:r>
+              <a:rPr lang="en-US" b="1" dirty="0"/>
+              <a:t>mean or median</a:t>
+            </a:r>
+            <a:r>
+              <a:rPr lang="en-US" dirty="0"/>
+              <a:t>?</a:t>
+            </a:r>
+          </a:p>
+          <a:p>
+            <a:endParaRPr lang="en-US" dirty="0"/>
+          </a:p>
+          <a:p>
+            <a:r>
+              <a:rPr lang="en-US" dirty="0"/>
+              <a:t>– Which variability measure is </a:t>
+            </a:r>
+            <a:r>
+              <a:rPr lang="en-US" b="1" dirty="0"/>
+              <a:t>most affected</a:t>
+            </a:r>
+            <a:r>
+              <a:rPr lang="en-US" dirty="0"/>
+              <a:t> by Athlete A10?</a:t>
+            </a:r>
+            <a:br>
+              <a:rPr lang="en-US" dirty="0"/>
+            </a:br>
+            <a:r>
+              <a:rPr lang="en-US" dirty="0"/>
+              <a:t>– Which variability measure is </a:t>
+            </a:r>
+            <a:r>
+              <a:rPr lang="en-US" b="1" dirty="0"/>
+              <a:t>least affected</a:t>
+            </a:r>
+            <a:r>
+              <a:rPr lang="en-US" dirty="0"/>
+              <a:t> by Athlete A10?</a:t>
+            </a:r>
+          </a:p>
+          <a:p>
+            <a:endParaRPr lang="en-US" dirty="0"/>
+          </a:p>
+          <a:p>
+            <a:r>
+              <a:rPr lang="en-US" dirty="0"/>
+              <a:t>– If you were </a:t>
+            </a:r>
+            <a:r>
+              <a:rPr lang="en-US" b="1" dirty="0"/>
+              <a:t>validating the data</a:t>
+            </a:r>
+            <a:r>
+              <a:rPr lang="en-US" dirty="0"/>
+              <a:t>, which variability measure would you look at first?</a:t>
+            </a:r>
+            <a:br>
+              <a:rPr lang="en-US" dirty="0"/>
+            </a:br>
+            <a:r>
+              <a:rPr lang="en-US" dirty="0"/>
+              <a:t>– If you were </a:t>
+            </a:r>
+            <a:r>
+              <a:rPr lang="en-US" b="1" dirty="0"/>
+              <a:t>describing performance consistency</a:t>
+            </a:r>
+            <a:r>
+              <a:rPr lang="en-US" dirty="0"/>
+              <a:t>, which would you report?</a:t>
+            </a:r>
+          </a:p>
+          <a:p>
+            <a:endParaRPr lang="en-US" dirty="0"/>
+          </a:p>
+          <a:p>
+            <a:r>
+              <a:rPr lang="en-US" dirty="0"/>
+              <a:t>– If you could report </a:t>
+            </a:r>
+            <a:r>
+              <a:rPr lang="en-US" b="1" dirty="0"/>
+              <a:t>one number for “typical performance”</a:t>
+            </a:r>
+            <a:r>
+              <a:rPr lang="en-US" dirty="0"/>
+              <a:t> and </a:t>
+            </a:r>
+            <a:r>
+              <a:rPr lang="en-US" b="1" dirty="0"/>
+              <a:t>one number for “spread”</a:t>
+            </a:r>
+            <a:r>
+              <a:rPr lang="en-US" dirty="0"/>
+              <a:t> to a coach, what would you choose and why?</a:t>
+            </a:r>
+          </a:p>
+        </p:txBody>
+      </p:sp>
+      <p:sp>
+        <p:nvSpPr>
+          <p:cNvPr id="4" name="Slide Number Placeholder 3"/>
+          <p:cNvSpPr>
+            <a:spLocks noGrp="1"/>
+          </p:cNvSpPr>
+          <p:nvPr>
+            <p:ph type="sldNum" sz="quarter" idx="5"/>
+          </p:nvPr>
+        </p:nvSpPr>
+        <p:spPr/>
+        <p:txBody>
+          <a:bodyPr/>
+          <a:lstStyle/>
+          <a:p>
+            <a:fld id="{1560C251-82B7-4253-A774-38D73C276BCE}" type="slidenum">
+              <a:rPr lang="en-US" smtClean="0"/>
+              <a:t>33</a:t>
             </a:fld>
             <a:endParaRPr lang="en-US"/>
           </a:p>
@@ -4243,7 +4442,7 @@
 </p:notes>
 </file>
 
-<file path=ppt/notesSlides/notesSlide25.xml><?xml version="1.0" encoding="utf-8"?>
+<file path=ppt/notesSlides/notesSlide27.xml><?xml version="1.0" encoding="utf-8"?>
 <p:notes xmlns:a="http://schemas.openxmlformats.org/drawingml/2006/main" xmlns:r="http://schemas.openxmlformats.org/officeDocument/2006/relationships" xmlns:p="http://schemas.openxmlformats.org/presentationml/2006/main">
   <p:cSld>
     <p:spTree>
@@ -4332,7 +4531,7 @@
           <a:p>
             <a:fld id="{1560C251-82B7-4253-A774-38D73C276BCE}" type="slidenum">
               <a:rPr lang="en-US" smtClean="0"/>
-              <a:t>32</a:t>
+              <a:t>34</a:t>
             </a:fld>
             <a:endParaRPr lang="en-US"/>
           </a:p>
@@ -4351,7 +4550,7 @@
 </p:notes>
 </file>
 
-<file path=ppt/notesSlides/notesSlide26.xml><?xml version="1.0" encoding="utf-8"?>
+<file path=ppt/notesSlides/notesSlide28.xml><?xml version="1.0" encoding="utf-8"?>
 <p:notes xmlns:a="http://schemas.openxmlformats.org/drawingml/2006/main" xmlns:r="http://schemas.openxmlformats.org/officeDocument/2006/relationships" xmlns:p="http://schemas.openxmlformats.org/presentationml/2006/main">
   <p:cSld>
     <p:spTree>
@@ -4443,7 +4642,7 @@
           <a:p>
             <a:fld id="{1560C251-82B7-4253-A774-38D73C276BCE}" type="slidenum">
               <a:rPr lang="en-US" smtClean="0"/>
-              <a:t>36</a:t>
+              <a:t>39</a:t>
             </a:fld>
             <a:endParaRPr lang="en-US"/>
           </a:p>
@@ -4462,7 +4661,7 @@
 </p:notes>
 </file>
 
-<file path=ppt/notesSlides/notesSlide27.xml><?xml version="1.0" encoding="utf-8"?>
+<file path=ppt/notesSlides/notesSlide29.xml><?xml version="1.0" encoding="utf-8"?>
 <p:notes xmlns:a="http://schemas.openxmlformats.org/drawingml/2006/main" xmlns:r="http://schemas.openxmlformats.org/officeDocument/2006/relationships" xmlns:p="http://schemas.openxmlformats.org/presentationml/2006/main">
   <p:cSld>
     <p:spTree>
@@ -4557,7 +4756,7 @@
           <a:p>
             <a:fld id="{1560C251-82B7-4253-A774-38D73C276BCE}" type="slidenum">
               <a:rPr lang="en-US" smtClean="0"/>
-              <a:t>37</a:t>
+              <a:t>40</a:t>
             </a:fld>
             <a:endParaRPr lang="en-US"/>
           </a:p>
@@ -4567,130 +4766,6 @@
     <p:extLst>
       <p:ext uri="{BB962C8B-B14F-4D97-AF65-F5344CB8AC3E}">
         <p14:creationId xmlns:p14="http://schemas.microsoft.com/office/powerpoint/2010/main" val="4233449667"/>
-      </p:ext>
-    </p:extLst>
-  </p:cSld>
-  <p:clrMapOvr>
-    <a:masterClrMapping/>
-  </p:clrMapOvr>
-</p:notes>
-</file>
-
-<file path=ppt/notesSlides/notesSlide28.xml><?xml version="1.0" encoding="utf-8"?>
-<p:notes xmlns:a="http://schemas.openxmlformats.org/drawingml/2006/main" xmlns:r="http://schemas.openxmlformats.org/officeDocument/2006/relationships" xmlns:p="http://schemas.openxmlformats.org/presentationml/2006/main">
-  <p:cSld>
-    <p:spTree>
-      <p:nvGrpSpPr>
-        <p:cNvPr id="1" name=""/>
-        <p:cNvGrpSpPr/>
-        <p:nvPr/>
-      </p:nvGrpSpPr>
-      <p:grpSpPr>
-        <a:xfrm>
-          <a:off x="0" y="0"/>
-          <a:ext cx="0" cy="0"/>
-          <a:chOff x="0" y="0"/>
-          <a:chExt cx="0" cy="0"/>
-        </a:xfrm>
-      </p:grpSpPr>
-      <p:sp>
-        <p:nvSpPr>
-          <p:cNvPr id="2" name="Slide Image Placeholder 1"/>
-          <p:cNvSpPr>
-            <a:spLocks noGrp="1" noRot="1" noChangeAspect="1"/>
-          </p:cNvSpPr>
-          <p:nvPr>
-            <p:ph type="sldImg"/>
-          </p:nvPr>
-        </p:nvSpPr>
-        <p:spPr/>
-      </p:sp>
-      <p:sp>
-        <p:nvSpPr>
-          <p:cNvPr id="3" name="Notes Placeholder 2"/>
-          <p:cNvSpPr>
-            <a:spLocks noGrp="1"/>
-          </p:cNvSpPr>
-          <p:nvPr>
-            <p:ph type="body" idx="1"/>
-          </p:nvPr>
-        </p:nvSpPr>
-        <p:spPr/>
-        <p:txBody>
-          <a:bodyPr/>
-          <a:lstStyle/>
-          <a:p>
-            <a:r>
-              <a:rPr lang="en-US" b="1" dirty="0"/>
-              <a:t>Same statistics, different data</a:t>
-            </a:r>
-            <a:br>
-              <a:rPr lang="en-US" dirty="0"/>
-            </a:br>
-            <a:r>
-              <a:rPr lang="en-US" dirty="0"/>
-              <a:t>Multiple datasets can share identical summary statistics but have very different structures.</a:t>
-            </a:r>
-          </a:p>
-          <a:p>
-            <a:r>
-              <a:rPr lang="en-US" b="1" dirty="0"/>
-              <a:t>Why visualization is necessary</a:t>
-            </a:r>
-            <a:br>
-              <a:rPr lang="en-US" dirty="0"/>
-            </a:br>
-            <a:r>
-              <a:rPr lang="en-US" dirty="0"/>
-              <a:t>Plots reveal patterns that summary statistics alone cannot detect.</a:t>
-            </a:r>
-          </a:p>
-          <a:p>
-            <a:endParaRPr lang="en-US" dirty="0"/>
-          </a:p>
-          <a:p>
-            <a:r>
-              <a:rPr lang="en-US" dirty="0"/>
-              <a:t>Mention </a:t>
-            </a:r>
-            <a:r>
-              <a:rPr lang="en-US" b="1" dirty="0"/>
-              <a:t>why pie charts </a:t>
-            </a:r>
-            <a:r>
-              <a:rPr lang="en-US" dirty="0"/>
-              <a:t>are not ideal – stacked bar is better</a:t>
-            </a:r>
-          </a:p>
-        </p:txBody>
-      </p:sp>
-      <p:sp>
-        <p:nvSpPr>
-          <p:cNvPr id="4" name="Slide Number Placeholder 3"/>
-          <p:cNvSpPr>
-            <a:spLocks noGrp="1"/>
-          </p:cNvSpPr>
-          <p:nvPr>
-            <p:ph type="sldNum" sz="quarter" idx="5"/>
-          </p:nvPr>
-        </p:nvSpPr>
-        <p:spPr/>
-        <p:txBody>
-          <a:bodyPr/>
-          <a:lstStyle/>
-          <a:p>
-            <a:fld id="{1560C251-82B7-4253-A774-38D73C276BCE}" type="slidenum">
-              <a:rPr lang="en-US" smtClean="0"/>
-              <a:t>39</a:t>
-            </a:fld>
-            <a:endParaRPr lang="en-US"/>
-          </a:p>
-        </p:txBody>
-      </p:sp>
-    </p:spTree>
-    <p:extLst>
-      <p:ext uri="{BB962C8B-B14F-4D97-AF65-F5344CB8AC3E}">
-        <p14:creationId xmlns:p14="http://schemas.microsoft.com/office/powerpoint/2010/main" val="75824352"/>
       </p:ext>
     </p:extLst>
   </p:cSld>
@@ -4791,7 +4866,7 @@
           <a:p>
             <a:fld id="{1560C251-82B7-4253-A774-38D73C276BCE}" type="slidenum">
               <a:rPr lang="en-US" smtClean="0"/>
-              <a:t>3</a:t>
+              <a:t>5</a:t>
             </a:fld>
             <a:endParaRPr lang="en-US"/>
           </a:p>
@@ -4801,6 +4876,130 @@
     <p:extLst>
       <p:ext uri="{BB962C8B-B14F-4D97-AF65-F5344CB8AC3E}">
         <p14:creationId xmlns:p14="http://schemas.microsoft.com/office/powerpoint/2010/main" val="2912310543"/>
+      </p:ext>
+    </p:extLst>
+  </p:cSld>
+  <p:clrMapOvr>
+    <a:masterClrMapping/>
+  </p:clrMapOvr>
+</p:notes>
+</file>
+
+<file path=ppt/notesSlides/notesSlide30.xml><?xml version="1.0" encoding="utf-8"?>
+<p:notes xmlns:a="http://schemas.openxmlformats.org/drawingml/2006/main" xmlns:r="http://schemas.openxmlformats.org/officeDocument/2006/relationships" xmlns:p="http://schemas.openxmlformats.org/presentationml/2006/main">
+  <p:cSld>
+    <p:spTree>
+      <p:nvGrpSpPr>
+        <p:cNvPr id="1" name=""/>
+        <p:cNvGrpSpPr/>
+        <p:nvPr/>
+      </p:nvGrpSpPr>
+      <p:grpSpPr>
+        <a:xfrm>
+          <a:off x="0" y="0"/>
+          <a:ext cx="0" cy="0"/>
+          <a:chOff x="0" y="0"/>
+          <a:chExt cx="0" cy="0"/>
+        </a:xfrm>
+      </p:grpSpPr>
+      <p:sp>
+        <p:nvSpPr>
+          <p:cNvPr id="2" name="Slide Image Placeholder 1"/>
+          <p:cNvSpPr>
+            <a:spLocks noGrp="1" noRot="1" noChangeAspect="1"/>
+          </p:cNvSpPr>
+          <p:nvPr>
+            <p:ph type="sldImg"/>
+          </p:nvPr>
+        </p:nvSpPr>
+        <p:spPr/>
+      </p:sp>
+      <p:sp>
+        <p:nvSpPr>
+          <p:cNvPr id="3" name="Notes Placeholder 2"/>
+          <p:cNvSpPr>
+            <a:spLocks noGrp="1"/>
+          </p:cNvSpPr>
+          <p:nvPr>
+            <p:ph type="body" idx="1"/>
+          </p:nvPr>
+        </p:nvSpPr>
+        <p:spPr/>
+        <p:txBody>
+          <a:bodyPr/>
+          <a:lstStyle/>
+          <a:p>
+            <a:r>
+              <a:rPr lang="en-US" b="1" dirty="0"/>
+              <a:t>Same statistics, different data</a:t>
+            </a:r>
+            <a:br>
+              <a:rPr lang="en-US" dirty="0"/>
+            </a:br>
+            <a:r>
+              <a:rPr lang="en-US" dirty="0"/>
+              <a:t>Multiple datasets can share identical summary statistics but have very different structures.</a:t>
+            </a:r>
+          </a:p>
+          <a:p>
+            <a:r>
+              <a:rPr lang="en-US" b="1" dirty="0"/>
+              <a:t>Why visualization is necessary</a:t>
+            </a:r>
+            <a:br>
+              <a:rPr lang="en-US" dirty="0"/>
+            </a:br>
+            <a:r>
+              <a:rPr lang="en-US" dirty="0"/>
+              <a:t>Plots reveal patterns that summary statistics alone cannot detect.</a:t>
+            </a:r>
+          </a:p>
+          <a:p>
+            <a:endParaRPr lang="en-US" dirty="0"/>
+          </a:p>
+          <a:p>
+            <a:r>
+              <a:rPr lang="en-US" dirty="0"/>
+              <a:t>Mention </a:t>
+            </a:r>
+            <a:r>
+              <a:rPr lang="en-US" b="1" dirty="0"/>
+              <a:t>why pie charts </a:t>
+            </a:r>
+            <a:r>
+              <a:rPr lang="en-US" dirty="0"/>
+              <a:t>are not ideal – stacked bar is better</a:t>
+            </a:r>
+          </a:p>
+        </p:txBody>
+      </p:sp>
+      <p:sp>
+        <p:nvSpPr>
+          <p:cNvPr id="4" name="Slide Number Placeholder 3"/>
+          <p:cNvSpPr>
+            <a:spLocks noGrp="1"/>
+          </p:cNvSpPr>
+          <p:nvPr>
+            <p:ph type="sldNum" sz="quarter" idx="5"/>
+          </p:nvPr>
+        </p:nvSpPr>
+        <p:spPr/>
+        <p:txBody>
+          <a:bodyPr/>
+          <a:lstStyle/>
+          <a:p>
+            <a:fld id="{1560C251-82B7-4253-A774-38D73C276BCE}" type="slidenum">
+              <a:rPr lang="en-US" smtClean="0"/>
+              <a:t>42</a:t>
+            </a:fld>
+            <a:endParaRPr lang="en-US"/>
+          </a:p>
+        </p:txBody>
+      </p:sp>
+    </p:spTree>
+    <p:extLst>
+      <p:ext uri="{BB962C8B-B14F-4D97-AF65-F5344CB8AC3E}">
+        <p14:creationId xmlns:p14="http://schemas.microsoft.com/office/powerpoint/2010/main" val="75824352"/>
       </p:ext>
     </p:extLst>
   </p:cSld>
@@ -4938,7 +5137,7 @@
           <a:p>
             <a:fld id="{1560C251-82B7-4253-A774-38D73C276BCE}" type="slidenum">
               <a:rPr lang="en-US" smtClean="0"/>
-              <a:t>4</a:t>
+              <a:t>6</a:t>
             </a:fld>
             <a:endParaRPr lang="en-US"/>
           </a:p>
@@ -5085,7 +5284,7 @@
           <a:p>
             <a:fld id="{1560C251-82B7-4253-A774-38D73C276BCE}" type="slidenum">
               <a:rPr lang="en-US" smtClean="0"/>
-              <a:t>5</a:t>
+              <a:t>7</a:t>
             </a:fld>
             <a:endParaRPr lang="en-US"/>
           </a:p>
@@ -5175,7 +5374,7 @@
           <a:p>
             <a:fld id="{1560C251-82B7-4253-A774-38D73C276BCE}" type="slidenum">
               <a:rPr lang="en-US" smtClean="0"/>
-              <a:t>6</a:t>
+              <a:t>8</a:t>
             </a:fld>
             <a:endParaRPr lang="en-US"/>
           </a:p>
@@ -5317,7 +5516,7 @@
           <a:p>
             <a:fld id="{1560C251-82B7-4253-A774-38D73C276BCE}" type="slidenum">
               <a:rPr lang="en-US" smtClean="0"/>
-              <a:t>7</a:t>
+              <a:t>9</a:t>
             </a:fld>
             <a:endParaRPr lang="en-US"/>
           </a:p>
@@ -5464,7 +5663,7 @@
           <a:p>
             <a:fld id="{1560C251-82B7-4253-A774-38D73C276BCE}" type="slidenum">
               <a:rPr lang="en-US" smtClean="0"/>
-              <a:t>8</a:t>
+              <a:t>10</a:t>
             </a:fld>
             <a:endParaRPr lang="en-US"/>
           </a:p>
@@ -5635,7 +5834,7 @@
           <a:p>
             <a:fld id="{1560C251-82B7-4253-A774-38D73C276BCE}" type="slidenum">
               <a:rPr lang="en-US" smtClean="0"/>
-              <a:t>9</a:t>
+              <a:t>11</a:t>
             </a:fld>
             <a:endParaRPr lang="en-US"/>
           </a:p>
@@ -9185,6 +9384,780 @@
   <p:cSld>
     <p:spTree>
       <p:nvGrpSpPr>
+        <p:cNvPr id="1" name=""/>
+        <p:cNvGrpSpPr/>
+        <p:nvPr/>
+      </p:nvGrpSpPr>
+      <p:grpSpPr>
+        <a:xfrm>
+          <a:off x="0" y="0"/>
+          <a:ext cx="0" cy="0"/>
+          <a:chOff x="0" y="0"/>
+          <a:chExt cx="0" cy="0"/>
+        </a:xfrm>
+      </p:grpSpPr>
+      <p:sp>
+        <p:nvSpPr>
+          <p:cNvPr id="2" name="Title 1">
+            <a:extLst>
+              <a:ext uri="{FF2B5EF4-FFF2-40B4-BE49-F238E27FC236}">
+                <a16:creationId xmlns:a16="http://schemas.microsoft.com/office/drawing/2014/main" id="{08CA7D61-3432-671B-3EFC-43F846227E36}"/>
+              </a:ext>
+            </a:extLst>
+          </p:cNvPr>
+          <p:cNvSpPr>
+            <a:spLocks noGrp="1"/>
+          </p:cNvSpPr>
+          <p:nvPr>
+            <p:ph type="title"/>
+          </p:nvPr>
+        </p:nvSpPr>
+        <p:spPr/>
+        <p:txBody>
+          <a:bodyPr/>
+          <a:lstStyle/>
+          <a:p>
+            <a:r>
+              <a:rPr lang="en-US" dirty="0"/>
+              <a:t>Range</a:t>
+            </a:r>
+          </a:p>
+        </p:txBody>
+      </p:sp>
+      <p:sp>
+        <p:nvSpPr>
+          <p:cNvPr id="3" name="Content Placeholder 2">
+            <a:extLst>
+              <a:ext uri="{FF2B5EF4-FFF2-40B4-BE49-F238E27FC236}">
+                <a16:creationId xmlns:a16="http://schemas.microsoft.com/office/drawing/2014/main" id="{4BFE3BC2-A03B-D6FE-A07F-A2B5C66A40B1}"/>
+              </a:ext>
+            </a:extLst>
+          </p:cNvPr>
+          <p:cNvSpPr>
+            <a:spLocks noGrp="1"/>
+          </p:cNvSpPr>
+          <p:nvPr>
+            <p:ph idx="1"/>
+          </p:nvPr>
+        </p:nvSpPr>
+        <p:spPr/>
+        <p:txBody>
+          <a:bodyPr>
+            <a:normAutofit/>
+          </a:bodyPr>
+          <a:lstStyle/>
+          <a:p>
+            <a:r>
+              <a:rPr lang="en-US" dirty="0"/>
+              <a:t>Range: distance between the smallest and largest values.</a:t>
+            </a:r>
+          </a:p>
+          <a:p>
+            <a:pPr lvl="1"/>
+            <a:r>
+              <a:rPr lang="en-US" dirty="0"/>
+              <a:t>Sensitive to outliers</a:t>
+            </a:r>
+          </a:p>
+          <a:p>
+            <a:pPr lvl="1"/>
+            <a:endParaRPr lang="en-US" dirty="0"/>
+          </a:p>
+          <a:p>
+            <a:r>
+              <a:rPr lang="en-US" dirty="0"/>
+              <a:t>IQR: spread of the middle 50% of the data.</a:t>
+            </a:r>
+          </a:p>
+          <a:p>
+            <a:pPr lvl="1"/>
+            <a:r>
+              <a:rPr lang="en-US" dirty="0"/>
+              <a:t>Less sensitive to outliers</a:t>
+            </a:r>
+          </a:p>
+          <a:p>
+            <a:pPr lvl="1"/>
+            <a:endParaRPr lang="en-US" dirty="0"/>
+          </a:p>
+          <a:p>
+            <a:r>
+              <a:rPr lang="en-US" dirty="0">
+                <a:solidFill>
+                  <a:schemeClr val="bg2">
+                    <a:lumMod val="75000"/>
+                  </a:schemeClr>
+                </a:solidFill>
+              </a:rPr>
+              <a:t>Standard Deviation: square root of variance</a:t>
+            </a:r>
+          </a:p>
+          <a:p>
+            <a:pPr lvl="1"/>
+            <a:r>
+              <a:rPr lang="en-US" dirty="0">
+                <a:solidFill>
+                  <a:schemeClr val="bg2">
+                    <a:lumMod val="75000"/>
+                  </a:schemeClr>
+                </a:solidFill>
+              </a:rPr>
+              <a:t>Typical deviation from the mean </a:t>
+            </a:r>
+          </a:p>
+          <a:p>
+            <a:pPr lvl="1"/>
+            <a:r>
+              <a:rPr lang="en-US" dirty="0">
+                <a:solidFill>
+                  <a:schemeClr val="bg2">
+                    <a:lumMod val="75000"/>
+                  </a:schemeClr>
+                </a:solidFill>
+              </a:rPr>
+              <a:t>Same units as the data</a:t>
+            </a:r>
+          </a:p>
+          <a:p>
+            <a:endParaRPr lang="en-US" dirty="0"/>
+          </a:p>
+        </p:txBody>
+      </p:sp>
+      <p:sp>
+        <p:nvSpPr>
+          <p:cNvPr id="4" name="Slide Number Placeholder 3">
+            <a:extLst>
+              <a:ext uri="{FF2B5EF4-FFF2-40B4-BE49-F238E27FC236}">
+                <a16:creationId xmlns:a16="http://schemas.microsoft.com/office/drawing/2014/main" id="{F61C70DC-37FB-87E0-5D03-00D92FDD6D3C}"/>
+              </a:ext>
+            </a:extLst>
+          </p:cNvPr>
+          <p:cNvSpPr>
+            <a:spLocks noGrp="1"/>
+          </p:cNvSpPr>
+          <p:nvPr>
+            <p:ph type="sldNum" sz="quarter" idx="12"/>
+          </p:nvPr>
+        </p:nvSpPr>
+        <p:spPr/>
+        <p:txBody>
+          <a:bodyPr/>
+          <a:lstStyle/>
+          <a:p>
+            <a:fld id="{45C00377-489B-40EC-B059-26BDDD2E89B9}" type="slidenum">
+              <a:rPr lang="en-US" smtClean="0"/>
+              <a:pPr/>
+              <a:t>10</a:t>
+            </a:fld>
+            <a:endParaRPr lang="en-US" dirty="0"/>
+          </a:p>
+        </p:txBody>
+      </p:sp>
+    </p:spTree>
+    <p:extLst>
+      <p:ext uri="{BB962C8B-B14F-4D97-AF65-F5344CB8AC3E}">
+        <p14:creationId xmlns:p14="http://schemas.microsoft.com/office/powerpoint/2010/main" val="4206175980"/>
+      </p:ext>
+    </p:extLst>
+  </p:cSld>
+  <p:clrMapOvr>
+    <a:masterClrMapping/>
+  </p:clrMapOvr>
+  <p:timing>
+    <p:tnLst>
+      <p:par>
+        <p:cTn id="1" dur="indefinite" restart="never" nodeType="tmRoot">
+          <p:childTnLst>
+            <p:seq concurrent="1" nextAc="seek">
+              <p:cTn id="2" dur="indefinite" nodeType="mainSeq">
+                <p:childTnLst>
+                  <p:par>
+                    <p:cTn id="3" fill="hold">
+                      <p:stCondLst>
+                        <p:cond delay="indefinite"/>
+                      </p:stCondLst>
+                      <p:childTnLst>
+                        <p:par>
+                          <p:cTn id="4" fill="hold">
+                            <p:stCondLst>
+                              <p:cond delay="0"/>
+                            </p:stCondLst>
+                            <p:childTnLst>
+                              <p:par>
+                                <p:cTn id="5" presetID="1" presetClass="entr" presetSubtype="0" fill="hold" grpId="0" nodeType="clickEffect">
+                                  <p:stCondLst>
+                                    <p:cond delay="0"/>
+                                  </p:stCondLst>
+                                  <p:childTnLst>
+                                    <p:set>
+                                      <p:cBhvr>
+                                        <p:cTn id="6" dur="1" fill="hold">
+                                          <p:stCondLst>
+                                            <p:cond delay="0"/>
+                                          </p:stCondLst>
+                                        </p:cTn>
+                                        <p:tgtEl>
+                                          <p:spTgt spid="3">
+                                            <p:txEl>
+                                              <p:pRg st="0" end="0"/>
+                                            </p:txEl>
+                                          </p:spTgt>
+                                        </p:tgtEl>
+                                        <p:attrNameLst>
+                                          <p:attrName>style.visibility</p:attrName>
+                                        </p:attrNameLst>
+                                      </p:cBhvr>
+                                      <p:to>
+                                        <p:strVal val="visible"/>
+                                      </p:to>
+                                    </p:set>
+                                  </p:childTnLst>
+                                </p:cTn>
+                              </p:par>
+                              <p:par>
+                                <p:cTn id="7" presetID="1" presetClass="entr" presetSubtype="0" fill="hold" grpId="0" nodeType="withEffect">
+                                  <p:stCondLst>
+                                    <p:cond delay="0"/>
+                                  </p:stCondLst>
+                                  <p:childTnLst>
+                                    <p:set>
+                                      <p:cBhvr>
+                                        <p:cTn id="8" dur="1" fill="hold">
+                                          <p:stCondLst>
+                                            <p:cond delay="0"/>
+                                          </p:stCondLst>
+                                        </p:cTn>
+                                        <p:tgtEl>
+                                          <p:spTgt spid="3">
+                                            <p:txEl>
+                                              <p:pRg st="1" end="1"/>
+                                            </p:txEl>
+                                          </p:spTgt>
+                                        </p:tgtEl>
+                                        <p:attrNameLst>
+                                          <p:attrName>style.visibility</p:attrName>
+                                        </p:attrNameLst>
+                                      </p:cBhvr>
+                                      <p:to>
+                                        <p:strVal val="visible"/>
+                                      </p:to>
+                                    </p:set>
+                                  </p:childTnLst>
+                                </p:cTn>
+                              </p:par>
+                            </p:childTnLst>
+                          </p:cTn>
+                        </p:par>
+                      </p:childTnLst>
+                    </p:cTn>
+                  </p:par>
+                  <p:par>
+                    <p:cTn id="9" fill="hold">
+                      <p:stCondLst>
+                        <p:cond delay="indefinite"/>
+                      </p:stCondLst>
+                      <p:childTnLst>
+                        <p:par>
+                          <p:cTn id="10" fill="hold">
+                            <p:stCondLst>
+                              <p:cond delay="0"/>
+                            </p:stCondLst>
+                            <p:childTnLst>
+                              <p:par>
+                                <p:cTn id="11" presetID="1" presetClass="entr" presetSubtype="0" fill="hold" grpId="0" nodeType="clickEffect">
+                                  <p:stCondLst>
+                                    <p:cond delay="0"/>
+                                  </p:stCondLst>
+                                  <p:childTnLst>
+                                    <p:set>
+                                      <p:cBhvr>
+                                        <p:cTn id="12" dur="1" fill="hold">
+                                          <p:stCondLst>
+                                            <p:cond delay="0"/>
+                                          </p:stCondLst>
+                                        </p:cTn>
+                                        <p:tgtEl>
+                                          <p:spTgt spid="3">
+                                            <p:txEl>
+                                              <p:pRg st="3" end="3"/>
+                                            </p:txEl>
+                                          </p:spTgt>
+                                        </p:tgtEl>
+                                        <p:attrNameLst>
+                                          <p:attrName>style.visibility</p:attrName>
+                                        </p:attrNameLst>
+                                      </p:cBhvr>
+                                      <p:to>
+                                        <p:strVal val="visible"/>
+                                      </p:to>
+                                    </p:set>
+                                  </p:childTnLst>
+                                </p:cTn>
+                              </p:par>
+                              <p:par>
+                                <p:cTn id="13" presetID="1" presetClass="entr" presetSubtype="0" fill="hold" grpId="0" nodeType="withEffect">
+                                  <p:stCondLst>
+                                    <p:cond delay="0"/>
+                                  </p:stCondLst>
+                                  <p:childTnLst>
+                                    <p:set>
+                                      <p:cBhvr>
+                                        <p:cTn id="14" dur="1" fill="hold">
+                                          <p:stCondLst>
+                                            <p:cond delay="0"/>
+                                          </p:stCondLst>
+                                        </p:cTn>
+                                        <p:tgtEl>
+                                          <p:spTgt spid="3">
+                                            <p:txEl>
+                                              <p:pRg st="4" end="4"/>
+                                            </p:txEl>
+                                          </p:spTgt>
+                                        </p:tgtEl>
+                                        <p:attrNameLst>
+                                          <p:attrName>style.visibility</p:attrName>
+                                        </p:attrNameLst>
+                                      </p:cBhvr>
+                                      <p:to>
+                                        <p:strVal val="visible"/>
+                                      </p:to>
+                                    </p:set>
+                                  </p:childTnLst>
+                                </p:cTn>
+                              </p:par>
+                            </p:childTnLst>
+                          </p:cTn>
+                        </p:par>
+                      </p:childTnLst>
+                    </p:cTn>
+                  </p:par>
+                  <p:par>
+                    <p:cTn id="15" fill="hold">
+                      <p:stCondLst>
+                        <p:cond delay="indefinite"/>
+                      </p:stCondLst>
+                      <p:childTnLst>
+                        <p:par>
+                          <p:cTn id="16" fill="hold">
+                            <p:stCondLst>
+                              <p:cond delay="0"/>
+                            </p:stCondLst>
+                            <p:childTnLst>
+                              <p:par>
+                                <p:cTn id="17" presetID="1" presetClass="entr" presetSubtype="0" fill="hold" grpId="0" nodeType="clickEffect">
+                                  <p:stCondLst>
+                                    <p:cond delay="0"/>
+                                  </p:stCondLst>
+                                  <p:childTnLst>
+                                    <p:set>
+                                      <p:cBhvr>
+                                        <p:cTn id="18" dur="1" fill="hold">
+                                          <p:stCondLst>
+                                            <p:cond delay="0"/>
+                                          </p:stCondLst>
+                                        </p:cTn>
+                                        <p:tgtEl>
+                                          <p:spTgt spid="3">
+                                            <p:txEl>
+                                              <p:pRg st="6" end="6"/>
+                                            </p:txEl>
+                                          </p:spTgt>
+                                        </p:tgtEl>
+                                        <p:attrNameLst>
+                                          <p:attrName>style.visibility</p:attrName>
+                                        </p:attrNameLst>
+                                      </p:cBhvr>
+                                      <p:to>
+                                        <p:strVal val="visible"/>
+                                      </p:to>
+                                    </p:set>
+                                  </p:childTnLst>
+                                </p:cTn>
+                              </p:par>
+                              <p:par>
+                                <p:cTn id="19" presetID="1" presetClass="entr" presetSubtype="0" fill="hold" grpId="0" nodeType="withEffect">
+                                  <p:stCondLst>
+                                    <p:cond delay="0"/>
+                                  </p:stCondLst>
+                                  <p:childTnLst>
+                                    <p:set>
+                                      <p:cBhvr>
+                                        <p:cTn id="20" dur="1" fill="hold">
+                                          <p:stCondLst>
+                                            <p:cond delay="0"/>
+                                          </p:stCondLst>
+                                        </p:cTn>
+                                        <p:tgtEl>
+                                          <p:spTgt spid="3">
+                                            <p:txEl>
+                                              <p:pRg st="7" end="7"/>
+                                            </p:txEl>
+                                          </p:spTgt>
+                                        </p:tgtEl>
+                                        <p:attrNameLst>
+                                          <p:attrName>style.visibility</p:attrName>
+                                        </p:attrNameLst>
+                                      </p:cBhvr>
+                                      <p:to>
+                                        <p:strVal val="visible"/>
+                                      </p:to>
+                                    </p:set>
+                                  </p:childTnLst>
+                                </p:cTn>
+                              </p:par>
+                              <p:par>
+                                <p:cTn id="21" presetID="1" presetClass="entr" presetSubtype="0" fill="hold" grpId="0" nodeType="withEffect">
+                                  <p:stCondLst>
+                                    <p:cond delay="0"/>
+                                  </p:stCondLst>
+                                  <p:childTnLst>
+                                    <p:set>
+                                      <p:cBhvr>
+                                        <p:cTn id="22" dur="1" fill="hold">
+                                          <p:stCondLst>
+                                            <p:cond delay="0"/>
+                                          </p:stCondLst>
+                                        </p:cTn>
+                                        <p:tgtEl>
+                                          <p:spTgt spid="3">
+                                            <p:txEl>
+                                              <p:pRg st="8" end="8"/>
+                                            </p:txEl>
+                                          </p:spTgt>
+                                        </p:tgtEl>
+                                        <p:attrNameLst>
+                                          <p:attrName>style.visibility</p:attrName>
+                                        </p:attrNameLst>
+                                      </p:cBhvr>
+                                      <p:to>
+                                        <p:strVal val="visible"/>
+                                      </p:to>
+                                    </p:set>
+                                  </p:childTnLst>
+                                </p:cTn>
+                              </p:par>
+                            </p:childTnLst>
+                          </p:cTn>
+                        </p:par>
+                      </p:childTnLst>
+                    </p:cTn>
+                  </p:par>
+                </p:childTnLst>
+              </p:cTn>
+              <p:prevCondLst>
+                <p:cond evt="onPrev" delay="0">
+                  <p:tgtEl>
+                    <p:sldTgt/>
+                  </p:tgtEl>
+                </p:cond>
+              </p:prevCondLst>
+              <p:nextCondLst>
+                <p:cond evt="onNext" delay="0">
+                  <p:tgtEl>
+                    <p:sldTgt/>
+                  </p:tgtEl>
+                </p:cond>
+              </p:nextCondLst>
+            </p:seq>
+          </p:childTnLst>
+        </p:cTn>
+      </p:par>
+    </p:tnLst>
+    <p:bldLst>
+      <p:bldP spid="3" grpId="0" build="p"/>
+    </p:bldLst>
+  </p:timing>
+</p:sld>
+</file>
+
+<file path=ppt/slides/slide11.xml><?xml version="1.0" encoding="utf-8"?>
+<p:sld xmlns:a="http://schemas.openxmlformats.org/drawingml/2006/main" xmlns:r="http://schemas.openxmlformats.org/officeDocument/2006/relationships" xmlns:p="http://schemas.openxmlformats.org/presentationml/2006/main">
+  <p:cSld>
+    <p:spTree>
+      <p:nvGrpSpPr>
+        <p:cNvPr id="1" name="">
+          <a:extLst>
+            <a:ext uri="{FF2B5EF4-FFF2-40B4-BE49-F238E27FC236}">
+              <a16:creationId xmlns:a16="http://schemas.microsoft.com/office/drawing/2014/main" id="{8AAAEA5E-7577-2AE3-0E8B-A2EACB10EEDF}"/>
+            </a:ext>
+          </a:extLst>
+        </p:cNvPr>
+        <p:cNvGrpSpPr/>
+        <p:nvPr/>
+      </p:nvGrpSpPr>
+      <p:grpSpPr>
+        <a:xfrm>
+          <a:off x="0" y="0"/>
+          <a:ext cx="0" cy="0"/>
+          <a:chOff x="0" y="0"/>
+          <a:chExt cx="0" cy="0"/>
+        </a:xfrm>
+      </p:grpSpPr>
+      <p:sp>
+        <p:nvSpPr>
+          <p:cNvPr id="2" name="Title 1">
+            <a:extLst>
+              <a:ext uri="{FF2B5EF4-FFF2-40B4-BE49-F238E27FC236}">
+                <a16:creationId xmlns:a16="http://schemas.microsoft.com/office/drawing/2014/main" id="{3CBFB0CF-2A71-D3A2-2FF0-1B2A0CE00118}"/>
+              </a:ext>
+            </a:extLst>
+          </p:cNvPr>
+          <p:cNvSpPr>
+            <a:spLocks noGrp="1"/>
+          </p:cNvSpPr>
+          <p:nvPr>
+            <p:ph type="title"/>
+          </p:nvPr>
+        </p:nvSpPr>
+        <p:spPr/>
+        <p:txBody>
+          <a:bodyPr/>
+          <a:lstStyle/>
+          <a:p>
+            <a:r>
+              <a:rPr lang="en-US" dirty="0"/>
+              <a:t>Range and IQR</a:t>
+            </a:r>
+          </a:p>
+        </p:txBody>
+      </p:sp>
+      <p:sp>
+        <p:nvSpPr>
+          <p:cNvPr id="4" name="Slide Number Placeholder 3">
+            <a:extLst>
+              <a:ext uri="{FF2B5EF4-FFF2-40B4-BE49-F238E27FC236}">
+                <a16:creationId xmlns:a16="http://schemas.microsoft.com/office/drawing/2014/main" id="{FDD9E4FB-2395-2EC7-0828-BDF71DCE4A66}"/>
+              </a:ext>
+            </a:extLst>
+          </p:cNvPr>
+          <p:cNvSpPr>
+            <a:spLocks noGrp="1"/>
+          </p:cNvSpPr>
+          <p:nvPr>
+            <p:ph type="sldNum" sz="quarter" idx="12"/>
+          </p:nvPr>
+        </p:nvSpPr>
+        <p:spPr/>
+        <p:txBody>
+          <a:bodyPr/>
+          <a:lstStyle/>
+          <a:p>
+            <a:fld id="{45C00377-489B-40EC-B059-26BDDD2E89B9}" type="slidenum">
+              <a:rPr lang="en-US" smtClean="0"/>
+              <a:pPr/>
+              <a:t>11</a:t>
+            </a:fld>
+            <a:endParaRPr lang="en-US"/>
+          </a:p>
+        </p:txBody>
+      </p:sp>
+      <p:pic>
+        <p:nvPicPr>
+          <p:cNvPr id="9" name="Picture 8">
+            <a:extLst>
+              <a:ext uri="{FF2B5EF4-FFF2-40B4-BE49-F238E27FC236}">
+                <a16:creationId xmlns:a16="http://schemas.microsoft.com/office/drawing/2014/main" id="{870C3C5B-B049-1768-3B29-0B864DB2D1B2}"/>
+              </a:ext>
+            </a:extLst>
+          </p:cNvPr>
+          <p:cNvPicPr>
+            <a:picLocks noChangeAspect="1"/>
+          </p:cNvPicPr>
+          <p:nvPr/>
+        </p:nvPicPr>
+        <p:blipFill>
+          <a:blip r:embed="rId3"/>
+          <a:stretch>
+            <a:fillRect/>
+          </a:stretch>
+        </p:blipFill>
+        <p:spPr>
+          <a:xfrm>
+            <a:off x="3810000" y="2446866"/>
+            <a:ext cx="4876800" cy="2767013"/>
+          </a:xfrm>
+          <a:prstGeom prst="rect">
+            <a:avLst/>
+          </a:prstGeom>
+        </p:spPr>
+      </p:pic>
+      <p:cxnSp>
+        <p:nvCxnSpPr>
+          <p:cNvPr id="11" name="Straight Arrow Connector 10">
+            <a:extLst>
+              <a:ext uri="{FF2B5EF4-FFF2-40B4-BE49-F238E27FC236}">
+                <a16:creationId xmlns:a16="http://schemas.microsoft.com/office/drawing/2014/main" id="{4251B779-5782-62AB-EF5A-1689D42E8607}"/>
+              </a:ext>
+            </a:extLst>
+          </p:cNvPr>
+          <p:cNvCxnSpPr/>
+          <p:nvPr/>
+        </p:nvCxnSpPr>
+        <p:spPr>
+          <a:xfrm>
+            <a:off x="5283200" y="4741333"/>
+            <a:ext cx="1930400" cy="0"/>
+          </a:xfrm>
+          <a:prstGeom prst="straightConnector1">
+            <a:avLst/>
+          </a:prstGeom>
+          <a:ln w="28575">
+            <a:headEnd type="triangle"/>
+            <a:tailEnd type="triangle"/>
+          </a:ln>
+        </p:spPr>
+        <p:style>
+          <a:lnRef idx="1">
+            <a:schemeClr val="accent1"/>
+          </a:lnRef>
+          <a:fillRef idx="0">
+            <a:schemeClr val="accent1"/>
+          </a:fillRef>
+          <a:effectRef idx="0">
+            <a:schemeClr val="accent1"/>
+          </a:effectRef>
+          <a:fontRef idx="minor">
+            <a:schemeClr val="tx1"/>
+          </a:fontRef>
+        </p:style>
+      </p:cxnSp>
+      <p:cxnSp>
+        <p:nvCxnSpPr>
+          <p:cNvPr id="12" name="Straight Arrow Connector 11">
+            <a:extLst>
+              <a:ext uri="{FF2B5EF4-FFF2-40B4-BE49-F238E27FC236}">
+                <a16:creationId xmlns:a16="http://schemas.microsoft.com/office/drawing/2014/main" id="{99A5919D-D89C-D771-B49D-57D20C3EA9D6}"/>
+              </a:ext>
+            </a:extLst>
+          </p:cNvPr>
+          <p:cNvCxnSpPr>
+            <a:cxnSpLocks/>
+          </p:cNvCxnSpPr>
+          <p:nvPr/>
+        </p:nvCxnSpPr>
+        <p:spPr>
+          <a:xfrm>
+            <a:off x="4267201" y="2946399"/>
+            <a:ext cx="3962399" cy="0"/>
+          </a:xfrm>
+          <a:prstGeom prst="straightConnector1">
+            <a:avLst/>
+          </a:prstGeom>
+          <a:ln w="28575">
+            <a:headEnd type="triangle"/>
+            <a:tailEnd type="triangle"/>
+          </a:ln>
+        </p:spPr>
+        <p:style>
+          <a:lnRef idx="1">
+            <a:schemeClr val="accent1"/>
+          </a:lnRef>
+          <a:fillRef idx="0">
+            <a:schemeClr val="accent1"/>
+          </a:fillRef>
+          <a:effectRef idx="0">
+            <a:schemeClr val="accent1"/>
+          </a:effectRef>
+          <a:fontRef idx="minor">
+            <a:schemeClr val="tx1"/>
+          </a:fontRef>
+        </p:style>
+      </p:cxnSp>
+      <p:sp>
+        <p:nvSpPr>
+          <p:cNvPr id="14" name="TextBox 13">
+            <a:extLst>
+              <a:ext uri="{FF2B5EF4-FFF2-40B4-BE49-F238E27FC236}">
+                <a16:creationId xmlns:a16="http://schemas.microsoft.com/office/drawing/2014/main" id="{DC05E2EB-CC66-E792-FE91-C7F6FF66FEB0}"/>
+              </a:ext>
+            </a:extLst>
+          </p:cNvPr>
+          <p:cNvSpPr txBox="1"/>
+          <p:nvPr/>
+        </p:nvSpPr>
+        <p:spPr>
+          <a:xfrm>
+            <a:off x="5890898" y="2473854"/>
+            <a:ext cx="715004" cy="369332"/>
+          </a:xfrm>
+          <a:prstGeom prst="rect">
+            <a:avLst/>
+          </a:prstGeom>
+          <a:noFill/>
+        </p:spPr>
+        <p:txBody>
+          <a:bodyPr wrap="none" rtlCol="0">
+            <a:spAutoFit/>
+          </a:bodyPr>
+          <a:lstStyle/>
+          <a:p>
+            <a:r>
+              <a:rPr lang="en-US" dirty="0"/>
+              <a:t>range</a:t>
+            </a:r>
+          </a:p>
+        </p:txBody>
+      </p:sp>
+      <p:sp>
+        <p:nvSpPr>
+          <p:cNvPr id="15" name="TextBox 14">
+            <a:extLst>
+              <a:ext uri="{FF2B5EF4-FFF2-40B4-BE49-F238E27FC236}">
+                <a16:creationId xmlns:a16="http://schemas.microsoft.com/office/drawing/2014/main" id="{427B8F54-2B58-134B-0684-97B1817A1CD3}"/>
+              </a:ext>
+            </a:extLst>
+          </p:cNvPr>
+          <p:cNvSpPr txBox="1"/>
+          <p:nvPr/>
+        </p:nvSpPr>
+        <p:spPr>
+          <a:xfrm>
+            <a:off x="5570041" y="4741333"/>
+            <a:ext cx="1356718" cy="646331"/>
+          </a:xfrm>
+          <a:prstGeom prst="rect">
+            <a:avLst/>
+          </a:prstGeom>
+          <a:noFill/>
+        </p:spPr>
+        <p:txBody>
+          <a:bodyPr wrap="none" rtlCol="0">
+            <a:spAutoFit/>
+          </a:bodyPr>
+          <a:lstStyle/>
+          <a:p>
+            <a:r>
+              <a:rPr lang="en-US" dirty="0"/>
+              <a:t>Interquartile</a:t>
+            </a:r>
+          </a:p>
+          <a:p>
+            <a:pPr algn="ctr"/>
+            <a:r>
+              <a:rPr lang="en-US" dirty="0"/>
+              <a:t>range</a:t>
+            </a:r>
+          </a:p>
+        </p:txBody>
+      </p:sp>
+    </p:spTree>
+    <p:extLst>
+      <p:ext uri="{BB962C8B-B14F-4D97-AF65-F5344CB8AC3E}">
+        <p14:creationId xmlns:p14="http://schemas.microsoft.com/office/powerpoint/2010/main" val="3410868396"/>
+      </p:ext>
+    </p:extLst>
+  </p:cSld>
+  <p:clrMapOvr>
+    <a:masterClrMapping/>
+  </p:clrMapOvr>
+</p:sld>
+</file>
+
+<file path=ppt/slides/slide12.xml><?xml version="1.0" encoding="utf-8"?>
+<p:sld xmlns:a="http://schemas.openxmlformats.org/drawingml/2006/main" xmlns:r="http://schemas.openxmlformats.org/officeDocument/2006/relationships" xmlns:p="http://schemas.openxmlformats.org/presentationml/2006/main">
+  <p:cSld>
+    <p:spTree>
+      <p:nvGrpSpPr>
         <p:cNvPr id="1" name="">
           <a:extLst>
             <a:ext uri="{FF2B5EF4-FFF2-40B4-BE49-F238E27FC236}">
@@ -9340,6 +10313,14 @@
             </a:r>
           </a:p>
           <a:p>
+            <a:pPr lvl="1"/>
+            <a:r>
+              <a:rPr lang="en-GB" dirty="0"/>
+              <a:t>=STDEV.S(range)</a:t>
+            </a:r>
+            <a:endParaRPr lang="en-US" dirty="0"/>
+          </a:p>
+          <a:p>
             <a:endParaRPr lang="en-US" dirty="0"/>
           </a:p>
         </p:txBody>
@@ -9368,7 +10349,7 @@
             <a:fld id="{45C00377-489B-40EC-B059-26BDDD2E89B9}" type="slidenum">
               <a:rPr lang="en-US" smtClean="0"/>
               <a:pPr/>
-              <a:t>10</a:t>
+              <a:t>12</a:t>
             </a:fld>
             <a:endParaRPr lang="en-US" dirty="0"/>
           </a:p>
@@ -9384,10 +10365,345 @@
   <p:clrMapOvr>
     <a:masterClrMapping/>
   </p:clrMapOvr>
+  <p:timing>
+    <p:tnLst>
+      <p:par>
+        <p:cTn id="1" dur="indefinite" restart="never" nodeType="tmRoot">
+          <p:childTnLst>
+            <p:seq concurrent="1" nextAc="seek">
+              <p:cTn id="2" dur="indefinite" nodeType="mainSeq">
+                <p:childTnLst>
+                  <p:par>
+                    <p:cTn id="3" fill="hold">
+                      <p:stCondLst>
+                        <p:cond delay="indefinite"/>
+                      </p:stCondLst>
+                      <p:childTnLst>
+                        <p:par>
+                          <p:cTn id="4" fill="hold">
+                            <p:stCondLst>
+                              <p:cond delay="0"/>
+                            </p:stCondLst>
+                            <p:childTnLst>
+                              <p:par>
+                                <p:cTn id="5" presetID="1" presetClass="entr" presetSubtype="0" fill="hold" grpId="0" nodeType="clickEffect">
+                                  <p:stCondLst>
+                                    <p:cond delay="0"/>
+                                  </p:stCondLst>
+                                  <p:childTnLst>
+                                    <p:set>
+                                      <p:cBhvr>
+                                        <p:cTn id="6" dur="1" fill="hold">
+                                          <p:stCondLst>
+                                            <p:cond delay="0"/>
+                                          </p:stCondLst>
+                                        </p:cTn>
+                                        <p:tgtEl>
+                                          <p:spTgt spid="3">
+                                            <p:txEl>
+                                              <p:pRg st="0" end="0"/>
+                                            </p:txEl>
+                                          </p:spTgt>
+                                        </p:tgtEl>
+                                        <p:attrNameLst>
+                                          <p:attrName>style.visibility</p:attrName>
+                                        </p:attrNameLst>
+                                      </p:cBhvr>
+                                      <p:to>
+                                        <p:strVal val="visible"/>
+                                      </p:to>
+                                    </p:set>
+                                  </p:childTnLst>
+                                </p:cTn>
+                              </p:par>
+                              <p:par>
+                                <p:cTn id="7" presetID="1" presetClass="entr" presetSubtype="0" fill="hold" grpId="0" nodeType="withEffect">
+                                  <p:stCondLst>
+                                    <p:cond delay="0"/>
+                                  </p:stCondLst>
+                                  <p:childTnLst>
+                                    <p:set>
+                                      <p:cBhvr>
+                                        <p:cTn id="8" dur="1" fill="hold">
+                                          <p:stCondLst>
+                                            <p:cond delay="0"/>
+                                          </p:stCondLst>
+                                        </p:cTn>
+                                        <p:tgtEl>
+                                          <p:spTgt spid="3">
+                                            <p:txEl>
+                                              <p:pRg st="1" end="1"/>
+                                            </p:txEl>
+                                          </p:spTgt>
+                                        </p:tgtEl>
+                                        <p:attrNameLst>
+                                          <p:attrName>style.visibility</p:attrName>
+                                        </p:attrNameLst>
+                                      </p:cBhvr>
+                                      <p:to>
+                                        <p:strVal val="visible"/>
+                                      </p:to>
+                                    </p:set>
+                                  </p:childTnLst>
+                                </p:cTn>
+                              </p:par>
+                            </p:childTnLst>
+                          </p:cTn>
+                        </p:par>
+                      </p:childTnLst>
+                    </p:cTn>
+                  </p:par>
+                  <p:par>
+                    <p:cTn id="9" fill="hold">
+                      <p:stCondLst>
+                        <p:cond delay="indefinite"/>
+                      </p:stCondLst>
+                      <p:childTnLst>
+                        <p:par>
+                          <p:cTn id="10" fill="hold">
+                            <p:stCondLst>
+                              <p:cond delay="0"/>
+                            </p:stCondLst>
+                            <p:childTnLst>
+                              <p:par>
+                                <p:cTn id="11" presetID="1" presetClass="entr" presetSubtype="0" fill="hold" grpId="0" nodeType="clickEffect">
+                                  <p:stCondLst>
+                                    <p:cond delay="0"/>
+                                  </p:stCondLst>
+                                  <p:childTnLst>
+                                    <p:set>
+                                      <p:cBhvr>
+                                        <p:cTn id="12" dur="1" fill="hold">
+                                          <p:stCondLst>
+                                            <p:cond delay="0"/>
+                                          </p:stCondLst>
+                                        </p:cTn>
+                                        <p:tgtEl>
+                                          <p:spTgt spid="3">
+                                            <p:txEl>
+                                              <p:pRg st="3" end="3"/>
+                                            </p:txEl>
+                                          </p:spTgt>
+                                        </p:tgtEl>
+                                        <p:attrNameLst>
+                                          <p:attrName>style.visibility</p:attrName>
+                                        </p:attrNameLst>
+                                      </p:cBhvr>
+                                      <p:to>
+                                        <p:strVal val="visible"/>
+                                      </p:to>
+                                    </p:set>
+                                  </p:childTnLst>
+                                </p:cTn>
+                              </p:par>
+                              <p:par>
+                                <p:cTn id="13" presetID="1" presetClass="entr" presetSubtype="0" fill="hold" grpId="0" nodeType="withEffect">
+                                  <p:stCondLst>
+                                    <p:cond delay="0"/>
+                                  </p:stCondLst>
+                                  <p:childTnLst>
+                                    <p:set>
+                                      <p:cBhvr>
+                                        <p:cTn id="14" dur="1" fill="hold">
+                                          <p:stCondLst>
+                                            <p:cond delay="0"/>
+                                          </p:stCondLst>
+                                        </p:cTn>
+                                        <p:tgtEl>
+                                          <p:spTgt spid="3">
+                                            <p:txEl>
+                                              <p:pRg st="4" end="4"/>
+                                            </p:txEl>
+                                          </p:spTgt>
+                                        </p:tgtEl>
+                                        <p:attrNameLst>
+                                          <p:attrName>style.visibility</p:attrName>
+                                        </p:attrNameLst>
+                                      </p:cBhvr>
+                                      <p:to>
+                                        <p:strVal val="visible"/>
+                                      </p:to>
+                                    </p:set>
+                                  </p:childTnLst>
+                                </p:cTn>
+                              </p:par>
+                            </p:childTnLst>
+                          </p:cTn>
+                        </p:par>
+                      </p:childTnLst>
+                    </p:cTn>
+                  </p:par>
+                  <p:par>
+                    <p:cTn id="15" fill="hold">
+                      <p:stCondLst>
+                        <p:cond delay="indefinite"/>
+                      </p:stCondLst>
+                      <p:childTnLst>
+                        <p:par>
+                          <p:cTn id="16" fill="hold">
+                            <p:stCondLst>
+                              <p:cond delay="0"/>
+                            </p:stCondLst>
+                            <p:childTnLst>
+                              <p:par>
+                                <p:cTn id="17" presetID="1" presetClass="entr" presetSubtype="0" fill="hold" grpId="0" nodeType="clickEffect">
+                                  <p:stCondLst>
+                                    <p:cond delay="0"/>
+                                  </p:stCondLst>
+                                  <p:childTnLst>
+                                    <p:set>
+                                      <p:cBhvr>
+                                        <p:cTn id="18" dur="1" fill="hold">
+                                          <p:stCondLst>
+                                            <p:cond delay="0"/>
+                                          </p:stCondLst>
+                                        </p:cTn>
+                                        <p:tgtEl>
+                                          <p:spTgt spid="3">
+                                            <p:txEl>
+                                              <p:pRg st="6" end="6"/>
+                                            </p:txEl>
+                                          </p:spTgt>
+                                        </p:tgtEl>
+                                        <p:attrNameLst>
+                                          <p:attrName>style.visibility</p:attrName>
+                                        </p:attrNameLst>
+                                      </p:cBhvr>
+                                      <p:to>
+                                        <p:strVal val="visible"/>
+                                      </p:to>
+                                    </p:set>
+                                  </p:childTnLst>
+                                </p:cTn>
+                              </p:par>
+                              <p:par>
+                                <p:cTn id="19" presetID="1" presetClass="entr" presetSubtype="0" fill="hold" grpId="0" nodeType="withEffect">
+                                  <p:stCondLst>
+                                    <p:cond delay="0"/>
+                                  </p:stCondLst>
+                                  <p:childTnLst>
+                                    <p:set>
+                                      <p:cBhvr>
+                                        <p:cTn id="20" dur="1" fill="hold">
+                                          <p:stCondLst>
+                                            <p:cond delay="0"/>
+                                          </p:stCondLst>
+                                        </p:cTn>
+                                        <p:tgtEl>
+                                          <p:spTgt spid="3">
+                                            <p:txEl>
+                                              <p:pRg st="7" end="7"/>
+                                            </p:txEl>
+                                          </p:spTgt>
+                                        </p:tgtEl>
+                                        <p:attrNameLst>
+                                          <p:attrName>style.visibility</p:attrName>
+                                        </p:attrNameLst>
+                                      </p:cBhvr>
+                                      <p:to>
+                                        <p:strVal val="visible"/>
+                                      </p:to>
+                                    </p:set>
+                                  </p:childTnLst>
+                                </p:cTn>
+                              </p:par>
+                              <p:par>
+                                <p:cTn id="21" presetID="1" presetClass="entr" presetSubtype="0" fill="hold" grpId="0" nodeType="withEffect">
+                                  <p:stCondLst>
+                                    <p:cond delay="0"/>
+                                  </p:stCondLst>
+                                  <p:childTnLst>
+                                    <p:set>
+                                      <p:cBhvr>
+                                        <p:cTn id="22" dur="1" fill="hold">
+                                          <p:stCondLst>
+                                            <p:cond delay="0"/>
+                                          </p:stCondLst>
+                                        </p:cTn>
+                                        <p:tgtEl>
+                                          <p:spTgt spid="3">
+                                            <p:txEl>
+                                              <p:pRg st="8" end="8"/>
+                                            </p:txEl>
+                                          </p:spTgt>
+                                        </p:tgtEl>
+                                        <p:attrNameLst>
+                                          <p:attrName>style.visibility</p:attrName>
+                                        </p:attrNameLst>
+                                      </p:cBhvr>
+                                      <p:to>
+                                        <p:strVal val="visible"/>
+                                      </p:to>
+                                    </p:set>
+                                  </p:childTnLst>
+                                </p:cTn>
+                              </p:par>
+                              <p:par>
+                                <p:cTn id="23" presetID="1" presetClass="entr" presetSubtype="0" fill="hold" grpId="0" nodeType="withEffect">
+                                  <p:stCondLst>
+                                    <p:cond delay="0"/>
+                                  </p:stCondLst>
+                                  <p:childTnLst>
+                                    <p:set>
+                                      <p:cBhvr>
+                                        <p:cTn id="24" dur="1" fill="hold">
+                                          <p:stCondLst>
+                                            <p:cond delay="0"/>
+                                          </p:stCondLst>
+                                        </p:cTn>
+                                        <p:tgtEl>
+                                          <p:spTgt spid="3">
+                                            <p:txEl>
+                                              <p:pRg st="9" end="9"/>
+                                            </p:txEl>
+                                          </p:spTgt>
+                                        </p:tgtEl>
+                                        <p:attrNameLst>
+                                          <p:attrName>style.visibility</p:attrName>
+                                        </p:attrNameLst>
+                                      </p:cBhvr>
+                                      <p:to>
+                                        <p:strVal val="visible"/>
+                                      </p:to>
+                                    </p:set>
+                                  </p:childTnLst>
+                                </p:cTn>
+                              </p:par>
+                            </p:childTnLst>
+                          </p:cTn>
+                        </p:par>
+                      </p:childTnLst>
+                    </p:cTn>
+                  </p:par>
+                </p:childTnLst>
+              </p:cTn>
+              <p:prevCondLst>
+                <p:cond evt="onPrev" delay="0">
+                  <p:tgtEl>
+                    <p:sldTgt/>
+                  </p:tgtEl>
+                </p:cond>
+              </p:prevCondLst>
+              <p:nextCondLst>
+                <p:cond evt="onNext" delay="0">
+                  <p:tgtEl>
+                    <p:sldTgt/>
+                  </p:tgtEl>
+                </p:cond>
+              </p:nextCondLst>
+            </p:seq>
+          </p:childTnLst>
+        </p:cTn>
+      </p:par>
+    </p:tnLst>
+    <p:bldLst>
+      <p:bldP spid="3" grpId="0" build="p"/>
+    </p:bldLst>
+  </p:timing>
 </p:sld>
 </file>
 
-<file path=ppt/slides/slide11.xml><?xml version="1.0" encoding="utf-8"?>
+<file path=ppt/slides/slide13.xml><?xml version="1.0" encoding="utf-8"?>
 <p:sld xmlns:a="http://schemas.openxmlformats.org/drawingml/2006/main" xmlns:r="http://schemas.openxmlformats.org/officeDocument/2006/relationships" xmlns:p="http://schemas.openxmlformats.org/presentationml/2006/main">
   <p:cSld>
     <p:spTree>
@@ -9462,7 +10778,7 @@
             <a:fld id="{45C00377-489B-40EC-B059-26BDDD2E89B9}" type="slidenum">
               <a:rPr lang="en-US" smtClean="0"/>
               <a:pPr/>
-              <a:t>11</a:t>
+              <a:t>13</a:t>
             </a:fld>
             <a:endParaRPr lang="en-US" dirty="0"/>
           </a:p>
@@ -9592,7 +10908,7 @@
 </p:sld>
 </file>
 
-<file path=ppt/slides/slide12.xml><?xml version="1.0" encoding="utf-8"?>
+<file path=ppt/slides/slide14.xml><?xml version="1.0" encoding="utf-8"?>
 <p:sld xmlns:a="http://schemas.openxmlformats.org/drawingml/2006/main" xmlns:r="http://schemas.openxmlformats.org/officeDocument/2006/relationships" xmlns:p="http://schemas.openxmlformats.org/presentationml/2006/main">
   <p:cSld>
     <p:spTree>
@@ -9639,7 +10955,7 @@
             <a:fld id="{45C00377-489B-40EC-B059-26BDDD2E89B9}" type="slidenum">
               <a:rPr lang="en-US" smtClean="0"/>
               <a:pPr/>
-              <a:t>12</a:t>
+              <a:t>14</a:t>
             </a:fld>
             <a:endParaRPr lang="en-US"/>
           </a:p>
@@ -9688,7 +11004,7 @@
 </p:sld>
 </file>
 
-<file path=ppt/slides/slide13.xml><?xml version="1.0" encoding="utf-8"?>
+<file path=ppt/slides/slide15.xml><?xml version="1.0" encoding="utf-8"?>
 <p:sld xmlns:a="http://schemas.openxmlformats.org/drawingml/2006/main" xmlns:r="http://schemas.openxmlformats.org/officeDocument/2006/relationships" xmlns:p="http://schemas.openxmlformats.org/presentationml/2006/main">
   <p:cSld>
     <p:spTree>
@@ -9836,7 +11152,7 @@
 </p:sld>
 </file>
 
-<file path=ppt/slides/slide14.xml><?xml version="1.0" encoding="utf-8"?>
+<file path=ppt/slides/slide16.xml><?xml version="1.0" encoding="utf-8"?>
 <p:sld xmlns:a="http://schemas.openxmlformats.org/drawingml/2006/main" xmlns:r="http://schemas.openxmlformats.org/officeDocument/2006/relationships" xmlns:p="http://schemas.openxmlformats.org/presentationml/2006/main">
   <p:cSld>
     <p:spTree>
@@ -9981,7 +11297,7 @@
 </p:sld>
 </file>
 
-<file path=ppt/slides/slide15.xml><?xml version="1.0" encoding="utf-8"?>
+<file path=ppt/slides/slide17.xml><?xml version="1.0" encoding="utf-8"?>
 <p:sld xmlns:a="http://schemas.openxmlformats.org/drawingml/2006/main" xmlns:r="http://schemas.openxmlformats.org/officeDocument/2006/relationships" xmlns:p="http://schemas.openxmlformats.org/presentationml/2006/main">
   <p:cSld>
     <p:spTree>
@@ -10068,6 +11384,25 @@
           </a:p>
           <a:p>
             <a:pPr lvl="1"/>
+            <a:r>
+              <a:rPr lang="en-GB" dirty="0"/>
+              <a:t>Pooling athletes can create skew because athletes have different roles and opportunities. </a:t>
+            </a:r>
+          </a:p>
+          <a:p>
+            <a:pPr lvl="1"/>
+            <a:r>
+              <a:rPr lang="en-GB" dirty="0"/>
+              <a:t>Measurements within one athlete </a:t>
+            </a:r>
+            <a:r>
+              <a:rPr lang="en-GB" b="1" u="sng" dirty="0"/>
+              <a:t>may</a:t>
+            </a:r>
+            <a:r>
+              <a:rPr lang="en-GB" dirty="0"/>
+              <a:t> be more symmetric</a:t>
+            </a:r>
             <a:endParaRPr lang="en-US" dirty="0"/>
           </a:p>
           <a:p>
@@ -10090,15 +11425,15 @@
           <p:nvPr/>
         </p:nvPicPr>
         <p:blipFill>
-          <a:blip r:embed="rId2"/>
+          <a:blip r:embed="rId3"/>
           <a:stretch>
             <a:fillRect/>
           </a:stretch>
         </p:blipFill>
         <p:spPr>
           <a:xfrm>
-            <a:off x="3571008" y="2807678"/>
-            <a:ext cx="5049983" cy="3369285"/>
+            <a:off x="3707069" y="3305146"/>
+            <a:ext cx="4777861" cy="3187728"/>
           </a:xfrm>
           <a:prstGeom prst="rect">
             <a:avLst/>
@@ -10119,8 +11454,8 @@
         </p:nvSpPr>
         <p:spPr>
           <a:xfrm>
-            <a:off x="6972301" y="5014913"/>
-            <a:ext cx="1648690" cy="1162050"/>
+            <a:off x="7063410" y="5416062"/>
+            <a:ext cx="1421520" cy="1099239"/>
           </a:xfrm>
           <a:prstGeom prst="rect">
             <a:avLst/>
@@ -10170,7 +11505,7 @@
 </p:sld>
 </file>
 
-<file path=ppt/slides/slide16.xml><?xml version="1.0" encoding="utf-8"?>
+<file path=ppt/slides/slide18.xml><?xml version="1.0" encoding="utf-8"?>
 <p:sld xmlns:a="http://schemas.openxmlformats.org/drawingml/2006/main" xmlns:r="http://schemas.openxmlformats.org/officeDocument/2006/relationships" xmlns:p="http://schemas.openxmlformats.org/presentationml/2006/main">
   <p:cSld>
     <p:spTree>
@@ -10336,7 +11671,7 @@
 </p:sld>
 </file>
 
-<file path=ppt/slides/slide17.xml><?xml version="1.0" encoding="utf-8"?>
+<file path=ppt/slides/slide19.xml><?xml version="1.0" encoding="utf-8"?>
 <p:sld xmlns:a="http://schemas.openxmlformats.org/drawingml/2006/main" xmlns:r="http://schemas.openxmlformats.org/officeDocument/2006/relationships" xmlns:p="http://schemas.openxmlformats.org/presentationml/2006/main">
   <p:cSld>
     <p:spTree>
@@ -10383,7 +11718,7 @@
             <a:fld id="{45C00377-489B-40EC-B059-26BDDD2E89B9}" type="slidenum">
               <a:rPr lang="en-US" smtClean="0"/>
               <a:pPr/>
-              <a:t>17</a:t>
+              <a:t>19</a:t>
             </a:fld>
             <a:endParaRPr lang="en-US"/>
           </a:p>
@@ -10414,7 +11749,7 @@
           <a:p>
             <a:r>
               <a:rPr lang="en-US" dirty="0"/>
-              <a:t>Measuring center in non-normal data</a:t>
+              <a:t>Measuring the center in non-normal data</a:t>
             </a:r>
           </a:p>
         </p:txBody>
@@ -10432,7 +11767,1055 @@
 </p:sld>
 </file>
 
-<file path=ppt/slides/slide18.xml><?xml version="1.0" encoding="utf-8"?>
+<file path=ppt/slides/slide2.xml><?xml version="1.0" encoding="utf-8"?>
+<p:sld xmlns:a="http://schemas.openxmlformats.org/drawingml/2006/main" xmlns:r="http://schemas.openxmlformats.org/officeDocument/2006/relationships" xmlns:p="http://schemas.openxmlformats.org/presentationml/2006/main">
+  <p:cSld>
+    <p:spTree>
+      <p:nvGrpSpPr>
+        <p:cNvPr id="1" name="">
+          <a:extLst>
+            <a:ext uri="{FF2B5EF4-FFF2-40B4-BE49-F238E27FC236}">
+              <a16:creationId xmlns:a16="http://schemas.microsoft.com/office/drawing/2014/main" id="{6E75E7F1-6F00-B722-B640-807806D80B43}"/>
+            </a:ext>
+          </a:extLst>
+        </p:cNvPr>
+        <p:cNvGrpSpPr/>
+        <p:nvPr/>
+      </p:nvGrpSpPr>
+      <p:grpSpPr>
+        <a:xfrm>
+          <a:off x="0" y="0"/>
+          <a:ext cx="0" cy="0"/>
+          <a:chOff x="0" y="0"/>
+          <a:chExt cx="0" cy="0"/>
+        </a:xfrm>
+      </p:grpSpPr>
+      <p:sp>
+        <p:nvSpPr>
+          <p:cNvPr id="2" name="Title 1">
+            <a:extLst>
+              <a:ext uri="{FF2B5EF4-FFF2-40B4-BE49-F238E27FC236}">
+                <a16:creationId xmlns:a16="http://schemas.microsoft.com/office/drawing/2014/main" id="{2880A8B1-AB71-1D8C-7777-70A489C5500A}"/>
+              </a:ext>
+            </a:extLst>
+          </p:cNvPr>
+          <p:cNvSpPr>
+            <a:spLocks noGrp="1"/>
+          </p:cNvSpPr>
+          <p:nvPr>
+            <p:ph type="title"/>
+          </p:nvPr>
+        </p:nvSpPr>
+        <p:spPr/>
+        <p:txBody>
+          <a:bodyPr/>
+          <a:lstStyle/>
+          <a:p>
+            <a:r>
+              <a:rPr lang="en-US" dirty="0"/>
+              <a:t>levels of granularity</a:t>
+            </a:r>
+          </a:p>
+        </p:txBody>
+      </p:sp>
+      <p:pic>
+        <p:nvPicPr>
+          <p:cNvPr id="4" name="Picture 3">
+            <a:extLst>
+              <a:ext uri="{FF2B5EF4-FFF2-40B4-BE49-F238E27FC236}">
+                <a16:creationId xmlns:a16="http://schemas.microsoft.com/office/drawing/2014/main" id="{88D06B48-FFB8-FEB6-A2DF-AD7F6DF6E251}"/>
+              </a:ext>
+            </a:extLst>
+          </p:cNvPr>
+          <p:cNvPicPr>
+            <a:picLocks noChangeAspect="1"/>
+          </p:cNvPicPr>
+          <p:nvPr/>
+        </p:nvPicPr>
+        <p:blipFill>
+          <a:blip r:embed="rId2"/>
+          <a:stretch>
+            <a:fillRect/>
+          </a:stretch>
+        </p:blipFill>
+        <p:spPr>
+          <a:xfrm>
+            <a:off x="811420" y="1271779"/>
+            <a:ext cx="4825784" cy="3599478"/>
+          </a:xfrm>
+          <a:prstGeom prst="rect">
+            <a:avLst/>
+          </a:prstGeom>
+        </p:spPr>
+      </p:pic>
+      <p:pic>
+        <p:nvPicPr>
+          <p:cNvPr id="5" name="Picture 4">
+            <a:extLst>
+              <a:ext uri="{FF2B5EF4-FFF2-40B4-BE49-F238E27FC236}">
+                <a16:creationId xmlns:a16="http://schemas.microsoft.com/office/drawing/2014/main" id="{1F1C5F7A-3CE5-BAAD-6ED4-8F34A389D153}"/>
+              </a:ext>
+            </a:extLst>
+          </p:cNvPr>
+          <p:cNvPicPr>
+            <a:picLocks noChangeAspect="1"/>
+          </p:cNvPicPr>
+          <p:nvPr/>
+        </p:nvPicPr>
+        <p:blipFill>
+          <a:blip r:embed="rId3"/>
+          <a:stretch>
+            <a:fillRect/>
+          </a:stretch>
+        </p:blipFill>
+        <p:spPr>
+          <a:xfrm>
+            <a:off x="7570262" y="4582281"/>
+            <a:ext cx="2743200" cy="1494168"/>
+          </a:xfrm>
+          <a:prstGeom prst="rect">
+            <a:avLst/>
+          </a:prstGeom>
+        </p:spPr>
+      </p:pic>
+      <p:pic>
+        <p:nvPicPr>
+          <p:cNvPr id="7" name="Picture 6">
+            <a:extLst>
+              <a:ext uri="{FF2B5EF4-FFF2-40B4-BE49-F238E27FC236}">
+                <a16:creationId xmlns:a16="http://schemas.microsoft.com/office/drawing/2014/main" id="{A00BE1A1-4E14-1D8E-B9B8-4FD4CFC3E47F}"/>
+              </a:ext>
+            </a:extLst>
+          </p:cNvPr>
+          <p:cNvPicPr>
+            <a:picLocks noChangeAspect="1"/>
+          </p:cNvPicPr>
+          <p:nvPr/>
+        </p:nvPicPr>
+        <p:blipFill>
+          <a:blip r:embed="rId4"/>
+          <a:stretch>
+            <a:fillRect/>
+          </a:stretch>
+        </p:blipFill>
+        <p:spPr>
+          <a:xfrm>
+            <a:off x="7570262" y="2945619"/>
+            <a:ext cx="2743200" cy="1472540"/>
+          </a:xfrm>
+          <a:prstGeom prst="rect">
+            <a:avLst/>
+          </a:prstGeom>
+        </p:spPr>
+      </p:pic>
+      <p:pic>
+        <p:nvPicPr>
+          <p:cNvPr id="8" name="Picture 7">
+            <a:extLst>
+              <a:ext uri="{FF2B5EF4-FFF2-40B4-BE49-F238E27FC236}">
+                <a16:creationId xmlns:a16="http://schemas.microsoft.com/office/drawing/2014/main" id="{0BD59E24-2FCC-3465-1022-843CB08B22FD}"/>
+              </a:ext>
+            </a:extLst>
+          </p:cNvPr>
+          <p:cNvPicPr>
+            <a:picLocks noChangeAspect="1"/>
+          </p:cNvPicPr>
+          <p:nvPr/>
+        </p:nvPicPr>
+        <p:blipFill>
+          <a:blip r:embed="rId5"/>
+          <a:stretch>
+            <a:fillRect/>
+          </a:stretch>
+        </p:blipFill>
+        <p:spPr>
+          <a:xfrm>
+            <a:off x="7570262" y="1277816"/>
+            <a:ext cx="2789515" cy="1494168"/>
+          </a:xfrm>
+          <a:prstGeom prst="rect">
+            <a:avLst/>
+          </a:prstGeom>
+        </p:spPr>
+      </p:pic>
+      <p:sp>
+        <p:nvSpPr>
+          <p:cNvPr id="9" name="Rectangle 8">
+            <a:extLst>
+              <a:ext uri="{FF2B5EF4-FFF2-40B4-BE49-F238E27FC236}">
+                <a16:creationId xmlns:a16="http://schemas.microsoft.com/office/drawing/2014/main" id="{798E73D1-CCDC-7990-EEAE-FD76CD5F5AA0}"/>
+              </a:ext>
+            </a:extLst>
+          </p:cNvPr>
+          <p:cNvSpPr/>
+          <p:nvPr/>
+        </p:nvSpPr>
+        <p:spPr>
+          <a:xfrm>
+            <a:off x="4452729" y="1389899"/>
+            <a:ext cx="182880" cy="3383280"/>
+          </a:xfrm>
+          <a:prstGeom prst="rect">
+            <a:avLst/>
+          </a:prstGeom>
+          <a:noFill/>
+          <a:ln w="38100">
+            <a:solidFill>
+              <a:srgbClr val="FF0000"/>
+            </a:solidFill>
+          </a:ln>
+        </p:spPr>
+        <p:style>
+          <a:lnRef idx="2">
+            <a:schemeClr val="accent1">
+              <a:shade val="15000"/>
+            </a:schemeClr>
+          </a:lnRef>
+          <a:fillRef idx="1">
+            <a:schemeClr val="accent1"/>
+          </a:fillRef>
+          <a:effectRef idx="0">
+            <a:schemeClr val="accent1"/>
+          </a:effectRef>
+          <a:fontRef idx="minor">
+            <a:schemeClr val="lt1"/>
+          </a:fontRef>
+        </p:style>
+        <p:txBody>
+          <a:bodyPr rtlCol="0" anchor="ctr"/>
+          <a:lstStyle/>
+          <a:p>
+            <a:pPr algn="ctr"/>
+            <a:endParaRPr lang="en-US"/>
+          </a:p>
+        </p:txBody>
+      </p:sp>
+      <p:sp>
+        <p:nvSpPr>
+          <p:cNvPr id="10" name="Rectangle 9">
+            <a:extLst>
+              <a:ext uri="{FF2B5EF4-FFF2-40B4-BE49-F238E27FC236}">
+                <a16:creationId xmlns:a16="http://schemas.microsoft.com/office/drawing/2014/main" id="{0C80B174-D9F4-46C7-05F5-40C40FD7418F}"/>
+              </a:ext>
+            </a:extLst>
+          </p:cNvPr>
+          <p:cNvSpPr/>
+          <p:nvPr/>
+        </p:nvSpPr>
+        <p:spPr>
+          <a:xfrm>
+            <a:off x="2318137" y="1389899"/>
+            <a:ext cx="182880" cy="3383280"/>
+          </a:xfrm>
+          <a:prstGeom prst="rect">
+            <a:avLst/>
+          </a:prstGeom>
+          <a:noFill/>
+          <a:ln w="38100">
+            <a:solidFill>
+              <a:srgbClr val="FF0000"/>
+            </a:solidFill>
+          </a:ln>
+        </p:spPr>
+        <p:style>
+          <a:lnRef idx="2">
+            <a:schemeClr val="accent1">
+              <a:shade val="15000"/>
+            </a:schemeClr>
+          </a:lnRef>
+          <a:fillRef idx="1">
+            <a:schemeClr val="accent1"/>
+          </a:fillRef>
+          <a:effectRef idx="0">
+            <a:schemeClr val="accent1"/>
+          </a:effectRef>
+          <a:fontRef idx="minor">
+            <a:schemeClr val="lt1"/>
+          </a:fontRef>
+        </p:style>
+        <p:txBody>
+          <a:bodyPr rtlCol="0" anchor="ctr"/>
+          <a:lstStyle/>
+          <a:p>
+            <a:pPr algn="ctr"/>
+            <a:endParaRPr lang="en-US"/>
+          </a:p>
+        </p:txBody>
+      </p:sp>
+      <p:sp>
+        <p:nvSpPr>
+          <p:cNvPr id="11" name="Rectangle 10">
+            <a:extLst>
+              <a:ext uri="{FF2B5EF4-FFF2-40B4-BE49-F238E27FC236}">
+                <a16:creationId xmlns:a16="http://schemas.microsoft.com/office/drawing/2014/main" id="{710B58B3-5AAE-2F19-03EB-1EC30558CC65}"/>
+              </a:ext>
+            </a:extLst>
+          </p:cNvPr>
+          <p:cNvSpPr/>
+          <p:nvPr/>
+        </p:nvSpPr>
+        <p:spPr>
+          <a:xfrm>
+            <a:off x="3256171" y="1389899"/>
+            <a:ext cx="182880" cy="3383280"/>
+          </a:xfrm>
+          <a:prstGeom prst="rect">
+            <a:avLst/>
+          </a:prstGeom>
+          <a:noFill/>
+          <a:ln w="38100">
+            <a:solidFill>
+              <a:srgbClr val="FF0000"/>
+            </a:solidFill>
+          </a:ln>
+        </p:spPr>
+        <p:style>
+          <a:lnRef idx="2">
+            <a:schemeClr val="accent1">
+              <a:shade val="15000"/>
+            </a:schemeClr>
+          </a:lnRef>
+          <a:fillRef idx="1">
+            <a:schemeClr val="accent1"/>
+          </a:fillRef>
+          <a:effectRef idx="0">
+            <a:schemeClr val="accent1"/>
+          </a:effectRef>
+          <a:fontRef idx="minor">
+            <a:schemeClr val="lt1"/>
+          </a:fontRef>
+        </p:style>
+        <p:txBody>
+          <a:bodyPr rtlCol="0" anchor="ctr"/>
+          <a:lstStyle/>
+          <a:p>
+            <a:pPr algn="ctr"/>
+            <a:endParaRPr lang="en-US"/>
+          </a:p>
+        </p:txBody>
+      </p:sp>
+      <p:sp>
+        <p:nvSpPr>
+          <p:cNvPr id="12" name="Rectangle 11">
+            <a:extLst>
+              <a:ext uri="{FF2B5EF4-FFF2-40B4-BE49-F238E27FC236}">
+                <a16:creationId xmlns:a16="http://schemas.microsoft.com/office/drawing/2014/main" id="{BCD4BF29-C42A-30D3-FAC5-42650E8A22C8}"/>
+              </a:ext>
+            </a:extLst>
+          </p:cNvPr>
+          <p:cNvSpPr/>
+          <p:nvPr/>
+        </p:nvSpPr>
+        <p:spPr>
+          <a:xfrm>
+            <a:off x="10045147" y="1972242"/>
+            <a:ext cx="301377" cy="214456"/>
+          </a:xfrm>
+          <a:prstGeom prst="rect">
+            <a:avLst/>
+          </a:prstGeom>
+          <a:noFill/>
+          <a:ln w="38100">
+            <a:solidFill>
+              <a:srgbClr val="FF0000"/>
+            </a:solidFill>
+          </a:ln>
+        </p:spPr>
+        <p:style>
+          <a:lnRef idx="2">
+            <a:schemeClr val="accent1">
+              <a:shade val="15000"/>
+            </a:schemeClr>
+          </a:lnRef>
+          <a:fillRef idx="1">
+            <a:schemeClr val="accent1"/>
+          </a:fillRef>
+          <a:effectRef idx="0">
+            <a:schemeClr val="accent1"/>
+          </a:effectRef>
+          <a:fontRef idx="minor">
+            <a:schemeClr val="lt1"/>
+          </a:fontRef>
+        </p:style>
+        <p:txBody>
+          <a:bodyPr rtlCol="0" anchor="ctr"/>
+          <a:lstStyle/>
+          <a:p>
+            <a:pPr algn="ctr"/>
+            <a:endParaRPr lang="en-US"/>
+          </a:p>
+        </p:txBody>
+      </p:sp>
+      <p:sp>
+        <p:nvSpPr>
+          <p:cNvPr id="13" name="Rectangle 12">
+            <a:extLst>
+              <a:ext uri="{FF2B5EF4-FFF2-40B4-BE49-F238E27FC236}">
+                <a16:creationId xmlns:a16="http://schemas.microsoft.com/office/drawing/2014/main" id="{6E767374-0EF2-5237-1EE2-1BF2DE75B21B}"/>
+              </a:ext>
+            </a:extLst>
+          </p:cNvPr>
+          <p:cNvSpPr/>
+          <p:nvPr/>
+        </p:nvSpPr>
+        <p:spPr>
+          <a:xfrm>
+            <a:off x="10045146" y="3854500"/>
+            <a:ext cx="295095" cy="231517"/>
+          </a:xfrm>
+          <a:prstGeom prst="rect">
+            <a:avLst/>
+          </a:prstGeom>
+          <a:noFill/>
+          <a:ln w="38100">
+            <a:solidFill>
+              <a:srgbClr val="FF0000"/>
+            </a:solidFill>
+          </a:ln>
+        </p:spPr>
+        <p:style>
+          <a:lnRef idx="2">
+            <a:schemeClr val="accent1">
+              <a:shade val="15000"/>
+            </a:schemeClr>
+          </a:lnRef>
+          <a:fillRef idx="1">
+            <a:schemeClr val="accent1"/>
+          </a:fillRef>
+          <a:effectRef idx="0">
+            <a:schemeClr val="accent1"/>
+          </a:effectRef>
+          <a:fontRef idx="minor">
+            <a:schemeClr val="lt1"/>
+          </a:fontRef>
+        </p:style>
+        <p:txBody>
+          <a:bodyPr rtlCol="0" anchor="ctr"/>
+          <a:lstStyle/>
+          <a:p>
+            <a:pPr algn="ctr"/>
+            <a:endParaRPr lang="en-US"/>
+          </a:p>
+        </p:txBody>
+      </p:sp>
+      <p:sp>
+        <p:nvSpPr>
+          <p:cNvPr id="14" name="Rectangle 13">
+            <a:extLst>
+              <a:ext uri="{FF2B5EF4-FFF2-40B4-BE49-F238E27FC236}">
+                <a16:creationId xmlns:a16="http://schemas.microsoft.com/office/drawing/2014/main" id="{DFBFCED9-E2B8-0E86-F934-F2AD3A40DE75}"/>
+              </a:ext>
+            </a:extLst>
+          </p:cNvPr>
+          <p:cNvSpPr/>
+          <p:nvPr/>
+        </p:nvSpPr>
+        <p:spPr>
+          <a:xfrm>
+            <a:off x="10045146" y="4763381"/>
+            <a:ext cx="295096" cy="231517"/>
+          </a:xfrm>
+          <a:prstGeom prst="rect">
+            <a:avLst/>
+          </a:prstGeom>
+          <a:noFill/>
+          <a:ln w="38100">
+            <a:solidFill>
+              <a:srgbClr val="FF0000"/>
+            </a:solidFill>
+          </a:ln>
+        </p:spPr>
+        <p:style>
+          <a:lnRef idx="2">
+            <a:schemeClr val="accent1">
+              <a:shade val="15000"/>
+            </a:schemeClr>
+          </a:lnRef>
+          <a:fillRef idx="1">
+            <a:schemeClr val="accent1"/>
+          </a:fillRef>
+          <a:effectRef idx="0">
+            <a:schemeClr val="accent1"/>
+          </a:effectRef>
+          <a:fontRef idx="minor">
+            <a:schemeClr val="lt1"/>
+          </a:fontRef>
+        </p:style>
+        <p:txBody>
+          <a:bodyPr rtlCol="0" anchor="ctr"/>
+          <a:lstStyle/>
+          <a:p>
+            <a:pPr algn="ctr"/>
+            <a:endParaRPr lang="en-US"/>
+          </a:p>
+        </p:txBody>
+      </p:sp>
+      <p:cxnSp>
+        <p:nvCxnSpPr>
+          <p:cNvPr id="16" name="Straight Arrow Connector 15">
+            <a:extLst>
+              <a:ext uri="{FF2B5EF4-FFF2-40B4-BE49-F238E27FC236}">
+                <a16:creationId xmlns:a16="http://schemas.microsoft.com/office/drawing/2014/main" id="{8DE91AA4-992F-23CF-F830-52BD3A79CD1E}"/>
+              </a:ext>
+            </a:extLst>
+          </p:cNvPr>
+          <p:cNvCxnSpPr>
+            <a:cxnSpLocks/>
+          </p:cNvCxnSpPr>
+          <p:nvPr/>
+        </p:nvCxnSpPr>
+        <p:spPr>
+          <a:xfrm flipV="1">
+            <a:off x="5919537" y="2186698"/>
+            <a:ext cx="1363579" cy="585286"/>
+          </a:xfrm>
+          <a:prstGeom prst="straightConnector1">
+            <a:avLst/>
+          </a:prstGeom>
+          <a:ln w="38100">
+            <a:solidFill>
+              <a:srgbClr val="FF0000"/>
+            </a:solidFill>
+            <a:tailEnd type="triangle"/>
+          </a:ln>
+        </p:spPr>
+        <p:style>
+          <a:lnRef idx="2">
+            <a:schemeClr val="accent1"/>
+          </a:lnRef>
+          <a:fillRef idx="0">
+            <a:schemeClr val="accent1"/>
+          </a:fillRef>
+          <a:effectRef idx="1">
+            <a:schemeClr val="accent1"/>
+          </a:effectRef>
+          <a:fontRef idx="minor">
+            <a:schemeClr val="tx1"/>
+          </a:fontRef>
+        </p:style>
+      </p:cxnSp>
+      <p:cxnSp>
+        <p:nvCxnSpPr>
+          <p:cNvPr id="17" name="Straight Arrow Connector 16">
+            <a:extLst>
+              <a:ext uri="{FF2B5EF4-FFF2-40B4-BE49-F238E27FC236}">
+                <a16:creationId xmlns:a16="http://schemas.microsoft.com/office/drawing/2014/main" id="{B2234BDD-8AF8-8D27-01CD-6EAE75E964B9}"/>
+              </a:ext>
+            </a:extLst>
+          </p:cNvPr>
+          <p:cNvCxnSpPr>
+            <a:cxnSpLocks/>
+          </p:cNvCxnSpPr>
+          <p:nvPr/>
+        </p:nvCxnSpPr>
+        <p:spPr>
+          <a:xfrm>
+            <a:off x="5919537" y="3074504"/>
+            <a:ext cx="1363579" cy="901148"/>
+          </a:xfrm>
+          <a:prstGeom prst="straightConnector1">
+            <a:avLst/>
+          </a:prstGeom>
+          <a:ln w="38100">
+            <a:solidFill>
+              <a:srgbClr val="FF0000"/>
+            </a:solidFill>
+            <a:tailEnd type="triangle"/>
+          </a:ln>
+        </p:spPr>
+        <p:style>
+          <a:lnRef idx="2">
+            <a:schemeClr val="accent1"/>
+          </a:lnRef>
+          <a:fillRef idx="0">
+            <a:schemeClr val="accent1"/>
+          </a:fillRef>
+          <a:effectRef idx="1">
+            <a:schemeClr val="accent1"/>
+          </a:effectRef>
+          <a:fontRef idx="minor">
+            <a:schemeClr val="tx1"/>
+          </a:fontRef>
+        </p:style>
+      </p:cxnSp>
+      <p:cxnSp>
+        <p:nvCxnSpPr>
+          <p:cNvPr id="18" name="Straight Arrow Connector 17">
+            <a:extLst>
+              <a:ext uri="{FF2B5EF4-FFF2-40B4-BE49-F238E27FC236}">
+                <a16:creationId xmlns:a16="http://schemas.microsoft.com/office/drawing/2014/main" id="{0C155799-8229-B82D-DDE9-8C53FDE7FB7D}"/>
+              </a:ext>
+            </a:extLst>
+          </p:cNvPr>
+          <p:cNvCxnSpPr>
+            <a:cxnSpLocks/>
+          </p:cNvCxnSpPr>
+          <p:nvPr/>
+        </p:nvCxnSpPr>
+        <p:spPr>
+          <a:xfrm>
+            <a:off x="5919537" y="3429000"/>
+            <a:ext cx="1501680" cy="1442257"/>
+          </a:xfrm>
+          <a:prstGeom prst="straightConnector1">
+            <a:avLst/>
+          </a:prstGeom>
+          <a:ln w="38100">
+            <a:solidFill>
+              <a:srgbClr val="FF0000"/>
+            </a:solidFill>
+            <a:tailEnd type="triangle"/>
+          </a:ln>
+        </p:spPr>
+        <p:style>
+          <a:lnRef idx="2">
+            <a:schemeClr val="accent1"/>
+          </a:lnRef>
+          <a:fillRef idx="0">
+            <a:schemeClr val="accent1"/>
+          </a:fillRef>
+          <a:effectRef idx="1">
+            <a:schemeClr val="accent1"/>
+          </a:effectRef>
+          <a:fontRef idx="minor">
+            <a:schemeClr val="tx1"/>
+          </a:fontRef>
+        </p:style>
+      </p:cxnSp>
+      <p:sp>
+        <p:nvSpPr>
+          <p:cNvPr id="28" name="TextBox 27">
+            <a:extLst>
+              <a:ext uri="{FF2B5EF4-FFF2-40B4-BE49-F238E27FC236}">
+                <a16:creationId xmlns:a16="http://schemas.microsoft.com/office/drawing/2014/main" id="{7C7A04DA-7B57-BF59-2EDD-13FDA8E5CACB}"/>
+              </a:ext>
+            </a:extLst>
+          </p:cNvPr>
+          <p:cNvSpPr txBox="1"/>
+          <p:nvPr/>
+        </p:nvSpPr>
+        <p:spPr>
+          <a:xfrm>
+            <a:off x="856482" y="5682061"/>
+            <a:ext cx="5877378" cy="369332"/>
+          </a:xfrm>
+          <a:prstGeom prst="rect">
+            <a:avLst/>
+          </a:prstGeom>
+          <a:noFill/>
+        </p:spPr>
+        <p:txBody>
+          <a:bodyPr wrap="none" rtlCol="0">
+            <a:spAutoFit/>
+          </a:bodyPr>
+          <a:lstStyle/>
+          <a:p>
+            <a:r>
+              <a:rPr lang="en-US" dirty="0">
+                <a:solidFill>
+                  <a:srgbClr val="FF0000"/>
+                </a:solidFill>
+              </a:rPr>
+              <a:t>How do we get from team level stats to league level stats?</a:t>
+            </a:r>
+          </a:p>
+        </p:txBody>
+      </p:sp>
+    </p:spTree>
+    <p:extLst>
+      <p:ext uri="{BB962C8B-B14F-4D97-AF65-F5344CB8AC3E}">
+        <p14:creationId xmlns:p14="http://schemas.microsoft.com/office/powerpoint/2010/main" val="140872475"/>
+      </p:ext>
+    </p:extLst>
+  </p:cSld>
+  <p:clrMapOvr>
+    <a:masterClrMapping/>
+  </p:clrMapOvr>
+  <p:timing>
+    <p:tnLst>
+      <p:par>
+        <p:cTn id="1" dur="indefinite" restart="never" nodeType="tmRoot">
+          <p:childTnLst>
+            <p:seq concurrent="1" nextAc="seek">
+              <p:cTn id="2" dur="indefinite" nodeType="mainSeq">
+                <p:childTnLst>
+                  <p:par>
+                    <p:cTn id="3" fill="hold">
+                      <p:stCondLst>
+                        <p:cond delay="indefinite"/>
+                      </p:stCondLst>
+                      <p:childTnLst>
+                        <p:par>
+                          <p:cTn id="4" fill="hold">
+                            <p:stCondLst>
+                              <p:cond delay="0"/>
+                            </p:stCondLst>
+                            <p:childTnLst>
+                              <p:par>
+                                <p:cTn id="5" presetID="1" presetClass="entr" presetSubtype="0" fill="hold" grpId="0" nodeType="clickEffect">
+                                  <p:stCondLst>
+                                    <p:cond delay="0"/>
+                                  </p:stCondLst>
+                                  <p:childTnLst>
+                                    <p:set>
+                                      <p:cBhvr>
+                                        <p:cTn id="6" dur="1" fill="hold">
+                                          <p:stCondLst>
+                                            <p:cond delay="0"/>
+                                          </p:stCondLst>
+                                        </p:cTn>
+                                        <p:tgtEl>
+                                          <p:spTgt spid="10"/>
+                                        </p:tgtEl>
+                                        <p:attrNameLst>
+                                          <p:attrName>style.visibility</p:attrName>
+                                        </p:attrNameLst>
+                                      </p:cBhvr>
+                                      <p:to>
+                                        <p:strVal val="visible"/>
+                                      </p:to>
+                                    </p:set>
+                                  </p:childTnLst>
+                                </p:cTn>
+                              </p:par>
+                              <p:par>
+                                <p:cTn id="7" presetID="1" presetClass="entr" presetSubtype="0" fill="hold" nodeType="withEffect">
+                                  <p:stCondLst>
+                                    <p:cond delay="0"/>
+                                  </p:stCondLst>
+                                  <p:childTnLst>
+                                    <p:set>
+                                      <p:cBhvr>
+                                        <p:cTn id="8" dur="1" fill="hold">
+                                          <p:stCondLst>
+                                            <p:cond delay="0"/>
+                                          </p:stCondLst>
+                                        </p:cTn>
+                                        <p:tgtEl>
+                                          <p:spTgt spid="16"/>
+                                        </p:tgtEl>
+                                        <p:attrNameLst>
+                                          <p:attrName>style.visibility</p:attrName>
+                                        </p:attrNameLst>
+                                      </p:cBhvr>
+                                      <p:to>
+                                        <p:strVal val="visible"/>
+                                      </p:to>
+                                    </p:set>
+                                  </p:childTnLst>
+                                </p:cTn>
+                              </p:par>
+                              <p:par>
+                                <p:cTn id="9" presetID="1" presetClass="entr" presetSubtype="0" fill="hold" grpId="0" nodeType="withEffect">
+                                  <p:stCondLst>
+                                    <p:cond delay="0"/>
+                                  </p:stCondLst>
+                                  <p:childTnLst>
+                                    <p:set>
+                                      <p:cBhvr>
+                                        <p:cTn id="10" dur="1" fill="hold">
+                                          <p:stCondLst>
+                                            <p:cond delay="0"/>
+                                          </p:stCondLst>
+                                        </p:cTn>
+                                        <p:tgtEl>
+                                          <p:spTgt spid="12"/>
+                                        </p:tgtEl>
+                                        <p:attrNameLst>
+                                          <p:attrName>style.visibility</p:attrName>
+                                        </p:attrNameLst>
+                                      </p:cBhvr>
+                                      <p:to>
+                                        <p:strVal val="visible"/>
+                                      </p:to>
+                                    </p:set>
+                                  </p:childTnLst>
+                                </p:cTn>
+                              </p:par>
+                            </p:childTnLst>
+                          </p:cTn>
+                        </p:par>
+                      </p:childTnLst>
+                    </p:cTn>
+                  </p:par>
+                  <p:par>
+                    <p:cTn id="11" fill="hold">
+                      <p:stCondLst>
+                        <p:cond delay="indefinite"/>
+                      </p:stCondLst>
+                      <p:childTnLst>
+                        <p:par>
+                          <p:cTn id="12" fill="hold">
+                            <p:stCondLst>
+                              <p:cond delay="0"/>
+                            </p:stCondLst>
+                            <p:childTnLst>
+                              <p:par>
+                                <p:cTn id="13" presetID="1" presetClass="entr" presetSubtype="0" fill="hold" grpId="0" nodeType="clickEffect">
+                                  <p:stCondLst>
+                                    <p:cond delay="0"/>
+                                  </p:stCondLst>
+                                  <p:childTnLst>
+                                    <p:set>
+                                      <p:cBhvr>
+                                        <p:cTn id="14" dur="1" fill="hold">
+                                          <p:stCondLst>
+                                            <p:cond delay="0"/>
+                                          </p:stCondLst>
+                                        </p:cTn>
+                                        <p:tgtEl>
+                                          <p:spTgt spid="11"/>
+                                        </p:tgtEl>
+                                        <p:attrNameLst>
+                                          <p:attrName>style.visibility</p:attrName>
+                                        </p:attrNameLst>
+                                      </p:cBhvr>
+                                      <p:to>
+                                        <p:strVal val="visible"/>
+                                      </p:to>
+                                    </p:set>
+                                  </p:childTnLst>
+                                </p:cTn>
+                              </p:par>
+                              <p:par>
+                                <p:cTn id="15" presetID="1" presetClass="entr" presetSubtype="0" fill="hold" nodeType="withEffect">
+                                  <p:stCondLst>
+                                    <p:cond delay="0"/>
+                                  </p:stCondLst>
+                                  <p:childTnLst>
+                                    <p:set>
+                                      <p:cBhvr>
+                                        <p:cTn id="16" dur="1" fill="hold">
+                                          <p:stCondLst>
+                                            <p:cond delay="0"/>
+                                          </p:stCondLst>
+                                        </p:cTn>
+                                        <p:tgtEl>
+                                          <p:spTgt spid="17"/>
+                                        </p:tgtEl>
+                                        <p:attrNameLst>
+                                          <p:attrName>style.visibility</p:attrName>
+                                        </p:attrNameLst>
+                                      </p:cBhvr>
+                                      <p:to>
+                                        <p:strVal val="visible"/>
+                                      </p:to>
+                                    </p:set>
+                                  </p:childTnLst>
+                                </p:cTn>
+                              </p:par>
+                              <p:par>
+                                <p:cTn id="17" presetID="1" presetClass="entr" presetSubtype="0" fill="hold" grpId="0" nodeType="withEffect">
+                                  <p:stCondLst>
+                                    <p:cond delay="0"/>
+                                  </p:stCondLst>
+                                  <p:childTnLst>
+                                    <p:set>
+                                      <p:cBhvr>
+                                        <p:cTn id="18" dur="1" fill="hold">
+                                          <p:stCondLst>
+                                            <p:cond delay="0"/>
+                                          </p:stCondLst>
+                                        </p:cTn>
+                                        <p:tgtEl>
+                                          <p:spTgt spid="13"/>
+                                        </p:tgtEl>
+                                        <p:attrNameLst>
+                                          <p:attrName>style.visibility</p:attrName>
+                                        </p:attrNameLst>
+                                      </p:cBhvr>
+                                      <p:to>
+                                        <p:strVal val="visible"/>
+                                      </p:to>
+                                    </p:set>
+                                  </p:childTnLst>
+                                </p:cTn>
+                              </p:par>
+                            </p:childTnLst>
+                          </p:cTn>
+                        </p:par>
+                      </p:childTnLst>
+                    </p:cTn>
+                  </p:par>
+                  <p:par>
+                    <p:cTn id="19" fill="hold">
+                      <p:stCondLst>
+                        <p:cond delay="indefinite"/>
+                      </p:stCondLst>
+                      <p:childTnLst>
+                        <p:par>
+                          <p:cTn id="20" fill="hold">
+                            <p:stCondLst>
+                              <p:cond delay="0"/>
+                            </p:stCondLst>
+                            <p:childTnLst>
+                              <p:par>
+                                <p:cTn id="21" presetID="1" presetClass="entr" presetSubtype="0" fill="hold" grpId="0" nodeType="clickEffect">
+                                  <p:stCondLst>
+                                    <p:cond delay="0"/>
+                                  </p:stCondLst>
+                                  <p:childTnLst>
+                                    <p:set>
+                                      <p:cBhvr>
+                                        <p:cTn id="22" dur="1" fill="hold">
+                                          <p:stCondLst>
+                                            <p:cond delay="0"/>
+                                          </p:stCondLst>
+                                        </p:cTn>
+                                        <p:tgtEl>
+                                          <p:spTgt spid="9"/>
+                                        </p:tgtEl>
+                                        <p:attrNameLst>
+                                          <p:attrName>style.visibility</p:attrName>
+                                        </p:attrNameLst>
+                                      </p:cBhvr>
+                                      <p:to>
+                                        <p:strVal val="visible"/>
+                                      </p:to>
+                                    </p:set>
+                                  </p:childTnLst>
+                                </p:cTn>
+                              </p:par>
+                              <p:par>
+                                <p:cTn id="23" presetID="1" presetClass="entr" presetSubtype="0" fill="hold" nodeType="withEffect">
+                                  <p:stCondLst>
+                                    <p:cond delay="0"/>
+                                  </p:stCondLst>
+                                  <p:childTnLst>
+                                    <p:set>
+                                      <p:cBhvr>
+                                        <p:cTn id="24" dur="1" fill="hold">
+                                          <p:stCondLst>
+                                            <p:cond delay="0"/>
+                                          </p:stCondLst>
+                                        </p:cTn>
+                                        <p:tgtEl>
+                                          <p:spTgt spid="18"/>
+                                        </p:tgtEl>
+                                        <p:attrNameLst>
+                                          <p:attrName>style.visibility</p:attrName>
+                                        </p:attrNameLst>
+                                      </p:cBhvr>
+                                      <p:to>
+                                        <p:strVal val="visible"/>
+                                      </p:to>
+                                    </p:set>
+                                  </p:childTnLst>
+                                </p:cTn>
+                              </p:par>
+                              <p:par>
+                                <p:cTn id="25" presetID="1" presetClass="entr" presetSubtype="0" fill="hold" grpId="0" nodeType="withEffect">
+                                  <p:stCondLst>
+                                    <p:cond delay="0"/>
+                                  </p:stCondLst>
+                                  <p:childTnLst>
+                                    <p:set>
+                                      <p:cBhvr>
+                                        <p:cTn id="26" dur="1" fill="hold">
+                                          <p:stCondLst>
+                                            <p:cond delay="0"/>
+                                          </p:stCondLst>
+                                        </p:cTn>
+                                        <p:tgtEl>
+                                          <p:spTgt spid="14"/>
+                                        </p:tgtEl>
+                                        <p:attrNameLst>
+                                          <p:attrName>style.visibility</p:attrName>
+                                        </p:attrNameLst>
+                                      </p:cBhvr>
+                                      <p:to>
+                                        <p:strVal val="visible"/>
+                                      </p:to>
+                                    </p:set>
+                                  </p:childTnLst>
+                                </p:cTn>
+                              </p:par>
+                            </p:childTnLst>
+                          </p:cTn>
+                        </p:par>
+                      </p:childTnLst>
+                    </p:cTn>
+                  </p:par>
+                  <p:par>
+                    <p:cTn id="27" fill="hold">
+                      <p:stCondLst>
+                        <p:cond delay="indefinite"/>
+                      </p:stCondLst>
+                      <p:childTnLst>
+                        <p:par>
+                          <p:cTn id="28" fill="hold">
+                            <p:stCondLst>
+                              <p:cond delay="0"/>
+                            </p:stCondLst>
+                            <p:childTnLst>
+                              <p:par>
+                                <p:cTn id="29" presetID="1" presetClass="entr" presetSubtype="0" fill="hold" grpId="0" nodeType="clickEffect">
+                                  <p:stCondLst>
+                                    <p:cond delay="0"/>
+                                  </p:stCondLst>
+                                  <p:childTnLst>
+                                    <p:set>
+                                      <p:cBhvr>
+                                        <p:cTn id="30" dur="1" fill="hold">
+                                          <p:stCondLst>
+                                            <p:cond delay="0"/>
+                                          </p:stCondLst>
+                                        </p:cTn>
+                                        <p:tgtEl>
+                                          <p:spTgt spid="28"/>
+                                        </p:tgtEl>
+                                        <p:attrNameLst>
+                                          <p:attrName>style.visibility</p:attrName>
+                                        </p:attrNameLst>
+                                      </p:cBhvr>
+                                      <p:to>
+                                        <p:strVal val="visible"/>
+                                      </p:to>
+                                    </p:set>
+                                  </p:childTnLst>
+                                </p:cTn>
+                              </p:par>
+                            </p:childTnLst>
+                          </p:cTn>
+                        </p:par>
+                      </p:childTnLst>
+                    </p:cTn>
+                  </p:par>
+                </p:childTnLst>
+              </p:cTn>
+              <p:prevCondLst>
+                <p:cond evt="onPrev" delay="0">
+                  <p:tgtEl>
+                    <p:sldTgt/>
+                  </p:tgtEl>
+                </p:cond>
+              </p:prevCondLst>
+              <p:nextCondLst>
+                <p:cond evt="onNext" delay="0">
+                  <p:tgtEl>
+                    <p:sldTgt/>
+                  </p:tgtEl>
+                </p:cond>
+              </p:nextCondLst>
+            </p:seq>
+          </p:childTnLst>
+        </p:cTn>
+      </p:par>
+    </p:tnLst>
+    <p:bldLst>
+      <p:bldP spid="9" grpId="0" animBg="1"/>
+      <p:bldP spid="10" grpId="0" animBg="1"/>
+      <p:bldP spid="11" grpId="0" animBg="1"/>
+      <p:bldP spid="12" grpId="0" animBg="1"/>
+      <p:bldP spid="13" grpId="0" animBg="1"/>
+      <p:bldP spid="14" grpId="0" animBg="1"/>
+      <p:bldP spid="28" grpId="0"/>
+    </p:bldLst>
+  </p:timing>
+</p:sld>
+</file>
+
+<file path=ppt/slides/slide20.xml><?xml version="1.0" encoding="utf-8"?>
 <p:sld xmlns:a="http://schemas.openxmlformats.org/drawingml/2006/main" xmlns:r="http://schemas.openxmlformats.org/officeDocument/2006/relationships" xmlns:p="http://schemas.openxmlformats.org/presentationml/2006/main">
   <p:cSld>
     <p:spTree>
@@ -10501,7 +12884,7 @@
             <a:fld id="{45C00377-489B-40EC-B059-26BDDD2E89B9}" type="slidenum">
               <a:rPr lang="en-US" smtClean="0"/>
               <a:pPr/>
-              <a:t>18</a:t>
+              <a:t>20</a:t>
             </a:fld>
             <a:endParaRPr lang="en-US"/>
           </a:p>
@@ -10569,7 +12952,7 @@
 </p:sld>
 </file>
 
-<file path=ppt/slides/slide19.xml><?xml version="1.0" encoding="utf-8"?>
+<file path=ppt/slides/slide21.xml><?xml version="1.0" encoding="utf-8"?>
 <p:sld xmlns:a="http://schemas.openxmlformats.org/drawingml/2006/main" xmlns:r="http://schemas.openxmlformats.org/officeDocument/2006/relationships" xmlns:p="http://schemas.openxmlformats.org/presentationml/2006/main">
   <p:cSld>
     <p:spTree>
@@ -10644,7 +13027,7 @@
             <a:fld id="{45C00377-489B-40EC-B059-26BDDD2E89B9}" type="slidenum">
               <a:rPr lang="en-US" smtClean="0"/>
               <a:pPr/>
-              <a:t>19</a:t>
+              <a:t>21</a:t>
             </a:fld>
             <a:endParaRPr lang="en-US"/>
           </a:p>
@@ -10788,120 +13171,7 @@
 </p:sld>
 </file>
 
-<file path=ppt/slides/slide2.xml><?xml version="1.0" encoding="utf-8"?>
-<p:sld xmlns:a="http://schemas.openxmlformats.org/drawingml/2006/main" xmlns:r="http://schemas.openxmlformats.org/officeDocument/2006/relationships" xmlns:p="http://schemas.openxmlformats.org/presentationml/2006/main">
-  <p:cSld>
-    <p:spTree>
-      <p:nvGrpSpPr>
-        <p:cNvPr id="1" name=""/>
-        <p:cNvGrpSpPr/>
-        <p:nvPr/>
-      </p:nvGrpSpPr>
-      <p:grpSpPr>
-        <a:xfrm>
-          <a:off x="0" y="0"/>
-          <a:ext cx="0" cy="0"/>
-          <a:chOff x="0" y="0"/>
-          <a:chExt cx="0" cy="0"/>
-        </a:xfrm>
-      </p:grpSpPr>
-      <p:sp>
-        <p:nvSpPr>
-          <p:cNvPr id="2" name="Slide Number Placeholder 1">
-            <a:extLst>
-              <a:ext uri="{FF2B5EF4-FFF2-40B4-BE49-F238E27FC236}">
-                <a16:creationId xmlns:a16="http://schemas.microsoft.com/office/drawing/2014/main" id="{4F00E21B-1982-E0CA-1F9E-8355997AAE51}"/>
-              </a:ext>
-            </a:extLst>
-          </p:cNvPr>
-          <p:cNvSpPr>
-            <a:spLocks noGrp="1"/>
-          </p:cNvSpPr>
-          <p:nvPr>
-            <p:ph type="sldNum" sz="quarter" idx="11"/>
-          </p:nvPr>
-        </p:nvSpPr>
-        <p:spPr/>
-        <p:txBody>
-          <a:bodyPr/>
-          <a:lstStyle/>
-          <a:p>
-            <a:fld id="{45C00377-489B-40EC-B059-26BDDD2E89B9}" type="slidenum">
-              <a:rPr lang="en-US" smtClean="0"/>
-              <a:pPr/>
-              <a:t>2</a:t>
-            </a:fld>
-            <a:endParaRPr lang="en-US"/>
-          </a:p>
-        </p:txBody>
-      </p:sp>
-      <p:sp>
-        <p:nvSpPr>
-          <p:cNvPr id="3" name="Title 1">
-            <a:extLst>
-              <a:ext uri="{FF2B5EF4-FFF2-40B4-BE49-F238E27FC236}">
-                <a16:creationId xmlns:a16="http://schemas.microsoft.com/office/drawing/2014/main" id="{B2604BDD-1EB2-C9AE-AD81-128821271322}"/>
-              </a:ext>
-            </a:extLst>
-          </p:cNvPr>
-          <p:cNvSpPr txBox="1">
-            <a:spLocks/>
-          </p:cNvSpPr>
-          <p:nvPr/>
-        </p:nvSpPr>
-        <p:spPr>
-          <a:xfrm>
-            <a:off x="838200" y="3110401"/>
-            <a:ext cx="10515600" cy="637198"/>
-          </a:xfrm>
-          <a:prstGeom prst="rect">
-            <a:avLst/>
-          </a:prstGeom>
-        </p:spPr>
-        <p:txBody>
-          <a:bodyPr/>
-          <a:lstStyle>
-            <a:lvl1pPr algn="l" defTabSz="914400" rtl="0" eaLnBrk="1" latinLnBrk="0" hangingPunct="1">
-              <a:lnSpc>
-                <a:spcPct val="90000"/>
-              </a:lnSpc>
-              <a:spcBef>
-                <a:spcPct val="0"/>
-              </a:spcBef>
-              <a:buNone/>
-              <a:defRPr sz="3600" b="1" kern="1200" cap="all" baseline="0">
-                <a:solidFill>
-                  <a:schemeClr val="tx1"/>
-                </a:solidFill>
-                <a:latin typeface="+mn-lt"/>
-                <a:ea typeface="+mj-ea"/>
-                <a:cs typeface="+mj-cs"/>
-              </a:defRPr>
-            </a:lvl1pPr>
-          </a:lstStyle>
-          <a:p>
-            <a:pPr algn="ctr"/>
-            <a:r>
-              <a:rPr lang="en-US" b="0" dirty="0"/>
-              <a:t>What is “typical”?</a:t>
-            </a:r>
-          </a:p>
-        </p:txBody>
-      </p:sp>
-    </p:spTree>
-    <p:extLst>
-      <p:ext uri="{BB962C8B-B14F-4D97-AF65-F5344CB8AC3E}">
-        <p14:creationId xmlns:p14="http://schemas.microsoft.com/office/powerpoint/2010/main" val="944151257"/>
-      </p:ext>
-    </p:extLst>
-  </p:cSld>
-  <p:clrMapOvr>
-    <a:masterClrMapping/>
-  </p:clrMapOvr>
-</p:sld>
-</file>
-
-<file path=ppt/slides/slide20.xml><?xml version="1.0" encoding="utf-8"?>
+<file path=ppt/slides/slide22.xml><?xml version="1.0" encoding="utf-8"?>
 <p:sld xmlns:a="http://schemas.openxmlformats.org/drawingml/2006/main" xmlns:r="http://schemas.openxmlformats.org/officeDocument/2006/relationships" xmlns:p="http://schemas.openxmlformats.org/presentationml/2006/main">
   <p:cSld>
     <p:spTree>
@@ -10978,7 +13248,7 @@
             <a:fld id="{45C00377-489B-40EC-B059-26BDDD2E89B9}" type="slidenum">
               <a:rPr lang="en-US" smtClean="0"/>
               <a:pPr/>
-              <a:t>20</a:t>
+              <a:t>22</a:t>
             </a:fld>
             <a:endParaRPr lang="en-US"/>
           </a:p>
@@ -11085,7 +13355,7 @@
 </p:sld>
 </file>
 
-<file path=ppt/slides/slide21.xml><?xml version="1.0" encoding="utf-8"?>
+<file path=ppt/slides/slide23.xml><?xml version="1.0" encoding="utf-8"?>
 <p:sld xmlns:a="http://schemas.openxmlformats.org/drawingml/2006/main" xmlns:r="http://schemas.openxmlformats.org/officeDocument/2006/relationships" xmlns:p="http://schemas.openxmlformats.org/presentationml/2006/main">
   <p:cSld>
     <p:spTree>
@@ -11132,7 +13402,7 @@
             <a:fld id="{45C00377-489B-40EC-B059-26BDDD2E89B9}" type="slidenum">
               <a:rPr lang="en-US" smtClean="0"/>
               <a:pPr/>
-              <a:t>21</a:t>
+              <a:t>23</a:t>
             </a:fld>
             <a:endParaRPr lang="en-US"/>
           </a:p>
@@ -11181,7 +13451,7 @@
 </p:sld>
 </file>
 
-<file path=ppt/slides/slide22.xml><?xml version="1.0" encoding="utf-8"?>
+<file path=ppt/slides/slide24.xml><?xml version="1.0" encoding="utf-8"?>
 <p:sld xmlns:a="http://schemas.openxmlformats.org/drawingml/2006/main" xmlns:r="http://schemas.openxmlformats.org/officeDocument/2006/relationships" xmlns:p="http://schemas.openxmlformats.org/presentationml/2006/main">
   <p:cSld>
     <p:spTree>
@@ -11274,18 +13544,15 @@
             <a:pPr lvl="1"/>
             <a:r>
               <a:rPr lang="en-US" dirty="0"/>
-              <a:t>Lumping center-backs and wingers together in soccer makes total high-speed distance look "average." </a:t>
+              <a:t>Grouping all positions may make total high-speed distance look "average." </a:t>
             </a:r>
           </a:p>
           <a:p>
             <a:pPr lvl="1"/>
             <a:r>
               <a:rPr lang="en-US" dirty="0"/>
-              <a:t>Segmenting by position reveals that wingers log massive high-speed workloads, while central defenders rely more on mechanical impacts and aerial duels.</a:t>
-            </a:r>
-          </a:p>
-          <a:p>
-            <a:endParaRPr lang="en-US" dirty="0"/>
+              <a:t>Segmenting by position may reveal that certain groups log massive high-speed workloads.</a:t>
+            </a:r>
           </a:p>
         </p:txBody>
       </p:sp>
@@ -11299,10 +13566,252 @@
   <p:clrMapOvr>
     <a:masterClrMapping/>
   </p:clrMapOvr>
+  <p:timing>
+    <p:tnLst>
+      <p:par>
+        <p:cTn id="1" dur="indefinite" restart="never" nodeType="tmRoot">
+          <p:childTnLst>
+            <p:seq concurrent="1" nextAc="seek">
+              <p:cTn id="2" dur="indefinite" nodeType="mainSeq">
+                <p:childTnLst>
+                  <p:par>
+                    <p:cTn id="3" fill="hold">
+                      <p:stCondLst>
+                        <p:cond delay="indefinite"/>
+                      </p:stCondLst>
+                      <p:childTnLst>
+                        <p:par>
+                          <p:cTn id="4" fill="hold">
+                            <p:stCondLst>
+                              <p:cond delay="0"/>
+                            </p:stCondLst>
+                            <p:childTnLst>
+                              <p:par>
+                                <p:cTn id="5" presetID="1" presetClass="entr" presetSubtype="0" fill="hold" grpId="0" nodeType="clickEffect">
+                                  <p:stCondLst>
+                                    <p:cond delay="0"/>
+                                  </p:stCondLst>
+                                  <p:childTnLst>
+                                    <p:set>
+                                      <p:cBhvr>
+                                        <p:cTn id="6" dur="1" fill="hold">
+                                          <p:stCondLst>
+                                            <p:cond delay="0"/>
+                                          </p:stCondLst>
+                                        </p:cTn>
+                                        <p:tgtEl>
+                                          <p:spTgt spid="3">
+                                            <p:txEl>
+                                              <p:pRg st="0" end="0"/>
+                                            </p:txEl>
+                                          </p:spTgt>
+                                        </p:tgtEl>
+                                        <p:attrNameLst>
+                                          <p:attrName>style.visibility</p:attrName>
+                                        </p:attrNameLst>
+                                      </p:cBhvr>
+                                      <p:to>
+                                        <p:strVal val="visible"/>
+                                      </p:to>
+                                    </p:set>
+                                  </p:childTnLst>
+                                </p:cTn>
+                              </p:par>
+                            </p:childTnLst>
+                          </p:cTn>
+                        </p:par>
+                      </p:childTnLst>
+                    </p:cTn>
+                  </p:par>
+                  <p:par>
+                    <p:cTn id="7" fill="hold">
+                      <p:stCondLst>
+                        <p:cond delay="indefinite"/>
+                      </p:stCondLst>
+                      <p:childTnLst>
+                        <p:par>
+                          <p:cTn id="8" fill="hold">
+                            <p:stCondLst>
+                              <p:cond delay="0"/>
+                            </p:stCondLst>
+                            <p:childTnLst>
+                              <p:par>
+                                <p:cTn id="9" presetID="1" presetClass="entr" presetSubtype="0" fill="hold" grpId="0" nodeType="clickEffect">
+                                  <p:stCondLst>
+                                    <p:cond delay="0"/>
+                                  </p:stCondLst>
+                                  <p:childTnLst>
+                                    <p:set>
+                                      <p:cBhvr>
+                                        <p:cTn id="10" dur="1" fill="hold">
+                                          <p:stCondLst>
+                                            <p:cond delay="0"/>
+                                          </p:stCondLst>
+                                        </p:cTn>
+                                        <p:tgtEl>
+                                          <p:spTgt spid="3">
+                                            <p:txEl>
+                                              <p:pRg st="1" end="1"/>
+                                            </p:txEl>
+                                          </p:spTgt>
+                                        </p:tgtEl>
+                                        <p:attrNameLst>
+                                          <p:attrName>style.visibility</p:attrName>
+                                        </p:attrNameLst>
+                                      </p:cBhvr>
+                                      <p:to>
+                                        <p:strVal val="visible"/>
+                                      </p:to>
+                                    </p:set>
+                                  </p:childTnLst>
+                                </p:cTn>
+                              </p:par>
+                            </p:childTnLst>
+                          </p:cTn>
+                        </p:par>
+                      </p:childTnLst>
+                    </p:cTn>
+                  </p:par>
+                  <p:par>
+                    <p:cTn id="11" fill="hold">
+                      <p:stCondLst>
+                        <p:cond delay="indefinite"/>
+                      </p:stCondLst>
+                      <p:childTnLst>
+                        <p:par>
+                          <p:cTn id="12" fill="hold">
+                            <p:stCondLst>
+                              <p:cond delay="0"/>
+                            </p:stCondLst>
+                            <p:childTnLst>
+                              <p:par>
+                                <p:cTn id="13" presetID="1" presetClass="entr" presetSubtype="0" fill="hold" grpId="0" nodeType="clickEffect">
+                                  <p:stCondLst>
+                                    <p:cond delay="0"/>
+                                  </p:stCondLst>
+                                  <p:childTnLst>
+                                    <p:set>
+                                      <p:cBhvr>
+                                        <p:cTn id="14" dur="1" fill="hold">
+                                          <p:stCondLst>
+                                            <p:cond delay="0"/>
+                                          </p:stCondLst>
+                                        </p:cTn>
+                                        <p:tgtEl>
+                                          <p:spTgt spid="3">
+                                            <p:txEl>
+                                              <p:pRg st="3" end="3"/>
+                                            </p:txEl>
+                                          </p:spTgt>
+                                        </p:tgtEl>
+                                        <p:attrNameLst>
+                                          <p:attrName>style.visibility</p:attrName>
+                                        </p:attrNameLst>
+                                      </p:cBhvr>
+                                      <p:to>
+                                        <p:strVal val="visible"/>
+                                      </p:to>
+                                    </p:set>
+                                  </p:childTnLst>
+                                </p:cTn>
+                              </p:par>
+                              <p:par>
+                                <p:cTn id="15" presetID="1" presetClass="entr" presetSubtype="0" fill="hold" grpId="0" nodeType="withEffect">
+                                  <p:stCondLst>
+                                    <p:cond delay="0"/>
+                                  </p:stCondLst>
+                                  <p:childTnLst>
+                                    <p:set>
+                                      <p:cBhvr>
+                                        <p:cTn id="16" dur="1" fill="hold">
+                                          <p:stCondLst>
+                                            <p:cond delay="0"/>
+                                          </p:stCondLst>
+                                        </p:cTn>
+                                        <p:tgtEl>
+                                          <p:spTgt spid="3">
+                                            <p:txEl>
+                                              <p:pRg st="4" end="4"/>
+                                            </p:txEl>
+                                          </p:spTgt>
+                                        </p:tgtEl>
+                                        <p:attrNameLst>
+                                          <p:attrName>style.visibility</p:attrName>
+                                        </p:attrNameLst>
+                                      </p:cBhvr>
+                                      <p:to>
+                                        <p:strVal val="visible"/>
+                                      </p:to>
+                                    </p:set>
+                                  </p:childTnLst>
+                                </p:cTn>
+                              </p:par>
+                              <p:par>
+                                <p:cTn id="17" presetID="1" presetClass="entr" presetSubtype="0" fill="hold" grpId="0" nodeType="withEffect">
+                                  <p:stCondLst>
+                                    <p:cond delay="0"/>
+                                  </p:stCondLst>
+                                  <p:childTnLst>
+                                    <p:set>
+                                      <p:cBhvr>
+                                        <p:cTn id="18" dur="1" fill="hold">
+                                          <p:stCondLst>
+                                            <p:cond delay="0"/>
+                                          </p:stCondLst>
+                                        </p:cTn>
+                                        <p:tgtEl>
+                                          <p:spTgt spid="3">
+                                            <p:txEl>
+                                              <p:pRg st="5" end="5"/>
+                                            </p:txEl>
+                                          </p:spTgt>
+                                        </p:tgtEl>
+                                        <p:attrNameLst>
+                                          <p:attrName>style.visibility</p:attrName>
+                                        </p:attrNameLst>
+                                      </p:cBhvr>
+                                      <p:to>
+                                        <p:strVal val="visible"/>
+                                      </p:to>
+                                    </p:set>
+                                  </p:childTnLst>
+                                </p:cTn>
+                              </p:par>
+                            </p:childTnLst>
+                          </p:cTn>
+                        </p:par>
+                      </p:childTnLst>
+                    </p:cTn>
+                  </p:par>
+                </p:childTnLst>
+              </p:cTn>
+              <p:prevCondLst>
+                <p:cond evt="onPrev" delay="0">
+                  <p:tgtEl>
+                    <p:sldTgt/>
+                  </p:tgtEl>
+                </p:cond>
+              </p:prevCondLst>
+              <p:nextCondLst>
+                <p:cond evt="onNext" delay="0">
+                  <p:tgtEl>
+                    <p:sldTgt/>
+                  </p:tgtEl>
+                </p:cond>
+              </p:nextCondLst>
+            </p:seq>
+          </p:childTnLst>
+        </p:cTn>
+      </p:par>
+    </p:tnLst>
+    <p:bldLst>
+      <p:bldP spid="3" grpId="0" build="p"/>
+    </p:bldLst>
+  </p:timing>
 </p:sld>
 </file>
 
-<file path=ppt/slides/slide23.xml><?xml version="1.0" encoding="utf-8"?>
+<file path=ppt/slides/slide25.xml><?xml version="1.0" encoding="utf-8"?>
 <p:sld xmlns:a="http://schemas.openxmlformats.org/drawingml/2006/main" xmlns:r="http://schemas.openxmlformats.org/officeDocument/2006/relationships" xmlns:p="http://schemas.openxmlformats.org/presentationml/2006/main">
   <p:cSld>
     <p:spTree>
@@ -11344,7 +13853,7 @@
           <a:p>
             <a:r>
               <a:rPr lang="en-US" dirty="0"/>
-              <a:t>Simpson’s paradox</a:t>
+              <a:t>Grouping can change the conclusion</a:t>
             </a:r>
           </a:p>
         </p:txBody>
@@ -11404,7 +13913,7 @@
             <a:fld id="{45C00377-489B-40EC-B059-26BDDD2E89B9}" type="slidenum">
               <a:rPr lang="en-US" smtClean="0"/>
               <a:pPr/>
-              <a:t>23</a:t>
+              <a:t>25</a:t>
             </a:fld>
             <a:endParaRPr lang="en-US"/>
           </a:p>
@@ -12114,10 +14623,85 @@
   <p:clrMapOvr>
     <a:masterClrMapping/>
   </p:clrMapOvr>
+  <p:timing>
+    <p:tnLst>
+      <p:par>
+        <p:cTn id="1" dur="indefinite" restart="never" nodeType="tmRoot">
+          <p:childTnLst>
+            <p:seq concurrent="1" nextAc="seek">
+              <p:cTn id="2" dur="indefinite" nodeType="mainSeq">
+                <p:childTnLst>
+                  <p:par>
+                    <p:cTn id="3" fill="hold">
+                      <p:stCondLst>
+                        <p:cond delay="indefinite"/>
+                      </p:stCondLst>
+                      <p:childTnLst>
+                        <p:par>
+                          <p:cTn id="4" fill="hold">
+                            <p:stCondLst>
+                              <p:cond delay="0"/>
+                            </p:stCondLst>
+                            <p:childTnLst>
+                              <p:par>
+                                <p:cTn id="5" presetID="1" presetClass="entr" presetSubtype="0" fill="hold" nodeType="clickEffect">
+                                  <p:stCondLst>
+                                    <p:cond delay="0"/>
+                                  </p:stCondLst>
+                                  <p:childTnLst>
+                                    <p:set>
+                                      <p:cBhvr>
+                                        <p:cTn id="6" dur="1" fill="hold">
+                                          <p:stCondLst>
+                                            <p:cond delay="0"/>
+                                          </p:stCondLst>
+                                        </p:cTn>
+                                        <p:tgtEl>
+                                          <p:spTgt spid="9"/>
+                                        </p:tgtEl>
+                                        <p:attrNameLst>
+                                          <p:attrName>style.visibility</p:attrName>
+                                        </p:attrNameLst>
+                                      </p:cBhvr>
+                                      <p:to>
+                                        <p:strVal val="visible"/>
+                                      </p:to>
+                                    </p:set>
+                                  </p:childTnLst>
+                                </p:cTn>
+                              </p:par>
+                            </p:childTnLst>
+                          </p:cTn>
+                        </p:par>
+                      </p:childTnLst>
+                    </p:cTn>
+                  </p:par>
+                </p:childTnLst>
+              </p:cTn>
+              <p:prevCondLst>
+                <p:cond evt="onPrev" delay="0">
+                  <p:tgtEl>
+                    <p:sldTgt/>
+                  </p:tgtEl>
+                </p:cond>
+              </p:prevCondLst>
+              <p:nextCondLst>
+                <p:cond evt="onNext" delay="0">
+                  <p:tgtEl>
+                    <p:sldTgt/>
+                  </p:tgtEl>
+                </p:cond>
+              </p:nextCondLst>
+            </p:seq>
+          </p:childTnLst>
+        </p:cTn>
+      </p:par>
+    </p:tnLst>
+  </p:timing>
 </p:sld>
 </file>
 
-<file path=ppt/slides/slide24.xml><?xml version="1.0" encoding="utf-8"?>
+<file path=ppt/slides/slide26.xml><?xml version="1.0" encoding="utf-8"?>
 <p:sld xmlns:a="http://schemas.openxmlformats.org/drawingml/2006/main" xmlns:r="http://schemas.openxmlformats.org/officeDocument/2006/relationships" xmlns:p="http://schemas.openxmlformats.org/presentationml/2006/main">
   <p:cSld>
     <p:spTree>
@@ -12165,7 +14749,7 @@
           <a:p>
             <a:r>
               <a:rPr lang="en-US" dirty="0"/>
-              <a:t>Simpson’s paradox</a:t>
+              <a:t>Different grouping can flip the conclusion</a:t>
             </a:r>
           </a:p>
         </p:txBody>
@@ -12237,7 +14821,7 @@
             <a:fld id="{45C00377-489B-40EC-B059-26BDDD2E89B9}" type="slidenum">
               <a:rPr lang="en-US" smtClean="0"/>
               <a:pPr/>
-              <a:t>24</a:t>
+              <a:t>26</a:t>
             </a:fld>
             <a:endParaRPr lang="en-US"/>
           </a:p>
@@ -12258,7 +14842,7 @@
         <p:spPr>
           <a:xfrm>
             <a:off x="5148272" y="5897325"/>
-            <a:ext cx="1895455" cy="369332"/>
+            <a:ext cx="1993046" cy="369332"/>
           </a:xfrm>
           <a:prstGeom prst="rect">
             <a:avLst/>
@@ -12272,7 +14856,11 @@
           <a:lstStyle/>
           <a:p>
             <a:r>
-              <a:rPr lang="en-US" dirty="0"/>
+              <a:rPr lang="en-US" dirty="0">
+                <a:solidFill>
+                  <a:srgbClr val="FF0000"/>
+                </a:solidFill>
+              </a:rPr>
               <a:t>How can this be??</a:t>
             </a:r>
           </a:p>
@@ -12876,10 +15464,290 @@
   <p:clrMapOvr>
     <a:masterClrMapping/>
   </p:clrMapOvr>
+  <p:timing>
+    <p:tnLst>
+      <p:par>
+        <p:cTn id="1" dur="indefinite" restart="never" nodeType="tmRoot">
+          <p:childTnLst>
+            <p:seq concurrent="1" nextAc="seek">
+              <p:cTn id="2" dur="indefinite" nodeType="mainSeq">
+                <p:childTnLst>
+                  <p:par>
+                    <p:cTn id="3" fill="hold">
+                      <p:stCondLst>
+                        <p:cond delay="indefinite"/>
+                      </p:stCondLst>
+                      <p:childTnLst>
+                        <p:par>
+                          <p:cTn id="4" fill="hold">
+                            <p:stCondLst>
+                              <p:cond delay="0"/>
+                            </p:stCondLst>
+                            <p:childTnLst>
+                              <p:par>
+                                <p:cTn id="5" presetID="1" presetClass="entr" presetSubtype="0" fill="hold" grpId="0" nodeType="clickEffect">
+                                  <p:stCondLst>
+                                    <p:cond delay="0"/>
+                                  </p:stCondLst>
+                                  <p:childTnLst>
+                                    <p:set>
+                                      <p:cBhvr>
+                                        <p:cTn id="6" dur="1" fill="hold">
+                                          <p:stCondLst>
+                                            <p:cond delay="0"/>
+                                          </p:stCondLst>
+                                        </p:cTn>
+                                        <p:tgtEl>
+                                          <p:spTgt spid="19"/>
+                                        </p:tgtEl>
+                                        <p:attrNameLst>
+                                          <p:attrName>style.visibility</p:attrName>
+                                        </p:attrNameLst>
+                                      </p:cBhvr>
+                                      <p:to>
+                                        <p:strVal val="visible"/>
+                                      </p:to>
+                                    </p:set>
+                                  </p:childTnLst>
+                                </p:cTn>
+                              </p:par>
+                              <p:par>
+                                <p:cTn id="7" presetID="1" presetClass="entr" presetSubtype="0" fill="hold" nodeType="withEffect">
+                                  <p:stCondLst>
+                                    <p:cond delay="0"/>
+                                  </p:stCondLst>
+                                  <p:childTnLst>
+                                    <p:set>
+                                      <p:cBhvr>
+                                        <p:cTn id="8" dur="1" fill="hold">
+                                          <p:stCondLst>
+                                            <p:cond delay="0"/>
+                                          </p:stCondLst>
+                                        </p:cTn>
+                                        <p:tgtEl>
+                                          <p:spTgt spid="13"/>
+                                        </p:tgtEl>
+                                        <p:attrNameLst>
+                                          <p:attrName>style.visibility</p:attrName>
+                                        </p:attrNameLst>
+                                      </p:cBhvr>
+                                      <p:to>
+                                        <p:strVal val="visible"/>
+                                      </p:to>
+                                    </p:set>
+                                  </p:childTnLst>
+                                </p:cTn>
+                              </p:par>
+                              <p:par>
+                                <p:cTn id="9" presetID="1" presetClass="entr" presetSubtype="0" fill="hold" grpId="0" nodeType="withEffect">
+                                  <p:stCondLst>
+                                    <p:cond delay="0"/>
+                                  </p:stCondLst>
+                                  <p:childTnLst>
+                                    <p:set>
+                                      <p:cBhvr>
+                                        <p:cTn id="10" dur="1" fill="hold">
+                                          <p:stCondLst>
+                                            <p:cond delay="0"/>
+                                          </p:stCondLst>
+                                        </p:cTn>
+                                        <p:tgtEl>
+                                          <p:spTgt spid="9"/>
+                                        </p:tgtEl>
+                                        <p:attrNameLst>
+                                          <p:attrName>style.visibility</p:attrName>
+                                        </p:attrNameLst>
+                                      </p:cBhvr>
+                                      <p:to>
+                                        <p:strVal val="visible"/>
+                                      </p:to>
+                                    </p:set>
+                                  </p:childTnLst>
+                                </p:cTn>
+                              </p:par>
+                            </p:childTnLst>
+                          </p:cTn>
+                        </p:par>
+                      </p:childTnLst>
+                    </p:cTn>
+                  </p:par>
+                  <p:par>
+                    <p:cTn id="11" fill="hold">
+                      <p:stCondLst>
+                        <p:cond delay="indefinite"/>
+                      </p:stCondLst>
+                      <p:childTnLst>
+                        <p:par>
+                          <p:cTn id="12" fill="hold">
+                            <p:stCondLst>
+                              <p:cond delay="0"/>
+                            </p:stCondLst>
+                            <p:childTnLst>
+                              <p:par>
+                                <p:cTn id="13" presetID="1" presetClass="entr" presetSubtype="0" fill="hold" grpId="0" nodeType="clickEffect">
+                                  <p:stCondLst>
+                                    <p:cond delay="0"/>
+                                  </p:stCondLst>
+                                  <p:childTnLst>
+                                    <p:set>
+                                      <p:cBhvr>
+                                        <p:cTn id="14" dur="1" fill="hold">
+                                          <p:stCondLst>
+                                            <p:cond delay="0"/>
+                                          </p:stCondLst>
+                                        </p:cTn>
+                                        <p:tgtEl>
+                                          <p:spTgt spid="11"/>
+                                        </p:tgtEl>
+                                        <p:attrNameLst>
+                                          <p:attrName>style.visibility</p:attrName>
+                                        </p:attrNameLst>
+                                      </p:cBhvr>
+                                      <p:to>
+                                        <p:strVal val="visible"/>
+                                      </p:to>
+                                    </p:set>
+                                  </p:childTnLst>
+                                </p:cTn>
+                              </p:par>
+                              <p:par>
+                                <p:cTn id="15" presetID="1" presetClass="entr" presetSubtype="0" fill="hold" nodeType="withEffect">
+                                  <p:stCondLst>
+                                    <p:cond delay="0"/>
+                                  </p:stCondLst>
+                                  <p:childTnLst>
+                                    <p:set>
+                                      <p:cBhvr>
+                                        <p:cTn id="16" dur="1" fill="hold">
+                                          <p:stCondLst>
+                                            <p:cond delay="0"/>
+                                          </p:stCondLst>
+                                        </p:cTn>
+                                        <p:tgtEl>
+                                          <p:spTgt spid="14"/>
+                                        </p:tgtEl>
+                                        <p:attrNameLst>
+                                          <p:attrName>style.visibility</p:attrName>
+                                        </p:attrNameLst>
+                                      </p:cBhvr>
+                                      <p:to>
+                                        <p:strVal val="visible"/>
+                                      </p:to>
+                                    </p:set>
+                                  </p:childTnLst>
+                                </p:cTn>
+                              </p:par>
+                              <p:par>
+                                <p:cTn id="17" presetID="1" presetClass="entr" presetSubtype="0" fill="hold" grpId="0" nodeType="withEffect">
+                                  <p:stCondLst>
+                                    <p:cond delay="0"/>
+                                  </p:stCondLst>
+                                  <p:childTnLst>
+                                    <p:set>
+                                      <p:cBhvr>
+                                        <p:cTn id="18" dur="1" fill="hold">
+                                          <p:stCondLst>
+                                            <p:cond delay="0"/>
+                                          </p:stCondLst>
+                                        </p:cTn>
+                                        <p:tgtEl>
+                                          <p:spTgt spid="21"/>
+                                        </p:tgtEl>
+                                        <p:attrNameLst>
+                                          <p:attrName>style.visibility</p:attrName>
+                                        </p:attrNameLst>
+                                      </p:cBhvr>
+                                      <p:to>
+                                        <p:strVal val="visible"/>
+                                      </p:to>
+                                    </p:set>
+                                  </p:childTnLst>
+                                </p:cTn>
+                              </p:par>
+                            </p:childTnLst>
+                          </p:cTn>
+                        </p:par>
+                      </p:childTnLst>
+                    </p:cTn>
+                  </p:par>
+                  <p:par>
+                    <p:cTn id="19" fill="hold">
+                      <p:stCondLst>
+                        <p:cond delay="indefinite"/>
+                      </p:stCondLst>
+                      <p:childTnLst>
+                        <p:par>
+                          <p:cTn id="20" fill="hold">
+                            <p:stCondLst>
+                              <p:cond delay="0"/>
+                            </p:stCondLst>
+                            <p:childTnLst>
+                              <p:par>
+                                <p:cTn id="21" presetID="1" presetClass="entr" presetSubtype="0" fill="hold" grpId="0" nodeType="clickEffect">
+                                  <p:stCondLst>
+                                    <p:cond delay="0"/>
+                                  </p:stCondLst>
+                                  <p:childTnLst>
+                                    <p:set>
+                                      <p:cBhvr>
+                                        <p:cTn id="22" dur="1" fill="hold">
+                                          <p:stCondLst>
+                                            <p:cond delay="0"/>
+                                          </p:stCondLst>
+                                        </p:cTn>
+                                        <p:tgtEl>
+                                          <p:spTgt spid="5"/>
+                                        </p:tgtEl>
+                                        <p:attrNameLst>
+                                          <p:attrName>style.visibility</p:attrName>
+                                        </p:attrNameLst>
+                                      </p:cBhvr>
+                                      <p:to>
+                                        <p:strVal val="visible"/>
+                                      </p:to>
+                                    </p:set>
+                                  </p:childTnLst>
+                                </p:cTn>
+                              </p:par>
+                            </p:childTnLst>
+                          </p:cTn>
+                        </p:par>
+                      </p:childTnLst>
+                    </p:cTn>
+                  </p:par>
+                </p:childTnLst>
+              </p:cTn>
+              <p:prevCondLst>
+                <p:cond evt="onPrev" delay="0">
+                  <p:tgtEl>
+                    <p:sldTgt/>
+                  </p:tgtEl>
+                </p:cond>
+              </p:prevCondLst>
+              <p:nextCondLst>
+                <p:cond evt="onNext" delay="0">
+                  <p:tgtEl>
+                    <p:sldTgt/>
+                  </p:tgtEl>
+                </p:cond>
+              </p:nextCondLst>
+            </p:seq>
+          </p:childTnLst>
+        </p:cTn>
+      </p:par>
+    </p:tnLst>
+    <p:bldLst>
+      <p:bldP spid="5" grpId="0"/>
+      <p:bldP spid="9" grpId="0" animBg="1"/>
+      <p:bldP spid="11" grpId="0" animBg="1"/>
+      <p:bldP spid="19" grpId="0"/>
+      <p:bldP spid="21" grpId="0"/>
+    </p:bldLst>
+  </p:timing>
 </p:sld>
 </file>
 
-<file path=ppt/slides/slide25.xml><?xml version="1.0" encoding="utf-8"?>
+<file path=ppt/slides/slide27.xml><?xml version="1.0" encoding="utf-8"?>
 <p:sld xmlns:a="http://schemas.openxmlformats.org/drawingml/2006/main" xmlns:r="http://schemas.openxmlformats.org/officeDocument/2006/relationships" xmlns:p="http://schemas.openxmlformats.org/presentationml/2006/main">
   <p:cSld>
     <p:spTree>
@@ -12957,9 +15825,10 @@
               <a:buNone/>
             </a:pPr>
             <a:r>
-              <a:rPr lang="en-US" dirty="0"/>
-              <a:t>Who is the better shooter?</a:t>
-            </a:r>
+              <a:rPr lang="en-GB" dirty="0"/>
+              <a:t>A pattern that appears within each group may reverse when the groups are combined, because the groups contribute different amounts to the overall result.</a:t>
+            </a:r>
+            <a:endParaRPr lang="en-US" dirty="0"/>
           </a:p>
         </p:txBody>
       </p:sp>
@@ -12987,7 +15856,7 @@
             <a:fld id="{45C00377-489B-40EC-B059-26BDDD2E89B9}" type="slidenum">
               <a:rPr lang="en-US" smtClean="0"/>
               <a:pPr/>
-              <a:t>25</a:t>
+              <a:t>27</a:t>
             </a:fld>
             <a:endParaRPr lang="en-US" dirty="0"/>
           </a:p>
@@ -13015,7 +15884,7 @@
         </p:blipFill>
         <p:spPr>
           <a:xfrm>
-            <a:off x="3433391" y="2653426"/>
+            <a:off x="6303013" y="3130504"/>
             <a:ext cx="5325218" cy="2762636"/>
           </a:xfrm>
           <a:prstGeom prst="rect">
@@ -13023,6 +15892,334 @@
           </a:prstGeom>
         </p:spPr>
       </p:pic>
+      <p:graphicFrame>
+        <p:nvGraphicFramePr>
+          <p:cNvPr id="6" name="Table 5">
+            <a:extLst>
+              <a:ext uri="{FF2B5EF4-FFF2-40B4-BE49-F238E27FC236}">
+                <a16:creationId xmlns:a16="http://schemas.microsoft.com/office/drawing/2014/main" id="{C84069BE-F43F-F298-3E95-1BE9DC6F9A58}"/>
+              </a:ext>
+            </a:extLst>
+          </p:cNvPr>
+          <p:cNvGraphicFramePr>
+            <a:graphicFrameLocks noGrp="1"/>
+          </p:cNvGraphicFramePr>
+          <p:nvPr>
+            <p:extLst>
+              <p:ext uri="{D42A27DB-BD31-4B8C-83A1-F6EECF244321}">
+                <p14:modId xmlns:p14="http://schemas.microsoft.com/office/powerpoint/2010/main" val="1084519197"/>
+              </p:ext>
+            </p:extLst>
+          </p:nvPr>
+        </p:nvGraphicFramePr>
+        <p:xfrm>
+          <a:off x="149744" y="3955562"/>
+          <a:ext cx="5739244" cy="1112520"/>
+        </p:xfrm>
+        <a:graphic>
+          <a:graphicData uri="http://schemas.openxmlformats.org/drawingml/2006/table">
+            <a:tbl>
+              <a:tblPr firstRow="1" bandRow="1">
+                <a:tableStyleId>{5C22544A-7EE6-4342-B048-85BDC9FD1C3A}</a:tableStyleId>
+              </a:tblPr>
+              <a:tblGrid>
+                <a:gridCol w="1434811">
+                  <a:extLst>
+                    <a:ext uri="{9D8B030D-6E8A-4147-A177-3AD203B41FA5}">
+                      <a16:colId xmlns:a16="http://schemas.microsoft.com/office/drawing/2014/main" val="3243521770"/>
+                    </a:ext>
+                  </a:extLst>
+                </a:gridCol>
+                <a:gridCol w="1434811">
+                  <a:extLst>
+                    <a:ext uri="{9D8B030D-6E8A-4147-A177-3AD203B41FA5}">
+                      <a16:colId xmlns:a16="http://schemas.microsoft.com/office/drawing/2014/main" val="3381938047"/>
+                    </a:ext>
+                  </a:extLst>
+                </a:gridCol>
+                <a:gridCol w="1434811">
+                  <a:extLst>
+                    <a:ext uri="{9D8B030D-6E8A-4147-A177-3AD203B41FA5}">
+                      <a16:colId xmlns:a16="http://schemas.microsoft.com/office/drawing/2014/main" val="175830463"/>
+                    </a:ext>
+                  </a:extLst>
+                </a:gridCol>
+                <a:gridCol w="1434811">
+                  <a:extLst>
+                    <a:ext uri="{9D8B030D-6E8A-4147-A177-3AD203B41FA5}">
+                      <a16:colId xmlns:a16="http://schemas.microsoft.com/office/drawing/2014/main" val="658846749"/>
+                    </a:ext>
+                  </a:extLst>
+                </a:gridCol>
+              </a:tblGrid>
+              <a:tr h="370840">
+                <a:tc>
+                  <a:txBody>
+                    <a:bodyPr/>
+                    <a:lstStyle/>
+                    <a:p>
+                      <a:endParaRPr lang="en-US" dirty="0"/>
+                    </a:p>
+                  </a:txBody>
+                  <a:tcPr/>
+                </a:tc>
+                <a:tc>
+                  <a:txBody>
+                    <a:bodyPr/>
+                    <a:lstStyle/>
+                    <a:p>
+                      <a:pPr algn="ctr" rtl="0" fontAlgn="b">
+                        <a:buNone/>
+                      </a:pPr>
+                      <a:r>
+                        <a:rPr lang="en-US" sz="1800" b="1" kern="1200" dirty="0">
+                          <a:solidFill>
+                            <a:schemeClr val="lt1"/>
+                          </a:solidFill>
+                          <a:latin typeface="+mn-lt"/>
+                          <a:ea typeface="+mn-ea"/>
+                          <a:cs typeface="+mn-cs"/>
+                        </a:rPr>
+                        <a:t>2pt%</a:t>
+                      </a:r>
+                    </a:p>
+                  </a:txBody>
+                  <a:tcPr marL="28575" marR="28575" marT="19050" marB="19050" anchor="b"/>
+                </a:tc>
+                <a:tc>
+                  <a:txBody>
+                    <a:bodyPr/>
+                    <a:lstStyle/>
+                    <a:p>
+                      <a:pPr algn="ctr" rtl="0" fontAlgn="b">
+                        <a:buNone/>
+                      </a:pPr>
+                      <a:r>
+                        <a:rPr lang="en-US" sz="1800" b="1" kern="1200" dirty="0">
+                          <a:solidFill>
+                            <a:schemeClr val="lt1"/>
+                          </a:solidFill>
+                          <a:latin typeface="+mn-lt"/>
+                          <a:ea typeface="+mn-ea"/>
+                          <a:cs typeface="+mn-cs"/>
+                        </a:rPr>
+                        <a:t>3pt%</a:t>
+                      </a:r>
+                    </a:p>
+                  </a:txBody>
+                  <a:tcPr marL="28575" marR="28575" marT="19050" marB="19050" anchor="b"/>
+                </a:tc>
+                <a:tc>
+                  <a:txBody>
+                    <a:bodyPr/>
+                    <a:lstStyle/>
+                    <a:p>
+                      <a:pPr algn="ctr" rtl="0" fontAlgn="b">
+                        <a:buNone/>
+                      </a:pPr>
+                      <a:r>
+                        <a:rPr lang="en-US" sz="1800" b="1" kern="1200" dirty="0">
+                          <a:solidFill>
+                            <a:schemeClr val="lt1"/>
+                          </a:solidFill>
+                          <a:latin typeface="+mn-lt"/>
+                          <a:ea typeface="+mn-ea"/>
+                          <a:cs typeface="+mn-cs"/>
+                        </a:rPr>
+                        <a:t>FG%</a:t>
+                      </a:r>
+                    </a:p>
+                  </a:txBody>
+                  <a:tcPr marL="28575" marR="28575" marT="19050" marB="19050" anchor="b"/>
+                </a:tc>
+                <a:extLst>
+                  <a:ext uri="{0D108BD9-81ED-4DB2-BD59-A6C34878D82A}">
+                    <a16:rowId xmlns:a16="http://schemas.microsoft.com/office/drawing/2014/main" val="1350765908"/>
+                  </a:ext>
+                </a:extLst>
+              </a:tr>
+              <a:tr h="370840">
+                <a:tc>
+                  <a:txBody>
+                    <a:bodyPr/>
+                    <a:lstStyle/>
+                    <a:p>
+                      <a:r>
+                        <a:rPr lang="en-US" dirty="0"/>
+                        <a:t>Player A</a:t>
+                      </a:r>
+                    </a:p>
+                  </a:txBody>
+                  <a:tcPr/>
+                </a:tc>
+                <a:tc>
+                  <a:txBody>
+                    <a:bodyPr/>
+                    <a:lstStyle/>
+                    <a:p>
+                      <a:pPr marL="0" algn="ctr" defTabSz="914400" rtl="0" eaLnBrk="1" fontAlgn="b" latinLnBrk="0" hangingPunct="1">
+                        <a:buNone/>
+                      </a:pPr>
+                      <a:r>
+                        <a:rPr lang="en-US" sz="1800" kern="1200" dirty="0">
+                          <a:solidFill>
+                            <a:schemeClr val="dk1"/>
+                          </a:solidFill>
+                          <a:latin typeface="+mn-lt"/>
+                          <a:ea typeface="+mn-ea"/>
+                          <a:cs typeface="+mn-cs"/>
+                        </a:rPr>
+                        <a:t>75%</a:t>
+                      </a:r>
+                    </a:p>
+                  </a:txBody>
+                  <a:tcPr marL="28575" marR="28575" marT="19050" marB="19050" anchor="b"/>
+                </a:tc>
+                <a:tc>
+                  <a:txBody>
+                    <a:bodyPr/>
+                    <a:lstStyle/>
+                    <a:p>
+                      <a:pPr marL="0" algn="ctr" defTabSz="914400" rtl="0" eaLnBrk="1" fontAlgn="b" latinLnBrk="0" hangingPunct="1">
+                        <a:buNone/>
+                      </a:pPr>
+                      <a:r>
+                        <a:rPr lang="en-US" sz="1800" kern="1200" dirty="0">
+                          <a:solidFill>
+                            <a:schemeClr val="dk1"/>
+                          </a:solidFill>
+                          <a:latin typeface="+mn-lt"/>
+                          <a:ea typeface="+mn-ea"/>
+                          <a:cs typeface="+mn-cs"/>
+                        </a:rPr>
+                        <a:t>25%</a:t>
+                      </a:r>
+                    </a:p>
+                  </a:txBody>
+                  <a:tcPr marL="28575" marR="28575" marT="19050" marB="19050" anchor="b"/>
+                </a:tc>
+                <a:tc>
+                  <a:txBody>
+                    <a:bodyPr/>
+                    <a:lstStyle/>
+                    <a:p>
+                      <a:pPr marL="0" algn="ctr" defTabSz="914400" rtl="0" eaLnBrk="1" fontAlgn="b" latinLnBrk="0" hangingPunct="1">
+                        <a:buNone/>
+                      </a:pPr>
+                      <a:r>
+                        <a:rPr lang="en-US" sz="1800" kern="1200" dirty="0">
+                          <a:solidFill>
+                            <a:schemeClr val="dk1"/>
+                          </a:solidFill>
+                          <a:latin typeface="+mn-lt"/>
+                          <a:ea typeface="+mn-ea"/>
+                          <a:cs typeface="+mn-cs"/>
+                        </a:rPr>
+                        <a:t>65%</a:t>
+                      </a:r>
+                    </a:p>
+                  </a:txBody>
+                  <a:tcPr marL="28575" marR="28575" marT="19050" marB="19050" anchor="b"/>
+                </a:tc>
+                <a:extLst>
+                  <a:ext uri="{0D108BD9-81ED-4DB2-BD59-A6C34878D82A}">
+                    <a16:rowId xmlns:a16="http://schemas.microsoft.com/office/drawing/2014/main" val="1094331597"/>
+                  </a:ext>
+                </a:extLst>
+              </a:tr>
+              <a:tr h="370840">
+                <a:tc>
+                  <a:txBody>
+                    <a:bodyPr/>
+                    <a:lstStyle/>
+                    <a:p>
+                      <a:r>
+                        <a:rPr lang="en-US" dirty="0"/>
+                        <a:t>Player B</a:t>
+                      </a:r>
+                    </a:p>
+                  </a:txBody>
+                  <a:tcPr/>
+                </a:tc>
+                <a:tc>
+                  <a:txBody>
+                    <a:bodyPr/>
+                    <a:lstStyle/>
+                    <a:p>
+                      <a:pPr marL="0" algn="ctr" defTabSz="914400" rtl="0" eaLnBrk="1" fontAlgn="b" latinLnBrk="0" hangingPunct="1">
+                        <a:buNone/>
+                      </a:pPr>
+                      <a:r>
+                        <a:rPr lang="en-US" sz="1800" kern="1200">
+                          <a:solidFill>
+                            <a:schemeClr val="dk1"/>
+                          </a:solidFill>
+                          <a:latin typeface="+mn-lt"/>
+                          <a:ea typeface="+mn-ea"/>
+                          <a:cs typeface="+mn-cs"/>
+                        </a:rPr>
+                        <a:t>100%</a:t>
+                      </a:r>
+                    </a:p>
+                  </a:txBody>
+                  <a:tcPr marL="28575" marR="28575" marT="19050" marB="19050" anchor="b"/>
+                </a:tc>
+                <a:tc>
+                  <a:txBody>
+                    <a:bodyPr/>
+                    <a:lstStyle/>
+                    <a:p>
+                      <a:pPr marL="0" algn="ctr" defTabSz="914400" rtl="0" eaLnBrk="1" fontAlgn="b" latinLnBrk="0" hangingPunct="1">
+                        <a:buNone/>
+                      </a:pPr>
+                      <a:r>
+                        <a:rPr lang="en-US" sz="1800" kern="1200" dirty="0">
+                          <a:solidFill>
+                            <a:schemeClr val="dk1"/>
+                          </a:solidFill>
+                          <a:latin typeface="+mn-lt"/>
+                          <a:ea typeface="+mn-ea"/>
+                          <a:cs typeface="+mn-cs"/>
+                        </a:rPr>
+                        <a:t>50%</a:t>
+                      </a:r>
+                    </a:p>
+                  </a:txBody>
+                  <a:tcPr marL="28575" marR="28575" marT="19050" marB="19050" anchor="b"/>
+                </a:tc>
+                <a:tc>
+                  <a:txBody>
+                    <a:bodyPr/>
+                    <a:lstStyle/>
+                    <a:p>
+                      <a:pPr marL="0" algn="ctr" defTabSz="914400" rtl="0" eaLnBrk="1" fontAlgn="b" latinLnBrk="0" hangingPunct="1">
+                        <a:buNone/>
+                      </a:pPr>
+                      <a:r>
+                        <a:rPr lang="en-US" sz="1800" kern="1200" dirty="0">
+                          <a:solidFill>
+                            <a:schemeClr val="dk1"/>
+                          </a:solidFill>
+                          <a:latin typeface="+mn-lt"/>
+                          <a:ea typeface="+mn-ea"/>
+                          <a:cs typeface="+mn-cs"/>
+                        </a:rPr>
+                        <a:t>60%</a:t>
+                      </a:r>
+                    </a:p>
+                  </a:txBody>
+                  <a:tcPr marL="28575" marR="28575" marT="19050" marB="19050" anchor="b"/>
+                </a:tc>
+                <a:extLst>
+                  <a:ext uri="{0D108BD9-81ED-4DB2-BD59-A6C34878D82A}">
+                    <a16:rowId xmlns:a16="http://schemas.microsoft.com/office/drawing/2014/main" val="512187133"/>
+                  </a:ext>
+                </a:extLst>
+              </a:tr>
+            </a:tbl>
+          </a:graphicData>
+        </a:graphic>
+      </p:graphicFrame>
     </p:spTree>
     <p:extLst>
       <p:ext uri="{BB962C8B-B14F-4D97-AF65-F5344CB8AC3E}">
@@ -13036,7 +16233,7 @@
 </p:sld>
 </file>
 
-<file path=ppt/slides/slide26.xml><?xml version="1.0" encoding="utf-8"?>
+<file path=ppt/slides/slide28.xml><?xml version="1.0" encoding="utf-8"?>
 <p:sld xmlns:a="http://schemas.openxmlformats.org/drawingml/2006/main" xmlns:r="http://schemas.openxmlformats.org/officeDocument/2006/relationships" xmlns:p="http://schemas.openxmlformats.org/presentationml/2006/main">
   <p:cSld>
     <p:spTree>
@@ -13104,28 +16301,67 @@
           <a:p>
             <a:r>
               <a:rPr lang="en-US" dirty="0"/>
-              <a:t>Beyond Summary Tables: </a:t>
-            </a:r>
-          </a:p>
-          <a:p>
-            <a:pPr lvl="1"/>
-            <a:r>
-              <a:rPr lang="en-US" dirty="0"/>
-              <a:t>Numbers like means and standard deviations tell part of the story, but visual shapes reveal the full picture.</a:t>
-            </a:r>
-          </a:p>
-          <a:p>
-            <a:pPr lvl="1"/>
-            <a:r>
-              <a:rPr lang="en-US" dirty="0"/>
-              <a:t>Bar graphs, scatter plots and line graphs can show averages and averages over time </a:t>
-            </a:r>
-          </a:p>
-          <a:p>
-            <a:pPr lvl="1"/>
-            <a:r>
-              <a:rPr lang="en-US" dirty="0"/>
-              <a:t>Histograms, density plots, and boxplots are useful for spotting positional differences and skewness.</a:t>
+              <a:t>Numbers tell part of the story, but visual shapes reveal the </a:t>
+            </a:r>
+            <a:r>
+              <a:rPr lang="en-US" b="1" dirty="0"/>
+              <a:t>full picture</a:t>
+            </a:r>
+            <a:r>
+              <a:rPr lang="en-US" dirty="0"/>
+              <a:t>.</a:t>
+            </a:r>
+          </a:p>
+          <a:p>
+            <a:r>
+              <a:rPr lang="en-US" b="1" dirty="0"/>
+              <a:t>Bar graphs</a:t>
+            </a:r>
+            <a:r>
+              <a:rPr lang="en-US" dirty="0"/>
+              <a:t>, </a:t>
+            </a:r>
+            <a:r>
+              <a:rPr lang="en-US" b="1" dirty="0"/>
+              <a:t>scatter plots </a:t>
+            </a:r>
+            <a:r>
+              <a:rPr lang="en-US" dirty="0"/>
+              <a:t>and </a:t>
+            </a:r>
+            <a:r>
+              <a:rPr lang="en-US" b="1" dirty="0"/>
+              <a:t>line graphs </a:t>
+            </a:r>
+            <a:r>
+              <a:rPr lang="en-US" dirty="0"/>
+              <a:t>can show averages and averages over time </a:t>
+            </a:r>
+          </a:p>
+          <a:p>
+            <a:r>
+              <a:rPr lang="en-US" b="1" dirty="0"/>
+              <a:t>Histograms</a:t>
+            </a:r>
+            <a:r>
+              <a:rPr lang="en-US" dirty="0"/>
+              <a:t>, </a:t>
+            </a:r>
+            <a:r>
+              <a:rPr lang="en-US" b="1" dirty="0"/>
+              <a:t>density plots</a:t>
+            </a:r>
+            <a:r>
+              <a:rPr lang="en-US" dirty="0"/>
+              <a:t>, and </a:t>
+            </a:r>
+            <a:r>
+              <a:rPr lang="en-US" b="1" dirty="0"/>
+              <a:t>boxplots </a:t>
+            </a:r>
+            <a:r>
+              <a:rPr lang="en-US" dirty="0"/>
+              <a:t>are useful for spotting positional differences and skewness.</a:t>
             </a:r>
           </a:p>
           <a:p>
@@ -13151,10 +16387,190 @@
   <p:clrMapOvr>
     <a:masterClrMapping/>
   </p:clrMapOvr>
+  <p:timing>
+    <p:tnLst>
+      <p:par>
+        <p:cTn id="1" dur="indefinite" restart="never" nodeType="tmRoot">
+          <p:childTnLst>
+            <p:seq concurrent="1" nextAc="seek">
+              <p:cTn id="2" dur="indefinite" nodeType="mainSeq">
+                <p:childTnLst>
+                  <p:par>
+                    <p:cTn id="3" fill="hold">
+                      <p:stCondLst>
+                        <p:cond delay="indefinite"/>
+                      </p:stCondLst>
+                      <p:childTnLst>
+                        <p:par>
+                          <p:cTn id="4" fill="hold">
+                            <p:stCondLst>
+                              <p:cond delay="0"/>
+                            </p:stCondLst>
+                            <p:childTnLst>
+                              <p:par>
+                                <p:cTn id="5" presetID="1" presetClass="entr" presetSubtype="0" fill="hold" grpId="0" nodeType="clickEffect">
+                                  <p:stCondLst>
+                                    <p:cond delay="0"/>
+                                  </p:stCondLst>
+                                  <p:childTnLst>
+                                    <p:set>
+                                      <p:cBhvr>
+                                        <p:cTn id="6" dur="1" fill="hold">
+                                          <p:stCondLst>
+                                            <p:cond delay="0"/>
+                                          </p:stCondLst>
+                                        </p:cTn>
+                                        <p:tgtEl>
+                                          <p:spTgt spid="3">
+                                            <p:txEl>
+                                              <p:pRg st="0" end="0"/>
+                                            </p:txEl>
+                                          </p:spTgt>
+                                        </p:tgtEl>
+                                        <p:attrNameLst>
+                                          <p:attrName>style.visibility</p:attrName>
+                                        </p:attrNameLst>
+                                      </p:cBhvr>
+                                      <p:to>
+                                        <p:strVal val="visible"/>
+                                      </p:to>
+                                    </p:set>
+                                  </p:childTnLst>
+                                </p:cTn>
+                              </p:par>
+                            </p:childTnLst>
+                          </p:cTn>
+                        </p:par>
+                      </p:childTnLst>
+                    </p:cTn>
+                  </p:par>
+                  <p:par>
+                    <p:cTn id="7" fill="hold">
+                      <p:stCondLst>
+                        <p:cond delay="indefinite"/>
+                      </p:stCondLst>
+                      <p:childTnLst>
+                        <p:par>
+                          <p:cTn id="8" fill="hold">
+                            <p:stCondLst>
+                              <p:cond delay="0"/>
+                            </p:stCondLst>
+                            <p:childTnLst>
+                              <p:par>
+                                <p:cTn id="9" presetID="1" presetClass="entr" presetSubtype="0" fill="hold" grpId="0" nodeType="clickEffect">
+                                  <p:stCondLst>
+                                    <p:cond delay="0"/>
+                                  </p:stCondLst>
+                                  <p:childTnLst>
+                                    <p:set>
+                                      <p:cBhvr>
+                                        <p:cTn id="10" dur="1" fill="hold">
+                                          <p:stCondLst>
+                                            <p:cond delay="0"/>
+                                          </p:stCondLst>
+                                        </p:cTn>
+                                        <p:tgtEl>
+                                          <p:spTgt spid="3">
+                                            <p:txEl>
+                                              <p:pRg st="1" end="1"/>
+                                            </p:txEl>
+                                          </p:spTgt>
+                                        </p:tgtEl>
+                                        <p:attrNameLst>
+                                          <p:attrName>style.visibility</p:attrName>
+                                        </p:attrNameLst>
+                                      </p:cBhvr>
+                                      <p:to>
+                                        <p:strVal val="visible"/>
+                                      </p:to>
+                                    </p:set>
+                                  </p:childTnLst>
+                                </p:cTn>
+                              </p:par>
+                            </p:childTnLst>
+                          </p:cTn>
+                        </p:par>
+                      </p:childTnLst>
+                    </p:cTn>
+                  </p:par>
+                  <p:par>
+                    <p:cTn id="11" fill="hold">
+                      <p:stCondLst>
+                        <p:cond delay="indefinite"/>
+                      </p:stCondLst>
+                      <p:childTnLst>
+                        <p:par>
+                          <p:cTn id="12" fill="hold">
+                            <p:stCondLst>
+                              <p:cond delay="0"/>
+                            </p:stCondLst>
+                            <p:childTnLst>
+                              <p:par>
+                                <p:cTn id="13" presetID="1" presetClass="entr" presetSubtype="0" fill="hold" grpId="0" nodeType="clickEffect">
+                                  <p:stCondLst>
+                                    <p:cond delay="0"/>
+                                  </p:stCondLst>
+                                  <p:childTnLst>
+                                    <p:set>
+                                      <p:cBhvr>
+                                        <p:cTn id="14" dur="1" fill="hold">
+                                          <p:stCondLst>
+                                            <p:cond delay="0"/>
+                                          </p:stCondLst>
+                                        </p:cTn>
+                                        <p:tgtEl>
+                                          <p:spTgt spid="3">
+                                            <p:txEl>
+                                              <p:pRg st="2" end="2"/>
+                                            </p:txEl>
+                                          </p:spTgt>
+                                        </p:tgtEl>
+                                        <p:attrNameLst>
+                                          <p:attrName>style.visibility</p:attrName>
+                                        </p:attrNameLst>
+                                      </p:cBhvr>
+                                      <p:to>
+                                        <p:strVal val="visible"/>
+                                      </p:to>
+                                    </p:set>
+                                  </p:childTnLst>
+                                </p:cTn>
+                              </p:par>
+                            </p:childTnLst>
+                          </p:cTn>
+                        </p:par>
+                      </p:childTnLst>
+                    </p:cTn>
+                  </p:par>
+                </p:childTnLst>
+              </p:cTn>
+              <p:prevCondLst>
+                <p:cond evt="onPrev" delay="0">
+                  <p:tgtEl>
+                    <p:sldTgt/>
+                  </p:tgtEl>
+                </p:cond>
+              </p:prevCondLst>
+              <p:nextCondLst>
+                <p:cond evt="onNext" delay="0">
+                  <p:tgtEl>
+                    <p:sldTgt/>
+                  </p:tgtEl>
+                </p:cond>
+              </p:nextCondLst>
+            </p:seq>
+          </p:childTnLst>
+        </p:cTn>
+      </p:par>
+    </p:tnLst>
+    <p:bldLst>
+      <p:bldP spid="3" grpId="0" uiExpand="1" build="p"/>
+    </p:bldLst>
+  </p:timing>
 </p:sld>
 </file>
 
-<file path=ppt/slides/slide27.xml><?xml version="1.0" encoding="utf-8"?>
+<file path=ppt/slides/slide29.xml><?xml version="1.0" encoding="utf-8"?>
 <p:sld xmlns:a="http://schemas.openxmlformats.org/drawingml/2006/main" xmlns:r="http://schemas.openxmlformats.org/officeDocument/2006/relationships" xmlns:p="http://schemas.openxmlformats.org/presentationml/2006/main">
   <p:cSld>
     <p:spTree>
@@ -13200,7 +16616,7 @@
           <a:p>
             <a:r>
               <a:rPr lang="en-US" dirty="0"/>
-              <a:t>Anscombe’s quartet</a:t>
+              <a:t>Summary statistics cuts out nuance</a:t>
             </a:r>
           </a:p>
         </p:txBody>
@@ -13261,7 +16677,7 @@
             <a:fld id="{45C00377-489B-40EC-B059-26BDDD2E89B9}" type="slidenum">
               <a:rPr lang="en-US" smtClean="0"/>
               <a:pPr/>
-              <a:t>27</a:t>
+              <a:t>29</a:t>
             </a:fld>
             <a:endParaRPr lang="en-US"/>
           </a:p>
@@ -13489,7 +16905,558 @@
 </p:sld>
 </file>
 
-<file path=ppt/slides/slide28.xml><?xml version="1.0" encoding="utf-8"?>
+<file path=ppt/slides/slide3.xml><?xml version="1.0" encoding="utf-8"?>
+<p:sld xmlns:a="http://schemas.openxmlformats.org/drawingml/2006/main" xmlns:r="http://schemas.openxmlformats.org/officeDocument/2006/relationships" xmlns:p="http://schemas.openxmlformats.org/presentationml/2006/main">
+  <p:cSld>
+    <p:spTree>
+      <p:nvGrpSpPr>
+        <p:cNvPr id="1" name=""/>
+        <p:cNvGrpSpPr/>
+        <p:nvPr/>
+      </p:nvGrpSpPr>
+      <p:grpSpPr>
+        <a:xfrm>
+          <a:off x="0" y="0"/>
+          <a:ext cx="0" cy="0"/>
+          <a:chOff x="0" y="0"/>
+          <a:chExt cx="0" cy="0"/>
+        </a:xfrm>
+      </p:grpSpPr>
+      <p:sp>
+        <p:nvSpPr>
+          <p:cNvPr id="2" name="Title 1">
+            <a:extLst>
+              <a:ext uri="{FF2B5EF4-FFF2-40B4-BE49-F238E27FC236}">
+                <a16:creationId xmlns:a16="http://schemas.microsoft.com/office/drawing/2014/main" id="{853A69EA-9357-FEFF-8BA9-92D09596807E}"/>
+              </a:ext>
+            </a:extLst>
+          </p:cNvPr>
+          <p:cNvSpPr>
+            <a:spLocks noGrp="1"/>
+          </p:cNvSpPr>
+          <p:nvPr>
+            <p:ph type="title"/>
+          </p:nvPr>
+        </p:nvSpPr>
+        <p:spPr/>
+        <p:txBody>
+          <a:bodyPr/>
+          <a:lstStyle/>
+          <a:p>
+            <a:r>
+              <a:rPr lang="en-US" dirty="0"/>
+              <a:t>Summarizing your data</a:t>
+            </a:r>
+          </a:p>
+        </p:txBody>
+      </p:sp>
+      <p:sp>
+        <p:nvSpPr>
+          <p:cNvPr id="3" name="Content Placeholder 2">
+            <a:extLst>
+              <a:ext uri="{FF2B5EF4-FFF2-40B4-BE49-F238E27FC236}">
+                <a16:creationId xmlns:a16="http://schemas.microsoft.com/office/drawing/2014/main" id="{52C6A547-4297-8050-2D3C-A9ABA2E9C4DE}"/>
+              </a:ext>
+            </a:extLst>
+          </p:cNvPr>
+          <p:cNvSpPr>
+            <a:spLocks noGrp="1"/>
+          </p:cNvSpPr>
+          <p:nvPr>
+            <p:ph idx="1"/>
+          </p:nvPr>
+        </p:nvSpPr>
+        <p:spPr/>
+        <p:txBody>
+          <a:bodyPr/>
+          <a:lstStyle/>
+          <a:p>
+            <a:pPr lvl="0"/>
+            <a:r>
+              <a:rPr lang="en-GB" dirty="0"/>
+              <a:t>A single number can answer different questions:</a:t>
+            </a:r>
+            <a:endParaRPr lang="en-US" dirty="0"/>
+          </a:p>
+        </p:txBody>
+      </p:sp>
+      <p:graphicFrame>
+        <p:nvGraphicFramePr>
+          <p:cNvPr id="4" name="Table 3">
+            <a:extLst>
+              <a:ext uri="{FF2B5EF4-FFF2-40B4-BE49-F238E27FC236}">
+                <a16:creationId xmlns:a16="http://schemas.microsoft.com/office/drawing/2014/main" id="{CB727180-4864-B6DB-8F0D-9B3D110D220F}"/>
+              </a:ext>
+            </a:extLst>
+          </p:cNvPr>
+          <p:cNvGraphicFramePr>
+            <a:graphicFrameLocks noGrp="1"/>
+          </p:cNvGraphicFramePr>
+          <p:nvPr>
+            <p:extLst>
+              <p:ext uri="{D42A27DB-BD31-4B8C-83A1-F6EECF244321}">
+                <p14:modId xmlns:p14="http://schemas.microsoft.com/office/powerpoint/2010/main" val="1335827930"/>
+              </p:ext>
+            </p:extLst>
+          </p:nvPr>
+        </p:nvGraphicFramePr>
+        <p:xfrm>
+          <a:off x="838200" y="2894806"/>
+          <a:ext cx="10515600" cy="1828800"/>
+        </p:xfrm>
+        <a:graphic>
+          <a:graphicData uri="http://schemas.openxmlformats.org/drawingml/2006/table">
+            <a:tbl>
+              <a:tblPr firstRow="1">
+                <a:tableStyleId>{5C22544A-7EE6-4342-B048-85BDC9FD1C3A}</a:tableStyleId>
+              </a:tblPr>
+              <a:tblGrid>
+                <a:gridCol w="3505200">
+                  <a:extLst>
+                    <a:ext uri="{9D8B030D-6E8A-4147-A177-3AD203B41FA5}">
+                      <a16:colId xmlns:a16="http://schemas.microsoft.com/office/drawing/2014/main" val="684497730"/>
+                    </a:ext>
+                  </a:extLst>
+                </a:gridCol>
+                <a:gridCol w="3505200">
+                  <a:extLst>
+                    <a:ext uri="{9D8B030D-6E8A-4147-A177-3AD203B41FA5}">
+                      <a16:colId xmlns:a16="http://schemas.microsoft.com/office/drawing/2014/main" val="839638803"/>
+                    </a:ext>
+                  </a:extLst>
+                </a:gridCol>
+                <a:gridCol w="3505200">
+                  <a:extLst>
+                    <a:ext uri="{9D8B030D-6E8A-4147-A177-3AD203B41FA5}">
+                      <a16:colId xmlns:a16="http://schemas.microsoft.com/office/drawing/2014/main" val="4114828517"/>
+                    </a:ext>
+                  </a:extLst>
+                </a:gridCol>
+              </a:tblGrid>
+              <a:tr h="0">
+                <a:tc>
+                  <a:txBody>
+                    <a:bodyPr/>
+                    <a:lstStyle/>
+                    <a:p>
+                      <a:pPr>
+                        <a:buNone/>
+                      </a:pPr>
+                      <a:r>
+                        <a:rPr lang="en-GB" dirty="0"/>
+                        <a:t>Question</a:t>
+                      </a:r>
+                    </a:p>
+                  </a:txBody>
+                  <a:tcPr anchor="ctr"/>
+                </a:tc>
+                <a:tc>
+                  <a:txBody>
+                    <a:bodyPr/>
+                    <a:lstStyle/>
+                    <a:p>
+                      <a:pPr>
+                        <a:buNone/>
+                      </a:pPr>
+                      <a:r>
+                        <a:rPr lang="en-GB" dirty="0"/>
+                        <a:t>Method</a:t>
+                      </a:r>
+                    </a:p>
+                  </a:txBody>
+                  <a:tcPr anchor="ctr"/>
+                </a:tc>
+                <a:tc>
+                  <a:txBody>
+                    <a:bodyPr/>
+                    <a:lstStyle/>
+                    <a:p>
+                      <a:pPr>
+                        <a:buNone/>
+                      </a:pPr>
+                      <a:r>
+                        <a:rPr lang="en-GB" dirty="0"/>
+                        <a:t>Example</a:t>
+                      </a:r>
+                    </a:p>
+                  </a:txBody>
+                  <a:tcPr anchor="ctr"/>
+                </a:tc>
+                <a:extLst>
+                  <a:ext uri="{0D108BD9-81ED-4DB2-BD59-A6C34878D82A}">
+                    <a16:rowId xmlns:a16="http://schemas.microsoft.com/office/drawing/2014/main" val="4036436087"/>
+                  </a:ext>
+                </a:extLst>
+              </a:tr>
+              <a:tr h="0">
+                <a:tc>
+                  <a:txBody>
+                    <a:bodyPr/>
+                    <a:lstStyle/>
+                    <a:p>
+                      <a:pPr>
+                        <a:buNone/>
+                      </a:pPr>
+                      <a:r>
+                        <a:rPr lang="en-GB"/>
+                        <a:t>How much happened?</a:t>
+                      </a:r>
+                    </a:p>
+                  </a:txBody>
+                  <a:tcPr anchor="ctr"/>
+                </a:tc>
+                <a:tc>
+                  <a:txBody>
+                    <a:bodyPr/>
+                    <a:lstStyle/>
+                    <a:p>
+                      <a:pPr>
+                        <a:buNone/>
+                      </a:pPr>
+                      <a:r>
+                        <a:rPr lang="en-GB" dirty="0"/>
+                        <a:t>Sum</a:t>
+                      </a:r>
+                    </a:p>
+                  </a:txBody>
+                  <a:tcPr anchor="ctr"/>
+                </a:tc>
+                <a:tc>
+                  <a:txBody>
+                    <a:bodyPr/>
+                    <a:lstStyle/>
+                    <a:p>
+                      <a:pPr>
+                        <a:buNone/>
+                      </a:pPr>
+                      <a:r>
+                        <a:rPr lang="en-GB"/>
+                        <a:t>Total points scored</a:t>
+                      </a:r>
+                    </a:p>
+                  </a:txBody>
+                  <a:tcPr anchor="ctr"/>
+                </a:tc>
+                <a:extLst>
+                  <a:ext uri="{0D108BD9-81ED-4DB2-BD59-A6C34878D82A}">
+                    <a16:rowId xmlns:a16="http://schemas.microsoft.com/office/drawing/2014/main" val="153217137"/>
+                  </a:ext>
+                </a:extLst>
+              </a:tr>
+              <a:tr h="0">
+                <a:tc>
+                  <a:txBody>
+                    <a:bodyPr/>
+                    <a:lstStyle/>
+                    <a:p>
+                      <a:pPr>
+                        <a:buNone/>
+                      </a:pPr>
+                      <a:r>
+                        <a:rPr lang="en-GB"/>
+                        <a:t>How much per game?</a:t>
+                      </a:r>
+                    </a:p>
+                  </a:txBody>
+                  <a:tcPr anchor="ctr"/>
+                </a:tc>
+                <a:tc>
+                  <a:txBody>
+                    <a:bodyPr/>
+                    <a:lstStyle/>
+                    <a:p>
+                      <a:pPr>
+                        <a:buNone/>
+                      </a:pPr>
+                      <a:r>
+                        <a:rPr lang="en-GB" dirty="0"/>
+                        <a:t>Rate</a:t>
+                      </a:r>
+                    </a:p>
+                  </a:txBody>
+                  <a:tcPr anchor="ctr"/>
+                </a:tc>
+                <a:tc>
+                  <a:txBody>
+                    <a:bodyPr/>
+                    <a:lstStyle/>
+                    <a:p>
+                      <a:pPr>
+                        <a:buNone/>
+                      </a:pPr>
+                      <a:r>
+                        <a:rPr lang="en-GB"/>
+                        <a:t>Points per game</a:t>
+                      </a:r>
+                    </a:p>
+                  </a:txBody>
+                  <a:tcPr anchor="ctr"/>
+                </a:tc>
+                <a:extLst>
+                  <a:ext uri="{0D108BD9-81ED-4DB2-BD59-A6C34878D82A}">
+                    <a16:rowId xmlns:a16="http://schemas.microsoft.com/office/drawing/2014/main" val="3775018292"/>
+                  </a:ext>
+                </a:extLst>
+              </a:tr>
+              <a:tr h="0">
+                <a:tc>
+                  <a:txBody>
+                    <a:bodyPr/>
+                    <a:lstStyle/>
+                    <a:p>
+                      <a:pPr>
+                        <a:buNone/>
+                      </a:pPr>
+                      <a:r>
+                        <a:rPr lang="en-GB"/>
+                        <a:t>What is typical?</a:t>
+                      </a:r>
+                    </a:p>
+                  </a:txBody>
+                  <a:tcPr anchor="ctr"/>
+                </a:tc>
+                <a:tc>
+                  <a:txBody>
+                    <a:bodyPr/>
+                    <a:lstStyle/>
+                    <a:p>
+                      <a:pPr>
+                        <a:buNone/>
+                      </a:pPr>
+                      <a:r>
+                        <a:rPr lang="en-GB" dirty="0" err="1"/>
+                        <a:t>Center</a:t>
+                      </a:r>
+                      <a:endParaRPr lang="en-GB" dirty="0"/>
+                    </a:p>
+                  </a:txBody>
+                  <a:tcPr anchor="ctr"/>
+                </a:tc>
+                <a:tc>
+                  <a:txBody>
+                    <a:bodyPr/>
+                    <a:lstStyle/>
+                    <a:p>
+                      <a:pPr>
+                        <a:buNone/>
+                      </a:pPr>
+                      <a:r>
+                        <a:rPr lang="en-GB"/>
+                        <a:t>Mean or median points in a game</a:t>
+                      </a:r>
+                    </a:p>
+                  </a:txBody>
+                  <a:tcPr anchor="ctr"/>
+                </a:tc>
+                <a:extLst>
+                  <a:ext uri="{0D108BD9-81ED-4DB2-BD59-A6C34878D82A}">
+                    <a16:rowId xmlns:a16="http://schemas.microsoft.com/office/drawing/2014/main" val="3264308777"/>
+                  </a:ext>
+                </a:extLst>
+              </a:tr>
+              <a:tr h="0">
+                <a:tc>
+                  <a:txBody>
+                    <a:bodyPr/>
+                    <a:lstStyle/>
+                    <a:p>
+                      <a:pPr>
+                        <a:buNone/>
+                      </a:pPr>
+                      <a:r>
+                        <a:rPr lang="en-GB"/>
+                        <a:t>How much does it vary?</a:t>
+                      </a:r>
+                    </a:p>
+                  </a:txBody>
+                  <a:tcPr anchor="ctr"/>
+                </a:tc>
+                <a:tc>
+                  <a:txBody>
+                    <a:bodyPr/>
+                    <a:lstStyle/>
+                    <a:p>
+                      <a:pPr>
+                        <a:buNone/>
+                      </a:pPr>
+                      <a:r>
+                        <a:rPr lang="en-GB" dirty="0"/>
+                        <a:t>Spread</a:t>
+                      </a:r>
+                    </a:p>
+                  </a:txBody>
+                  <a:tcPr anchor="ctr"/>
+                </a:tc>
+                <a:tc>
+                  <a:txBody>
+                    <a:bodyPr/>
+                    <a:lstStyle/>
+                    <a:p>
+                      <a:pPr>
+                        <a:buNone/>
+                      </a:pPr>
+                      <a:r>
+                        <a:rPr lang="en-GB" dirty="0"/>
+                        <a:t>Range or standard deviation</a:t>
+                      </a:r>
+                    </a:p>
+                  </a:txBody>
+                  <a:tcPr anchor="ctr"/>
+                </a:tc>
+                <a:extLst>
+                  <a:ext uri="{0D108BD9-81ED-4DB2-BD59-A6C34878D82A}">
+                    <a16:rowId xmlns:a16="http://schemas.microsoft.com/office/drawing/2014/main" val="4096049664"/>
+                  </a:ext>
+                </a:extLst>
+              </a:tr>
+            </a:tbl>
+          </a:graphicData>
+        </a:graphic>
+      </p:graphicFrame>
+      <p:sp>
+        <p:nvSpPr>
+          <p:cNvPr id="5" name="Rectangle 4">
+            <a:extLst>
+              <a:ext uri="{FF2B5EF4-FFF2-40B4-BE49-F238E27FC236}">
+                <a16:creationId xmlns:a16="http://schemas.microsoft.com/office/drawing/2014/main" id="{577C30F0-94A0-3290-04BD-9CE64155C5F1}"/>
+              </a:ext>
+            </a:extLst>
+          </p:cNvPr>
+          <p:cNvSpPr/>
+          <p:nvPr/>
+        </p:nvSpPr>
+        <p:spPr>
+          <a:xfrm>
+            <a:off x="838200" y="3975652"/>
+            <a:ext cx="10515599" cy="747954"/>
+          </a:xfrm>
+          <a:prstGeom prst="rect">
+            <a:avLst/>
+          </a:prstGeom>
+          <a:noFill/>
+          <a:ln w="38100">
+            <a:solidFill>
+              <a:srgbClr val="FF0000"/>
+            </a:solidFill>
+          </a:ln>
+        </p:spPr>
+        <p:style>
+          <a:lnRef idx="2">
+            <a:schemeClr val="accent1">
+              <a:shade val="15000"/>
+            </a:schemeClr>
+          </a:lnRef>
+          <a:fillRef idx="1">
+            <a:schemeClr val="accent1"/>
+          </a:fillRef>
+          <a:effectRef idx="0">
+            <a:schemeClr val="accent1"/>
+          </a:effectRef>
+          <a:fontRef idx="minor">
+            <a:schemeClr val="lt1"/>
+          </a:fontRef>
+        </p:style>
+        <p:txBody>
+          <a:bodyPr rtlCol="0" anchor="ctr"/>
+          <a:lstStyle/>
+          <a:p>
+            <a:pPr algn="ctr"/>
+            <a:endParaRPr lang="en-US"/>
+          </a:p>
+        </p:txBody>
+      </p:sp>
+    </p:spTree>
+    <p:extLst>
+      <p:ext uri="{BB962C8B-B14F-4D97-AF65-F5344CB8AC3E}">
+        <p14:creationId xmlns:p14="http://schemas.microsoft.com/office/powerpoint/2010/main" val="3281068649"/>
+      </p:ext>
+    </p:extLst>
+  </p:cSld>
+  <p:clrMapOvr>
+    <a:masterClrMapping/>
+  </p:clrMapOvr>
+  <p:timing>
+    <p:tnLst>
+      <p:par>
+        <p:cTn id="1" dur="indefinite" restart="never" nodeType="tmRoot">
+          <p:childTnLst>
+            <p:seq concurrent="1" nextAc="seek">
+              <p:cTn id="2" dur="indefinite" nodeType="mainSeq">
+                <p:childTnLst>
+                  <p:par>
+                    <p:cTn id="3" fill="hold">
+                      <p:stCondLst>
+                        <p:cond delay="indefinite"/>
+                      </p:stCondLst>
+                      <p:childTnLst>
+                        <p:par>
+                          <p:cTn id="4" fill="hold">
+                            <p:stCondLst>
+                              <p:cond delay="0"/>
+                            </p:stCondLst>
+                            <p:childTnLst>
+                              <p:par>
+                                <p:cTn id="5" presetID="1" presetClass="entr" presetSubtype="0" fill="hold" grpId="0" nodeType="clickEffect">
+                                  <p:stCondLst>
+                                    <p:cond delay="0"/>
+                                  </p:stCondLst>
+                                  <p:childTnLst>
+                                    <p:set>
+                                      <p:cBhvr>
+                                        <p:cTn id="6" dur="1" fill="hold">
+                                          <p:stCondLst>
+                                            <p:cond delay="0"/>
+                                          </p:stCondLst>
+                                        </p:cTn>
+                                        <p:tgtEl>
+                                          <p:spTgt spid="5"/>
+                                        </p:tgtEl>
+                                        <p:attrNameLst>
+                                          <p:attrName>style.visibility</p:attrName>
+                                        </p:attrNameLst>
+                                      </p:cBhvr>
+                                      <p:to>
+                                        <p:strVal val="visible"/>
+                                      </p:to>
+                                    </p:set>
+                                  </p:childTnLst>
+                                </p:cTn>
+                              </p:par>
+                            </p:childTnLst>
+                          </p:cTn>
+                        </p:par>
+                      </p:childTnLst>
+                    </p:cTn>
+                  </p:par>
+                </p:childTnLst>
+              </p:cTn>
+              <p:prevCondLst>
+                <p:cond evt="onPrev" delay="0">
+                  <p:tgtEl>
+                    <p:sldTgt/>
+                  </p:tgtEl>
+                </p:cond>
+              </p:prevCondLst>
+              <p:nextCondLst>
+                <p:cond evt="onNext" delay="0">
+                  <p:tgtEl>
+                    <p:sldTgt/>
+                  </p:tgtEl>
+                </p:cond>
+              </p:nextCondLst>
+            </p:seq>
+          </p:childTnLst>
+        </p:cTn>
+      </p:par>
+    </p:tnLst>
+    <p:bldLst>
+      <p:bldP spid="5" grpId="0" animBg="1"/>
+    </p:bldLst>
+  </p:timing>
+</p:sld>
+</file>
+
+<file path=ppt/slides/slide30.xml><?xml version="1.0" encoding="utf-8"?>
 <p:sld xmlns:a="http://schemas.openxmlformats.org/drawingml/2006/main" xmlns:r="http://schemas.openxmlformats.org/officeDocument/2006/relationships" xmlns:p="http://schemas.openxmlformats.org/presentationml/2006/main">
   <p:cSld>
     <p:spTree>
@@ -13535,7 +17502,7 @@
           <a:p>
             <a:r>
               <a:rPr lang="en-US" dirty="0"/>
-              <a:t>Anscombe’s quartet</a:t>
+              <a:t>Visuals show the details </a:t>
             </a:r>
           </a:p>
         </p:txBody>
@@ -13564,7 +17531,7 @@
             <a:fld id="{45C00377-489B-40EC-B059-26BDDD2E89B9}" type="slidenum">
               <a:rPr lang="en-US" smtClean="0"/>
               <a:pPr/>
-              <a:t>28</a:t>
+              <a:t>30</a:t>
             </a:fld>
             <a:endParaRPr lang="en-US"/>
           </a:p>
@@ -13918,7 +17885,7 @@
 </p:sld>
 </file>
 
-<file path=ppt/slides/slide29.xml><?xml version="1.0" encoding="utf-8"?>
+<file path=ppt/slides/slide31.xml><?xml version="1.0" encoding="utf-8"?>
 <p:sld xmlns:a="http://schemas.openxmlformats.org/drawingml/2006/main" xmlns:r="http://schemas.openxmlformats.org/officeDocument/2006/relationships" xmlns:p="http://schemas.openxmlformats.org/presentationml/2006/main">
   <p:cSld>
     <p:spTree>
@@ -13993,7 +17960,7 @@
             <a:fld id="{45C00377-489B-40EC-B059-26BDDD2E89B9}" type="slidenum">
               <a:rPr lang="en-US" smtClean="0"/>
               <a:pPr/>
-              <a:t>29</a:t>
+              <a:t>31</a:t>
             </a:fld>
             <a:endParaRPr lang="en-US"/>
           </a:p>
@@ -14042,180 +18009,7 @@
 </p:sld>
 </file>
 
-<file path=ppt/slides/slide3.xml><?xml version="1.0" encoding="utf-8"?>
-<p:sld xmlns:a="http://schemas.openxmlformats.org/drawingml/2006/main" xmlns:r="http://schemas.openxmlformats.org/officeDocument/2006/relationships" xmlns:p="http://schemas.openxmlformats.org/presentationml/2006/main">
-  <p:cSld>
-    <p:spTree>
-      <p:nvGrpSpPr>
-        <p:cNvPr id="1" name=""/>
-        <p:cNvGrpSpPr/>
-        <p:nvPr/>
-      </p:nvGrpSpPr>
-      <p:grpSpPr>
-        <a:xfrm>
-          <a:off x="0" y="0"/>
-          <a:ext cx="0" cy="0"/>
-          <a:chOff x="0" y="0"/>
-          <a:chExt cx="0" cy="0"/>
-        </a:xfrm>
-      </p:grpSpPr>
-      <p:sp>
-        <p:nvSpPr>
-          <p:cNvPr id="3" name="Content Placeholder 2">
-            <a:extLst>
-              <a:ext uri="{FF2B5EF4-FFF2-40B4-BE49-F238E27FC236}">
-                <a16:creationId xmlns:a16="http://schemas.microsoft.com/office/drawing/2014/main" id="{1E7EFF20-7721-22CF-0B9C-0225448146B6}"/>
-              </a:ext>
-            </a:extLst>
-          </p:cNvPr>
-          <p:cNvSpPr>
-            <a:spLocks noGrp="1"/>
-          </p:cNvSpPr>
-          <p:nvPr>
-            <p:ph idx="1"/>
-          </p:nvPr>
-        </p:nvSpPr>
-        <p:spPr/>
-        <p:txBody>
-          <a:bodyPr>
-            <a:normAutofit/>
-          </a:bodyPr>
-          <a:lstStyle/>
-          <a:p>
-            <a:r>
-              <a:rPr lang="en-US" dirty="0"/>
-              <a:t>A method of describing a data set with a single figure</a:t>
-            </a:r>
-          </a:p>
-          <a:p>
-            <a:pPr lvl="1"/>
-            <a:endParaRPr lang="en-US" dirty="0"/>
-          </a:p>
-          <a:p>
-            <a:r>
-              <a:rPr lang="en-US" dirty="0"/>
-              <a:t>Main methods:</a:t>
-            </a:r>
-          </a:p>
-          <a:p>
-            <a:pPr lvl="1"/>
-            <a:r>
-              <a:rPr lang="en-US" dirty="0"/>
-              <a:t>Mean</a:t>
-            </a:r>
-          </a:p>
-          <a:p>
-            <a:pPr lvl="1"/>
-            <a:r>
-              <a:rPr lang="en-US" dirty="0"/>
-              <a:t>Median</a:t>
-            </a:r>
-          </a:p>
-          <a:p>
-            <a:pPr lvl="1"/>
-            <a:r>
-              <a:rPr lang="en-US" dirty="0"/>
-              <a:t>Mode </a:t>
-            </a:r>
-          </a:p>
-          <a:p>
-            <a:pPr lvl="1"/>
-            <a:endParaRPr lang="en-US" dirty="0"/>
-          </a:p>
-          <a:p>
-            <a:r>
-              <a:rPr lang="en-US" dirty="0"/>
-              <a:t>Most appropriate method depends on the data and question</a:t>
-            </a:r>
-          </a:p>
-          <a:p>
-            <a:pPr lvl="1"/>
-            <a:r>
-              <a:rPr lang="en-US" dirty="0"/>
-              <a:t>Scale of measurement</a:t>
-            </a:r>
-          </a:p>
-          <a:p>
-            <a:pPr lvl="1"/>
-            <a:r>
-              <a:rPr lang="en-US" dirty="0"/>
-              <a:t>Outliers and data distribution</a:t>
-            </a:r>
-          </a:p>
-        </p:txBody>
-      </p:sp>
-      <p:sp>
-        <p:nvSpPr>
-          <p:cNvPr id="4" name="Slide Number Placeholder 3">
-            <a:extLst>
-              <a:ext uri="{FF2B5EF4-FFF2-40B4-BE49-F238E27FC236}">
-                <a16:creationId xmlns:a16="http://schemas.microsoft.com/office/drawing/2014/main" id="{320425CF-433B-BA64-63C0-A6A6E36B0490}"/>
-              </a:ext>
-            </a:extLst>
-          </p:cNvPr>
-          <p:cNvSpPr>
-            <a:spLocks noGrp="1"/>
-          </p:cNvSpPr>
-          <p:nvPr>
-            <p:ph type="sldNum" sz="quarter" idx="12"/>
-          </p:nvPr>
-        </p:nvSpPr>
-        <p:spPr/>
-        <p:txBody>
-          <a:bodyPr/>
-          <a:lstStyle/>
-          <a:p>
-            <a:fld id="{45C00377-489B-40EC-B059-26BDDD2E89B9}" type="slidenum">
-              <a:rPr lang="en-US" smtClean="0"/>
-              <a:pPr/>
-              <a:t>3</a:t>
-            </a:fld>
-            <a:endParaRPr lang="en-US"/>
-          </a:p>
-        </p:txBody>
-      </p:sp>
-      <p:sp>
-        <p:nvSpPr>
-          <p:cNvPr id="2" name="Title 1">
-            <a:extLst>
-              <a:ext uri="{FF2B5EF4-FFF2-40B4-BE49-F238E27FC236}">
-                <a16:creationId xmlns:a16="http://schemas.microsoft.com/office/drawing/2014/main" id="{537E157F-E6F6-FE34-3C0A-A701E167D090}"/>
-              </a:ext>
-            </a:extLst>
-          </p:cNvPr>
-          <p:cNvSpPr>
-            <a:spLocks noGrp="1"/>
-          </p:cNvSpPr>
-          <p:nvPr>
-            <p:ph type="title"/>
-          </p:nvPr>
-        </p:nvSpPr>
-        <p:spPr/>
-        <p:txBody>
-          <a:bodyPr/>
-          <a:lstStyle/>
-          <a:p>
-            <a:r>
-              <a:rPr lang="en-US" dirty="0"/>
-              <a:t>Measures of central tendency</a:t>
-            </a:r>
-          </a:p>
-        </p:txBody>
-      </p:sp>
-    </p:spTree>
-    <p:extLst>
-      <p:ext uri="{BB962C8B-B14F-4D97-AF65-F5344CB8AC3E}">
-        <p14:creationId xmlns:p14="http://schemas.microsoft.com/office/powerpoint/2010/main" val="2698741083"/>
-      </p:ext>
-    </p:extLst>
-  </p:cSld>
-  <p:clrMapOvr>
-    <a:masterClrMapping/>
-  </p:clrMapOvr>
-</p:sld>
-</file>
-
-<file path=ppt/slides/slide30.xml><?xml version="1.0" encoding="utf-8"?>
+<file path=ppt/slides/slide32.xml><?xml version="1.0" encoding="utf-8"?>
 <p:sld xmlns:a="http://schemas.openxmlformats.org/drawingml/2006/main" xmlns:r="http://schemas.openxmlformats.org/officeDocument/2006/relationships" xmlns:p="http://schemas.openxmlformats.org/presentationml/2006/main">
   <p:cSld>
     <p:spTree>
@@ -14262,7 +18056,7 @@
             <a:fld id="{45C00377-489B-40EC-B059-26BDDD2E89B9}" type="slidenum">
               <a:rPr lang="en-US" smtClean="0"/>
               <a:pPr/>
-              <a:t>30</a:t>
+              <a:t>32</a:t>
             </a:fld>
             <a:endParaRPr lang="en-US"/>
           </a:p>
@@ -14302,294 +18096,6 @@
     <p:extLst>
       <p:ext uri="{BB962C8B-B14F-4D97-AF65-F5344CB8AC3E}">
         <p14:creationId xmlns:p14="http://schemas.microsoft.com/office/powerpoint/2010/main" val="3432585367"/>
-      </p:ext>
-    </p:extLst>
-  </p:cSld>
-  <p:clrMapOvr>
-    <a:masterClrMapping/>
-  </p:clrMapOvr>
-</p:sld>
-</file>
-
-<file path=ppt/slides/slide31.xml><?xml version="1.0" encoding="utf-8"?>
-<p:sld xmlns:a="http://schemas.openxmlformats.org/drawingml/2006/main" xmlns:r="http://schemas.openxmlformats.org/officeDocument/2006/relationships" xmlns:p="http://schemas.openxmlformats.org/presentationml/2006/main">
-  <p:cSld>
-    <p:spTree>
-      <p:nvGrpSpPr>
-        <p:cNvPr id="1" name=""/>
-        <p:cNvGrpSpPr/>
-        <p:nvPr/>
-      </p:nvGrpSpPr>
-      <p:grpSpPr>
-        <a:xfrm>
-          <a:off x="0" y="0"/>
-          <a:ext cx="0" cy="0"/>
-          <a:chOff x="0" y="0"/>
-          <a:chExt cx="0" cy="0"/>
-        </a:xfrm>
-      </p:grpSpPr>
-      <p:sp>
-        <p:nvSpPr>
-          <p:cNvPr id="2" name="Title 1">
-            <a:extLst>
-              <a:ext uri="{FF2B5EF4-FFF2-40B4-BE49-F238E27FC236}">
-                <a16:creationId xmlns:a16="http://schemas.microsoft.com/office/drawing/2014/main" id="{598F22AF-1CEB-4358-AE02-ACE12300E025}"/>
-              </a:ext>
-            </a:extLst>
-          </p:cNvPr>
-          <p:cNvSpPr>
-            <a:spLocks noGrp="1"/>
-          </p:cNvSpPr>
-          <p:nvPr>
-            <p:ph type="title"/>
-          </p:nvPr>
-        </p:nvSpPr>
-        <p:spPr/>
-        <p:txBody>
-          <a:bodyPr>
-            <a:normAutofit/>
-          </a:bodyPr>
-          <a:lstStyle/>
-          <a:p>
-            <a:r>
-              <a:rPr lang="en-US" dirty="0"/>
-              <a:t>In-Class Case Study</a:t>
-            </a:r>
-          </a:p>
-        </p:txBody>
-      </p:sp>
-      <p:sp>
-        <p:nvSpPr>
-          <p:cNvPr id="4" name="Slide Number Placeholder 3">
-            <a:extLst>
-              <a:ext uri="{FF2B5EF4-FFF2-40B4-BE49-F238E27FC236}">
-                <a16:creationId xmlns:a16="http://schemas.microsoft.com/office/drawing/2014/main" id="{A2A0E682-D3F6-11F1-EDAC-1B4AB62D5A53}"/>
-              </a:ext>
-            </a:extLst>
-          </p:cNvPr>
-          <p:cNvSpPr>
-            <a:spLocks noGrp="1"/>
-          </p:cNvSpPr>
-          <p:nvPr>
-            <p:ph type="sldNum" sz="quarter" idx="12"/>
-          </p:nvPr>
-        </p:nvSpPr>
-        <p:spPr/>
-        <p:txBody>
-          <a:bodyPr/>
-          <a:lstStyle/>
-          <a:p>
-            <a:fld id="{45C00377-489B-40EC-B059-26BDDD2E89B9}" type="slidenum">
-              <a:rPr lang="en-US" smtClean="0"/>
-              <a:pPr/>
-              <a:t>31</a:t>
-            </a:fld>
-            <a:endParaRPr lang="en-US"/>
-          </a:p>
-        </p:txBody>
-      </p:sp>
-      <p:sp>
-        <p:nvSpPr>
-          <p:cNvPr id="6" name="Content Placeholder 5">
-            <a:extLst>
-              <a:ext uri="{FF2B5EF4-FFF2-40B4-BE49-F238E27FC236}">
-                <a16:creationId xmlns:a16="http://schemas.microsoft.com/office/drawing/2014/main" id="{AD6FB6CF-0C73-AA1A-2E6E-93AAE6CA5D9F}"/>
-              </a:ext>
-            </a:extLst>
-          </p:cNvPr>
-          <p:cNvSpPr>
-            <a:spLocks noGrp="1"/>
-          </p:cNvSpPr>
-          <p:nvPr>
-            <p:ph idx="1"/>
-          </p:nvPr>
-        </p:nvSpPr>
-        <p:spPr/>
-        <p:txBody>
-          <a:bodyPr/>
-          <a:lstStyle/>
-          <a:p>
-            <a:r>
-              <a:rPr lang="en-US" dirty="0"/>
-              <a:t>Before conducting analysis, it is good to find out what your data actually looks like. In this activity, you will describe one important numeric variable using measures of center, spread, and distribution.</a:t>
-            </a:r>
-          </a:p>
-          <a:p>
-            <a:endParaRPr lang="en-US" dirty="0"/>
-          </a:p>
-        </p:txBody>
-      </p:sp>
-    </p:spTree>
-    <p:extLst>
-      <p:ext uri="{BB962C8B-B14F-4D97-AF65-F5344CB8AC3E}">
-        <p14:creationId xmlns:p14="http://schemas.microsoft.com/office/powerpoint/2010/main" val="3949845190"/>
-      </p:ext>
-    </p:extLst>
-  </p:cSld>
-  <p:clrMapOvr>
-    <a:masterClrMapping/>
-  </p:clrMapOvr>
-</p:sld>
-</file>
-
-<file path=ppt/slides/slide32.xml><?xml version="1.0" encoding="utf-8"?>
-<p:sld xmlns:a="http://schemas.openxmlformats.org/drawingml/2006/main" xmlns:r="http://schemas.openxmlformats.org/officeDocument/2006/relationships" xmlns:p="http://schemas.openxmlformats.org/presentationml/2006/main">
-  <p:cSld>
-    <p:spTree>
-      <p:nvGrpSpPr>
-        <p:cNvPr id="1" name="">
-          <a:extLst>
-            <a:ext uri="{FF2B5EF4-FFF2-40B4-BE49-F238E27FC236}">
-              <a16:creationId xmlns:a16="http://schemas.microsoft.com/office/drawing/2014/main" id="{C3E42084-E35B-C8A9-81F3-CFD97127A2BE}"/>
-            </a:ext>
-          </a:extLst>
-        </p:cNvPr>
-        <p:cNvGrpSpPr/>
-        <p:nvPr/>
-      </p:nvGrpSpPr>
-      <p:grpSpPr>
-        <a:xfrm>
-          <a:off x="0" y="0"/>
-          <a:ext cx="0" cy="0"/>
-          <a:chOff x="0" y="0"/>
-          <a:chExt cx="0" cy="0"/>
-        </a:xfrm>
-      </p:grpSpPr>
-      <p:sp>
-        <p:nvSpPr>
-          <p:cNvPr id="2" name="Title 1">
-            <a:extLst>
-              <a:ext uri="{FF2B5EF4-FFF2-40B4-BE49-F238E27FC236}">
-                <a16:creationId xmlns:a16="http://schemas.microsoft.com/office/drawing/2014/main" id="{1637C26A-2352-AEE0-6F8B-BDF0EF18EB9E}"/>
-              </a:ext>
-            </a:extLst>
-          </p:cNvPr>
-          <p:cNvSpPr>
-            <a:spLocks noGrp="1"/>
-          </p:cNvSpPr>
-          <p:nvPr>
-            <p:ph type="title"/>
-          </p:nvPr>
-        </p:nvSpPr>
-        <p:spPr/>
-        <p:txBody>
-          <a:bodyPr>
-            <a:normAutofit/>
-          </a:bodyPr>
-          <a:lstStyle/>
-          <a:p>
-            <a:r>
-              <a:rPr lang="en-US" dirty="0"/>
-              <a:t>In-Class Case Study</a:t>
-            </a:r>
-          </a:p>
-        </p:txBody>
-      </p:sp>
-      <p:sp>
-        <p:nvSpPr>
-          <p:cNvPr id="4" name="Slide Number Placeholder 3">
-            <a:extLst>
-              <a:ext uri="{FF2B5EF4-FFF2-40B4-BE49-F238E27FC236}">
-                <a16:creationId xmlns:a16="http://schemas.microsoft.com/office/drawing/2014/main" id="{4A5BBC1B-A8A9-8371-D6EB-8865A458B962}"/>
-              </a:ext>
-            </a:extLst>
-          </p:cNvPr>
-          <p:cNvSpPr>
-            <a:spLocks noGrp="1"/>
-          </p:cNvSpPr>
-          <p:nvPr>
-            <p:ph type="sldNum" sz="quarter" idx="12"/>
-          </p:nvPr>
-        </p:nvSpPr>
-        <p:spPr/>
-        <p:txBody>
-          <a:bodyPr/>
-          <a:lstStyle/>
-          <a:p>
-            <a:fld id="{45C00377-489B-40EC-B059-26BDDD2E89B9}" type="slidenum">
-              <a:rPr lang="en-US" smtClean="0"/>
-              <a:pPr/>
-              <a:t>32</a:t>
-            </a:fld>
-            <a:endParaRPr lang="en-US"/>
-          </a:p>
-        </p:txBody>
-      </p:sp>
-      <p:sp>
-        <p:nvSpPr>
-          <p:cNvPr id="6" name="Content Placeholder 5">
-            <a:extLst>
-              <a:ext uri="{FF2B5EF4-FFF2-40B4-BE49-F238E27FC236}">
-                <a16:creationId xmlns:a16="http://schemas.microsoft.com/office/drawing/2014/main" id="{EA425A5A-9D9C-9569-BBA9-675BC106A949}"/>
-              </a:ext>
-            </a:extLst>
-          </p:cNvPr>
-          <p:cNvSpPr>
-            <a:spLocks noGrp="1"/>
-          </p:cNvSpPr>
-          <p:nvPr>
-            <p:ph idx="1"/>
-          </p:nvPr>
-        </p:nvSpPr>
-        <p:spPr/>
-        <p:txBody>
-          <a:bodyPr/>
-          <a:lstStyle/>
-          <a:p>
-            <a:pPr marL="0" indent="0">
-              <a:buNone/>
-            </a:pPr>
-            <a:r>
-              <a:rPr lang="en-US" b="1" dirty="0"/>
-              <a:t>Part 1: Choose what to describe</a:t>
-            </a:r>
-          </a:p>
-          <a:p>
-            <a:pPr lvl="0"/>
-            <a:r>
-              <a:rPr lang="en-US" dirty="0"/>
-              <a:t>Identify what </a:t>
-            </a:r>
-            <a:r>
-              <a:rPr lang="en-US" b="1" dirty="0"/>
-              <a:t>one row</a:t>
-            </a:r>
-            <a:r>
-              <a:rPr lang="en-US" dirty="0"/>
-              <a:t> of your dataset represents: a player, a player-game, a team-game, a training session, or something else.</a:t>
-            </a:r>
-          </a:p>
-          <a:p>
-            <a:r>
-              <a:rPr lang="en-US" dirty="0"/>
-              <a:t>Choose one numeric variable that matters. </a:t>
-            </a:r>
-          </a:p>
-          <a:p>
-            <a:pPr lvl="0"/>
-            <a:r>
-              <a:rPr lang="en-US" dirty="0"/>
-              <a:t>Record the variable’s units and the number of observations with a usable value.</a:t>
-            </a:r>
-          </a:p>
-          <a:p>
-            <a:endParaRPr lang="en-US" dirty="0"/>
-          </a:p>
-          <a:p>
-            <a:pPr marL="0" indent="0">
-              <a:buNone/>
-            </a:pPr>
-            <a:r>
-              <a:rPr lang="en-US" dirty="0"/>
-              <a:t>If you do not have data, use a provided class dataset and complete the same steps. Note which dataset you used.</a:t>
-            </a:r>
-          </a:p>
-        </p:txBody>
-      </p:sp>
-    </p:spTree>
-    <p:extLst>
-      <p:ext uri="{BB962C8B-B14F-4D97-AF65-F5344CB8AC3E}">
-        <p14:creationId xmlns:p14="http://schemas.microsoft.com/office/powerpoint/2010/main" val="1377703460"/>
       </p:ext>
     </p:extLst>
   </p:cSld>
@@ -14621,6 +18127,294 @@
           <p:cNvPr id="2" name="Title 1">
             <a:extLst>
               <a:ext uri="{FF2B5EF4-FFF2-40B4-BE49-F238E27FC236}">
+                <a16:creationId xmlns:a16="http://schemas.microsoft.com/office/drawing/2014/main" id="{598F22AF-1CEB-4358-AE02-ACE12300E025}"/>
+              </a:ext>
+            </a:extLst>
+          </p:cNvPr>
+          <p:cNvSpPr>
+            <a:spLocks noGrp="1"/>
+          </p:cNvSpPr>
+          <p:nvPr>
+            <p:ph type="title"/>
+          </p:nvPr>
+        </p:nvSpPr>
+        <p:spPr/>
+        <p:txBody>
+          <a:bodyPr>
+            <a:normAutofit/>
+          </a:bodyPr>
+          <a:lstStyle/>
+          <a:p>
+            <a:r>
+              <a:rPr lang="en-US" dirty="0"/>
+              <a:t>In-Class Case Study</a:t>
+            </a:r>
+          </a:p>
+        </p:txBody>
+      </p:sp>
+      <p:sp>
+        <p:nvSpPr>
+          <p:cNvPr id="4" name="Slide Number Placeholder 3">
+            <a:extLst>
+              <a:ext uri="{FF2B5EF4-FFF2-40B4-BE49-F238E27FC236}">
+                <a16:creationId xmlns:a16="http://schemas.microsoft.com/office/drawing/2014/main" id="{A2A0E682-D3F6-11F1-EDAC-1B4AB62D5A53}"/>
+              </a:ext>
+            </a:extLst>
+          </p:cNvPr>
+          <p:cNvSpPr>
+            <a:spLocks noGrp="1"/>
+          </p:cNvSpPr>
+          <p:nvPr>
+            <p:ph type="sldNum" sz="quarter" idx="12"/>
+          </p:nvPr>
+        </p:nvSpPr>
+        <p:spPr/>
+        <p:txBody>
+          <a:bodyPr/>
+          <a:lstStyle/>
+          <a:p>
+            <a:fld id="{45C00377-489B-40EC-B059-26BDDD2E89B9}" type="slidenum">
+              <a:rPr lang="en-US" smtClean="0"/>
+              <a:pPr/>
+              <a:t>33</a:t>
+            </a:fld>
+            <a:endParaRPr lang="en-US"/>
+          </a:p>
+        </p:txBody>
+      </p:sp>
+      <p:sp>
+        <p:nvSpPr>
+          <p:cNvPr id="6" name="Content Placeholder 5">
+            <a:extLst>
+              <a:ext uri="{FF2B5EF4-FFF2-40B4-BE49-F238E27FC236}">
+                <a16:creationId xmlns:a16="http://schemas.microsoft.com/office/drawing/2014/main" id="{AD6FB6CF-0C73-AA1A-2E6E-93AAE6CA5D9F}"/>
+              </a:ext>
+            </a:extLst>
+          </p:cNvPr>
+          <p:cNvSpPr>
+            <a:spLocks noGrp="1"/>
+          </p:cNvSpPr>
+          <p:nvPr>
+            <p:ph idx="1"/>
+          </p:nvPr>
+        </p:nvSpPr>
+        <p:spPr/>
+        <p:txBody>
+          <a:bodyPr/>
+          <a:lstStyle/>
+          <a:p>
+            <a:r>
+              <a:rPr lang="en-US" dirty="0"/>
+              <a:t>Before conducting analysis, it is good to find out what your data actually looks like. In this activity, you will describe one important numeric variable using measures of center, spread, and distribution.</a:t>
+            </a:r>
+          </a:p>
+          <a:p>
+            <a:endParaRPr lang="en-US" dirty="0"/>
+          </a:p>
+        </p:txBody>
+      </p:sp>
+    </p:spTree>
+    <p:extLst>
+      <p:ext uri="{BB962C8B-B14F-4D97-AF65-F5344CB8AC3E}">
+        <p14:creationId xmlns:p14="http://schemas.microsoft.com/office/powerpoint/2010/main" val="3949845190"/>
+      </p:ext>
+    </p:extLst>
+  </p:cSld>
+  <p:clrMapOvr>
+    <a:masterClrMapping/>
+  </p:clrMapOvr>
+</p:sld>
+</file>
+
+<file path=ppt/slides/slide34.xml><?xml version="1.0" encoding="utf-8"?>
+<p:sld xmlns:a="http://schemas.openxmlformats.org/drawingml/2006/main" xmlns:r="http://schemas.openxmlformats.org/officeDocument/2006/relationships" xmlns:p="http://schemas.openxmlformats.org/presentationml/2006/main">
+  <p:cSld>
+    <p:spTree>
+      <p:nvGrpSpPr>
+        <p:cNvPr id="1" name="">
+          <a:extLst>
+            <a:ext uri="{FF2B5EF4-FFF2-40B4-BE49-F238E27FC236}">
+              <a16:creationId xmlns:a16="http://schemas.microsoft.com/office/drawing/2014/main" id="{C3E42084-E35B-C8A9-81F3-CFD97127A2BE}"/>
+            </a:ext>
+          </a:extLst>
+        </p:cNvPr>
+        <p:cNvGrpSpPr/>
+        <p:nvPr/>
+      </p:nvGrpSpPr>
+      <p:grpSpPr>
+        <a:xfrm>
+          <a:off x="0" y="0"/>
+          <a:ext cx="0" cy="0"/>
+          <a:chOff x="0" y="0"/>
+          <a:chExt cx="0" cy="0"/>
+        </a:xfrm>
+      </p:grpSpPr>
+      <p:sp>
+        <p:nvSpPr>
+          <p:cNvPr id="2" name="Title 1">
+            <a:extLst>
+              <a:ext uri="{FF2B5EF4-FFF2-40B4-BE49-F238E27FC236}">
+                <a16:creationId xmlns:a16="http://schemas.microsoft.com/office/drawing/2014/main" id="{1637C26A-2352-AEE0-6F8B-BDF0EF18EB9E}"/>
+              </a:ext>
+            </a:extLst>
+          </p:cNvPr>
+          <p:cNvSpPr>
+            <a:spLocks noGrp="1"/>
+          </p:cNvSpPr>
+          <p:nvPr>
+            <p:ph type="title"/>
+          </p:nvPr>
+        </p:nvSpPr>
+        <p:spPr/>
+        <p:txBody>
+          <a:bodyPr>
+            <a:normAutofit/>
+          </a:bodyPr>
+          <a:lstStyle/>
+          <a:p>
+            <a:r>
+              <a:rPr lang="en-US" dirty="0"/>
+              <a:t>In-Class Case Study</a:t>
+            </a:r>
+          </a:p>
+        </p:txBody>
+      </p:sp>
+      <p:sp>
+        <p:nvSpPr>
+          <p:cNvPr id="4" name="Slide Number Placeholder 3">
+            <a:extLst>
+              <a:ext uri="{FF2B5EF4-FFF2-40B4-BE49-F238E27FC236}">
+                <a16:creationId xmlns:a16="http://schemas.microsoft.com/office/drawing/2014/main" id="{4A5BBC1B-A8A9-8371-D6EB-8865A458B962}"/>
+              </a:ext>
+            </a:extLst>
+          </p:cNvPr>
+          <p:cNvSpPr>
+            <a:spLocks noGrp="1"/>
+          </p:cNvSpPr>
+          <p:nvPr>
+            <p:ph type="sldNum" sz="quarter" idx="12"/>
+          </p:nvPr>
+        </p:nvSpPr>
+        <p:spPr/>
+        <p:txBody>
+          <a:bodyPr/>
+          <a:lstStyle/>
+          <a:p>
+            <a:fld id="{45C00377-489B-40EC-B059-26BDDD2E89B9}" type="slidenum">
+              <a:rPr lang="en-US" smtClean="0"/>
+              <a:pPr/>
+              <a:t>34</a:t>
+            </a:fld>
+            <a:endParaRPr lang="en-US"/>
+          </a:p>
+        </p:txBody>
+      </p:sp>
+      <p:sp>
+        <p:nvSpPr>
+          <p:cNvPr id="6" name="Content Placeholder 5">
+            <a:extLst>
+              <a:ext uri="{FF2B5EF4-FFF2-40B4-BE49-F238E27FC236}">
+                <a16:creationId xmlns:a16="http://schemas.microsoft.com/office/drawing/2014/main" id="{EA425A5A-9D9C-9569-BBA9-675BC106A949}"/>
+              </a:ext>
+            </a:extLst>
+          </p:cNvPr>
+          <p:cNvSpPr>
+            <a:spLocks noGrp="1"/>
+          </p:cNvSpPr>
+          <p:nvPr>
+            <p:ph idx="1"/>
+          </p:nvPr>
+        </p:nvSpPr>
+        <p:spPr/>
+        <p:txBody>
+          <a:bodyPr/>
+          <a:lstStyle/>
+          <a:p>
+            <a:pPr marL="0" indent="0">
+              <a:buNone/>
+            </a:pPr>
+            <a:r>
+              <a:rPr lang="en-US" b="1" dirty="0"/>
+              <a:t>Part 1: Choose what to describe</a:t>
+            </a:r>
+          </a:p>
+          <a:p>
+            <a:pPr lvl="0"/>
+            <a:r>
+              <a:rPr lang="en-US" dirty="0"/>
+              <a:t>Identify what </a:t>
+            </a:r>
+            <a:r>
+              <a:rPr lang="en-US" b="1" dirty="0"/>
+              <a:t>one row</a:t>
+            </a:r>
+            <a:r>
+              <a:rPr lang="en-US" dirty="0"/>
+              <a:t> of your dataset represents: a player, a player-game, a team-game, a training session, or something else.</a:t>
+            </a:r>
+          </a:p>
+          <a:p>
+            <a:r>
+              <a:rPr lang="en-US" dirty="0"/>
+              <a:t>Choose one numeric variable that matters. </a:t>
+            </a:r>
+          </a:p>
+          <a:p>
+            <a:pPr lvl="0"/>
+            <a:r>
+              <a:rPr lang="en-US" dirty="0"/>
+              <a:t>Record the variable’s units and the number of observations with a usable value.</a:t>
+            </a:r>
+          </a:p>
+          <a:p>
+            <a:endParaRPr lang="en-US" dirty="0"/>
+          </a:p>
+          <a:p>
+            <a:pPr marL="0" indent="0">
+              <a:buNone/>
+            </a:pPr>
+            <a:r>
+              <a:rPr lang="en-US" dirty="0"/>
+              <a:t>If you do not have data, use a provided class dataset and complete the same steps. Note which dataset you used.</a:t>
+            </a:r>
+          </a:p>
+        </p:txBody>
+      </p:sp>
+    </p:spTree>
+    <p:extLst>
+      <p:ext uri="{BB962C8B-B14F-4D97-AF65-F5344CB8AC3E}">
+        <p14:creationId xmlns:p14="http://schemas.microsoft.com/office/powerpoint/2010/main" val="1377703460"/>
+      </p:ext>
+    </p:extLst>
+  </p:cSld>
+  <p:clrMapOvr>
+    <a:masterClrMapping/>
+  </p:clrMapOvr>
+</p:sld>
+</file>
+
+<file path=ppt/slides/slide35.xml><?xml version="1.0" encoding="utf-8"?>
+<p:sld xmlns:a="http://schemas.openxmlformats.org/drawingml/2006/main" xmlns:r="http://schemas.openxmlformats.org/officeDocument/2006/relationships" xmlns:p="http://schemas.openxmlformats.org/presentationml/2006/main">
+  <p:cSld>
+    <p:spTree>
+      <p:nvGrpSpPr>
+        <p:cNvPr id="1" name=""/>
+        <p:cNvGrpSpPr/>
+        <p:nvPr/>
+      </p:nvGrpSpPr>
+      <p:grpSpPr>
+        <a:xfrm>
+          <a:off x="0" y="0"/>
+          <a:ext cx="0" cy="0"/>
+          <a:chOff x="0" y="0"/>
+          <a:chExt cx="0" cy="0"/>
+        </a:xfrm>
+      </p:grpSpPr>
+      <p:sp>
+        <p:nvSpPr>
+          <p:cNvPr id="2" name="Title 1">
+            <a:extLst>
+              <a:ext uri="{FF2B5EF4-FFF2-40B4-BE49-F238E27FC236}">
                 <a16:creationId xmlns:a16="http://schemas.microsoft.com/office/drawing/2014/main" id="{BC42575F-F300-2894-BC27-EF842D6543F9}"/>
               </a:ext>
             </a:extLst>
@@ -14731,7 +18525,7 @@
 </p:sld>
 </file>
 
-<file path=ppt/slides/slide34.xml><?xml version="1.0" encoding="utf-8"?>
+<file path=ppt/slides/slide36.xml><?xml version="1.0" encoding="utf-8"?>
 <p:sld xmlns:a="http://schemas.openxmlformats.org/drawingml/2006/main" xmlns:r="http://schemas.openxmlformats.org/officeDocument/2006/relationships" xmlns:p="http://schemas.openxmlformats.org/presentationml/2006/main">
   <p:cSld>
     <p:spTree>
@@ -14873,7 +18667,7 @@
 </p:sld>
 </file>
 
-<file path=ppt/slides/slide35.xml><?xml version="1.0" encoding="utf-8"?>
+<file path=ppt/slides/slide37.xml><?xml version="1.0" encoding="utf-8"?>
 <p:sld xmlns:a="http://schemas.openxmlformats.org/drawingml/2006/main" xmlns:r="http://schemas.openxmlformats.org/officeDocument/2006/relationships" xmlns:p="http://schemas.openxmlformats.org/presentationml/2006/main">
   <p:cSld>
     <p:spTree>
@@ -14994,7 +18788,87 @@
 </p:sld>
 </file>
 
-<file path=ppt/slides/slide36.xml><?xml version="1.0" encoding="utf-8"?>
+<file path=ppt/slides/slide38.xml><?xml version="1.0" encoding="utf-8"?>
+<p:sld xmlns:a="http://schemas.openxmlformats.org/drawingml/2006/main" xmlns:r="http://schemas.openxmlformats.org/officeDocument/2006/relationships" xmlns:p="http://schemas.openxmlformats.org/presentationml/2006/main">
+  <p:cSld>
+    <p:spTree>
+      <p:nvGrpSpPr>
+        <p:cNvPr id="1" name=""/>
+        <p:cNvGrpSpPr/>
+        <p:nvPr/>
+      </p:nvGrpSpPr>
+      <p:grpSpPr>
+        <a:xfrm>
+          <a:off x="0" y="0"/>
+          <a:ext cx="0" cy="0"/>
+          <a:chOff x="0" y="0"/>
+          <a:chExt cx="0" cy="0"/>
+        </a:xfrm>
+      </p:grpSpPr>
+      <p:sp>
+        <p:nvSpPr>
+          <p:cNvPr id="2" name="Title 1">
+            <a:extLst>
+              <a:ext uri="{FF2B5EF4-FFF2-40B4-BE49-F238E27FC236}">
+                <a16:creationId xmlns:a16="http://schemas.microsoft.com/office/drawing/2014/main" id="{ECDE0AE2-E636-E68E-9B07-04884FC2B797}"/>
+              </a:ext>
+            </a:extLst>
+          </p:cNvPr>
+          <p:cNvSpPr>
+            <a:spLocks noGrp="1"/>
+          </p:cNvSpPr>
+          <p:nvPr>
+            <p:ph type="title"/>
+          </p:nvPr>
+        </p:nvSpPr>
+        <p:spPr/>
+        <p:txBody>
+          <a:bodyPr/>
+          <a:lstStyle/>
+          <a:p>
+            <a:endParaRPr lang="en-US"/>
+          </a:p>
+        </p:txBody>
+      </p:sp>
+      <p:sp>
+        <p:nvSpPr>
+          <p:cNvPr id="3" name="Content Placeholder 2">
+            <a:extLst>
+              <a:ext uri="{FF2B5EF4-FFF2-40B4-BE49-F238E27FC236}">
+                <a16:creationId xmlns:a16="http://schemas.microsoft.com/office/drawing/2014/main" id="{1EA88E0E-CB9B-A03E-F107-BDF40F74103E}"/>
+              </a:ext>
+            </a:extLst>
+          </p:cNvPr>
+          <p:cNvSpPr>
+            <a:spLocks noGrp="1"/>
+          </p:cNvSpPr>
+          <p:nvPr>
+            <p:ph idx="1"/>
+          </p:nvPr>
+        </p:nvSpPr>
+        <p:spPr/>
+        <p:txBody>
+          <a:bodyPr/>
+          <a:lstStyle/>
+          <a:p>
+            <a:endParaRPr lang="en-US"/>
+          </a:p>
+        </p:txBody>
+      </p:sp>
+    </p:spTree>
+    <p:extLst>
+      <p:ext uri="{BB962C8B-B14F-4D97-AF65-F5344CB8AC3E}">
+        <p14:creationId xmlns:p14="http://schemas.microsoft.com/office/powerpoint/2010/main" val="557613493"/>
+      </p:ext>
+    </p:extLst>
+  </p:cSld>
+  <p:clrMapOvr>
+    <a:masterClrMapping/>
+  </p:clrMapOvr>
+</p:sld>
+</file>
+
+<file path=ppt/slides/slide39.xml><?xml version="1.0" encoding="utf-8"?>
 <p:sld xmlns:a="http://schemas.openxmlformats.org/drawingml/2006/main" xmlns:r="http://schemas.openxmlformats.org/officeDocument/2006/relationships" xmlns:p="http://schemas.openxmlformats.org/presentationml/2006/main">
   <p:cSld>
     <p:spTree>
@@ -15041,7 +18915,7 @@
             <a:fld id="{45C00377-489B-40EC-B059-26BDDD2E89B9}" type="slidenum">
               <a:rPr lang="en-US" smtClean="0"/>
               <a:pPr/>
-              <a:t>36</a:t>
+              <a:t>39</a:t>
             </a:fld>
             <a:endParaRPr lang="en-US"/>
           </a:p>
@@ -15090,7 +18964,7 @@
 </p:sld>
 </file>
 
-<file path=ppt/slides/slide37.xml><?xml version="1.0" encoding="utf-8"?>
+<file path=ppt/slides/slide4.xml><?xml version="1.0" encoding="utf-8"?>
 <p:sld xmlns:a="http://schemas.openxmlformats.org/drawingml/2006/main" xmlns:r="http://schemas.openxmlformats.org/officeDocument/2006/relationships" xmlns:p="http://schemas.openxmlformats.org/presentationml/2006/main">
   <p:cSld>
     <p:spTree>
@@ -15109,86 +18983,18 @@
       </p:grpSpPr>
       <p:sp>
         <p:nvSpPr>
-          <p:cNvPr id="2" name="Title 1">
-            <a:extLst>
-              <a:ext uri="{FF2B5EF4-FFF2-40B4-BE49-F238E27FC236}">
-                <a16:creationId xmlns:a16="http://schemas.microsoft.com/office/drawing/2014/main" id="{34DEF9CC-1EF7-C20D-ABF9-9A718993E68A}"/>
-              </a:ext>
-            </a:extLst>
-          </p:cNvPr>
-          <p:cNvSpPr>
-            <a:spLocks noGrp="1"/>
-          </p:cNvSpPr>
-          <p:nvPr>
-            <p:ph type="title"/>
-          </p:nvPr>
-        </p:nvSpPr>
-        <p:spPr/>
-        <p:txBody>
-          <a:bodyPr/>
-          <a:lstStyle/>
-          <a:p>
-            <a:r>
-              <a:rPr lang="en-US"/>
-              <a:t>What they reveal</a:t>
-            </a:r>
-          </a:p>
-        </p:txBody>
-      </p:sp>
-      <p:sp>
-        <p:nvSpPr>
-          <p:cNvPr id="3" name="Content Placeholder 2">
-            <a:extLst>
-              <a:ext uri="{FF2B5EF4-FFF2-40B4-BE49-F238E27FC236}">
-                <a16:creationId xmlns:a16="http://schemas.microsoft.com/office/drawing/2014/main" id="{228A91EC-F982-93D0-0803-D5331F2C3D43}"/>
-              </a:ext>
-            </a:extLst>
-          </p:cNvPr>
-          <p:cNvSpPr>
-            <a:spLocks noGrp="1"/>
-          </p:cNvSpPr>
-          <p:nvPr>
-            <p:ph idx="1"/>
-          </p:nvPr>
-        </p:nvSpPr>
-        <p:spPr/>
-        <p:txBody>
-          <a:bodyPr/>
-          <a:lstStyle/>
-          <a:p>
-            <a:r>
-              <a:rPr lang="en-US" dirty="0"/>
-              <a:t>Quick snapshot of your data</a:t>
-            </a:r>
-          </a:p>
-          <a:p>
-            <a:r>
-              <a:rPr lang="en-US" dirty="0"/>
-              <a:t>Identify typical values and variation</a:t>
-            </a:r>
-          </a:p>
-          <a:p>
-            <a:r>
-              <a:rPr lang="en-US" dirty="0"/>
-              <a:t>Compare groups or time periods</a:t>
-            </a:r>
-          </a:p>
-        </p:txBody>
-      </p:sp>
-      <p:sp>
-        <p:nvSpPr>
-          <p:cNvPr id="4" name="Slide Number Placeholder 3">
-            <a:extLst>
-              <a:ext uri="{FF2B5EF4-FFF2-40B4-BE49-F238E27FC236}">
-                <a16:creationId xmlns:a16="http://schemas.microsoft.com/office/drawing/2014/main" id="{C82B0F1F-8354-3EF0-C3F4-777FFECF6337}"/>
-              </a:ext>
-            </a:extLst>
-          </p:cNvPr>
-          <p:cNvSpPr>
-            <a:spLocks noGrp="1"/>
-          </p:cNvSpPr>
-          <p:nvPr>
-            <p:ph type="sldNum" sz="quarter" idx="12"/>
+          <p:cNvPr id="2" name="Slide Number Placeholder 1">
+            <a:extLst>
+              <a:ext uri="{FF2B5EF4-FFF2-40B4-BE49-F238E27FC236}">
+                <a16:creationId xmlns:a16="http://schemas.microsoft.com/office/drawing/2014/main" id="{4F00E21B-1982-E0CA-1F9E-8355997AAE51}"/>
+              </a:ext>
+            </a:extLst>
+          </p:cNvPr>
+          <p:cNvSpPr>
+            <a:spLocks noGrp="1"/>
+          </p:cNvSpPr>
+          <p:nvPr>
+            <p:ph type="sldNum" sz="quarter" idx="11"/>
           </p:nvPr>
         </p:nvSpPr>
         <p:spPr/>
@@ -15199,7 +19005,188 @@
             <a:fld id="{45C00377-489B-40EC-B059-26BDDD2E89B9}" type="slidenum">
               <a:rPr lang="en-US" smtClean="0"/>
               <a:pPr/>
-              <a:t>37</a:t>
+              <a:t>4</a:t>
+            </a:fld>
+            <a:endParaRPr lang="en-US"/>
+          </a:p>
+        </p:txBody>
+      </p:sp>
+      <p:sp>
+        <p:nvSpPr>
+          <p:cNvPr id="3" name="Title 1">
+            <a:extLst>
+              <a:ext uri="{FF2B5EF4-FFF2-40B4-BE49-F238E27FC236}">
+                <a16:creationId xmlns:a16="http://schemas.microsoft.com/office/drawing/2014/main" id="{B2604BDD-1EB2-C9AE-AD81-128821271322}"/>
+              </a:ext>
+            </a:extLst>
+          </p:cNvPr>
+          <p:cNvSpPr txBox="1">
+            <a:spLocks/>
+          </p:cNvSpPr>
+          <p:nvPr/>
+        </p:nvSpPr>
+        <p:spPr>
+          <a:xfrm>
+            <a:off x="838200" y="3110401"/>
+            <a:ext cx="10515600" cy="637198"/>
+          </a:xfrm>
+          <a:prstGeom prst="rect">
+            <a:avLst/>
+          </a:prstGeom>
+        </p:spPr>
+        <p:txBody>
+          <a:bodyPr/>
+          <a:lstStyle>
+            <a:lvl1pPr algn="l" defTabSz="914400" rtl="0" eaLnBrk="1" latinLnBrk="0" hangingPunct="1">
+              <a:lnSpc>
+                <a:spcPct val="90000"/>
+              </a:lnSpc>
+              <a:spcBef>
+                <a:spcPct val="0"/>
+              </a:spcBef>
+              <a:buNone/>
+              <a:defRPr sz="3600" b="1" kern="1200" cap="all" baseline="0">
+                <a:solidFill>
+                  <a:schemeClr val="tx1"/>
+                </a:solidFill>
+                <a:latin typeface="+mn-lt"/>
+                <a:ea typeface="+mj-ea"/>
+                <a:cs typeface="+mj-cs"/>
+              </a:defRPr>
+            </a:lvl1pPr>
+          </a:lstStyle>
+          <a:p>
+            <a:pPr algn="ctr"/>
+            <a:r>
+              <a:rPr lang="en-US" b="0" dirty="0"/>
+              <a:t>What is “typical”?</a:t>
+            </a:r>
+          </a:p>
+        </p:txBody>
+      </p:sp>
+    </p:spTree>
+    <p:extLst>
+      <p:ext uri="{BB962C8B-B14F-4D97-AF65-F5344CB8AC3E}">
+        <p14:creationId xmlns:p14="http://schemas.microsoft.com/office/powerpoint/2010/main" val="944151257"/>
+      </p:ext>
+    </p:extLst>
+  </p:cSld>
+  <p:clrMapOvr>
+    <a:masterClrMapping/>
+  </p:clrMapOvr>
+</p:sld>
+</file>
+
+<file path=ppt/slides/slide40.xml><?xml version="1.0" encoding="utf-8"?>
+<p:sld xmlns:a="http://schemas.openxmlformats.org/drawingml/2006/main" xmlns:r="http://schemas.openxmlformats.org/officeDocument/2006/relationships" xmlns:p="http://schemas.openxmlformats.org/presentationml/2006/main">
+  <p:cSld>
+    <p:spTree>
+      <p:nvGrpSpPr>
+        <p:cNvPr id="1" name=""/>
+        <p:cNvGrpSpPr/>
+        <p:nvPr/>
+      </p:nvGrpSpPr>
+      <p:grpSpPr>
+        <a:xfrm>
+          <a:off x="0" y="0"/>
+          <a:ext cx="0" cy="0"/>
+          <a:chOff x="0" y="0"/>
+          <a:chExt cx="0" cy="0"/>
+        </a:xfrm>
+      </p:grpSpPr>
+      <p:sp>
+        <p:nvSpPr>
+          <p:cNvPr id="2" name="Title 1">
+            <a:extLst>
+              <a:ext uri="{FF2B5EF4-FFF2-40B4-BE49-F238E27FC236}">
+                <a16:creationId xmlns:a16="http://schemas.microsoft.com/office/drawing/2014/main" id="{34DEF9CC-1EF7-C20D-ABF9-9A718993E68A}"/>
+              </a:ext>
+            </a:extLst>
+          </p:cNvPr>
+          <p:cNvSpPr>
+            <a:spLocks noGrp="1"/>
+          </p:cNvSpPr>
+          <p:nvPr>
+            <p:ph type="title"/>
+          </p:nvPr>
+        </p:nvSpPr>
+        <p:spPr/>
+        <p:txBody>
+          <a:bodyPr/>
+          <a:lstStyle/>
+          <a:p>
+            <a:r>
+              <a:rPr lang="en-US"/>
+              <a:t>What they reveal</a:t>
+            </a:r>
+          </a:p>
+        </p:txBody>
+      </p:sp>
+      <p:sp>
+        <p:nvSpPr>
+          <p:cNvPr id="3" name="Content Placeholder 2">
+            <a:extLst>
+              <a:ext uri="{FF2B5EF4-FFF2-40B4-BE49-F238E27FC236}">
+                <a16:creationId xmlns:a16="http://schemas.microsoft.com/office/drawing/2014/main" id="{228A91EC-F982-93D0-0803-D5331F2C3D43}"/>
+              </a:ext>
+            </a:extLst>
+          </p:cNvPr>
+          <p:cNvSpPr>
+            <a:spLocks noGrp="1"/>
+          </p:cNvSpPr>
+          <p:nvPr>
+            <p:ph idx="1"/>
+          </p:nvPr>
+        </p:nvSpPr>
+        <p:spPr/>
+        <p:txBody>
+          <a:bodyPr/>
+          <a:lstStyle/>
+          <a:p>
+            <a:r>
+              <a:rPr lang="en-US" dirty="0"/>
+              <a:t>Quick snapshot of your data</a:t>
+            </a:r>
+          </a:p>
+          <a:p>
+            <a:r>
+              <a:rPr lang="en-US" dirty="0"/>
+              <a:t>Identify typical values and variation</a:t>
+            </a:r>
+          </a:p>
+          <a:p>
+            <a:r>
+              <a:rPr lang="en-US" dirty="0"/>
+              <a:t>Compare groups or time periods</a:t>
+            </a:r>
+          </a:p>
+        </p:txBody>
+      </p:sp>
+      <p:sp>
+        <p:nvSpPr>
+          <p:cNvPr id="4" name="Slide Number Placeholder 3">
+            <a:extLst>
+              <a:ext uri="{FF2B5EF4-FFF2-40B4-BE49-F238E27FC236}">
+                <a16:creationId xmlns:a16="http://schemas.microsoft.com/office/drawing/2014/main" id="{C82B0F1F-8354-3EF0-C3F4-777FFECF6337}"/>
+              </a:ext>
+            </a:extLst>
+          </p:cNvPr>
+          <p:cNvSpPr>
+            <a:spLocks noGrp="1"/>
+          </p:cNvSpPr>
+          <p:nvPr>
+            <p:ph type="sldNum" sz="quarter" idx="12"/>
+          </p:nvPr>
+        </p:nvSpPr>
+        <p:spPr/>
+        <p:txBody>
+          <a:bodyPr/>
+          <a:lstStyle/>
+          <a:p>
+            <a:fld id="{45C00377-489B-40EC-B059-26BDDD2E89B9}" type="slidenum">
+              <a:rPr lang="en-US" smtClean="0"/>
+              <a:pPr/>
+              <a:t>40</a:t>
             </a:fld>
             <a:endParaRPr lang="en-US"/>
           </a:p>
@@ -15248,7 +19235,7 @@
 </p:sld>
 </file>
 
-<file path=ppt/slides/slide38.xml><?xml version="1.0" encoding="utf-8"?>
+<file path=ppt/slides/slide41.xml><?xml version="1.0" encoding="utf-8"?>
 <p:sld xmlns:a="http://schemas.openxmlformats.org/drawingml/2006/main" xmlns:r="http://schemas.openxmlformats.org/officeDocument/2006/relationships" xmlns:p="http://schemas.openxmlformats.org/presentationml/2006/main">
   <p:cSld>
     <p:spTree>
@@ -15379,7 +19366,7 @@
 </p:sld>
 </file>
 
-<file path=ppt/slides/slide39.xml><?xml version="1.0" encoding="utf-8"?>
+<file path=ppt/slides/slide42.xml><?xml version="1.0" encoding="utf-8"?>
 <p:sld xmlns:a="http://schemas.openxmlformats.org/drawingml/2006/main" xmlns:r="http://schemas.openxmlformats.org/officeDocument/2006/relationships" xmlns:p="http://schemas.openxmlformats.org/presentationml/2006/main">
   <p:cSld>
     <p:spTree>
@@ -15510,7 +19497,7 @@
             <a:fld id="{45C00377-489B-40EC-B059-26BDDD2E89B9}" type="slidenum">
               <a:rPr lang="en-US" smtClean="0"/>
               <a:pPr/>
-              <a:t>39</a:t>
+              <a:t>42</a:t>
             </a:fld>
             <a:endParaRPr lang="en-US"/>
           </a:p>
@@ -15529,184 +19516,7 @@
 </p:sld>
 </file>
 
-<file path=ppt/slides/slide4.xml><?xml version="1.0" encoding="utf-8"?>
-<p:sld xmlns:a="http://schemas.openxmlformats.org/drawingml/2006/main" xmlns:r="http://schemas.openxmlformats.org/officeDocument/2006/relationships" xmlns:p="http://schemas.openxmlformats.org/presentationml/2006/main">
-  <p:cSld>
-    <p:spTree>
-      <p:nvGrpSpPr>
-        <p:cNvPr id="1" name="">
-          <a:extLst>
-            <a:ext uri="{FF2B5EF4-FFF2-40B4-BE49-F238E27FC236}">
-              <a16:creationId xmlns:a16="http://schemas.microsoft.com/office/drawing/2014/main" id="{7BCD22BB-FD16-96CE-85B0-13D619F19E23}"/>
-            </a:ext>
-          </a:extLst>
-        </p:cNvPr>
-        <p:cNvGrpSpPr/>
-        <p:nvPr/>
-      </p:nvGrpSpPr>
-      <p:grpSpPr>
-        <a:xfrm>
-          <a:off x="0" y="0"/>
-          <a:ext cx="0" cy="0"/>
-          <a:chOff x="0" y="0"/>
-          <a:chExt cx="0" cy="0"/>
-        </a:xfrm>
-      </p:grpSpPr>
-      <p:sp>
-        <p:nvSpPr>
-          <p:cNvPr id="2" name="Title 1">
-            <a:extLst>
-              <a:ext uri="{FF2B5EF4-FFF2-40B4-BE49-F238E27FC236}">
-                <a16:creationId xmlns:a16="http://schemas.microsoft.com/office/drawing/2014/main" id="{C54EF5EC-1A9E-DDC3-DBFA-C7F7A42B3F83}"/>
-              </a:ext>
-            </a:extLst>
-          </p:cNvPr>
-          <p:cNvSpPr>
-            <a:spLocks noGrp="1"/>
-          </p:cNvSpPr>
-          <p:nvPr>
-            <p:ph type="title"/>
-          </p:nvPr>
-        </p:nvSpPr>
-        <p:spPr/>
-        <p:txBody>
-          <a:bodyPr/>
-          <a:lstStyle/>
-          <a:p>
-            <a:r>
-              <a:rPr lang="en-US" dirty="0"/>
-              <a:t>Mean, Median and Mode</a:t>
-            </a:r>
-          </a:p>
-        </p:txBody>
-      </p:sp>
-      <p:sp>
-        <p:nvSpPr>
-          <p:cNvPr id="3" name="Content Placeholder 2">
-            <a:extLst>
-              <a:ext uri="{FF2B5EF4-FFF2-40B4-BE49-F238E27FC236}">
-                <a16:creationId xmlns:a16="http://schemas.microsoft.com/office/drawing/2014/main" id="{D9F83990-63DF-C1E7-CB5D-672EC20E5059}"/>
-              </a:ext>
-            </a:extLst>
-          </p:cNvPr>
-          <p:cNvSpPr>
-            <a:spLocks noGrp="1"/>
-          </p:cNvSpPr>
-          <p:nvPr>
-            <p:ph idx="1"/>
-          </p:nvPr>
-        </p:nvSpPr>
-        <p:spPr/>
-        <p:txBody>
-          <a:bodyPr/>
-          <a:lstStyle/>
-          <a:p>
-            <a:r>
-              <a:rPr lang="en-US" dirty="0"/>
-              <a:t>Mean: arithmetic mean </a:t>
-            </a:r>
-          </a:p>
-          <a:p>
-            <a:pPr lvl="1"/>
-            <a:r>
-              <a:rPr lang="en-US" dirty="0"/>
-              <a:t>Determined by the sum of the values in the distribution divided by the number of values.</a:t>
-            </a:r>
-          </a:p>
-          <a:p>
-            <a:pPr lvl="1"/>
-            <a:r>
-              <a:rPr lang="en-US" dirty="0"/>
-              <a:t>Misleading if outliers or asymmetries are present</a:t>
-            </a:r>
-          </a:p>
-          <a:p>
-            <a:pPr lvl="1"/>
-            <a:endParaRPr lang="en-US" dirty="0"/>
-          </a:p>
-          <a:p>
-            <a:r>
-              <a:rPr lang="en-US" dirty="0"/>
-              <a:t>Median: the middle value</a:t>
-            </a:r>
-          </a:p>
-          <a:p>
-            <a:pPr lvl="1"/>
-            <a:r>
-              <a:rPr lang="en-US" dirty="0"/>
-              <a:t>the data point below which half of the values lie</a:t>
-            </a:r>
-          </a:p>
-          <a:p>
-            <a:pPr lvl="1"/>
-            <a:r>
-              <a:rPr lang="en-US" dirty="0"/>
-              <a:t>Ignores magnitude, focused on order</a:t>
-            </a:r>
-          </a:p>
-          <a:p>
-            <a:pPr lvl="1"/>
-            <a:endParaRPr lang="en-US" dirty="0"/>
-          </a:p>
-          <a:p>
-            <a:r>
-              <a:rPr lang="en-US" dirty="0"/>
-              <a:t>Mode: most frequent value</a:t>
-            </a:r>
-          </a:p>
-          <a:p>
-            <a:pPr lvl="1"/>
-            <a:r>
-              <a:rPr lang="en-US" dirty="0"/>
-              <a:t>Rarely used for interval or ratio data</a:t>
-            </a:r>
-          </a:p>
-        </p:txBody>
-      </p:sp>
-      <p:sp>
-        <p:nvSpPr>
-          <p:cNvPr id="4" name="Slide Number Placeholder 3">
-            <a:extLst>
-              <a:ext uri="{FF2B5EF4-FFF2-40B4-BE49-F238E27FC236}">
-                <a16:creationId xmlns:a16="http://schemas.microsoft.com/office/drawing/2014/main" id="{4A4D32E9-1577-E359-5868-2FF46783D4B8}"/>
-              </a:ext>
-            </a:extLst>
-          </p:cNvPr>
-          <p:cNvSpPr>
-            <a:spLocks noGrp="1"/>
-          </p:cNvSpPr>
-          <p:nvPr>
-            <p:ph type="sldNum" sz="quarter" idx="12"/>
-          </p:nvPr>
-        </p:nvSpPr>
-        <p:spPr/>
-        <p:txBody>
-          <a:bodyPr/>
-          <a:lstStyle/>
-          <a:p>
-            <a:fld id="{45C00377-489B-40EC-B059-26BDDD2E89B9}" type="slidenum">
-              <a:rPr lang="en-US" smtClean="0"/>
-              <a:pPr/>
-              <a:t>4</a:t>
-            </a:fld>
-            <a:endParaRPr lang="en-US"/>
-          </a:p>
-        </p:txBody>
-      </p:sp>
-    </p:spTree>
-    <p:extLst>
-      <p:ext uri="{BB962C8B-B14F-4D97-AF65-F5344CB8AC3E}">
-        <p14:creationId xmlns:p14="http://schemas.microsoft.com/office/powerpoint/2010/main" val="2352837927"/>
-      </p:ext>
-    </p:extLst>
-  </p:cSld>
-  <p:clrMapOvr>
-    <a:masterClrMapping/>
-  </p:clrMapOvr>
-</p:sld>
-</file>
-
-<file path=ppt/slides/slide40.xml><?xml version="1.0" encoding="utf-8"?>
+<file path=ppt/slides/slide43.xml><?xml version="1.0" encoding="utf-8"?>
 <p:sld xmlns:a="http://schemas.openxmlformats.org/drawingml/2006/main" xmlns:r="http://schemas.openxmlformats.org/officeDocument/2006/relationships" xmlns:p="http://schemas.openxmlformats.org/presentationml/2006/main">
   <p:cSld>
     <p:spTree>
@@ -15809,7 +19619,7 @@
             <a:fld id="{45C00377-489B-40EC-B059-26BDDD2E89B9}" type="slidenum">
               <a:rPr lang="en-US" smtClean="0"/>
               <a:pPr/>
-              <a:t>40</a:t>
+              <a:t>43</a:t>
             </a:fld>
             <a:endParaRPr lang="en-US"/>
           </a:p>
@@ -15858,7 +19668,7 @@
 </p:sld>
 </file>
 
-<file path=ppt/slides/slide41.xml><?xml version="1.0" encoding="utf-8"?>
+<file path=ppt/slides/slide44.xml><?xml version="1.0" encoding="utf-8"?>
 <p:sld xmlns:a="http://schemas.openxmlformats.org/drawingml/2006/main" xmlns:r="http://schemas.openxmlformats.org/officeDocument/2006/relationships" xmlns:p="http://schemas.openxmlformats.org/presentationml/2006/main">
   <p:cSld>
     <p:spTree>
@@ -15962,7 +19772,7 @@
             <a:fld id="{45C00377-489B-40EC-B059-26BDDD2E89B9}" type="slidenum">
               <a:rPr lang="en-US" smtClean="0"/>
               <a:pPr/>
-              <a:t>41</a:t>
+              <a:t>44</a:t>
             </a:fld>
             <a:endParaRPr lang="en-US"/>
           </a:p>
@@ -16011,7 +19821,7 @@
 </p:sld>
 </file>
 
-<file path=ppt/slides/slide42.xml><?xml version="1.0" encoding="utf-8"?>
+<file path=ppt/slides/slide45.xml><?xml version="1.0" encoding="utf-8"?>
 <p:sld xmlns:a="http://schemas.openxmlformats.org/drawingml/2006/main" xmlns:r="http://schemas.openxmlformats.org/officeDocument/2006/relationships" xmlns:p="http://schemas.openxmlformats.org/presentationml/2006/main" show="0">
   <p:cSld>
     <p:spTree>
@@ -16150,7 +19960,7 @@
             <a:fld id="{45C00377-489B-40EC-B059-26BDDD2E89B9}" type="slidenum">
               <a:rPr lang="en-US" smtClean="0"/>
               <a:pPr/>
-              <a:t>42</a:t>
+              <a:t>45</a:t>
             </a:fld>
             <a:endParaRPr lang="en-US"/>
           </a:p>
@@ -16208,7 +20018,7 @@
 </p:sld>
 </file>
 
-<file path=ppt/slides/slide43.xml><?xml version="1.0" encoding="utf-8"?>
+<file path=ppt/slides/slide46.xml><?xml version="1.0" encoding="utf-8"?>
 <p:sld xmlns:a="http://schemas.openxmlformats.org/drawingml/2006/main" xmlns:r="http://schemas.openxmlformats.org/officeDocument/2006/relationships" xmlns:p="http://schemas.openxmlformats.org/presentationml/2006/main" show="0">
   <p:cSld>
     <p:spTree>
@@ -16339,7 +20149,7 @@
             <a:fld id="{45C00377-489B-40EC-B059-26BDDD2E89B9}" type="slidenum">
               <a:rPr lang="en-US" smtClean="0"/>
               <a:pPr/>
-              <a:t>43</a:t>
+              <a:t>46</a:t>
             </a:fld>
             <a:endParaRPr lang="en-US"/>
           </a:p>
@@ -16387,6 +20197,1026 @@
   <p:cSld>
     <p:spTree>
       <p:nvGrpSpPr>
+        <p:cNvPr id="1" name=""/>
+        <p:cNvGrpSpPr/>
+        <p:nvPr/>
+      </p:nvGrpSpPr>
+      <p:grpSpPr>
+        <a:xfrm>
+          <a:off x="0" y="0"/>
+          <a:ext cx="0" cy="0"/>
+          <a:chOff x="0" y="0"/>
+          <a:chExt cx="0" cy="0"/>
+        </a:xfrm>
+      </p:grpSpPr>
+      <p:sp>
+        <p:nvSpPr>
+          <p:cNvPr id="3" name="Content Placeholder 2">
+            <a:extLst>
+              <a:ext uri="{FF2B5EF4-FFF2-40B4-BE49-F238E27FC236}">
+                <a16:creationId xmlns:a16="http://schemas.microsoft.com/office/drawing/2014/main" id="{1E7EFF20-7721-22CF-0B9C-0225448146B6}"/>
+              </a:ext>
+            </a:extLst>
+          </p:cNvPr>
+          <p:cNvSpPr>
+            <a:spLocks noGrp="1"/>
+          </p:cNvSpPr>
+          <p:nvPr>
+            <p:ph idx="1"/>
+          </p:nvPr>
+        </p:nvSpPr>
+        <p:spPr/>
+        <p:txBody>
+          <a:bodyPr>
+            <a:normAutofit/>
+          </a:bodyPr>
+          <a:lstStyle/>
+          <a:p>
+            <a:r>
+              <a:rPr lang="en-US" dirty="0"/>
+              <a:t>A method of describing a data set with a single figure</a:t>
+            </a:r>
+          </a:p>
+          <a:p>
+            <a:pPr lvl="1"/>
+            <a:endParaRPr lang="en-US" dirty="0"/>
+          </a:p>
+          <a:p>
+            <a:r>
+              <a:rPr lang="en-US" dirty="0"/>
+              <a:t>Main methods:</a:t>
+            </a:r>
+          </a:p>
+          <a:p>
+            <a:pPr lvl="1"/>
+            <a:r>
+              <a:rPr lang="en-US" dirty="0"/>
+              <a:t>Mean</a:t>
+            </a:r>
+          </a:p>
+          <a:p>
+            <a:pPr lvl="1"/>
+            <a:r>
+              <a:rPr lang="en-US" dirty="0"/>
+              <a:t>Median</a:t>
+            </a:r>
+          </a:p>
+          <a:p>
+            <a:pPr lvl="1"/>
+            <a:r>
+              <a:rPr lang="en-US" dirty="0"/>
+              <a:t>Mode </a:t>
+            </a:r>
+          </a:p>
+          <a:p>
+            <a:pPr lvl="1"/>
+            <a:endParaRPr lang="en-US" dirty="0"/>
+          </a:p>
+          <a:p>
+            <a:r>
+              <a:rPr lang="en-US" dirty="0"/>
+              <a:t>Most appropriate method depends on the data and question</a:t>
+            </a:r>
+          </a:p>
+          <a:p>
+            <a:pPr lvl="1"/>
+            <a:r>
+              <a:rPr lang="en-US" dirty="0"/>
+              <a:t>Scale of measurement</a:t>
+            </a:r>
+          </a:p>
+          <a:p>
+            <a:pPr lvl="1"/>
+            <a:r>
+              <a:rPr lang="en-US" dirty="0"/>
+              <a:t>Outliers and data distribution</a:t>
+            </a:r>
+          </a:p>
+        </p:txBody>
+      </p:sp>
+      <p:sp>
+        <p:nvSpPr>
+          <p:cNvPr id="4" name="Slide Number Placeholder 3">
+            <a:extLst>
+              <a:ext uri="{FF2B5EF4-FFF2-40B4-BE49-F238E27FC236}">
+                <a16:creationId xmlns:a16="http://schemas.microsoft.com/office/drawing/2014/main" id="{320425CF-433B-BA64-63C0-A6A6E36B0490}"/>
+              </a:ext>
+            </a:extLst>
+          </p:cNvPr>
+          <p:cNvSpPr>
+            <a:spLocks noGrp="1"/>
+          </p:cNvSpPr>
+          <p:nvPr>
+            <p:ph type="sldNum" sz="quarter" idx="12"/>
+          </p:nvPr>
+        </p:nvSpPr>
+        <p:spPr/>
+        <p:txBody>
+          <a:bodyPr/>
+          <a:lstStyle/>
+          <a:p>
+            <a:fld id="{45C00377-489B-40EC-B059-26BDDD2E89B9}" type="slidenum">
+              <a:rPr lang="en-US" smtClean="0"/>
+              <a:pPr/>
+              <a:t>5</a:t>
+            </a:fld>
+            <a:endParaRPr lang="en-US"/>
+          </a:p>
+        </p:txBody>
+      </p:sp>
+      <p:sp>
+        <p:nvSpPr>
+          <p:cNvPr id="2" name="Title 1">
+            <a:extLst>
+              <a:ext uri="{FF2B5EF4-FFF2-40B4-BE49-F238E27FC236}">
+                <a16:creationId xmlns:a16="http://schemas.microsoft.com/office/drawing/2014/main" id="{537E157F-E6F6-FE34-3C0A-A701E167D090}"/>
+              </a:ext>
+            </a:extLst>
+          </p:cNvPr>
+          <p:cNvSpPr>
+            <a:spLocks noGrp="1"/>
+          </p:cNvSpPr>
+          <p:nvPr>
+            <p:ph type="title"/>
+          </p:nvPr>
+        </p:nvSpPr>
+        <p:spPr/>
+        <p:txBody>
+          <a:bodyPr/>
+          <a:lstStyle/>
+          <a:p>
+            <a:r>
+              <a:rPr lang="en-US" dirty="0"/>
+              <a:t>Measures of central tendency</a:t>
+            </a:r>
+          </a:p>
+        </p:txBody>
+      </p:sp>
+    </p:spTree>
+    <p:extLst>
+      <p:ext uri="{BB962C8B-B14F-4D97-AF65-F5344CB8AC3E}">
+        <p14:creationId xmlns:p14="http://schemas.microsoft.com/office/powerpoint/2010/main" val="2698741083"/>
+      </p:ext>
+    </p:extLst>
+  </p:cSld>
+  <p:clrMapOvr>
+    <a:masterClrMapping/>
+  </p:clrMapOvr>
+  <p:timing>
+    <p:tnLst>
+      <p:par>
+        <p:cTn id="1" dur="indefinite" restart="never" nodeType="tmRoot">
+          <p:childTnLst>
+            <p:seq concurrent="1" nextAc="seek">
+              <p:cTn id="2" dur="indefinite" nodeType="mainSeq">
+                <p:childTnLst>
+                  <p:par>
+                    <p:cTn id="3" fill="hold">
+                      <p:stCondLst>
+                        <p:cond delay="indefinite"/>
+                      </p:stCondLst>
+                      <p:childTnLst>
+                        <p:par>
+                          <p:cTn id="4" fill="hold">
+                            <p:stCondLst>
+                              <p:cond delay="0"/>
+                            </p:stCondLst>
+                            <p:childTnLst>
+                              <p:par>
+                                <p:cTn id="5" presetID="1" presetClass="entr" presetSubtype="0" fill="hold" grpId="0" nodeType="clickEffect">
+                                  <p:stCondLst>
+                                    <p:cond delay="0"/>
+                                  </p:stCondLst>
+                                  <p:childTnLst>
+                                    <p:set>
+                                      <p:cBhvr>
+                                        <p:cTn id="6" dur="1" fill="hold">
+                                          <p:stCondLst>
+                                            <p:cond delay="0"/>
+                                          </p:stCondLst>
+                                        </p:cTn>
+                                        <p:tgtEl>
+                                          <p:spTgt spid="3">
+                                            <p:txEl>
+                                              <p:pRg st="0" end="0"/>
+                                            </p:txEl>
+                                          </p:spTgt>
+                                        </p:tgtEl>
+                                        <p:attrNameLst>
+                                          <p:attrName>style.visibility</p:attrName>
+                                        </p:attrNameLst>
+                                      </p:cBhvr>
+                                      <p:to>
+                                        <p:strVal val="visible"/>
+                                      </p:to>
+                                    </p:set>
+                                  </p:childTnLst>
+                                </p:cTn>
+                              </p:par>
+                            </p:childTnLst>
+                          </p:cTn>
+                        </p:par>
+                      </p:childTnLst>
+                    </p:cTn>
+                  </p:par>
+                  <p:par>
+                    <p:cTn id="7" fill="hold">
+                      <p:stCondLst>
+                        <p:cond delay="indefinite"/>
+                      </p:stCondLst>
+                      <p:childTnLst>
+                        <p:par>
+                          <p:cTn id="8" fill="hold">
+                            <p:stCondLst>
+                              <p:cond delay="0"/>
+                            </p:stCondLst>
+                            <p:childTnLst>
+                              <p:par>
+                                <p:cTn id="9" presetID="1" presetClass="entr" presetSubtype="0" fill="hold" grpId="0" nodeType="clickEffect">
+                                  <p:stCondLst>
+                                    <p:cond delay="0"/>
+                                  </p:stCondLst>
+                                  <p:childTnLst>
+                                    <p:set>
+                                      <p:cBhvr>
+                                        <p:cTn id="10" dur="1" fill="hold">
+                                          <p:stCondLst>
+                                            <p:cond delay="0"/>
+                                          </p:stCondLst>
+                                        </p:cTn>
+                                        <p:tgtEl>
+                                          <p:spTgt spid="3">
+                                            <p:txEl>
+                                              <p:pRg st="2" end="2"/>
+                                            </p:txEl>
+                                          </p:spTgt>
+                                        </p:tgtEl>
+                                        <p:attrNameLst>
+                                          <p:attrName>style.visibility</p:attrName>
+                                        </p:attrNameLst>
+                                      </p:cBhvr>
+                                      <p:to>
+                                        <p:strVal val="visible"/>
+                                      </p:to>
+                                    </p:set>
+                                  </p:childTnLst>
+                                </p:cTn>
+                              </p:par>
+                              <p:par>
+                                <p:cTn id="11" presetID="1" presetClass="entr" presetSubtype="0" fill="hold" grpId="0" nodeType="withEffect">
+                                  <p:stCondLst>
+                                    <p:cond delay="0"/>
+                                  </p:stCondLst>
+                                  <p:childTnLst>
+                                    <p:set>
+                                      <p:cBhvr>
+                                        <p:cTn id="12" dur="1" fill="hold">
+                                          <p:stCondLst>
+                                            <p:cond delay="0"/>
+                                          </p:stCondLst>
+                                        </p:cTn>
+                                        <p:tgtEl>
+                                          <p:spTgt spid="3">
+                                            <p:txEl>
+                                              <p:pRg st="3" end="3"/>
+                                            </p:txEl>
+                                          </p:spTgt>
+                                        </p:tgtEl>
+                                        <p:attrNameLst>
+                                          <p:attrName>style.visibility</p:attrName>
+                                        </p:attrNameLst>
+                                      </p:cBhvr>
+                                      <p:to>
+                                        <p:strVal val="visible"/>
+                                      </p:to>
+                                    </p:set>
+                                  </p:childTnLst>
+                                </p:cTn>
+                              </p:par>
+                              <p:par>
+                                <p:cTn id="13" presetID="1" presetClass="entr" presetSubtype="0" fill="hold" grpId="0" nodeType="withEffect">
+                                  <p:stCondLst>
+                                    <p:cond delay="0"/>
+                                  </p:stCondLst>
+                                  <p:childTnLst>
+                                    <p:set>
+                                      <p:cBhvr>
+                                        <p:cTn id="14" dur="1" fill="hold">
+                                          <p:stCondLst>
+                                            <p:cond delay="0"/>
+                                          </p:stCondLst>
+                                        </p:cTn>
+                                        <p:tgtEl>
+                                          <p:spTgt spid="3">
+                                            <p:txEl>
+                                              <p:pRg st="4" end="4"/>
+                                            </p:txEl>
+                                          </p:spTgt>
+                                        </p:tgtEl>
+                                        <p:attrNameLst>
+                                          <p:attrName>style.visibility</p:attrName>
+                                        </p:attrNameLst>
+                                      </p:cBhvr>
+                                      <p:to>
+                                        <p:strVal val="visible"/>
+                                      </p:to>
+                                    </p:set>
+                                  </p:childTnLst>
+                                </p:cTn>
+                              </p:par>
+                              <p:par>
+                                <p:cTn id="15" presetID="1" presetClass="entr" presetSubtype="0" fill="hold" grpId="0" nodeType="withEffect">
+                                  <p:stCondLst>
+                                    <p:cond delay="0"/>
+                                  </p:stCondLst>
+                                  <p:childTnLst>
+                                    <p:set>
+                                      <p:cBhvr>
+                                        <p:cTn id="16" dur="1" fill="hold">
+                                          <p:stCondLst>
+                                            <p:cond delay="0"/>
+                                          </p:stCondLst>
+                                        </p:cTn>
+                                        <p:tgtEl>
+                                          <p:spTgt spid="3">
+                                            <p:txEl>
+                                              <p:pRg st="5" end="5"/>
+                                            </p:txEl>
+                                          </p:spTgt>
+                                        </p:tgtEl>
+                                        <p:attrNameLst>
+                                          <p:attrName>style.visibility</p:attrName>
+                                        </p:attrNameLst>
+                                      </p:cBhvr>
+                                      <p:to>
+                                        <p:strVal val="visible"/>
+                                      </p:to>
+                                    </p:set>
+                                  </p:childTnLst>
+                                </p:cTn>
+                              </p:par>
+                            </p:childTnLst>
+                          </p:cTn>
+                        </p:par>
+                      </p:childTnLst>
+                    </p:cTn>
+                  </p:par>
+                  <p:par>
+                    <p:cTn id="17" fill="hold">
+                      <p:stCondLst>
+                        <p:cond delay="indefinite"/>
+                      </p:stCondLst>
+                      <p:childTnLst>
+                        <p:par>
+                          <p:cTn id="18" fill="hold">
+                            <p:stCondLst>
+                              <p:cond delay="0"/>
+                            </p:stCondLst>
+                            <p:childTnLst>
+                              <p:par>
+                                <p:cTn id="19" presetID="1" presetClass="entr" presetSubtype="0" fill="hold" grpId="0" nodeType="clickEffect">
+                                  <p:stCondLst>
+                                    <p:cond delay="0"/>
+                                  </p:stCondLst>
+                                  <p:childTnLst>
+                                    <p:set>
+                                      <p:cBhvr>
+                                        <p:cTn id="20" dur="1" fill="hold">
+                                          <p:stCondLst>
+                                            <p:cond delay="0"/>
+                                          </p:stCondLst>
+                                        </p:cTn>
+                                        <p:tgtEl>
+                                          <p:spTgt spid="3">
+                                            <p:txEl>
+                                              <p:pRg st="7" end="7"/>
+                                            </p:txEl>
+                                          </p:spTgt>
+                                        </p:tgtEl>
+                                        <p:attrNameLst>
+                                          <p:attrName>style.visibility</p:attrName>
+                                        </p:attrNameLst>
+                                      </p:cBhvr>
+                                      <p:to>
+                                        <p:strVal val="visible"/>
+                                      </p:to>
+                                    </p:set>
+                                  </p:childTnLst>
+                                </p:cTn>
+                              </p:par>
+                              <p:par>
+                                <p:cTn id="21" presetID="1" presetClass="entr" presetSubtype="0" fill="hold" grpId="0" nodeType="withEffect">
+                                  <p:stCondLst>
+                                    <p:cond delay="0"/>
+                                  </p:stCondLst>
+                                  <p:childTnLst>
+                                    <p:set>
+                                      <p:cBhvr>
+                                        <p:cTn id="22" dur="1" fill="hold">
+                                          <p:stCondLst>
+                                            <p:cond delay="0"/>
+                                          </p:stCondLst>
+                                        </p:cTn>
+                                        <p:tgtEl>
+                                          <p:spTgt spid="3">
+                                            <p:txEl>
+                                              <p:pRg st="8" end="8"/>
+                                            </p:txEl>
+                                          </p:spTgt>
+                                        </p:tgtEl>
+                                        <p:attrNameLst>
+                                          <p:attrName>style.visibility</p:attrName>
+                                        </p:attrNameLst>
+                                      </p:cBhvr>
+                                      <p:to>
+                                        <p:strVal val="visible"/>
+                                      </p:to>
+                                    </p:set>
+                                  </p:childTnLst>
+                                </p:cTn>
+                              </p:par>
+                              <p:par>
+                                <p:cTn id="23" presetID="1" presetClass="entr" presetSubtype="0" fill="hold" grpId="0" nodeType="withEffect">
+                                  <p:stCondLst>
+                                    <p:cond delay="0"/>
+                                  </p:stCondLst>
+                                  <p:childTnLst>
+                                    <p:set>
+                                      <p:cBhvr>
+                                        <p:cTn id="24" dur="1" fill="hold">
+                                          <p:stCondLst>
+                                            <p:cond delay="0"/>
+                                          </p:stCondLst>
+                                        </p:cTn>
+                                        <p:tgtEl>
+                                          <p:spTgt spid="3">
+                                            <p:txEl>
+                                              <p:pRg st="9" end="9"/>
+                                            </p:txEl>
+                                          </p:spTgt>
+                                        </p:tgtEl>
+                                        <p:attrNameLst>
+                                          <p:attrName>style.visibility</p:attrName>
+                                        </p:attrNameLst>
+                                      </p:cBhvr>
+                                      <p:to>
+                                        <p:strVal val="visible"/>
+                                      </p:to>
+                                    </p:set>
+                                  </p:childTnLst>
+                                </p:cTn>
+                              </p:par>
+                            </p:childTnLst>
+                          </p:cTn>
+                        </p:par>
+                      </p:childTnLst>
+                    </p:cTn>
+                  </p:par>
+                </p:childTnLst>
+              </p:cTn>
+              <p:prevCondLst>
+                <p:cond evt="onPrev" delay="0">
+                  <p:tgtEl>
+                    <p:sldTgt/>
+                  </p:tgtEl>
+                </p:cond>
+              </p:prevCondLst>
+              <p:nextCondLst>
+                <p:cond evt="onNext" delay="0">
+                  <p:tgtEl>
+                    <p:sldTgt/>
+                  </p:tgtEl>
+                </p:cond>
+              </p:nextCondLst>
+            </p:seq>
+          </p:childTnLst>
+        </p:cTn>
+      </p:par>
+    </p:tnLst>
+    <p:bldLst>
+      <p:bldP spid="3" grpId="0" build="p"/>
+    </p:bldLst>
+  </p:timing>
+</p:sld>
+</file>
+
+<file path=ppt/slides/slide6.xml><?xml version="1.0" encoding="utf-8"?>
+<p:sld xmlns:a="http://schemas.openxmlformats.org/drawingml/2006/main" xmlns:r="http://schemas.openxmlformats.org/officeDocument/2006/relationships" xmlns:p="http://schemas.openxmlformats.org/presentationml/2006/main">
+  <p:cSld>
+    <p:spTree>
+      <p:nvGrpSpPr>
+        <p:cNvPr id="1" name="">
+          <a:extLst>
+            <a:ext uri="{FF2B5EF4-FFF2-40B4-BE49-F238E27FC236}">
+              <a16:creationId xmlns:a16="http://schemas.microsoft.com/office/drawing/2014/main" id="{7BCD22BB-FD16-96CE-85B0-13D619F19E23}"/>
+            </a:ext>
+          </a:extLst>
+        </p:cNvPr>
+        <p:cNvGrpSpPr/>
+        <p:nvPr/>
+      </p:nvGrpSpPr>
+      <p:grpSpPr>
+        <a:xfrm>
+          <a:off x="0" y="0"/>
+          <a:ext cx="0" cy="0"/>
+          <a:chOff x="0" y="0"/>
+          <a:chExt cx="0" cy="0"/>
+        </a:xfrm>
+      </p:grpSpPr>
+      <p:sp>
+        <p:nvSpPr>
+          <p:cNvPr id="2" name="Title 1">
+            <a:extLst>
+              <a:ext uri="{FF2B5EF4-FFF2-40B4-BE49-F238E27FC236}">
+                <a16:creationId xmlns:a16="http://schemas.microsoft.com/office/drawing/2014/main" id="{C54EF5EC-1A9E-DDC3-DBFA-C7F7A42B3F83}"/>
+              </a:ext>
+            </a:extLst>
+          </p:cNvPr>
+          <p:cNvSpPr>
+            <a:spLocks noGrp="1"/>
+          </p:cNvSpPr>
+          <p:nvPr>
+            <p:ph type="title"/>
+          </p:nvPr>
+        </p:nvSpPr>
+        <p:spPr/>
+        <p:txBody>
+          <a:bodyPr/>
+          <a:lstStyle/>
+          <a:p>
+            <a:r>
+              <a:rPr lang="en-US" dirty="0"/>
+              <a:t>Mean, Median and Mode</a:t>
+            </a:r>
+          </a:p>
+        </p:txBody>
+      </p:sp>
+      <p:sp>
+        <p:nvSpPr>
+          <p:cNvPr id="3" name="Content Placeholder 2">
+            <a:extLst>
+              <a:ext uri="{FF2B5EF4-FFF2-40B4-BE49-F238E27FC236}">
+                <a16:creationId xmlns:a16="http://schemas.microsoft.com/office/drawing/2014/main" id="{D9F83990-63DF-C1E7-CB5D-672EC20E5059}"/>
+              </a:ext>
+            </a:extLst>
+          </p:cNvPr>
+          <p:cNvSpPr>
+            <a:spLocks noGrp="1"/>
+          </p:cNvSpPr>
+          <p:nvPr>
+            <p:ph idx="1"/>
+          </p:nvPr>
+        </p:nvSpPr>
+        <p:spPr/>
+        <p:txBody>
+          <a:bodyPr/>
+          <a:lstStyle/>
+          <a:p>
+            <a:r>
+              <a:rPr lang="en-US" dirty="0"/>
+              <a:t>Mean: arithmetic mean </a:t>
+            </a:r>
+          </a:p>
+          <a:p>
+            <a:pPr lvl="1"/>
+            <a:r>
+              <a:rPr lang="en-US" dirty="0"/>
+              <a:t>Determined by the sum of the values in the distribution divided by the number of values.</a:t>
+            </a:r>
+          </a:p>
+          <a:p>
+            <a:pPr lvl="1"/>
+            <a:r>
+              <a:rPr lang="en-US" dirty="0"/>
+              <a:t>Misleading if outliers or asymmetries are present</a:t>
+            </a:r>
+          </a:p>
+          <a:p>
+            <a:pPr lvl="1"/>
+            <a:endParaRPr lang="en-US" dirty="0"/>
+          </a:p>
+          <a:p>
+            <a:r>
+              <a:rPr lang="en-US" dirty="0"/>
+              <a:t>Median: the middle value</a:t>
+            </a:r>
+          </a:p>
+          <a:p>
+            <a:pPr lvl="1"/>
+            <a:r>
+              <a:rPr lang="en-US" dirty="0"/>
+              <a:t>the data point below which half of the values lie</a:t>
+            </a:r>
+          </a:p>
+          <a:p>
+            <a:pPr lvl="1"/>
+            <a:r>
+              <a:rPr lang="en-US" dirty="0"/>
+              <a:t>Ignores magnitude, focused on order</a:t>
+            </a:r>
+          </a:p>
+          <a:p>
+            <a:pPr lvl="1"/>
+            <a:endParaRPr lang="en-US" dirty="0"/>
+          </a:p>
+          <a:p>
+            <a:r>
+              <a:rPr lang="en-US" dirty="0"/>
+              <a:t>Mode: most frequent value</a:t>
+            </a:r>
+          </a:p>
+          <a:p>
+            <a:pPr lvl="1"/>
+            <a:r>
+              <a:rPr lang="en-US" dirty="0"/>
+              <a:t>Rarely used for interval or ratio data</a:t>
+            </a:r>
+          </a:p>
+        </p:txBody>
+      </p:sp>
+      <p:sp>
+        <p:nvSpPr>
+          <p:cNvPr id="4" name="Slide Number Placeholder 3">
+            <a:extLst>
+              <a:ext uri="{FF2B5EF4-FFF2-40B4-BE49-F238E27FC236}">
+                <a16:creationId xmlns:a16="http://schemas.microsoft.com/office/drawing/2014/main" id="{4A4D32E9-1577-E359-5868-2FF46783D4B8}"/>
+              </a:ext>
+            </a:extLst>
+          </p:cNvPr>
+          <p:cNvSpPr>
+            <a:spLocks noGrp="1"/>
+          </p:cNvSpPr>
+          <p:nvPr>
+            <p:ph type="sldNum" sz="quarter" idx="12"/>
+          </p:nvPr>
+        </p:nvSpPr>
+        <p:spPr/>
+        <p:txBody>
+          <a:bodyPr/>
+          <a:lstStyle/>
+          <a:p>
+            <a:fld id="{45C00377-489B-40EC-B059-26BDDD2E89B9}" type="slidenum">
+              <a:rPr lang="en-US" smtClean="0"/>
+              <a:pPr/>
+              <a:t>6</a:t>
+            </a:fld>
+            <a:endParaRPr lang="en-US"/>
+          </a:p>
+        </p:txBody>
+      </p:sp>
+    </p:spTree>
+    <p:extLst>
+      <p:ext uri="{BB962C8B-B14F-4D97-AF65-F5344CB8AC3E}">
+        <p14:creationId xmlns:p14="http://schemas.microsoft.com/office/powerpoint/2010/main" val="2352837927"/>
+      </p:ext>
+    </p:extLst>
+  </p:cSld>
+  <p:clrMapOvr>
+    <a:masterClrMapping/>
+  </p:clrMapOvr>
+  <p:timing>
+    <p:tnLst>
+      <p:par>
+        <p:cTn id="1" dur="indefinite" restart="never" nodeType="tmRoot">
+          <p:childTnLst>
+            <p:seq concurrent="1" nextAc="seek">
+              <p:cTn id="2" dur="indefinite" nodeType="mainSeq">
+                <p:childTnLst>
+                  <p:par>
+                    <p:cTn id="3" fill="hold">
+                      <p:stCondLst>
+                        <p:cond delay="indefinite"/>
+                      </p:stCondLst>
+                      <p:childTnLst>
+                        <p:par>
+                          <p:cTn id="4" fill="hold">
+                            <p:stCondLst>
+                              <p:cond delay="0"/>
+                            </p:stCondLst>
+                            <p:childTnLst>
+                              <p:par>
+                                <p:cTn id="5" presetID="1" presetClass="entr" presetSubtype="0" fill="hold" grpId="0" nodeType="clickEffect">
+                                  <p:stCondLst>
+                                    <p:cond delay="0"/>
+                                  </p:stCondLst>
+                                  <p:childTnLst>
+                                    <p:set>
+                                      <p:cBhvr>
+                                        <p:cTn id="6" dur="1" fill="hold">
+                                          <p:stCondLst>
+                                            <p:cond delay="0"/>
+                                          </p:stCondLst>
+                                        </p:cTn>
+                                        <p:tgtEl>
+                                          <p:spTgt spid="3">
+                                            <p:txEl>
+                                              <p:pRg st="0" end="0"/>
+                                            </p:txEl>
+                                          </p:spTgt>
+                                        </p:tgtEl>
+                                        <p:attrNameLst>
+                                          <p:attrName>style.visibility</p:attrName>
+                                        </p:attrNameLst>
+                                      </p:cBhvr>
+                                      <p:to>
+                                        <p:strVal val="visible"/>
+                                      </p:to>
+                                    </p:set>
+                                  </p:childTnLst>
+                                </p:cTn>
+                              </p:par>
+                              <p:par>
+                                <p:cTn id="7" presetID="1" presetClass="entr" presetSubtype="0" fill="hold" grpId="0" nodeType="withEffect">
+                                  <p:stCondLst>
+                                    <p:cond delay="0"/>
+                                  </p:stCondLst>
+                                  <p:childTnLst>
+                                    <p:set>
+                                      <p:cBhvr>
+                                        <p:cTn id="8" dur="1" fill="hold">
+                                          <p:stCondLst>
+                                            <p:cond delay="0"/>
+                                          </p:stCondLst>
+                                        </p:cTn>
+                                        <p:tgtEl>
+                                          <p:spTgt spid="3">
+                                            <p:txEl>
+                                              <p:pRg st="1" end="1"/>
+                                            </p:txEl>
+                                          </p:spTgt>
+                                        </p:tgtEl>
+                                        <p:attrNameLst>
+                                          <p:attrName>style.visibility</p:attrName>
+                                        </p:attrNameLst>
+                                      </p:cBhvr>
+                                      <p:to>
+                                        <p:strVal val="visible"/>
+                                      </p:to>
+                                    </p:set>
+                                  </p:childTnLst>
+                                </p:cTn>
+                              </p:par>
+                              <p:par>
+                                <p:cTn id="9" presetID="1" presetClass="entr" presetSubtype="0" fill="hold" grpId="0" nodeType="withEffect">
+                                  <p:stCondLst>
+                                    <p:cond delay="0"/>
+                                  </p:stCondLst>
+                                  <p:childTnLst>
+                                    <p:set>
+                                      <p:cBhvr>
+                                        <p:cTn id="10" dur="1" fill="hold">
+                                          <p:stCondLst>
+                                            <p:cond delay="0"/>
+                                          </p:stCondLst>
+                                        </p:cTn>
+                                        <p:tgtEl>
+                                          <p:spTgt spid="3">
+                                            <p:txEl>
+                                              <p:pRg st="2" end="2"/>
+                                            </p:txEl>
+                                          </p:spTgt>
+                                        </p:tgtEl>
+                                        <p:attrNameLst>
+                                          <p:attrName>style.visibility</p:attrName>
+                                        </p:attrNameLst>
+                                      </p:cBhvr>
+                                      <p:to>
+                                        <p:strVal val="visible"/>
+                                      </p:to>
+                                    </p:set>
+                                  </p:childTnLst>
+                                </p:cTn>
+                              </p:par>
+                            </p:childTnLst>
+                          </p:cTn>
+                        </p:par>
+                      </p:childTnLst>
+                    </p:cTn>
+                  </p:par>
+                  <p:par>
+                    <p:cTn id="11" fill="hold">
+                      <p:stCondLst>
+                        <p:cond delay="indefinite"/>
+                      </p:stCondLst>
+                      <p:childTnLst>
+                        <p:par>
+                          <p:cTn id="12" fill="hold">
+                            <p:stCondLst>
+                              <p:cond delay="0"/>
+                            </p:stCondLst>
+                            <p:childTnLst>
+                              <p:par>
+                                <p:cTn id="13" presetID="1" presetClass="entr" presetSubtype="0" fill="hold" grpId="0" nodeType="clickEffect">
+                                  <p:stCondLst>
+                                    <p:cond delay="0"/>
+                                  </p:stCondLst>
+                                  <p:childTnLst>
+                                    <p:set>
+                                      <p:cBhvr>
+                                        <p:cTn id="14" dur="1" fill="hold">
+                                          <p:stCondLst>
+                                            <p:cond delay="0"/>
+                                          </p:stCondLst>
+                                        </p:cTn>
+                                        <p:tgtEl>
+                                          <p:spTgt spid="3">
+                                            <p:txEl>
+                                              <p:pRg st="4" end="4"/>
+                                            </p:txEl>
+                                          </p:spTgt>
+                                        </p:tgtEl>
+                                        <p:attrNameLst>
+                                          <p:attrName>style.visibility</p:attrName>
+                                        </p:attrNameLst>
+                                      </p:cBhvr>
+                                      <p:to>
+                                        <p:strVal val="visible"/>
+                                      </p:to>
+                                    </p:set>
+                                  </p:childTnLst>
+                                </p:cTn>
+                              </p:par>
+                              <p:par>
+                                <p:cTn id="15" presetID="1" presetClass="entr" presetSubtype="0" fill="hold" grpId="0" nodeType="withEffect">
+                                  <p:stCondLst>
+                                    <p:cond delay="0"/>
+                                  </p:stCondLst>
+                                  <p:childTnLst>
+                                    <p:set>
+                                      <p:cBhvr>
+                                        <p:cTn id="16" dur="1" fill="hold">
+                                          <p:stCondLst>
+                                            <p:cond delay="0"/>
+                                          </p:stCondLst>
+                                        </p:cTn>
+                                        <p:tgtEl>
+                                          <p:spTgt spid="3">
+                                            <p:txEl>
+                                              <p:pRg st="5" end="5"/>
+                                            </p:txEl>
+                                          </p:spTgt>
+                                        </p:tgtEl>
+                                        <p:attrNameLst>
+                                          <p:attrName>style.visibility</p:attrName>
+                                        </p:attrNameLst>
+                                      </p:cBhvr>
+                                      <p:to>
+                                        <p:strVal val="visible"/>
+                                      </p:to>
+                                    </p:set>
+                                  </p:childTnLst>
+                                </p:cTn>
+                              </p:par>
+                              <p:par>
+                                <p:cTn id="17" presetID="1" presetClass="entr" presetSubtype="0" fill="hold" grpId="0" nodeType="withEffect">
+                                  <p:stCondLst>
+                                    <p:cond delay="0"/>
+                                  </p:stCondLst>
+                                  <p:childTnLst>
+                                    <p:set>
+                                      <p:cBhvr>
+                                        <p:cTn id="18" dur="1" fill="hold">
+                                          <p:stCondLst>
+                                            <p:cond delay="0"/>
+                                          </p:stCondLst>
+                                        </p:cTn>
+                                        <p:tgtEl>
+                                          <p:spTgt spid="3">
+                                            <p:txEl>
+                                              <p:pRg st="6" end="6"/>
+                                            </p:txEl>
+                                          </p:spTgt>
+                                        </p:tgtEl>
+                                        <p:attrNameLst>
+                                          <p:attrName>style.visibility</p:attrName>
+                                        </p:attrNameLst>
+                                      </p:cBhvr>
+                                      <p:to>
+                                        <p:strVal val="visible"/>
+                                      </p:to>
+                                    </p:set>
+                                  </p:childTnLst>
+                                </p:cTn>
+                              </p:par>
+                            </p:childTnLst>
+                          </p:cTn>
+                        </p:par>
+                      </p:childTnLst>
+                    </p:cTn>
+                  </p:par>
+                  <p:par>
+                    <p:cTn id="19" fill="hold">
+                      <p:stCondLst>
+                        <p:cond delay="indefinite"/>
+                      </p:stCondLst>
+                      <p:childTnLst>
+                        <p:par>
+                          <p:cTn id="20" fill="hold">
+                            <p:stCondLst>
+                              <p:cond delay="0"/>
+                            </p:stCondLst>
+                            <p:childTnLst>
+                              <p:par>
+                                <p:cTn id="21" presetID="1" presetClass="entr" presetSubtype="0" fill="hold" grpId="0" nodeType="clickEffect">
+                                  <p:stCondLst>
+                                    <p:cond delay="0"/>
+                                  </p:stCondLst>
+                                  <p:childTnLst>
+                                    <p:set>
+                                      <p:cBhvr>
+                                        <p:cTn id="22" dur="1" fill="hold">
+                                          <p:stCondLst>
+                                            <p:cond delay="0"/>
+                                          </p:stCondLst>
+                                        </p:cTn>
+                                        <p:tgtEl>
+                                          <p:spTgt spid="3">
+                                            <p:txEl>
+                                              <p:pRg st="8" end="8"/>
+                                            </p:txEl>
+                                          </p:spTgt>
+                                        </p:tgtEl>
+                                        <p:attrNameLst>
+                                          <p:attrName>style.visibility</p:attrName>
+                                        </p:attrNameLst>
+                                      </p:cBhvr>
+                                      <p:to>
+                                        <p:strVal val="visible"/>
+                                      </p:to>
+                                    </p:set>
+                                  </p:childTnLst>
+                                </p:cTn>
+                              </p:par>
+                              <p:par>
+                                <p:cTn id="23" presetID="1" presetClass="entr" presetSubtype="0" fill="hold" grpId="0" nodeType="withEffect">
+                                  <p:stCondLst>
+                                    <p:cond delay="0"/>
+                                  </p:stCondLst>
+                                  <p:childTnLst>
+                                    <p:set>
+                                      <p:cBhvr>
+                                        <p:cTn id="24" dur="1" fill="hold">
+                                          <p:stCondLst>
+                                            <p:cond delay="0"/>
+                                          </p:stCondLst>
+                                        </p:cTn>
+                                        <p:tgtEl>
+                                          <p:spTgt spid="3">
+                                            <p:txEl>
+                                              <p:pRg st="9" end="9"/>
+                                            </p:txEl>
+                                          </p:spTgt>
+                                        </p:tgtEl>
+                                        <p:attrNameLst>
+                                          <p:attrName>style.visibility</p:attrName>
+                                        </p:attrNameLst>
+                                      </p:cBhvr>
+                                      <p:to>
+                                        <p:strVal val="visible"/>
+                                      </p:to>
+                                    </p:set>
+                                  </p:childTnLst>
+                                </p:cTn>
+                              </p:par>
+                            </p:childTnLst>
+                          </p:cTn>
+                        </p:par>
+                      </p:childTnLst>
+                    </p:cTn>
+                  </p:par>
+                </p:childTnLst>
+              </p:cTn>
+              <p:prevCondLst>
+                <p:cond evt="onPrev" delay="0">
+                  <p:tgtEl>
+                    <p:sldTgt/>
+                  </p:tgtEl>
+                </p:cond>
+              </p:prevCondLst>
+              <p:nextCondLst>
+                <p:cond evt="onNext" delay="0">
+                  <p:tgtEl>
+                    <p:sldTgt/>
+                  </p:tgtEl>
+                </p:cond>
+              </p:nextCondLst>
+            </p:seq>
+          </p:childTnLst>
+        </p:cTn>
+      </p:par>
+    </p:tnLst>
+    <p:bldLst>
+      <p:bldP spid="3" grpId="0" build="p"/>
+    </p:bldLst>
+  </p:timing>
+</p:sld>
+</file>
+
+<file path=ppt/slides/slide7.xml><?xml version="1.0" encoding="utf-8"?>
+<p:sld xmlns:a="http://schemas.openxmlformats.org/drawingml/2006/main" xmlns:r="http://schemas.openxmlformats.org/officeDocument/2006/relationships" xmlns:p="http://schemas.openxmlformats.org/presentationml/2006/main">
+  <p:cSld>
+    <p:spTree>
+      <p:nvGrpSpPr>
         <p:cNvPr id="1" name="">
           <a:extLst>
             <a:ext uri="{FF2B5EF4-FFF2-40B4-BE49-F238E27FC236}">
@@ -16527,7 +21357,7 @@
             <a:fld id="{45C00377-489B-40EC-B059-26BDDD2E89B9}" type="slidenum">
               <a:rPr lang="en-US" smtClean="0"/>
               <a:pPr/>
-              <a:t>5</a:t>
+              <a:t>7</a:t>
             </a:fld>
             <a:endParaRPr lang="en-US"/>
           </a:p>
@@ -16537,260 +21367,6 @@
     <p:extLst>
       <p:ext uri="{BB962C8B-B14F-4D97-AF65-F5344CB8AC3E}">
         <p14:creationId xmlns:p14="http://schemas.microsoft.com/office/powerpoint/2010/main" val="538422726"/>
-      </p:ext>
-    </p:extLst>
-  </p:cSld>
-  <p:clrMapOvr>
-    <a:masterClrMapping/>
-  </p:clrMapOvr>
-</p:sld>
-</file>
-
-<file path=ppt/slides/slide6.xml><?xml version="1.0" encoding="utf-8"?>
-<p:sld xmlns:a="http://schemas.openxmlformats.org/drawingml/2006/main" xmlns:r="http://schemas.openxmlformats.org/officeDocument/2006/relationships" xmlns:p="http://schemas.openxmlformats.org/presentationml/2006/main">
-  <p:cSld>
-    <p:spTree>
-      <p:nvGrpSpPr>
-        <p:cNvPr id="1" name=""/>
-        <p:cNvGrpSpPr/>
-        <p:nvPr/>
-      </p:nvGrpSpPr>
-      <p:grpSpPr>
-        <a:xfrm>
-          <a:off x="0" y="0"/>
-          <a:ext cx="0" cy="0"/>
-          <a:chOff x="0" y="0"/>
-          <a:chExt cx="0" cy="0"/>
-        </a:xfrm>
-      </p:grpSpPr>
-      <p:sp>
-        <p:nvSpPr>
-          <p:cNvPr id="4" name="Slide Number Placeholder 3">
-            <a:extLst>
-              <a:ext uri="{FF2B5EF4-FFF2-40B4-BE49-F238E27FC236}">
-                <a16:creationId xmlns:a16="http://schemas.microsoft.com/office/drawing/2014/main" id="{C4ED73F4-D104-466A-88A1-7E877D73A09E}"/>
-              </a:ext>
-            </a:extLst>
-          </p:cNvPr>
-          <p:cNvSpPr>
-            <a:spLocks noGrp="1"/>
-          </p:cNvSpPr>
-          <p:nvPr>
-            <p:ph type="sldNum" sz="quarter" idx="11"/>
-          </p:nvPr>
-        </p:nvSpPr>
-        <p:spPr/>
-        <p:txBody>
-          <a:bodyPr/>
-          <a:lstStyle/>
-          <a:p>
-            <a:fld id="{45C00377-489B-40EC-B059-26BDDD2E89B9}" type="slidenum">
-              <a:rPr lang="en-US" smtClean="0"/>
-              <a:pPr/>
-              <a:t>6</a:t>
-            </a:fld>
-            <a:endParaRPr lang="en-US"/>
-          </a:p>
-        </p:txBody>
-      </p:sp>
-      <p:sp>
-        <p:nvSpPr>
-          <p:cNvPr id="2" name="Title 1">
-            <a:extLst>
-              <a:ext uri="{FF2B5EF4-FFF2-40B4-BE49-F238E27FC236}">
-                <a16:creationId xmlns:a16="http://schemas.microsoft.com/office/drawing/2014/main" id="{1727BF50-FD66-6235-C76B-2B50EB662B38}"/>
-              </a:ext>
-            </a:extLst>
-          </p:cNvPr>
-          <p:cNvSpPr>
-            <a:spLocks noGrp="1"/>
-          </p:cNvSpPr>
-          <p:nvPr>
-            <p:ph type="title"/>
-          </p:nvPr>
-        </p:nvSpPr>
-        <p:spPr/>
-        <p:txBody>
-          <a:bodyPr>
-            <a:normAutofit fontScale="90000"/>
-          </a:bodyPr>
-          <a:lstStyle/>
-          <a:p>
-            <a:r>
-              <a:rPr lang="en-US" dirty="0"/>
-              <a:t>Variation and distribution </a:t>
-            </a:r>
-          </a:p>
-        </p:txBody>
-      </p:sp>
-    </p:spTree>
-    <p:extLst>
-      <p:ext uri="{BB962C8B-B14F-4D97-AF65-F5344CB8AC3E}">
-        <p14:creationId xmlns:p14="http://schemas.microsoft.com/office/powerpoint/2010/main" val="1868022990"/>
-      </p:ext>
-    </p:extLst>
-  </p:cSld>
-  <p:clrMapOvr>
-    <a:masterClrMapping/>
-  </p:clrMapOvr>
-</p:sld>
-</file>
-
-<file path=ppt/slides/slide7.xml><?xml version="1.0" encoding="utf-8"?>
-<p:sld xmlns:a="http://schemas.openxmlformats.org/drawingml/2006/main" xmlns:r="http://schemas.openxmlformats.org/officeDocument/2006/relationships" xmlns:p="http://schemas.openxmlformats.org/presentationml/2006/main">
-  <p:cSld>
-    <p:spTree>
-      <p:nvGrpSpPr>
-        <p:cNvPr id="1" name=""/>
-        <p:cNvGrpSpPr/>
-        <p:nvPr/>
-      </p:nvGrpSpPr>
-      <p:grpSpPr>
-        <a:xfrm>
-          <a:off x="0" y="0"/>
-          <a:ext cx="0" cy="0"/>
-          <a:chOff x="0" y="0"/>
-          <a:chExt cx="0" cy="0"/>
-        </a:xfrm>
-      </p:grpSpPr>
-      <p:sp>
-        <p:nvSpPr>
-          <p:cNvPr id="2" name="Title 1">
-            <a:extLst>
-              <a:ext uri="{FF2B5EF4-FFF2-40B4-BE49-F238E27FC236}">
-                <a16:creationId xmlns:a16="http://schemas.microsoft.com/office/drawing/2014/main" id="{0306C600-AB03-A85B-A5F6-526034814841}"/>
-              </a:ext>
-            </a:extLst>
-          </p:cNvPr>
-          <p:cNvSpPr>
-            <a:spLocks noGrp="1"/>
-          </p:cNvSpPr>
-          <p:nvPr>
-            <p:ph type="title"/>
-          </p:nvPr>
-        </p:nvSpPr>
-        <p:spPr/>
-        <p:txBody>
-          <a:bodyPr/>
-          <a:lstStyle/>
-          <a:p>
-            <a:r>
-              <a:rPr lang="en-US" dirty="0"/>
-              <a:t>Measures of variability</a:t>
-            </a:r>
-          </a:p>
-        </p:txBody>
-      </p:sp>
-      <p:sp>
-        <p:nvSpPr>
-          <p:cNvPr id="3" name="Content Placeholder 2">
-            <a:extLst>
-              <a:ext uri="{FF2B5EF4-FFF2-40B4-BE49-F238E27FC236}">
-                <a16:creationId xmlns:a16="http://schemas.microsoft.com/office/drawing/2014/main" id="{2CF9311E-CBE6-3DD5-8A4F-B5CD2086BC0A}"/>
-              </a:ext>
-            </a:extLst>
-          </p:cNvPr>
-          <p:cNvSpPr>
-            <a:spLocks noGrp="1"/>
-          </p:cNvSpPr>
-          <p:nvPr>
-            <p:ph idx="1"/>
-          </p:nvPr>
-        </p:nvSpPr>
-        <p:spPr/>
-        <p:txBody>
-          <a:bodyPr/>
-          <a:lstStyle/>
-          <a:p>
-            <a:r>
-              <a:rPr lang="en-US" dirty="0"/>
-              <a:t>The degree of spread or distribution of the data.	</a:t>
-            </a:r>
-          </a:p>
-          <a:p>
-            <a:pPr lvl="1"/>
-            <a:endParaRPr lang="en-US" dirty="0"/>
-          </a:p>
-          <a:p>
-            <a:r>
-              <a:rPr lang="en-US" dirty="0"/>
-              <a:t>Can be used to show consistency or meaningful differences.</a:t>
-            </a:r>
-          </a:p>
-          <a:p>
-            <a:pPr lvl="1"/>
-            <a:endParaRPr lang="en-US" dirty="0"/>
-          </a:p>
-          <a:p>
-            <a:r>
-              <a:rPr lang="en-US" dirty="0"/>
-              <a:t>Methods:</a:t>
-            </a:r>
-          </a:p>
-          <a:p>
-            <a:pPr lvl="1"/>
-            <a:r>
-              <a:rPr lang="en-US" dirty="0"/>
-              <a:t>Range</a:t>
-            </a:r>
-          </a:p>
-          <a:p>
-            <a:pPr lvl="1"/>
-            <a:r>
-              <a:rPr lang="en-US" dirty="0"/>
-              <a:t>IQR</a:t>
-            </a:r>
-          </a:p>
-          <a:p>
-            <a:pPr lvl="1"/>
-            <a:r>
-              <a:rPr lang="en-US" dirty="0"/>
-              <a:t>Variance</a:t>
-            </a:r>
-          </a:p>
-          <a:p>
-            <a:pPr lvl="1"/>
-            <a:r>
-              <a:rPr lang="en-US" dirty="0"/>
-              <a:t>Standard Deviation</a:t>
-            </a:r>
-          </a:p>
-        </p:txBody>
-      </p:sp>
-      <p:sp>
-        <p:nvSpPr>
-          <p:cNvPr id="4" name="Slide Number Placeholder 3">
-            <a:extLst>
-              <a:ext uri="{FF2B5EF4-FFF2-40B4-BE49-F238E27FC236}">
-                <a16:creationId xmlns:a16="http://schemas.microsoft.com/office/drawing/2014/main" id="{473CEEB2-1A75-D5E1-B376-ADB7F27AA3C7}"/>
-              </a:ext>
-            </a:extLst>
-          </p:cNvPr>
-          <p:cNvSpPr>
-            <a:spLocks noGrp="1"/>
-          </p:cNvSpPr>
-          <p:nvPr>
-            <p:ph type="sldNum" sz="quarter" idx="12"/>
-          </p:nvPr>
-        </p:nvSpPr>
-        <p:spPr/>
-        <p:txBody>
-          <a:bodyPr/>
-          <a:lstStyle/>
-          <a:p>
-            <a:fld id="{45C00377-489B-40EC-B059-26BDDD2E89B9}" type="slidenum">
-              <a:rPr lang="en-US" smtClean="0"/>
-              <a:pPr/>
-              <a:t>7</a:t>
-            </a:fld>
-            <a:endParaRPr lang="en-US"/>
-          </a:p>
-        </p:txBody>
-      </p:sp>
-    </p:spTree>
-    <p:extLst>
-      <p:ext uri="{BB962C8B-B14F-4D97-AF65-F5344CB8AC3E}">
-        <p14:creationId xmlns:p14="http://schemas.microsoft.com/office/powerpoint/2010/main" val="3421327094"/>
       </p:ext>
     </p:extLst>
   </p:cSld>
@@ -16819,145 +21395,18 @@
       </p:grpSpPr>
       <p:sp>
         <p:nvSpPr>
-          <p:cNvPr id="2" name="Title 1">
-            <a:extLst>
-              <a:ext uri="{FF2B5EF4-FFF2-40B4-BE49-F238E27FC236}">
-                <a16:creationId xmlns:a16="http://schemas.microsoft.com/office/drawing/2014/main" id="{08CA7D61-3432-671B-3EFC-43F846227E36}"/>
-              </a:ext>
-            </a:extLst>
-          </p:cNvPr>
-          <p:cNvSpPr>
-            <a:spLocks noGrp="1"/>
-          </p:cNvSpPr>
-          <p:nvPr>
-            <p:ph type="title"/>
-          </p:nvPr>
-        </p:nvSpPr>
-        <p:spPr/>
-        <p:txBody>
-          <a:bodyPr/>
-          <a:lstStyle/>
-          <a:p>
-            <a:r>
-              <a:rPr lang="en-US" dirty="0"/>
-              <a:t>Range</a:t>
-            </a:r>
-          </a:p>
-        </p:txBody>
-      </p:sp>
-      <p:sp>
-        <p:nvSpPr>
-          <p:cNvPr id="3" name="Content Placeholder 2">
-            <a:extLst>
-              <a:ext uri="{FF2B5EF4-FFF2-40B4-BE49-F238E27FC236}">
-                <a16:creationId xmlns:a16="http://schemas.microsoft.com/office/drawing/2014/main" id="{4BFE3BC2-A03B-D6FE-A07F-A2B5C66A40B1}"/>
-              </a:ext>
-            </a:extLst>
-          </p:cNvPr>
-          <p:cNvSpPr>
-            <a:spLocks noGrp="1"/>
-          </p:cNvSpPr>
-          <p:nvPr>
-            <p:ph idx="1"/>
-          </p:nvPr>
-        </p:nvSpPr>
-        <p:spPr/>
-        <p:txBody>
-          <a:bodyPr>
-            <a:normAutofit/>
-          </a:bodyPr>
-          <a:lstStyle/>
-          <a:p>
-            <a:r>
-              <a:rPr lang="en-US" dirty="0"/>
-              <a:t>Range: distance between the smallest and largest values.</a:t>
-            </a:r>
-          </a:p>
-          <a:p>
-            <a:pPr lvl="1"/>
-            <a:r>
-              <a:rPr lang="en-US" dirty="0"/>
-              <a:t>Sensitive to outliers</a:t>
-            </a:r>
-          </a:p>
-          <a:p>
-            <a:pPr lvl="1"/>
-            <a:endParaRPr lang="en-US" dirty="0"/>
-          </a:p>
-          <a:p>
-            <a:r>
-              <a:rPr lang="en-US" dirty="0"/>
-              <a:t>IQR: spread of the middle 50% of the data.</a:t>
-            </a:r>
-          </a:p>
-          <a:p>
-            <a:pPr lvl="1"/>
-            <a:r>
-              <a:rPr lang="en-US" dirty="0"/>
-              <a:t>Less sensitive to outliers</a:t>
-            </a:r>
-          </a:p>
-          <a:p>
-            <a:pPr lvl="1"/>
-            <a:endParaRPr lang="en-US" dirty="0"/>
-          </a:p>
-          <a:p>
-            <a:r>
-              <a:rPr lang="en-US" dirty="0">
-                <a:solidFill>
-                  <a:schemeClr val="bg2">
-                    <a:lumMod val="75000"/>
-                  </a:schemeClr>
-                </a:solidFill>
-              </a:rPr>
-              <a:t>Standard Deviation: square root of variance</a:t>
-            </a:r>
-          </a:p>
-          <a:p>
-            <a:pPr lvl="1"/>
-            <a:r>
-              <a:rPr lang="en-US" dirty="0">
-                <a:solidFill>
-                  <a:schemeClr val="bg2">
-                    <a:lumMod val="75000"/>
-                  </a:schemeClr>
-                </a:solidFill>
-              </a:rPr>
-              <a:t>Typical deviation from the mean </a:t>
-            </a:r>
-          </a:p>
-          <a:p>
-            <a:pPr lvl="1"/>
-            <a:r>
-              <a:rPr lang="en-US" dirty="0">
-                <a:solidFill>
-                  <a:schemeClr val="bg2">
-                    <a:lumMod val="75000"/>
-                  </a:schemeClr>
-                </a:solidFill>
-              </a:rPr>
-              <a:t>Same units as the data</a:t>
-            </a:r>
-          </a:p>
-          <a:p>
-            <a:endParaRPr lang="en-US" dirty="0"/>
-          </a:p>
-        </p:txBody>
-      </p:sp>
-      <p:sp>
-        <p:nvSpPr>
           <p:cNvPr id="4" name="Slide Number Placeholder 3">
             <a:extLst>
               <a:ext uri="{FF2B5EF4-FFF2-40B4-BE49-F238E27FC236}">
-                <a16:creationId xmlns:a16="http://schemas.microsoft.com/office/drawing/2014/main" id="{F61C70DC-37FB-87E0-5D03-00D92FDD6D3C}"/>
-              </a:ext>
-            </a:extLst>
-          </p:cNvPr>
-          <p:cNvSpPr>
-            <a:spLocks noGrp="1"/>
-          </p:cNvSpPr>
-          <p:nvPr>
-            <p:ph type="sldNum" sz="quarter" idx="12"/>
+                <a16:creationId xmlns:a16="http://schemas.microsoft.com/office/drawing/2014/main" id="{C4ED73F4-D104-466A-88A1-7E877D73A09E}"/>
+              </a:ext>
+            </a:extLst>
+          </p:cNvPr>
+          <p:cNvSpPr>
+            <a:spLocks noGrp="1"/>
+          </p:cNvSpPr>
+          <p:nvPr>
+            <p:ph type="sldNum" sz="quarter" idx="11"/>
           </p:nvPr>
         </p:nvSpPr>
         <p:spPr/>
@@ -16970,14 +21419,44 @@
               <a:pPr/>
               <a:t>8</a:t>
             </a:fld>
-            <a:endParaRPr lang="en-US" dirty="0"/>
+            <a:endParaRPr lang="en-US"/>
+          </a:p>
+        </p:txBody>
+      </p:sp>
+      <p:sp>
+        <p:nvSpPr>
+          <p:cNvPr id="2" name="Title 1">
+            <a:extLst>
+              <a:ext uri="{FF2B5EF4-FFF2-40B4-BE49-F238E27FC236}">
+                <a16:creationId xmlns:a16="http://schemas.microsoft.com/office/drawing/2014/main" id="{1727BF50-FD66-6235-C76B-2B50EB662B38}"/>
+              </a:ext>
+            </a:extLst>
+          </p:cNvPr>
+          <p:cNvSpPr>
+            <a:spLocks noGrp="1"/>
+          </p:cNvSpPr>
+          <p:nvPr>
+            <p:ph type="title"/>
+          </p:nvPr>
+        </p:nvSpPr>
+        <p:spPr/>
+        <p:txBody>
+          <a:bodyPr>
+            <a:normAutofit fontScale="90000"/>
+          </a:bodyPr>
+          <a:lstStyle/>
+          <a:p>
+            <a:r>
+              <a:rPr lang="en-US" dirty="0"/>
+              <a:t>How much does it vary?</a:t>
+            </a:r>
           </a:p>
         </p:txBody>
       </p:sp>
     </p:spTree>
     <p:extLst>
       <p:ext uri="{BB962C8B-B14F-4D97-AF65-F5344CB8AC3E}">
-        <p14:creationId xmlns:p14="http://schemas.microsoft.com/office/powerpoint/2010/main" val="4206175980"/>
+        <p14:creationId xmlns:p14="http://schemas.microsoft.com/office/powerpoint/2010/main" val="1868022990"/>
       </p:ext>
     </p:extLst>
   </p:cSld>
@@ -16992,13 +21471,7 @@
   <p:cSld>
     <p:spTree>
       <p:nvGrpSpPr>
-        <p:cNvPr id="1" name="">
-          <a:extLst>
-            <a:ext uri="{FF2B5EF4-FFF2-40B4-BE49-F238E27FC236}">
-              <a16:creationId xmlns:a16="http://schemas.microsoft.com/office/drawing/2014/main" id="{8AAAEA5E-7577-2AE3-0E8B-A2EACB10EEDF}"/>
-            </a:ext>
-          </a:extLst>
-        </p:cNvPr>
+        <p:cNvPr id="1" name=""/>
         <p:cNvGrpSpPr/>
         <p:nvPr/>
       </p:nvGrpSpPr>
@@ -17015,7 +21488,7 @@
           <p:cNvPr id="2" name="Title 1">
             <a:extLst>
               <a:ext uri="{FF2B5EF4-FFF2-40B4-BE49-F238E27FC236}">
-                <a16:creationId xmlns:a16="http://schemas.microsoft.com/office/drawing/2014/main" id="{3CBFB0CF-2A71-D3A2-2FF0-1B2A0CE00118}"/>
+                <a16:creationId xmlns:a16="http://schemas.microsoft.com/office/drawing/2014/main" id="{0306C600-AB03-A85B-A5F6-526034814841}"/>
               </a:ext>
             </a:extLst>
           </p:cNvPr>
@@ -17033,7 +21506,83 @@
           <a:p>
             <a:r>
               <a:rPr lang="en-US" dirty="0"/>
-              <a:t>Range and IQR</a:t>
+              <a:t>Measures of variability</a:t>
+            </a:r>
+          </a:p>
+        </p:txBody>
+      </p:sp>
+      <p:sp>
+        <p:nvSpPr>
+          <p:cNvPr id="3" name="Content Placeholder 2">
+            <a:extLst>
+              <a:ext uri="{FF2B5EF4-FFF2-40B4-BE49-F238E27FC236}">
+                <a16:creationId xmlns:a16="http://schemas.microsoft.com/office/drawing/2014/main" id="{2CF9311E-CBE6-3DD5-8A4F-B5CD2086BC0A}"/>
+              </a:ext>
+            </a:extLst>
+          </p:cNvPr>
+          <p:cNvSpPr>
+            <a:spLocks noGrp="1"/>
+          </p:cNvSpPr>
+          <p:nvPr>
+            <p:ph idx="1"/>
+          </p:nvPr>
+        </p:nvSpPr>
+        <p:spPr/>
+        <p:txBody>
+          <a:bodyPr/>
+          <a:lstStyle/>
+          <a:p>
+            <a:r>
+              <a:rPr lang="en-US" dirty="0"/>
+              <a:t>The degree of spread or distribution of the data.	</a:t>
+            </a:r>
+          </a:p>
+          <a:p>
+            <a:pPr lvl="1"/>
+            <a:endParaRPr lang="en-US" dirty="0"/>
+          </a:p>
+          <a:p>
+            <a:r>
+              <a:rPr lang="en-US" dirty="0"/>
+              <a:t>Can be used to show consistency or meaningful differences.</a:t>
+            </a:r>
+          </a:p>
+          <a:p>
+            <a:pPr lvl="1"/>
+            <a:endParaRPr lang="en-US" dirty="0"/>
+          </a:p>
+          <a:p>
+            <a:r>
+              <a:rPr lang="en-US" dirty="0"/>
+              <a:t>Methods:</a:t>
+            </a:r>
+          </a:p>
+          <a:p>
+            <a:pPr lvl="1"/>
+            <a:r>
+              <a:rPr lang="en-US" dirty="0"/>
+              <a:t>Range</a:t>
+            </a:r>
+          </a:p>
+          <a:p>
+            <a:pPr lvl="1"/>
+            <a:r>
+              <a:rPr lang="en-US" dirty="0"/>
+              <a:t>IQR</a:t>
+            </a:r>
+          </a:p>
+          <a:p>
+            <a:pPr lvl="1"/>
+            <a:r>
+              <a:rPr lang="en-US" dirty="0"/>
+              <a:t>Variance</a:t>
+            </a:r>
+          </a:p>
+          <a:p>
+            <a:pPr lvl="1"/>
+            <a:r>
+              <a:rPr lang="en-US" dirty="0"/>
+              <a:t>Standard Deviation</a:t>
             </a:r>
           </a:p>
         </p:txBody>
@@ -17043,7 +21592,7 @@
           <p:cNvPr id="4" name="Slide Number Placeholder 3">
             <a:extLst>
               <a:ext uri="{FF2B5EF4-FFF2-40B4-BE49-F238E27FC236}">
-                <a16:creationId xmlns:a16="http://schemas.microsoft.com/office/drawing/2014/main" id="{FDD9E4FB-2395-2EC7-0828-BDF71DCE4A66}"/>
+                <a16:creationId xmlns:a16="http://schemas.microsoft.com/office/drawing/2014/main" id="{473CEEB2-1A75-D5E1-B376-ADB7F27AA3C7}"/>
               </a:ext>
             </a:extLst>
           </p:cNvPr>
@@ -17068,205 +21617,320 @@
           </a:p>
         </p:txBody>
       </p:sp>
-      <p:pic>
-        <p:nvPicPr>
-          <p:cNvPr id="9" name="Picture 8">
-            <a:extLst>
-              <a:ext uri="{FF2B5EF4-FFF2-40B4-BE49-F238E27FC236}">
-                <a16:creationId xmlns:a16="http://schemas.microsoft.com/office/drawing/2014/main" id="{870C3C5B-B049-1768-3B29-0B864DB2D1B2}"/>
-              </a:ext>
-            </a:extLst>
-          </p:cNvPr>
-          <p:cNvPicPr>
-            <a:picLocks noChangeAspect="1"/>
-          </p:cNvPicPr>
-          <p:nvPr/>
-        </p:nvPicPr>
-        <p:blipFill>
-          <a:blip r:embed="rId3"/>
-          <a:stretch>
-            <a:fillRect/>
-          </a:stretch>
-        </p:blipFill>
-        <p:spPr>
-          <a:xfrm>
-            <a:off x="3810000" y="2446866"/>
-            <a:ext cx="4876800" cy="2767013"/>
-          </a:xfrm>
-          <a:prstGeom prst="rect">
-            <a:avLst/>
-          </a:prstGeom>
-        </p:spPr>
-      </p:pic>
-      <p:cxnSp>
-        <p:nvCxnSpPr>
-          <p:cNvPr id="11" name="Straight Arrow Connector 10">
-            <a:extLst>
-              <a:ext uri="{FF2B5EF4-FFF2-40B4-BE49-F238E27FC236}">
-                <a16:creationId xmlns:a16="http://schemas.microsoft.com/office/drawing/2014/main" id="{4251B779-5782-62AB-EF5A-1689D42E8607}"/>
-              </a:ext>
-            </a:extLst>
-          </p:cNvPr>
-          <p:cNvCxnSpPr/>
-          <p:nvPr/>
-        </p:nvCxnSpPr>
-        <p:spPr>
-          <a:xfrm>
-            <a:off x="5283200" y="4741333"/>
-            <a:ext cx="1930400" cy="0"/>
-          </a:xfrm>
-          <a:prstGeom prst="straightConnector1">
-            <a:avLst/>
-          </a:prstGeom>
-          <a:ln w="28575">
-            <a:headEnd type="triangle"/>
-            <a:tailEnd type="triangle"/>
-          </a:ln>
-        </p:spPr>
-        <p:style>
-          <a:lnRef idx="1">
-            <a:schemeClr val="accent1"/>
-          </a:lnRef>
-          <a:fillRef idx="0">
-            <a:schemeClr val="accent1"/>
-          </a:fillRef>
-          <a:effectRef idx="0">
-            <a:schemeClr val="accent1"/>
-          </a:effectRef>
-          <a:fontRef idx="minor">
-            <a:schemeClr val="tx1"/>
-          </a:fontRef>
-        </p:style>
-      </p:cxnSp>
-      <p:cxnSp>
-        <p:nvCxnSpPr>
-          <p:cNvPr id="12" name="Straight Arrow Connector 11">
-            <a:extLst>
-              <a:ext uri="{FF2B5EF4-FFF2-40B4-BE49-F238E27FC236}">
-                <a16:creationId xmlns:a16="http://schemas.microsoft.com/office/drawing/2014/main" id="{99A5919D-D89C-D771-B49D-57D20C3EA9D6}"/>
-              </a:ext>
-            </a:extLst>
-          </p:cNvPr>
-          <p:cNvCxnSpPr>
-            <a:cxnSpLocks/>
-          </p:cNvCxnSpPr>
-          <p:nvPr/>
-        </p:nvCxnSpPr>
-        <p:spPr>
-          <a:xfrm>
-            <a:off x="4267201" y="2946399"/>
-            <a:ext cx="3962399" cy="0"/>
-          </a:xfrm>
-          <a:prstGeom prst="straightConnector1">
-            <a:avLst/>
-          </a:prstGeom>
-          <a:ln w="28575">
-            <a:headEnd type="triangle"/>
-            <a:tailEnd type="triangle"/>
-          </a:ln>
-        </p:spPr>
-        <p:style>
-          <a:lnRef idx="1">
-            <a:schemeClr val="accent1"/>
-          </a:lnRef>
-          <a:fillRef idx="0">
-            <a:schemeClr val="accent1"/>
-          </a:fillRef>
-          <a:effectRef idx="0">
-            <a:schemeClr val="accent1"/>
-          </a:effectRef>
-          <a:fontRef idx="minor">
-            <a:schemeClr val="tx1"/>
-          </a:fontRef>
-        </p:style>
-      </p:cxnSp>
-      <p:sp>
-        <p:nvSpPr>
-          <p:cNvPr id="14" name="TextBox 13">
-            <a:extLst>
-              <a:ext uri="{FF2B5EF4-FFF2-40B4-BE49-F238E27FC236}">
-                <a16:creationId xmlns:a16="http://schemas.microsoft.com/office/drawing/2014/main" id="{DC05E2EB-CC66-E792-FE91-C7F6FF66FEB0}"/>
-              </a:ext>
-            </a:extLst>
-          </p:cNvPr>
-          <p:cNvSpPr txBox="1"/>
-          <p:nvPr/>
-        </p:nvSpPr>
-        <p:spPr>
-          <a:xfrm>
-            <a:off x="5890898" y="2473854"/>
-            <a:ext cx="715004" cy="369332"/>
-          </a:xfrm>
-          <a:prstGeom prst="rect">
-            <a:avLst/>
-          </a:prstGeom>
-          <a:noFill/>
-        </p:spPr>
-        <p:txBody>
-          <a:bodyPr wrap="none" rtlCol="0">
-            <a:spAutoFit/>
-          </a:bodyPr>
-          <a:lstStyle/>
-          <a:p>
-            <a:r>
-              <a:rPr lang="en-US" dirty="0"/>
-              <a:t>range</a:t>
-            </a:r>
-          </a:p>
-        </p:txBody>
-      </p:sp>
-      <p:sp>
-        <p:nvSpPr>
-          <p:cNvPr id="15" name="TextBox 14">
-            <a:extLst>
-              <a:ext uri="{FF2B5EF4-FFF2-40B4-BE49-F238E27FC236}">
-                <a16:creationId xmlns:a16="http://schemas.microsoft.com/office/drawing/2014/main" id="{427B8F54-2B58-134B-0684-97B1817A1CD3}"/>
-              </a:ext>
-            </a:extLst>
-          </p:cNvPr>
-          <p:cNvSpPr txBox="1"/>
-          <p:nvPr/>
-        </p:nvSpPr>
-        <p:spPr>
-          <a:xfrm>
-            <a:off x="5570041" y="4741333"/>
-            <a:ext cx="1356718" cy="646331"/>
-          </a:xfrm>
-          <a:prstGeom prst="rect">
-            <a:avLst/>
-          </a:prstGeom>
-          <a:noFill/>
-        </p:spPr>
-        <p:txBody>
-          <a:bodyPr wrap="none" rtlCol="0">
-            <a:spAutoFit/>
-          </a:bodyPr>
-          <a:lstStyle/>
-          <a:p>
-            <a:r>
-              <a:rPr lang="en-US" dirty="0"/>
-              <a:t>Interquartile</a:t>
-            </a:r>
-          </a:p>
-          <a:p>
-            <a:pPr algn="ctr"/>
-            <a:r>
-              <a:rPr lang="en-US" dirty="0"/>
-              <a:t>range</a:t>
-            </a:r>
-          </a:p>
-        </p:txBody>
-      </p:sp>
     </p:spTree>
     <p:extLst>
       <p:ext uri="{BB962C8B-B14F-4D97-AF65-F5344CB8AC3E}">
-        <p14:creationId xmlns:p14="http://schemas.microsoft.com/office/powerpoint/2010/main" val="3410868396"/>
+        <p14:creationId xmlns:p14="http://schemas.microsoft.com/office/powerpoint/2010/main" val="3421327094"/>
       </p:ext>
     </p:extLst>
   </p:cSld>
   <p:clrMapOvr>
     <a:masterClrMapping/>
   </p:clrMapOvr>
+  <p:timing>
+    <p:tnLst>
+      <p:par>
+        <p:cTn id="1" dur="indefinite" restart="never" nodeType="tmRoot">
+          <p:childTnLst>
+            <p:seq concurrent="1" nextAc="seek">
+              <p:cTn id="2" dur="indefinite" nodeType="mainSeq">
+                <p:childTnLst>
+                  <p:par>
+                    <p:cTn id="3" fill="hold">
+                      <p:stCondLst>
+                        <p:cond delay="indefinite"/>
+                      </p:stCondLst>
+                      <p:childTnLst>
+                        <p:par>
+                          <p:cTn id="4" fill="hold">
+                            <p:stCondLst>
+                              <p:cond delay="0"/>
+                            </p:stCondLst>
+                            <p:childTnLst>
+                              <p:par>
+                                <p:cTn id="5" presetID="1" presetClass="entr" presetSubtype="0" fill="hold" grpId="0" nodeType="clickEffect">
+                                  <p:stCondLst>
+                                    <p:cond delay="0"/>
+                                  </p:stCondLst>
+                                  <p:childTnLst>
+                                    <p:set>
+                                      <p:cBhvr>
+                                        <p:cTn id="6" dur="1" fill="hold">
+                                          <p:stCondLst>
+                                            <p:cond delay="0"/>
+                                          </p:stCondLst>
+                                        </p:cTn>
+                                        <p:tgtEl>
+                                          <p:spTgt spid="3">
+                                            <p:txEl>
+                                              <p:pRg st="0" end="0"/>
+                                            </p:txEl>
+                                          </p:spTgt>
+                                        </p:tgtEl>
+                                        <p:attrNameLst>
+                                          <p:attrName>style.visibility</p:attrName>
+                                        </p:attrNameLst>
+                                      </p:cBhvr>
+                                      <p:to>
+                                        <p:strVal val="visible"/>
+                                      </p:to>
+                                    </p:set>
+                                  </p:childTnLst>
+                                </p:cTn>
+                              </p:par>
+                            </p:childTnLst>
+                          </p:cTn>
+                        </p:par>
+                      </p:childTnLst>
+                    </p:cTn>
+                  </p:par>
+                  <p:par>
+                    <p:cTn id="7" fill="hold">
+                      <p:stCondLst>
+                        <p:cond delay="indefinite"/>
+                      </p:stCondLst>
+                      <p:childTnLst>
+                        <p:par>
+                          <p:cTn id="8" fill="hold">
+                            <p:stCondLst>
+                              <p:cond delay="0"/>
+                            </p:stCondLst>
+                            <p:childTnLst>
+                              <p:par>
+                                <p:cTn id="9" presetID="1" presetClass="entr" presetSubtype="0" fill="hold" grpId="0" nodeType="clickEffect">
+                                  <p:stCondLst>
+                                    <p:cond delay="0"/>
+                                  </p:stCondLst>
+                                  <p:childTnLst>
+                                    <p:set>
+                                      <p:cBhvr>
+                                        <p:cTn id="10" dur="1" fill="hold">
+                                          <p:stCondLst>
+                                            <p:cond delay="0"/>
+                                          </p:stCondLst>
+                                        </p:cTn>
+                                        <p:tgtEl>
+                                          <p:spTgt spid="3">
+                                            <p:txEl>
+                                              <p:pRg st="2" end="2"/>
+                                            </p:txEl>
+                                          </p:spTgt>
+                                        </p:tgtEl>
+                                        <p:attrNameLst>
+                                          <p:attrName>style.visibility</p:attrName>
+                                        </p:attrNameLst>
+                                      </p:cBhvr>
+                                      <p:to>
+                                        <p:strVal val="visible"/>
+                                      </p:to>
+                                    </p:set>
+                                  </p:childTnLst>
+                                </p:cTn>
+                              </p:par>
+                            </p:childTnLst>
+                          </p:cTn>
+                        </p:par>
+                      </p:childTnLst>
+                    </p:cTn>
+                  </p:par>
+                  <p:par>
+                    <p:cTn id="11" fill="hold">
+                      <p:stCondLst>
+                        <p:cond delay="indefinite"/>
+                      </p:stCondLst>
+                      <p:childTnLst>
+                        <p:par>
+                          <p:cTn id="12" fill="hold">
+                            <p:stCondLst>
+                              <p:cond delay="0"/>
+                            </p:stCondLst>
+                            <p:childTnLst>
+                              <p:par>
+                                <p:cTn id="13" presetID="1" presetClass="entr" presetSubtype="0" fill="hold" grpId="0" nodeType="clickEffect">
+                                  <p:stCondLst>
+                                    <p:cond delay="0"/>
+                                  </p:stCondLst>
+                                  <p:childTnLst>
+                                    <p:set>
+                                      <p:cBhvr>
+                                        <p:cTn id="14" dur="1" fill="hold">
+                                          <p:stCondLst>
+                                            <p:cond delay="0"/>
+                                          </p:stCondLst>
+                                        </p:cTn>
+                                        <p:tgtEl>
+                                          <p:spTgt spid="3">
+                                            <p:txEl>
+                                              <p:pRg st="4" end="4"/>
+                                            </p:txEl>
+                                          </p:spTgt>
+                                        </p:tgtEl>
+                                        <p:attrNameLst>
+                                          <p:attrName>style.visibility</p:attrName>
+                                        </p:attrNameLst>
+                                      </p:cBhvr>
+                                      <p:to>
+                                        <p:strVal val="visible"/>
+                                      </p:to>
+                                    </p:set>
+                                  </p:childTnLst>
+                                </p:cTn>
+                              </p:par>
+                              <p:par>
+                                <p:cTn id="15" presetID="1" presetClass="entr" presetSubtype="0" fill="hold" grpId="0" nodeType="withEffect">
+                                  <p:stCondLst>
+                                    <p:cond delay="0"/>
+                                  </p:stCondLst>
+                                  <p:childTnLst>
+                                    <p:set>
+                                      <p:cBhvr>
+                                        <p:cTn id="16" dur="1" fill="hold">
+                                          <p:stCondLst>
+                                            <p:cond delay="0"/>
+                                          </p:stCondLst>
+                                        </p:cTn>
+                                        <p:tgtEl>
+                                          <p:spTgt spid="3">
+                                            <p:txEl>
+                                              <p:pRg st="5" end="5"/>
+                                            </p:txEl>
+                                          </p:spTgt>
+                                        </p:tgtEl>
+                                        <p:attrNameLst>
+                                          <p:attrName>style.visibility</p:attrName>
+                                        </p:attrNameLst>
+                                      </p:cBhvr>
+                                      <p:to>
+                                        <p:strVal val="visible"/>
+                                      </p:to>
+                                    </p:set>
+                                  </p:childTnLst>
+                                </p:cTn>
+                              </p:par>
+                              <p:par>
+                                <p:cTn id="17" presetID="1" presetClass="entr" presetSubtype="0" fill="hold" grpId="0" nodeType="withEffect">
+                                  <p:stCondLst>
+                                    <p:cond delay="0"/>
+                                  </p:stCondLst>
+                                  <p:childTnLst>
+                                    <p:set>
+                                      <p:cBhvr>
+                                        <p:cTn id="18" dur="1" fill="hold">
+                                          <p:stCondLst>
+                                            <p:cond delay="0"/>
+                                          </p:stCondLst>
+                                        </p:cTn>
+                                        <p:tgtEl>
+                                          <p:spTgt spid="3">
+                                            <p:txEl>
+                                              <p:pRg st="6" end="6"/>
+                                            </p:txEl>
+                                          </p:spTgt>
+                                        </p:tgtEl>
+                                        <p:attrNameLst>
+                                          <p:attrName>style.visibility</p:attrName>
+                                        </p:attrNameLst>
+                                      </p:cBhvr>
+                                      <p:to>
+                                        <p:strVal val="visible"/>
+                                      </p:to>
+                                    </p:set>
+                                  </p:childTnLst>
+                                </p:cTn>
+                              </p:par>
+                              <p:par>
+                                <p:cTn id="19" presetID="1" presetClass="entr" presetSubtype="0" fill="hold" grpId="0" nodeType="withEffect">
+                                  <p:stCondLst>
+                                    <p:cond delay="0"/>
+                                  </p:stCondLst>
+                                  <p:childTnLst>
+                                    <p:set>
+                                      <p:cBhvr>
+                                        <p:cTn id="20" dur="1" fill="hold">
+                                          <p:stCondLst>
+                                            <p:cond delay="0"/>
+                                          </p:stCondLst>
+                                        </p:cTn>
+                                        <p:tgtEl>
+                                          <p:spTgt spid="3">
+                                            <p:txEl>
+                                              <p:pRg st="7" end="7"/>
+                                            </p:txEl>
+                                          </p:spTgt>
+                                        </p:tgtEl>
+                                        <p:attrNameLst>
+                                          <p:attrName>style.visibility</p:attrName>
+                                        </p:attrNameLst>
+                                      </p:cBhvr>
+                                      <p:to>
+                                        <p:strVal val="visible"/>
+                                      </p:to>
+                                    </p:set>
+                                  </p:childTnLst>
+                                </p:cTn>
+                              </p:par>
+                              <p:par>
+                                <p:cTn id="21" presetID="1" presetClass="entr" presetSubtype="0" fill="hold" grpId="0" nodeType="withEffect">
+                                  <p:stCondLst>
+                                    <p:cond delay="0"/>
+                                  </p:stCondLst>
+                                  <p:childTnLst>
+                                    <p:set>
+                                      <p:cBhvr>
+                                        <p:cTn id="22" dur="1" fill="hold">
+                                          <p:stCondLst>
+                                            <p:cond delay="0"/>
+                                          </p:stCondLst>
+                                        </p:cTn>
+                                        <p:tgtEl>
+                                          <p:spTgt spid="3">
+                                            <p:txEl>
+                                              <p:pRg st="8" end="8"/>
+                                            </p:txEl>
+                                          </p:spTgt>
+                                        </p:tgtEl>
+                                        <p:attrNameLst>
+                                          <p:attrName>style.visibility</p:attrName>
+                                        </p:attrNameLst>
+                                      </p:cBhvr>
+                                      <p:to>
+                                        <p:strVal val="visible"/>
+                                      </p:to>
+                                    </p:set>
+                                  </p:childTnLst>
+                                </p:cTn>
+                              </p:par>
+                            </p:childTnLst>
+                          </p:cTn>
+                        </p:par>
+                      </p:childTnLst>
+                    </p:cTn>
+                  </p:par>
+                </p:childTnLst>
+              </p:cTn>
+              <p:prevCondLst>
+                <p:cond evt="onPrev" delay="0">
+                  <p:tgtEl>
+                    <p:sldTgt/>
+                  </p:tgtEl>
+                </p:cond>
+              </p:prevCondLst>
+              <p:nextCondLst>
+                <p:cond evt="onNext" delay="0">
+                  <p:tgtEl>
+                    <p:sldTgt/>
+                  </p:tgtEl>
+                </p:cond>
+              </p:nextCondLst>
+            </p:seq>
+          </p:childTnLst>
+        </p:cTn>
+      </p:par>
+    </p:tnLst>
+    <p:bldLst>
+      <p:bldP spid="3" grpId="0" build="p"/>
+    </p:bldLst>
+  </p:timing>
 </p:sld>
 </file>
 

--- a/pptx/Lecture8.pptx
+++ b/pptx/Lecture8.pptx
@@ -4818,6 +4818,15 @@
         <p:txBody>
           <a:bodyPr/>
           <a:lstStyle/>
+          <a:p>
+            <a:r>
+              <a:rPr lang="en-US" b="1" dirty="0"/>
+              <a:t>Scale of measurement = type of data</a:t>
+            </a:r>
+          </a:p>
+          <a:p>
+            <a:endParaRPr lang="en-US" b="1" dirty="0"/>
+          </a:p>
           <a:p>
             <a:r>
               <a:rPr lang="en-US" b="1" dirty="0"/>
